--- a/02_Variablen/02_Variablen.pptx
+++ b/02_Variablen/02_Variablen.pptx
@@ -9,26 +9,25 @@
     <p:sldMasterId id="2147483675" r:id="rId5"/>
   </p:sldMasterIdLst>
   <p:notesMasterIdLst>
-    <p:notesMasterId r:id="rId20"/>
+    <p:notesMasterId r:id="rId19"/>
   </p:notesMasterIdLst>
   <p:handoutMasterIdLst>
-    <p:handoutMasterId r:id="rId21"/>
+    <p:handoutMasterId r:id="rId20"/>
   </p:handoutMasterIdLst>
   <p:sldIdLst>
     <p:sldId id="257" r:id="rId6"/>
     <p:sldId id="287" r:id="rId7"/>
     <p:sldId id="286" r:id="rId8"/>
-    <p:sldId id="285" r:id="rId9"/>
-    <p:sldId id="265" r:id="rId10"/>
-    <p:sldId id="274" r:id="rId11"/>
-    <p:sldId id="268" r:id="rId12"/>
-    <p:sldId id="269" r:id="rId13"/>
-    <p:sldId id="281" r:id="rId14"/>
-    <p:sldId id="272" r:id="rId15"/>
-    <p:sldId id="273" r:id="rId16"/>
+    <p:sldId id="290" r:id="rId9"/>
+    <p:sldId id="269" r:id="rId10"/>
+    <p:sldId id="281" r:id="rId11"/>
+    <p:sldId id="289" r:id="rId12"/>
+    <p:sldId id="288" r:id="rId13"/>
+    <p:sldId id="272" r:id="rId14"/>
+    <p:sldId id="273" r:id="rId15"/>
+    <p:sldId id="275" r:id="rId16"/>
     <p:sldId id="266" r:id="rId17"/>
-    <p:sldId id="275" r:id="rId18"/>
-    <p:sldId id="282" r:id="rId19"/>
+    <p:sldId id="282" r:id="rId18"/>
   </p:sldIdLst>
   <p:sldSz cx="9144000" cy="6858000" type="screen4x3"/>
   <p:notesSz cx="6858000" cy="9926638"/>
@@ -297,7 +296,7 @@
               <a:pPr>
                 <a:defRPr/>
               </a:pPr>
-              <a:t>17.09.2021</a:t>
+              <a:t>22.09.2021</a:t>
             </a:fld>
             <a:endParaRPr lang="de-AT"/>
           </a:p>
@@ -512,7 +511,7 @@
               <a:pPr>
                 <a:defRPr/>
               </a:pPr>
-              <a:t>17.09.2021</a:t>
+              <a:t>22.09.2021</a:t>
             </a:fld>
             <a:endParaRPr lang="de-AT"/>
           </a:p>
@@ -4299,7 +4298,7 @@
             <a:fld id="{ABC9E1A3-5F60-4045-A7A5-F47B61D1FECD}" type="datetimeFigureOut">
               <a:rPr lang="de-AT" smtClean="0"/>
               <a:pPr/>
-              <a:t>17.09.2021</a:t>
+              <a:t>22.09.2021</a:t>
             </a:fld>
             <a:endParaRPr lang="de-AT"/>
           </a:p>
@@ -4499,7 +4498,7 @@
             <a:fld id="{ABC9E1A3-5F60-4045-A7A5-F47B61D1FECD}" type="datetimeFigureOut">
               <a:rPr lang="de-AT" smtClean="0"/>
               <a:pPr/>
-              <a:t>17.09.2021</a:t>
+              <a:t>22.09.2021</a:t>
             </a:fld>
             <a:endParaRPr lang="de-AT"/>
           </a:p>
@@ -8531,7 +8530,15 @@
             </a:pPr>
             <a:r>
               <a:rPr lang="de-AT" dirty="0" smtClean="0"/>
-              <a:t>Unser bisheriges „Programm“ hat bei jeden Aufruf immer „Hallo Welt“ ausgegeben.</a:t>
+              <a:t>Unser bisheriges „Programm“ hat bei </a:t>
+            </a:r>
+            <a:r>
+              <a:rPr lang="de-AT" dirty="0" smtClean="0"/>
+              <a:t>jedem </a:t>
+            </a:r>
+            <a:r>
+              <a:rPr lang="de-AT" dirty="0" smtClean="0"/>
+              <a:t>Aufruf immer „Hallo Welt“ ausgegeben.</a:t>
             </a:r>
             <a:br>
               <a:rPr lang="de-AT" dirty="0" smtClean="0"/>
@@ -8650,314 +8657,17 @@
   <p:clrMapOvr>
     <a:masterClrMapping/>
   </p:clrMapOvr>
+  <p:timing>
+    <p:tnLst>
+      <p:par>
+        <p:cTn id="1" dur="indefinite" restart="never" nodeType="tmRoot"/>
+      </p:par>
+    </p:tnLst>
+  </p:timing>
 </p:sld>
 </file>
 
 <file path=ppt/slides/slide10.xml><?xml version="1.0" encoding="utf-8"?>
-<p:sld xmlns:a="http://schemas.openxmlformats.org/drawingml/2006/main" xmlns:r="http://schemas.openxmlformats.org/officeDocument/2006/relationships" xmlns:p="http://schemas.openxmlformats.org/presentationml/2006/main">
-  <p:cSld>
-    <p:spTree>
-      <p:nvGrpSpPr>
-        <p:cNvPr id="1" name=""/>
-        <p:cNvGrpSpPr/>
-        <p:nvPr/>
-      </p:nvGrpSpPr>
-      <p:grpSpPr>
-        <a:xfrm>
-          <a:off x="0" y="0"/>
-          <a:ext cx="0" cy="0"/>
-          <a:chOff x="0" y="0"/>
-          <a:chExt cx="0" cy="0"/>
-        </a:xfrm>
-      </p:grpSpPr>
-      <p:sp>
-        <p:nvSpPr>
-          <p:cNvPr id="21507" name="Foliennummernplatzhalter 4"/>
-          <p:cNvSpPr>
-            <a:spLocks noGrp="1"/>
-          </p:cNvSpPr>
-          <p:nvPr>
-            <p:ph type="sldNum" sz="quarter" idx="4294967295"/>
-          </p:nvPr>
-        </p:nvSpPr>
-        <p:spPr>
-          <a:xfrm>
-            <a:off x="6773863" y="6380163"/>
-            <a:ext cx="2195512" cy="341312"/>
-          </a:xfrm>
-          <a:prstGeom prst="rect">
-            <a:avLst/>
-          </a:prstGeom>
-          <a:noFill/>
-          <a:ln/>
-          <a:extLst>
-            <a:ext uri="{909E8E84-426E-40DD-AFC4-6F175D3DCCD1}">
-              <a14:hiddenFill xmlns:a14="http://schemas.microsoft.com/office/drawing/2010/main">
-                <a:solidFill>
-                  <a:srgbClr val="FFFFFF"/>
-                </a:solidFill>
-              </a14:hiddenFill>
-            </a:ext>
-            <a:ext uri="{91240B29-F687-4F45-9708-019B960494DF}">
-              <a14:hiddenLine xmlns:a14="http://schemas.microsoft.com/office/drawing/2010/main" w="9525">
-                <a:solidFill>
-                  <a:srgbClr val="000000"/>
-                </a:solidFill>
-                <a:miter lim="800000"/>
-                <a:headEnd/>
-                <a:tailEnd/>
-              </a14:hiddenLine>
-            </a:ext>
-          </a:extLst>
-        </p:spPr>
-        <p:txBody>
-          <a:bodyPr/>
-          <a:lstStyle>
-            <a:lvl1pPr>
-              <a:spcBef>
-                <a:spcPct val="20000"/>
-              </a:spcBef>
-              <a:buFont typeface="Wingdings" panose="05000000000000000000" pitchFamily="2" charset="2"/>
-              <a:buChar char="Ø"/>
-              <a:defRPr sz="3200">
-                <a:solidFill>
-                  <a:srgbClr val="000080"/>
-                </a:solidFill>
-                <a:latin typeface="Times New Roman" panose="02020603050405020304" pitchFamily="18" charset="0"/>
-              </a:defRPr>
-            </a:lvl1pPr>
-            <a:lvl2pPr marL="742950" indent="-285750">
-              <a:spcBef>
-                <a:spcPct val="20000"/>
-              </a:spcBef>
-              <a:buChar char="•"/>
-              <a:defRPr sz="2800">
-                <a:solidFill>
-                  <a:srgbClr val="000080"/>
-                </a:solidFill>
-                <a:latin typeface="Times New Roman" panose="02020603050405020304" pitchFamily="18" charset="0"/>
-              </a:defRPr>
-            </a:lvl2pPr>
-            <a:lvl3pPr marL="1143000" indent="-228600">
-              <a:spcBef>
-                <a:spcPct val="20000"/>
-              </a:spcBef>
-              <a:buFont typeface="Wingdings" panose="05000000000000000000" pitchFamily="2" charset="2"/>
-              <a:buChar char="§"/>
-              <a:defRPr sz="2400">
-                <a:solidFill>
-                  <a:srgbClr val="000080"/>
-                </a:solidFill>
-                <a:latin typeface="Times New Roman" panose="02020603050405020304" pitchFamily="18" charset="0"/>
-              </a:defRPr>
-            </a:lvl3pPr>
-            <a:lvl4pPr marL="1600200" indent="-228600">
-              <a:spcBef>
-                <a:spcPct val="20000"/>
-              </a:spcBef>
-              <a:buChar char="–"/>
-              <a:defRPr sz="2000">
-                <a:solidFill>
-                  <a:srgbClr val="000080"/>
-                </a:solidFill>
-                <a:latin typeface="Times New Roman" panose="02020603050405020304" pitchFamily="18" charset="0"/>
-              </a:defRPr>
-            </a:lvl4pPr>
-            <a:lvl5pPr marL="2057400" indent="-228600">
-              <a:spcBef>
-                <a:spcPct val="20000"/>
-              </a:spcBef>
-              <a:buChar char="»"/>
-              <a:defRPr sz="2000">
-                <a:solidFill>
-                  <a:srgbClr val="000080"/>
-                </a:solidFill>
-                <a:latin typeface="Times New Roman" panose="02020603050405020304" pitchFamily="18" charset="0"/>
-              </a:defRPr>
-            </a:lvl5pPr>
-            <a:lvl6pPr marL="2514600" indent="-228600" eaLnBrk="0" fontAlgn="base" hangingPunct="0">
-              <a:spcBef>
-                <a:spcPct val="20000"/>
-              </a:spcBef>
-              <a:spcAft>
-                <a:spcPct val="0"/>
-              </a:spcAft>
-              <a:buChar char="»"/>
-              <a:defRPr sz="2000">
-                <a:solidFill>
-                  <a:srgbClr val="000080"/>
-                </a:solidFill>
-                <a:latin typeface="Times New Roman" panose="02020603050405020304" pitchFamily="18" charset="0"/>
-              </a:defRPr>
-            </a:lvl6pPr>
-            <a:lvl7pPr marL="2971800" indent="-228600" eaLnBrk="0" fontAlgn="base" hangingPunct="0">
-              <a:spcBef>
-                <a:spcPct val="20000"/>
-              </a:spcBef>
-              <a:spcAft>
-                <a:spcPct val="0"/>
-              </a:spcAft>
-              <a:buChar char="»"/>
-              <a:defRPr sz="2000">
-                <a:solidFill>
-                  <a:srgbClr val="000080"/>
-                </a:solidFill>
-                <a:latin typeface="Times New Roman" panose="02020603050405020304" pitchFamily="18" charset="0"/>
-              </a:defRPr>
-            </a:lvl7pPr>
-            <a:lvl8pPr marL="3429000" indent="-228600" eaLnBrk="0" fontAlgn="base" hangingPunct="0">
-              <a:spcBef>
-                <a:spcPct val="20000"/>
-              </a:spcBef>
-              <a:spcAft>
-                <a:spcPct val="0"/>
-              </a:spcAft>
-              <a:buChar char="»"/>
-              <a:defRPr sz="2000">
-                <a:solidFill>
-                  <a:srgbClr val="000080"/>
-                </a:solidFill>
-                <a:latin typeface="Times New Roman" panose="02020603050405020304" pitchFamily="18" charset="0"/>
-              </a:defRPr>
-            </a:lvl8pPr>
-            <a:lvl9pPr marL="3886200" indent="-228600" eaLnBrk="0" fontAlgn="base" hangingPunct="0">
-              <a:spcBef>
-                <a:spcPct val="20000"/>
-              </a:spcBef>
-              <a:spcAft>
-                <a:spcPct val="0"/>
-              </a:spcAft>
-              <a:buChar char="»"/>
-              <a:defRPr sz="2000">
-                <a:solidFill>
-                  <a:srgbClr val="000080"/>
-                </a:solidFill>
-                <a:latin typeface="Times New Roman" panose="02020603050405020304" pitchFamily="18" charset="0"/>
-              </a:defRPr>
-            </a:lvl9pPr>
-          </a:lstStyle>
-          <a:p>
-            <a:pPr>
-              <a:spcBef>
-                <a:spcPct val="0"/>
-              </a:spcBef>
-              <a:buFontTx/>
-              <a:buNone/>
-            </a:pPr>
-            <a:fld id="{E00ABB23-8E16-40B9-A845-CB6C3B14536A}" type="slidenum">
-              <a:rPr lang="de-DE" altLang="de-DE" sz="1400" smtClean="0">
-                <a:solidFill>
-                  <a:schemeClr val="bg1"/>
-                </a:solidFill>
-              </a:rPr>
-              <a:pPr>
-                <a:spcBef>
-                  <a:spcPct val="0"/>
-                </a:spcBef>
-                <a:buFontTx/>
-                <a:buNone/>
-              </a:pPr>
-              <a:t>10</a:t>
-            </a:fld>
-            <a:endParaRPr lang="de-DE" altLang="de-DE" sz="1400">
-              <a:solidFill>
-                <a:schemeClr val="bg1"/>
-              </a:solidFill>
-            </a:endParaRPr>
-          </a:p>
-        </p:txBody>
-      </p:sp>
-      <p:sp>
-        <p:nvSpPr>
-          <p:cNvPr id="21508" name="Rectangle 2"/>
-          <p:cNvSpPr>
-            <a:spLocks noGrp="1" noChangeArrowheads="1"/>
-          </p:cNvSpPr>
-          <p:nvPr>
-            <p:ph type="title"/>
-          </p:nvPr>
-        </p:nvSpPr>
-        <p:spPr/>
-        <p:txBody>
-          <a:bodyPr/>
-          <a:lstStyle/>
-          <a:p>
-            <a:pPr eaLnBrk="1" hangingPunct="1"/>
-            <a:r>
-              <a:rPr lang="de-DE" altLang="de-DE"/>
-              <a:t>Zuweisungsoperator</a:t>
-            </a:r>
-          </a:p>
-        </p:txBody>
-      </p:sp>
-      <p:pic>
-        <p:nvPicPr>
-          <p:cNvPr id="21509" name="Picture 4"/>
-          <p:cNvPicPr>
-            <a:picLocks noChangeAspect="1" noChangeArrowheads="1"/>
-          </p:cNvPicPr>
-          <p:nvPr/>
-        </p:nvPicPr>
-        <p:blipFill>
-          <a:blip r:embed="rId2">
-            <a:extLst>
-              <a:ext uri="{28A0092B-C50C-407E-A947-70E740481C1C}">
-                <a14:useLocalDpi xmlns:a14="http://schemas.microsoft.com/office/drawing/2010/main" val="0"/>
-              </a:ext>
-            </a:extLst>
-          </a:blip>
-          <a:srcRect/>
-          <a:stretch>
-            <a:fillRect/>
-          </a:stretch>
-        </p:blipFill>
-        <p:spPr bwMode="auto">
-          <a:xfrm>
-            <a:off x="1708150" y="1730375"/>
-            <a:ext cx="5727700" cy="3397250"/>
-          </a:xfrm>
-          <a:prstGeom prst="rect">
-            <a:avLst/>
-          </a:prstGeom>
-          <a:noFill/>
-          <a:ln>
-            <a:noFill/>
-          </a:ln>
-          <a:extLst>
-            <a:ext uri="{909E8E84-426E-40DD-AFC4-6F175D3DCCD1}">
-              <a14:hiddenFill xmlns:a14="http://schemas.microsoft.com/office/drawing/2010/main">
-                <a:solidFill>
-                  <a:srgbClr val="FFFFFF"/>
-                </a:solidFill>
-              </a14:hiddenFill>
-            </a:ext>
-            <a:ext uri="{91240B29-F687-4F45-9708-019B960494DF}">
-              <a14:hiddenLine xmlns:a14="http://schemas.microsoft.com/office/drawing/2010/main" w="9525">
-                <a:solidFill>
-                  <a:srgbClr val="000000"/>
-                </a:solidFill>
-                <a:miter lim="800000"/>
-                <a:headEnd/>
-                <a:tailEnd/>
-              </a14:hiddenLine>
-            </a:ext>
-          </a:extLst>
-        </p:spPr>
-      </p:pic>
-    </p:spTree>
-    <p:extLst>
-      <p:ext uri="{BB962C8B-B14F-4D97-AF65-F5344CB8AC3E}">
-        <p14:creationId xmlns:p14="http://schemas.microsoft.com/office/powerpoint/2010/main" val="2198421695"/>
-      </p:ext>
-    </p:extLst>
-  </p:cSld>
-  <p:clrMapOvr>
-    <a:masterClrMapping/>
-  </p:clrMapOvr>
-</p:sld>
-</file>
-
-<file path=ppt/slides/slide11.xml><?xml version="1.0" encoding="utf-8"?>
 <p:sld xmlns:a="http://schemas.openxmlformats.org/drawingml/2006/main" xmlns:r="http://schemas.openxmlformats.org/officeDocument/2006/relationships" xmlns:p="http://schemas.openxmlformats.org/presentationml/2006/main">
   <p:cSld>
     <p:spTree>
@@ -9011,6 +8721,9 @@
           <a:bodyPr/>
           <a:lstStyle/>
           <a:p>
+            <a:pPr marL="0" indent="0">
+              <a:buNone/>
+            </a:pPr>
             <a:r>
               <a:rPr lang="de-AT" altLang="de-DE" sz="2800" dirty="0"/>
               <a:t>Vorsicht</a:t>
@@ -9230,7 +8943,7 @@
                 <a:buFontTx/>
                 <a:buNone/>
               </a:pPr>
-              <a:t>11</a:t>
+              <a:t>10</a:t>
             </a:fld>
             <a:endParaRPr lang="de-DE" altLang="de-DE" sz="1400">
               <a:solidFill>
@@ -12147,442 +11860,7 @@
 </p:sld>
 </file>
 
-<file path=ppt/slides/slide12.xml><?xml version="1.0" encoding="utf-8"?>
-<p:sld xmlns:a="http://schemas.openxmlformats.org/drawingml/2006/main" xmlns:r="http://schemas.openxmlformats.org/officeDocument/2006/relationships" xmlns:p="http://schemas.openxmlformats.org/presentationml/2006/main">
-  <p:cSld>
-    <p:spTree>
-      <p:nvGrpSpPr>
-        <p:cNvPr id="1" name=""/>
-        <p:cNvGrpSpPr/>
-        <p:nvPr/>
-      </p:nvGrpSpPr>
-      <p:grpSpPr>
-        <a:xfrm>
-          <a:off x="0" y="0"/>
-          <a:ext cx="0" cy="0"/>
-          <a:chOff x="0" y="0"/>
-          <a:chExt cx="0" cy="0"/>
-        </a:xfrm>
-      </p:grpSpPr>
-      <p:sp>
-        <p:nvSpPr>
-          <p:cNvPr id="15363" name="Foliennummernplatzhalter 4"/>
-          <p:cNvSpPr>
-            <a:spLocks noGrp="1"/>
-          </p:cNvSpPr>
-          <p:nvPr>
-            <p:ph type="sldNum" sz="quarter" idx="4294967295"/>
-          </p:nvPr>
-        </p:nvSpPr>
-        <p:spPr>
-          <a:xfrm>
-            <a:off x="6773863" y="6380163"/>
-            <a:ext cx="2195512" cy="341312"/>
-          </a:xfrm>
-          <a:prstGeom prst="rect">
-            <a:avLst/>
-          </a:prstGeom>
-          <a:noFill/>
-          <a:ln/>
-          <a:extLst>
-            <a:ext uri="{909E8E84-426E-40DD-AFC4-6F175D3DCCD1}">
-              <a14:hiddenFill xmlns:a14="http://schemas.microsoft.com/office/drawing/2010/main">
-                <a:solidFill>
-                  <a:srgbClr val="FFFFFF"/>
-                </a:solidFill>
-              </a14:hiddenFill>
-            </a:ext>
-            <a:ext uri="{91240B29-F687-4F45-9708-019B960494DF}">
-              <a14:hiddenLine xmlns:a14="http://schemas.microsoft.com/office/drawing/2010/main" w="9525">
-                <a:solidFill>
-                  <a:srgbClr val="000000"/>
-                </a:solidFill>
-                <a:miter lim="800000"/>
-                <a:headEnd/>
-                <a:tailEnd/>
-              </a14:hiddenLine>
-            </a:ext>
-          </a:extLst>
-        </p:spPr>
-        <p:txBody>
-          <a:bodyPr/>
-          <a:lstStyle>
-            <a:lvl1pPr>
-              <a:spcBef>
-                <a:spcPct val="20000"/>
-              </a:spcBef>
-              <a:buFont typeface="Wingdings" panose="05000000000000000000" pitchFamily="2" charset="2"/>
-              <a:buChar char="Ø"/>
-              <a:defRPr sz="3200">
-                <a:solidFill>
-                  <a:srgbClr val="000080"/>
-                </a:solidFill>
-                <a:latin typeface="Times New Roman" panose="02020603050405020304" pitchFamily="18" charset="0"/>
-              </a:defRPr>
-            </a:lvl1pPr>
-            <a:lvl2pPr marL="742950" indent="-285750">
-              <a:spcBef>
-                <a:spcPct val="20000"/>
-              </a:spcBef>
-              <a:buChar char="•"/>
-              <a:defRPr sz="2800">
-                <a:solidFill>
-                  <a:srgbClr val="000080"/>
-                </a:solidFill>
-                <a:latin typeface="Times New Roman" panose="02020603050405020304" pitchFamily="18" charset="0"/>
-              </a:defRPr>
-            </a:lvl2pPr>
-            <a:lvl3pPr marL="1143000" indent="-228600">
-              <a:spcBef>
-                <a:spcPct val="20000"/>
-              </a:spcBef>
-              <a:buFont typeface="Wingdings" panose="05000000000000000000" pitchFamily="2" charset="2"/>
-              <a:buChar char="§"/>
-              <a:defRPr sz="2400">
-                <a:solidFill>
-                  <a:srgbClr val="000080"/>
-                </a:solidFill>
-                <a:latin typeface="Times New Roman" panose="02020603050405020304" pitchFamily="18" charset="0"/>
-              </a:defRPr>
-            </a:lvl3pPr>
-            <a:lvl4pPr marL="1600200" indent="-228600">
-              <a:spcBef>
-                <a:spcPct val="20000"/>
-              </a:spcBef>
-              <a:buChar char="–"/>
-              <a:defRPr sz="2000">
-                <a:solidFill>
-                  <a:srgbClr val="000080"/>
-                </a:solidFill>
-                <a:latin typeface="Times New Roman" panose="02020603050405020304" pitchFamily="18" charset="0"/>
-              </a:defRPr>
-            </a:lvl4pPr>
-            <a:lvl5pPr marL="2057400" indent="-228600">
-              <a:spcBef>
-                <a:spcPct val="20000"/>
-              </a:spcBef>
-              <a:buChar char="»"/>
-              <a:defRPr sz="2000">
-                <a:solidFill>
-                  <a:srgbClr val="000080"/>
-                </a:solidFill>
-                <a:latin typeface="Times New Roman" panose="02020603050405020304" pitchFamily="18" charset="0"/>
-              </a:defRPr>
-            </a:lvl5pPr>
-            <a:lvl6pPr marL="2514600" indent="-228600" eaLnBrk="0" fontAlgn="base" hangingPunct="0">
-              <a:spcBef>
-                <a:spcPct val="20000"/>
-              </a:spcBef>
-              <a:spcAft>
-                <a:spcPct val="0"/>
-              </a:spcAft>
-              <a:buChar char="»"/>
-              <a:defRPr sz="2000">
-                <a:solidFill>
-                  <a:srgbClr val="000080"/>
-                </a:solidFill>
-                <a:latin typeface="Times New Roman" panose="02020603050405020304" pitchFamily="18" charset="0"/>
-              </a:defRPr>
-            </a:lvl6pPr>
-            <a:lvl7pPr marL="2971800" indent="-228600" eaLnBrk="0" fontAlgn="base" hangingPunct="0">
-              <a:spcBef>
-                <a:spcPct val="20000"/>
-              </a:spcBef>
-              <a:spcAft>
-                <a:spcPct val="0"/>
-              </a:spcAft>
-              <a:buChar char="»"/>
-              <a:defRPr sz="2000">
-                <a:solidFill>
-                  <a:srgbClr val="000080"/>
-                </a:solidFill>
-                <a:latin typeface="Times New Roman" panose="02020603050405020304" pitchFamily="18" charset="0"/>
-              </a:defRPr>
-            </a:lvl7pPr>
-            <a:lvl8pPr marL="3429000" indent="-228600" eaLnBrk="0" fontAlgn="base" hangingPunct="0">
-              <a:spcBef>
-                <a:spcPct val="20000"/>
-              </a:spcBef>
-              <a:spcAft>
-                <a:spcPct val="0"/>
-              </a:spcAft>
-              <a:buChar char="»"/>
-              <a:defRPr sz="2000">
-                <a:solidFill>
-                  <a:srgbClr val="000080"/>
-                </a:solidFill>
-                <a:latin typeface="Times New Roman" panose="02020603050405020304" pitchFamily="18" charset="0"/>
-              </a:defRPr>
-            </a:lvl8pPr>
-            <a:lvl9pPr marL="3886200" indent="-228600" eaLnBrk="0" fontAlgn="base" hangingPunct="0">
-              <a:spcBef>
-                <a:spcPct val="20000"/>
-              </a:spcBef>
-              <a:spcAft>
-                <a:spcPct val="0"/>
-              </a:spcAft>
-              <a:buChar char="»"/>
-              <a:defRPr sz="2000">
-                <a:solidFill>
-                  <a:srgbClr val="000080"/>
-                </a:solidFill>
-                <a:latin typeface="Times New Roman" panose="02020603050405020304" pitchFamily="18" charset="0"/>
-              </a:defRPr>
-            </a:lvl9pPr>
-          </a:lstStyle>
-          <a:p>
-            <a:pPr>
-              <a:spcBef>
-                <a:spcPct val="0"/>
-              </a:spcBef>
-              <a:buFontTx/>
-              <a:buNone/>
-            </a:pPr>
-            <a:fld id="{C4A61D47-9B62-4C54-9F0F-F9D105DA4D4A}" type="slidenum">
-              <a:rPr lang="de-DE" altLang="de-DE" sz="1400" smtClean="0">
-                <a:solidFill>
-                  <a:schemeClr val="bg1"/>
-                </a:solidFill>
-              </a:rPr>
-              <a:pPr>
-                <a:spcBef>
-                  <a:spcPct val="0"/>
-                </a:spcBef>
-                <a:buFontTx/>
-                <a:buNone/>
-              </a:pPr>
-              <a:t>12</a:t>
-            </a:fld>
-            <a:endParaRPr lang="de-DE" altLang="de-DE" sz="1400">
-              <a:solidFill>
-                <a:schemeClr val="bg1"/>
-              </a:solidFill>
-            </a:endParaRPr>
-          </a:p>
-        </p:txBody>
-      </p:sp>
-      <p:sp>
-        <p:nvSpPr>
-          <p:cNvPr id="15364" name="Rectangle 2"/>
-          <p:cNvSpPr>
-            <a:spLocks noGrp="1" noChangeArrowheads="1"/>
-          </p:cNvSpPr>
-          <p:nvPr>
-            <p:ph type="title"/>
-          </p:nvPr>
-        </p:nvSpPr>
-        <p:spPr/>
-        <p:txBody>
-          <a:bodyPr/>
-          <a:lstStyle/>
-          <a:p>
-            <a:pPr eaLnBrk="1" hangingPunct="1"/>
-            <a:r>
-              <a:rPr lang="de-DE" altLang="de-DE" dirty="0"/>
-              <a:t>Bezeichner – Namen von Variablen </a:t>
-            </a:r>
-          </a:p>
-        </p:txBody>
-      </p:sp>
-      <p:sp>
-        <p:nvSpPr>
-          <p:cNvPr id="15365" name="Rectangle 3"/>
-          <p:cNvSpPr>
-            <a:spLocks noGrp="1" noChangeArrowheads="1"/>
-          </p:cNvSpPr>
-          <p:nvPr>
-            <p:ph type="body" idx="1"/>
-          </p:nvPr>
-        </p:nvSpPr>
-        <p:spPr>
-          <a:xfrm>
-            <a:off x="457200" y="1268414"/>
-            <a:ext cx="8229600" cy="4857750"/>
-          </a:xfrm>
-        </p:spPr>
-        <p:txBody>
-          <a:bodyPr/>
-          <a:lstStyle/>
-          <a:p>
-            <a:pPr eaLnBrk="1" hangingPunct="1"/>
-            <a:r>
-              <a:rPr lang="de-DE" altLang="de-DE" sz="2400" dirty="0"/>
-              <a:t>Kombination aus Zeichen, Ziffern, _, @</a:t>
-            </a:r>
-          </a:p>
-          <a:p>
-            <a:pPr eaLnBrk="1" hangingPunct="1"/>
-            <a:r>
-              <a:rPr lang="de-DE" altLang="de-DE" sz="2400" dirty="0"/>
-              <a:t>Case-sensitiv</a:t>
-            </a:r>
-          </a:p>
-          <a:p>
-            <a:pPr eaLnBrk="1" hangingPunct="1"/>
-            <a:r>
-              <a:rPr lang="de-DE" altLang="de-DE" sz="2400" dirty="0"/>
-              <a:t>Schlüsselwörter dürfen nicht verwendet werden</a:t>
-            </a:r>
-          </a:p>
-          <a:p>
-            <a:pPr lvl="1" eaLnBrk="1" hangingPunct="1"/>
-            <a:r>
-              <a:rPr lang="de-DE" altLang="de-DE" sz="2100" dirty="0"/>
-              <a:t>Siehe </a:t>
-            </a:r>
-            <a:r>
-              <a:rPr lang="de-DE" altLang="de-DE" sz="2100" dirty="0">
-                <a:hlinkClick r:id="rId2"/>
-              </a:rPr>
-              <a:t>https://msdn.microsoft.com/de-de/library/x53a06bb%28v=vs.120%29.aspx</a:t>
-            </a:r>
-            <a:endParaRPr lang="de-DE" altLang="de-DE" sz="2100" dirty="0"/>
-          </a:p>
-          <a:p>
-            <a:pPr eaLnBrk="1" hangingPunct="1"/>
-            <a:r>
-              <a:rPr lang="de-DE" altLang="de-DE" sz="2400" dirty="0"/>
-              <a:t>Richtlinien für die Namenswahl:</a:t>
-            </a:r>
-          </a:p>
-          <a:p>
-            <a:pPr lvl="1" eaLnBrk="1" hangingPunct="1"/>
-            <a:r>
-              <a:rPr lang="de-DE" altLang="de-DE" sz="2000" dirty="0"/>
-              <a:t>Sprechende Bezeichner verwenden – der Name beschreibt, was in der Variablen gespeichert ist!</a:t>
-            </a:r>
-          </a:p>
-          <a:p>
-            <a:pPr lvl="1" eaLnBrk="1" hangingPunct="1"/>
-            <a:r>
-              <a:rPr lang="de-DE" altLang="de-DE" sz="2000" dirty="0"/>
-              <a:t>Nur englische Namen verwenden</a:t>
-            </a:r>
-          </a:p>
-          <a:p>
-            <a:pPr lvl="1" eaLnBrk="1" hangingPunct="1"/>
-            <a:r>
-              <a:rPr lang="de-DE" altLang="de-DE" sz="2100" dirty="0"/>
-              <a:t>„</a:t>
-            </a:r>
-            <a:r>
-              <a:rPr lang="de-DE" altLang="de-DE" sz="2100" dirty="0" err="1"/>
-              <a:t>CamelCase</a:t>
-            </a:r>
-            <a:r>
-              <a:rPr lang="de-DE" altLang="de-DE" sz="2100" dirty="0"/>
-              <a:t>“</a:t>
-            </a:r>
-          </a:p>
-          <a:p>
-            <a:pPr lvl="2" eaLnBrk="1" hangingPunct="1"/>
-            <a:r>
-              <a:rPr lang="de-DE" altLang="de-DE" sz="1800" dirty="0"/>
-              <a:t>Beginnen mit kleinem Anfangsbuchstaben</a:t>
-            </a:r>
-          </a:p>
-          <a:p>
-            <a:pPr lvl="2" eaLnBrk="1" hangingPunct="1"/>
-            <a:r>
-              <a:rPr lang="de-DE" altLang="de-DE" sz="1800" dirty="0"/>
-              <a:t>Jedes innere Teilwort groß beginnen</a:t>
-            </a:r>
-          </a:p>
-          <a:p>
-            <a:pPr lvl="2" eaLnBrk="1" hangingPunct="1"/>
-            <a:r>
-              <a:rPr lang="de-DE" altLang="de-DE" sz="1800" dirty="0" err="1"/>
-              <a:t>Bsp</a:t>
-            </a:r>
-            <a:r>
-              <a:rPr lang="de-DE" altLang="de-DE" sz="1800" dirty="0"/>
-              <a:t>: </a:t>
-            </a:r>
-            <a:r>
-              <a:rPr lang="de-DE" altLang="de-DE" sz="1800" i="1" dirty="0" err="1">
-                <a:latin typeface="Courier New" panose="02070309020205020404" pitchFamily="49" charset="0"/>
-                <a:cs typeface="Courier New" panose="02070309020205020404" pitchFamily="49" charset="0"/>
-              </a:rPr>
-              <a:t>myVariableInCamelCaseNotation</a:t>
-            </a:r>
-            <a:endParaRPr lang="de-DE" altLang="de-DE" sz="1800" i="1" dirty="0">
-              <a:latin typeface="Courier New" panose="02070309020205020404" pitchFamily="49" charset="0"/>
-              <a:cs typeface="Courier New" panose="02070309020205020404" pitchFamily="49" charset="0"/>
-            </a:endParaRPr>
-          </a:p>
-          <a:p>
-            <a:pPr eaLnBrk="1" hangingPunct="1"/>
-            <a:endParaRPr lang="de-DE" altLang="de-DE" sz="2800" dirty="0"/>
-          </a:p>
-          <a:p>
-            <a:pPr eaLnBrk="1" hangingPunct="1"/>
-            <a:endParaRPr lang="de-DE" altLang="de-DE" sz="2800" dirty="0"/>
-          </a:p>
-          <a:p>
-            <a:pPr eaLnBrk="1" hangingPunct="1"/>
-            <a:endParaRPr lang="de-DE" altLang="de-DE" sz="2800" dirty="0"/>
-          </a:p>
-          <a:p>
-            <a:pPr eaLnBrk="1" hangingPunct="1"/>
-            <a:endParaRPr lang="de-DE" altLang="de-DE" sz="2800" dirty="0"/>
-          </a:p>
-        </p:txBody>
-      </p:sp>
-      <p:pic>
-        <p:nvPicPr>
-          <p:cNvPr id="1030" name="Picture 6" descr="http://duden.de/_media_/full/K/Kamel-201100285794.jpg"/>
-          <p:cNvPicPr>
-            <a:picLocks noChangeAspect="1" noChangeArrowheads="1"/>
-          </p:cNvPicPr>
-          <p:nvPr/>
-        </p:nvPicPr>
-        <p:blipFill>
-          <a:blip r:embed="rId3" cstate="print">
-            <a:extLst>
-              <a:ext uri="{28A0092B-C50C-407E-A947-70E740481C1C}">
-                <a14:useLocalDpi xmlns:a14="http://schemas.microsoft.com/office/drawing/2010/main" val="0"/>
-              </a:ext>
-            </a:extLst>
-          </a:blip>
-          <a:srcRect/>
-          <a:stretch>
-            <a:fillRect/>
-          </a:stretch>
-        </p:blipFill>
-        <p:spPr bwMode="auto">
-          <a:xfrm>
-            <a:off x="6795291" y="4653136"/>
-            <a:ext cx="1521817" cy="1353109"/>
-          </a:xfrm>
-          <a:prstGeom prst="rect">
-            <a:avLst/>
-          </a:prstGeom>
-          <a:noFill/>
-          <a:extLst>
-            <a:ext uri="{909E8E84-426E-40DD-AFC4-6F175D3DCCD1}">
-              <a14:hiddenFill xmlns:a14="http://schemas.microsoft.com/office/drawing/2010/main">
-                <a:solidFill>
-                  <a:srgbClr val="FFFFFF"/>
-                </a:solidFill>
-              </a14:hiddenFill>
-            </a:ext>
-          </a:extLst>
-        </p:spPr>
-      </p:pic>
-    </p:spTree>
-    <p:extLst>
-      <p:ext uri="{BB962C8B-B14F-4D97-AF65-F5344CB8AC3E}">
-        <p14:creationId xmlns:p14="http://schemas.microsoft.com/office/powerpoint/2010/main" val="1324539928"/>
-      </p:ext>
-    </p:extLst>
-  </p:cSld>
-  <p:clrMapOvr>
-    <a:masterClrMapping/>
-  </p:clrMapOvr>
-</p:sld>
-</file>
-
-<file path=ppt/slides/slide13.xml><?xml version="1.0" encoding="utf-8"?>
+<file path=ppt/slides/slide11.xml><?xml version="1.0" encoding="utf-8"?>
 <p:sld xmlns:a="http://schemas.openxmlformats.org/drawingml/2006/main" xmlns:r="http://schemas.openxmlformats.org/officeDocument/2006/relationships" xmlns:p="http://schemas.openxmlformats.org/presentationml/2006/main">
   <p:cSld>
     <p:spTree>
@@ -12634,236 +11912,637 @@
         <p:spPr>
           <a:xfrm>
             <a:off x="457200" y="1052736"/>
-            <a:ext cx="8229600" cy="5073427"/>
+            <a:ext cx="8229600" cy="5184576"/>
           </a:xfrm>
         </p:spPr>
         <p:txBody>
           <a:bodyPr/>
           <a:lstStyle/>
           <a:p>
-            <a:pPr lvl="0">
+            <a:pPr marL="0" lvl="0" indent="0">
+              <a:buNone/>
               <a:defRPr sz="1800"/>
             </a:pPr>
             <a:r>
-              <a:rPr lang="en-US" dirty="0"/>
+              <a:rPr lang="en-US" dirty="0">
+                <a:latin typeface="Courier New" panose="02070309020205020404" pitchFamily="49" charset="0"/>
+                <a:cs typeface="Courier New" panose="02070309020205020404" pitchFamily="49" charset="0"/>
+              </a:rPr>
               <a:t>string </a:t>
             </a:r>
             <a:r>
-              <a:rPr lang="en-US" dirty="0" err="1"/>
-              <a:t>someText</a:t>
-            </a:r>
-            <a:r>
-              <a:rPr lang="en-US" dirty="0"/>
-              <a:t> = “Important text”;</a:t>
-            </a:r>
-          </a:p>
-          <a:p>
-            <a:pPr lvl="0">
+              <a:rPr lang="en-US" dirty="0" smtClean="0">
+                <a:latin typeface="Courier New" panose="02070309020205020404" pitchFamily="49" charset="0"/>
+                <a:cs typeface="Courier New" panose="02070309020205020404" pitchFamily="49" charset="0"/>
+              </a:rPr>
+              <a:t>message</a:t>
+            </a:r>
+            <a:r>
+              <a:rPr lang="en-US" dirty="0" smtClean="0">
+                <a:latin typeface="Courier New" panose="02070309020205020404" pitchFamily="49" charset="0"/>
+                <a:cs typeface="Courier New" panose="02070309020205020404" pitchFamily="49" charset="0"/>
+              </a:rPr>
+              <a:t> </a:t>
+            </a:r>
+            <a:r>
+              <a:rPr lang="en-US" dirty="0">
+                <a:latin typeface="Courier New" panose="02070309020205020404" pitchFamily="49" charset="0"/>
+                <a:cs typeface="Courier New" panose="02070309020205020404" pitchFamily="49" charset="0"/>
+              </a:rPr>
+              <a:t>= </a:t>
+            </a:r>
+            <a:r>
+              <a:rPr lang="de-AT" dirty="0" smtClean="0">
+                <a:latin typeface="Courier New" panose="02070309020205020404" pitchFamily="49" charset="0"/>
+                <a:cs typeface="Courier New" panose="02070309020205020404" pitchFamily="49" charset="0"/>
+              </a:rPr>
+              <a:t>"</a:t>
+            </a:r>
+            <a:r>
+              <a:rPr lang="en-US" dirty="0" smtClean="0">
+                <a:latin typeface="Courier New" panose="02070309020205020404" pitchFamily="49" charset="0"/>
+                <a:cs typeface="Courier New" panose="02070309020205020404" pitchFamily="49" charset="0"/>
+              </a:rPr>
+              <a:t>Important text</a:t>
+            </a:r>
+            <a:r>
+              <a:rPr lang="de-AT" dirty="0" smtClean="0">
+                <a:latin typeface="Courier New" panose="02070309020205020404" pitchFamily="49" charset="0"/>
+                <a:cs typeface="Courier New" panose="02070309020205020404" pitchFamily="49" charset="0"/>
+              </a:rPr>
+              <a:t>"</a:t>
+            </a:r>
+            <a:r>
+              <a:rPr lang="en-US" dirty="0" smtClean="0">
+                <a:latin typeface="Courier New" panose="02070309020205020404" pitchFamily="49" charset="0"/>
+                <a:cs typeface="Courier New" panose="02070309020205020404" pitchFamily="49" charset="0"/>
+              </a:rPr>
+              <a:t>;</a:t>
+            </a:r>
+            <a:endParaRPr lang="en-US" dirty="0">
+              <a:latin typeface="Courier New" panose="02070309020205020404" pitchFamily="49" charset="0"/>
+              <a:cs typeface="Courier New" panose="02070309020205020404" pitchFamily="49" charset="0"/>
+            </a:endParaRPr>
+          </a:p>
+          <a:p>
+            <a:pPr marL="0" lvl="0" indent="0">
+              <a:buNone/>
               <a:defRPr sz="1800"/>
             </a:pPr>
             <a:r>
-              <a:rPr lang="en-US" dirty="0" err="1"/>
+              <a:rPr lang="en-US" dirty="0" err="1">
+                <a:latin typeface="Courier New" panose="02070309020205020404" pitchFamily="49" charset="0"/>
+                <a:cs typeface="Courier New" panose="02070309020205020404" pitchFamily="49" charset="0"/>
+              </a:rPr>
               <a:t>int</a:t>
             </a:r>
             <a:r>
-              <a:rPr lang="en-US" dirty="0"/>
-              <a:t> value = 42;</a:t>
-            </a:r>
-          </a:p>
-          <a:p>
-            <a:pPr lvl="0">
+              <a:rPr lang="en-US" dirty="0">
+                <a:latin typeface="Courier New" panose="02070309020205020404" pitchFamily="49" charset="0"/>
+                <a:cs typeface="Courier New" panose="02070309020205020404" pitchFamily="49" charset="0"/>
+              </a:rPr>
+              <a:t> </a:t>
+            </a:r>
+            <a:r>
+              <a:rPr lang="en-US" dirty="0" err="1" smtClean="0">
+                <a:latin typeface="Courier New" panose="02070309020205020404" pitchFamily="49" charset="0"/>
+                <a:cs typeface="Courier New" panose="02070309020205020404" pitchFamily="49" charset="0"/>
+              </a:rPr>
+              <a:t>errorCount</a:t>
+            </a:r>
+            <a:r>
+              <a:rPr lang="en-US" dirty="0" smtClean="0">
+                <a:latin typeface="Courier New" panose="02070309020205020404" pitchFamily="49" charset="0"/>
+                <a:cs typeface="Courier New" panose="02070309020205020404" pitchFamily="49" charset="0"/>
+              </a:rPr>
+              <a:t> </a:t>
+            </a:r>
+            <a:r>
+              <a:rPr lang="en-US" dirty="0">
+                <a:latin typeface="Courier New" panose="02070309020205020404" pitchFamily="49" charset="0"/>
+                <a:cs typeface="Courier New" panose="02070309020205020404" pitchFamily="49" charset="0"/>
+              </a:rPr>
+              <a:t>= 42;</a:t>
+            </a:r>
+          </a:p>
+          <a:p>
+            <a:pPr marL="0" lvl="0" indent="0">
+              <a:buNone/>
               <a:defRPr sz="1800"/>
             </a:pPr>
             <a:r>
-              <a:rPr lang="en-US" dirty="0"/>
+              <a:rPr lang="en-US" dirty="0">
+                <a:latin typeface="Courier New" panose="02070309020205020404" pitchFamily="49" charset="0"/>
+                <a:cs typeface="Courier New" panose="02070309020205020404" pitchFamily="49" charset="0"/>
+              </a:rPr>
               <a:t>bool </a:t>
             </a:r>
             <a:r>
-              <a:rPr lang="en-US" dirty="0" err="1"/>
+              <a:rPr lang="en-US" dirty="0" err="1">
+                <a:latin typeface="Courier New" panose="02070309020205020404" pitchFamily="49" charset="0"/>
+                <a:cs typeface="Courier New" panose="02070309020205020404" pitchFamily="49" charset="0"/>
+              </a:rPr>
               <a:t>isValid</a:t>
             </a:r>
             <a:r>
-              <a:rPr lang="en-US" dirty="0"/>
+              <a:rPr lang="en-US" dirty="0">
+                <a:latin typeface="Courier New" panose="02070309020205020404" pitchFamily="49" charset="0"/>
+                <a:cs typeface="Courier New" panose="02070309020205020404" pitchFamily="49" charset="0"/>
+              </a:rPr>
               <a:t> = true;</a:t>
             </a:r>
           </a:p>
           <a:p>
-            <a:pPr lvl="0">
+            <a:pPr marL="0" lvl="0" indent="0">
+              <a:buNone/>
               <a:defRPr sz="1800"/>
             </a:pPr>
             <a:r>
-              <a:rPr lang="en-US" dirty="0"/>
+              <a:rPr lang="en-US" dirty="0">
+                <a:latin typeface="Courier New" panose="02070309020205020404" pitchFamily="49" charset="0"/>
+                <a:cs typeface="Courier New" panose="02070309020205020404" pitchFamily="49" charset="0"/>
+              </a:rPr>
               <a:t>double </a:t>
             </a:r>
             <a:r>
-              <a:rPr lang="en-US" dirty="0" err="1"/>
-              <a:t>decimalValue</a:t>
-            </a:r>
-            <a:r>
-              <a:rPr lang="en-US" dirty="0"/>
-              <a:t> = 3.141592653;</a:t>
-            </a:r>
-          </a:p>
-          <a:p>
-            <a:pPr lvl="0">
+              <a:rPr lang="en-US" dirty="0" err="1" smtClean="0">
+                <a:latin typeface="Courier New" panose="02070309020205020404" pitchFamily="49" charset="0"/>
+                <a:cs typeface="Courier New" panose="02070309020205020404" pitchFamily="49" charset="0"/>
+              </a:rPr>
+              <a:t>piValue</a:t>
+            </a:r>
+            <a:r>
+              <a:rPr lang="en-US" dirty="0" smtClean="0">
+                <a:latin typeface="Courier New" panose="02070309020205020404" pitchFamily="49" charset="0"/>
+                <a:cs typeface="Courier New" panose="02070309020205020404" pitchFamily="49" charset="0"/>
+              </a:rPr>
+              <a:t> </a:t>
+            </a:r>
+            <a:r>
+              <a:rPr lang="en-US" dirty="0">
+                <a:latin typeface="Courier New" panose="02070309020205020404" pitchFamily="49" charset="0"/>
+                <a:cs typeface="Courier New" panose="02070309020205020404" pitchFamily="49" charset="0"/>
+              </a:rPr>
+              <a:t>= 3.141592653</a:t>
+            </a:r>
+            <a:r>
+              <a:rPr lang="en-US" dirty="0" smtClean="0">
+                <a:latin typeface="Courier New" panose="02070309020205020404" pitchFamily="49" charset="0"/>
+                <a:cs typeface="Courier New" panose="02070309020205020404" pitchFamily="49" charset="0"/>
+              </a:rPr>
+              <a:t>;</a:t>
+            </a:r>
+            <a:br>
+              <a:rPr lang="en-US" dirty="0" smtClean="0">
+                <a:latin typeface="Courier New" panose="02070309020205020404" pitchFamily="49" charset="0"/>
+                <a:cs typeface="Courier New" panose="02070309020205020404" pitchFamily="49" charset="0"/>
+              </a:rPr>
+            </a:br>
+            <a:endParaRPr lang="de-AT" sz="1800" dirty="0" smtClean="0">
+              <a:latin typeface="Courier New" panose="02070309020205020404" pitchFamily="49" charset="0"/>
+              <a:ea typeface="Monaco"/>
+              <a:cs typeface="Courier New" panose="02070309020205020404" pitchFamily="49" charset="0"/>
+              <a:sym typeface="Monaco"/>
+            </a:endParaRPr>
+          </a:p>
+          <a:p>
+            <a:pPr marL="0" lvl="0" indent="0">
+              <a:buNone/>
               <a:defRPr sz="1800"/>
             </a:pPr>
-            <a:endParaRPr lang="en-US" dirty="0"/>
+            <a:r>
+              <a:rPr lang="de-AT" sz="1800" dirty="0" err="1" smtClean="0">
+                <a:latin typeface="Courier New" panose="02070309020205020404" pitchFamily="49" charset="0"/>
+                <a:cs typeface="Courier New" panose="02070309020205020404" pitchFamily="49" charset="0"/>
+              </a:rPr>
+              <a:t>string</a:t>
+            </a:r>
+            <a:r>
+              <a:rPr lang="de-AT" sz="1800" dirty="0" smtClean="0">
+                <a:latin typeface="Courier New" panose="02070309020205020404" pitchFamily="49" charset="0"/>
+                <a:cs typeface="Courier New" panose="02070309020205020404" pitchFamily="49" charset="0"/>
+              </a:rPr>
+              <a:t> </a:t>
+            </a:r>
+            <a:r>
+              <a:rPr lang="de-AT" sz="1800" dirty="0" err="1">
+                <a:latin typeface="Courier New" panose="02070309020205020404" pitchFamily="49" charset="0"/>
+                <a:cs typeface="Courier New" panose="02070309020205020404" pitchFamily="49" charset="0"/>
+              </a:rPr>
+              <a:t>firstName</a:t>
+            </a:r>
+            <a:r>
+              <a:rPr lang="de-AT" sz="1800" dirty="0">
+                <a:latin typeface="Courier New" panose="02070309020205020404" pitchFamily="49" charset="0"/>
+                <a:cs typeface="Courier New" panose="02070309020205020404" pitchFamily="49" charset="0"/>
+              </a:rPr>
+              <a:t> = </a:t>
+            </a:r>
+            <a:r>
+              <a:rPr lang="de-AT" dirty="0" smtClean="0">
+                <a:latin typeface="Courier New" panose="02070309020205020404" pitchFamily="49" charset="0"/>
+                <a:cs typeface="Courier New" panose="02070309020205020404" pitchFamily="49" charset="0"/>
+              </a:rPr>
+              <a:t>"</a:t>
+            </a:r>
+            <a:r>
+              <a:rPr lang="de-AT" sz="1800" dirty="0" smtClean="0">
+                <a:latin typeface="Courier New" panose="02070309020205020404" pitchFamily="49" charset="0"/>
+                <a:cs typeface="Courier New" panose="02070309020205020404" pitchFamily="49" charset="0"/>
+              </a:rPr>
+              <a:t>Hansi</a:t>
+            </a:r>
+            <a:r>
+              <a:rPr lang="de-AT" dirty="0" smtClean="0">
+                <a:latin typeface="Courier New" panose="02070309020205020404" pitchFamily="49" charset="0"/>
+                <a:cs typeface="Courier New" panose="02070309020205020404" pitchFamily="49" charset="0"/>
+              </a:rPr>
+              <a:t>"</a:t>
+            </a:r>
+            <a:r>
+              <a:rPr lang="de-AT" sz="1800" dirty="0" smtClean="0">
+                <a:latin typeface="Courier New" panose="02070309020205020404" pitchFamily="49" charset="0"/>
+                <a:cs typeface="Courier New" panose="02070309020205020404" pitchFamily="49" charset="0"/>
+              </a:rPr>
+              <a:t>;</a:t>
+            </a:r>
+            <a:endParaRPr lang="de-AT" sz="1800" dirty="0">
+              <a:latin typeface="Courier New" panose="02070309020205020404" pitchFamily="49" charset="0"/>
+              <a:cs typeface="Courier New" panose="02070309020205020404" pitchFamily="49" charset="0"/>
+            </a:endParaRPr>
+          </a:p>
+          <a:p>
+            <a:pPr marL="0" lvl="0" indent="0">
+              <a:buNone/>
+              <a:defRPr sz="1800"/>
+            </a:pPr>
+            <a:r>
+              <a:rPr lang="de-AT" sz="1800" dirty="0" err="1">
+                <a:latin typeface="Courier New" panose="02070309020205020404" pitchFamily="49" charset="0"/>
+                <a:cs typeface="Courier New" panose="02070309020205020404" pitchFamily="49" charset="0"/>
+              </a:rPr>
+              <a:t>string</a:t>
+            </a:r>
+            <a:r>
+              <a:rPr lang="de-AT" sz="1800" dirty="0">
+                <a:latin typeface="Courier New" panose="02070309020205020404" pitchFamily="49" charset="0"/>
+                <a:cs typeface="Courier New" panose="02070309020205020404" pitchFamily="49" charset="0"/>
+              </a:rPr>
+              <a:t> </a:t>
+            </a:r>
+            <a:r>
+              <a:rPr lang="de-AT" sz="1800" dirty="0" err="1">
+                <a:latin typeface="Courier New" panose="02070309020205020404" pitchFamily="49" charset="0"/>
+                <a:cs typeface="Courier New" panose="02070309020205020404" pitchFamily="49" charset="0"/>
+              </a:rPr>
+              <a:t>lastName</a:t>
+            </a:r>
+            <a:r>
+              <a:rPr lang="de-AT" sz="1800" dirty="0">
+                <a:latin typeface="Courier New" panose="02070309020205020404" pitchFamily="49" charset="0"/>
+                <a:cs typeface="Courier New" panose="02070309020205020404" pitchFamily="49" charset="0"/>
+              </a:rPr>
+              <a:t> = </a:t>
+            </a:r>
+            <a:r>
+              <a:rPr lang="de-AT" dirty="0" smtClean="0">
+                <a:latin typeface="Courier New" panose="02070309020205020404" pitchFamily="49" charset="0"/>
+                <a:cs typeface="Courier New" panose="02070309020205020404" pitchFamily="49" charset="0"/>
+              </a:rPr>
+              <a:t>"</a:t>
+            </a:r>
+            <a:r>
+              <a:rPr lang="de-AT" sz="1800" dirty="0" smtClean="0">
+                <a:latin typeface="Courier New" panose="02070309020205020404" pitchFamily="49" charset="0"/>
+                <a:cs typeface="Courier New" panose="02070309020205020404" pitchFamily="49" charset="0"/>
+              </a:rPr>
+              <a:t>Hinterseer</a:t>
+            </a:r>
+            <a:r>
+              <a:rPr lang="de-AT" dirty="0" smtClean="0">
+                <a:latin typeface="Courier New" panose="02070309020205020404" pitchFamily="49" charset="0"/>
+                <a:cs typeface="Courier New" panose="02070309020205020404" pitchFamily="49" charset="0"/>
+              </a:rPr>
+              <a:t>"</a:t>
+            </a:r>
+            <a:r>
+              <a:rPr lang="de-AT" sz="1800" dirty="0" smtClean="0">
+                <a:latin typeface="Courier New" panose="02070309020205020404" pitchFamily="49" charset="0"/>
+                <a:cs typeface="Courier New" panose="02070309020205020404" pitchFamily="49" charset="0"/>
+              </a:rPr>
+              <a:t>;</a:t>
+            </a:r>
+            <a:endParaRPr lang="de-AT" sz="1800" dirty="0">
+              <a:latin typeface="Courier New" panose="02070309020205020404" pitchFamily="49" charset="0"/>
+              <a:cs typeface="Courier New" panose="02070309020205020404" pitchFamily="49" charset="0"/>
+            </a:endParaRPr>
+          </a:p>
+          <a:p>
+            <a:pPr marL="0" lvl="0" indent="0">
+              <a:buNone/>
+              <a:defRPr sz="1800"/>
+            </a:pPr>
+            <a:r>
+              <a:rPr lang="de-AT" sz="1800" dirty="0">
+                <a:latin typeface="Courier New" panose="02070309020205020404" pitchFamily="49" charset="0"/>
+                <a:cs typeface="Courier New" panose="02070309020205020404" pitchFamily="49" charset="0"/>
+              </a:rPr>
+              <a:t>Console.WriteLine(</a:t>
+            </a:r>
+            <a:r>
+              <a:rPr lang="de-AT" sz="1800" dirty="0" err="1">
+                <a:latin typeface="Courier New" panose="02070309020205020404" pitchFamily="49" charset="0"/>
+                <a:cs typeface="Courier New" panose="02070309020205020404" pitchFamily="49" charset="0"/>
+              </a:rPr>
+              <a:t>firstName</a:t>
+            </a:r>
+            <a:r>
+              <a:rPr lang="de-AT" sz="1800" dirty="0">
+                <a:latin typeface="Courier New" panose="02070309020205020404" pitchFamily="49" charset="0"/>
+                <a:cs typeface="Courier New" panose="02070309020205020404" pitchFamily="49" charset="0"/>
+              </a:rPr>
+              <a:t> + </a:t>
+            </a:r>
+            <a:r>
+              <a:rPr lang="de-AT" dirty="0">
+                <a:latin typeface="Courier New" panose="02070309020205020404" pitchFamily="49" charset="0"/>
+                <a:cs typeface="Courier New" panose="02070309020205020404" pitchFamily="49" charset="0"/>
+              </a:rPr>
+              <a:t>"</a:t>
+            </a:r>
+            <a:r>
+              <a:rPr lang="de-AT" sz="1800" dirty="0" smtClean="0">
+                <a:latin typeface="Courier New" panose="02070309020205020404" pitchFamily="49" charset="0"/>
+                <a:cs typeface="Courier New" panose="02070309020205020404" pitchFamily="49" charset="0"/>
+              </a:rPr>
+              <a:t> </a:t>
+            </a:r>
+            <a:r>
+              <a:rPr lang="de-AT" dirty="0">
+                <a:latin typeface="Courier New" panose="02070309020205020404" pitchFamily="49" charset="0"/>
+                <a:cs typeface="Courier New" panose="02070309020205020404" pitchFamily="49" charset="0"/>
+              </a:rPr>
+              <a:t>"</a:t>
+            </a:r>
+            <a:r>
+              <a:rPr lang="de-AT" sz="1800" dirty="0" smtClean="0">
+                <a:latin typeface="Courier New" panose="02070309020205020404" pitchFamily="49" charset="0"/>
+                <a:cs typeface="Courier New" panose="02070309020205020404" pitchFamily="49" charset="0"/>
+              </a:rPr>
+              <a:t> </a:t>
+            </a:r>
+            <a:r>
+              <a:rPr lang="de-AT" sz="1800" dirty="0">
+                <a:latin typeface="Courier New" panose="02070309020205020404" pitchFamily="49" charset="0"/>
+                <a:cs typeface="Courier New" panose="02070309020205020404" pitchFamily="49" charset="0"/>
+              </a:rPr>
+              <a:t>+ </a:t>
+            </a:r>
+            <a:r>
+              <a:rPr lang="de-AT" sz="1800" dirty="0" err="1">
+                <a:latin typeface="Courier New" panose="02070309020205020404" pitchFamily="49" charset="0"/>
+                <a:cs typeface="Courier New" panose="02070309020205020404" pitchFamily="49" charset="0"/>
+              </a:rPr>
+              <a:t>lastName</a:t>
+            </a:r>
+            <a:r>
+              <a:rPr lang="de-AT" sz="1800" dirty="0">
+                <a:latin typeface="Courier New" panose="02070309020205020404" pitchFamily="49" charset="0"/>
+                <a:cs typeface="Courier New" panose="02070309020205020404" pitchFamily="49" charset="0"/>
+              </a:rPr>
+              <a:t>);</a:t>
+            </a:r>
           </a:p>
           <a:p>
             <a:pPr lvl="0">
               <a:defRPr sz="1800"/>
             </a:pPr>
             <a:endParaRPr lang="de-AT" sz="1800" dirty="0">
-              <a:latin typeface="Monaco"/>
-              <a:ea typeface="Monaco"/>
-              <a:cs typeface="Monaco"/>
-              <a:sym typeface="Monaco"/>
+              <a:latin typeface="Courier New" panose="02070309020205020404" pitchFamily="49" charset="0"/>
+              <a:cs typeface="Courier New" panose="02070309020205020404" pitchFamily="49" charset="0"/>
             </a:endParaRPr>
           </a:p>
           <a:p>
-            <a:pPr lvl="0">
+            <a:pPr marL="0" lvl="0" indent="0">
+              <a:buNone/>
               <a:defRPr sz="1800"/>
             </a:pPr>
             <a:r>
-              <a:rPr lang="de-AT" sz="1800" dirty="0" err="1"/>
-              <a:t>string</a:t>
-            </a:r>
-            <a:r>
-              <a:rPr lang="de-AT" sz="1800" dirty="0"/>
-              <a:t> </a:t>
-            </a:r>
-            <a:r>
-              <a:rPr lang="de-AT" sz="1800" dirty="0" err="1"/>
-              <a:t>firstName</a:t>
-            </a:r>
-            <a:r>
-              <a:rPr lang="de-AT" sz="1800" dirty="0"/>
-              <a:t> = “Hansi”;</a:t>
-            </a:r>
-          </a:p>
-          <a:p>
-            <a:pPr lvl="0">
+              <a:rPr lang="en-US" sz="1800" dirty="0" err="1">
+                <a:latin typeface="Courier New" panose="02070309020205020404" pitchFamily="49" charset="0"/>
+                <a:cs typeface="Courier New" panose="02070309020205020404" pitchFamily="49" charset="0"/>
+              </a:rPr>
+              <a:t>int</a:t>
+            </a:r>
+            <a:r>
+              <a:rPr lang="en-US" sz="1800" dirty="0">
+                <a:latin typeface="Courier New" panose="02070309020205020404" pitchFamily="49" charset="0"/>
+                <a:cs typeface="Courier New" panose="02070309020205020404" pitchFamily="49" charset="0"/>
+              </a:rPr>
+              <a:t> summand1 = 17;</a:t>
+            </a:r>
+          </a:p>
+          <a:p>
+            <a:pPr marL="0" lvl="0" indent="0">
+              <a:buNone/>
               <a:defRPr sz="1800"/>
             </a:pPr>
             <a:r>
-              <a:rPr lang="de-AT" sz="1800" dirty="0" err="1"/>
-              <a:t>string</a:t>
-            </a:r>
-            <a:r>
-              <a:rPr lang="de-AT" sz="1800" dirty="0"/>
-              <a:t> </a:t>
-            </a:r>
-            <a:r>
-              <a:rPr lang="de-AT" sz="1800" dirty="0" err="1"/>
-              <a:t>lastName</a:t>
-            </a:r>
-            <a:r>
-              <a:rPr lang="de-AT" sz="1800" dirty="0"/>
-              <a:t> = “Hinterseer”;</a:t>
-            </a:r>
-          </a:p>
-          <a:p>
-            <a:pPr lvl="0">
+              <a:rPr lang="en-US" sz="1800" dirty="0" err="1">
+                <a:latin typeface="Courier New" panose="02070309020205020404" pitchFamily="49" charset="0"/>
+                <a:cs typeface="Courier New" panose="02070309020205020404" pitchFamily="49" charset="0"/>
+              </a:rPr>
+              <a:t>int</a:t>
+            </a:r>
+            <a:r>
+              <a:rPr lang="en-US" sz="1800" dirty="0">
+                <a:latin typeface="Courier New" panose="02070309020205020404" pitchFamily="49" charset="0"/>
+                <a:cs typeface="Courier New" panose="02070309020205020404" pitchFamily="49" charset="0"/>
+              </a:rPr>
+              <a:t> summand2 = 42;</a:t>
+            </a:r>
+          </a:p>
+          <a:p>
+            <a:pPr marL="0" lvl="0" indent="0">
+              <a:buNone/>
               <a:defRPr sz="1800"/>
             </a:pPr>
             <a:r>
-              <a:rPr lang="de-AT" sz="1800" dirty="0"/>
-              <a:t>Console.WriteLine(</a:t>
-            </a:r>
-            <a:r>
-              <a:rPr lang="de-AT" sz="1800" dirty="0" err="1"/>
-              <a:t>firstName</a:t>
-            </a:r>
-            <a:r>
-              <a:rPr lang="de-AT" sz="1800" dirty="0"/>
-              <a:t> + “ “ + </a:t>
-            </a:r>
-            <a:r>
-              <a:rPr lang="de-AT" sz="1800" dirty="0" err="1"/>
-              <a:t>lastName</a:t>
-            </a:r>
-            <a:r>
-              <a:rPr lang="de-AT" sz="1800" dirty="0"/>
-              <a:t>);</a:t>
-            </a:r>
-          </a:p>
-          <a:p>
-            <a:pPr lvl="0">
+              <a:rPr lang="en-US" sz="1800" dirty="0" err="1">
+                <a:latin typeface="Courier New" panose="02070309020205020404" pitchFamily="49" charset="0"/>
+                <a:cs typeface="Courier New" panose="02070309020205020404" pitchFamily="49" charset="0"/>
+              </a:rPr>
+              <a:t>int</a:t>
+            </a:r>
+            <a:r>
+              <a:rPr lang="en-US" sz="1800" dirty="0">
+                <a:latin typeface="Courier New" panose="02070309020205020404" pitchFamily="49" charset="0"/>
+                <a:cs typeface="Courier New" panose="02070309020205020404" pitchFamily="49" charset="0"/>
+              </a:rPr>
+              <a:t> sum = summand1 + summand2;</a:t>
+            </a:r>
+          </a:p>
+          <a:p>
+            <a:pPr marL="0" indent="0">
+              <a:buNone/>
               <a:defRPr sz="1800"/>
             </a:pPr>
-            <a:endParaRPr lang="de-AT" sz="1800" dirty="0"/>
-          </a:p>
-          <a:p>
-            <a:pPr lvl="0">
+            <a:r>
+              <a:rPr lang="de-AT" sz="1800" dirty="0" err="1">
+                <a:latin typeface="Courier New" panose="02070309020205020404" pitchFamily="49" charset="0"/>
+                <a:cs typeface="Courier New" panose="02070309020205020404" pitchFamily="49" charset="0"/>
+              </a:rPr>
+              <a:t>Console.WriteLine</a:t>
+            </a:r>
+            <a:r>
+              <a:rPr lang="de-AT" sz="1800" dirty="0" smtClean="0">
+                <a:latin typeface="Courier New" panose="02070309020205020404" pitchFamily="49" charset="0"/>
+                <a:cs typeface="Courier New" panose="02070309020205020404" pitchFamily="49" charset="0"/>
+              </a:rPr>
+              <a:t>(</a:t>
+            </a:r>
+            <a:r>
+              <a:rPr lang="de-AT" dirty="0" smtClean="0">
+                <a:latin typeface="Courier New" panose="02070309020205020404" pitchFamily="49" charset="0"/>
+                <a:cs typeface="Courier New" panose="02070309020205020404" pitchFamily="49" charset="0"/>
+              </a:rPr>
+              <a:t>"</a:t>
+            </a:r>
+            <a:r>
+              <a:rPr lang="de-AT" sz="1800" dirty="0" smtClean="0">
+                <a:latin typeface="Courier New" panose="02070309020205020404" pitchFamily="49" charset="0"/>
+                <a:cs typeface="Courier New" panose="02070309020205020404" pitchFamily="49" charset="0"/>
+              </a:rPr>
+              <a:t>Die </a:t>
+            </a:r>
+            <a:r>
+              <a:rPr lang="de-AT" sz="1800" dirty="0">
+                <a:latin typeface="Courier New" panose="02070309020205020404" pitchFamily="49" charset="0"/>
+                <a:cs typeface="Courier New" panose="02070309020205020404" pitchFamily="49" charset="0"/>
+              </a:rPr>
+              <a:t>Summe beträgt </a:t>
+            </a:r>
+            <a:r>
+              <a:rPr lang="de-AT" dirty="0">
+                <a:latin typeface="Courier New" panose="02070309020205020404" pitchFamily="49" charset="0"/>
+                <a:cs typeface="Courier New" panose="02070309020205020404" pitchFamily="49" charset="0"/>
+              </a:rPr>
+              <a:t>"</a:t>
+            </a:r>
+            <a:r>
+              <a:rPr lang="de-AT" sz="1800" dirty="0" smtClean="0">
+                <a:latin typeface="Courier New" panose="02070309020205020404" pitchFamily="49" charset="0"/>
+                <a:cs typeface="Courier New" panose="02070309020205020404" pitchFamily="49" charset="0"/>
+              </a:rPr>
+              <a:t> </a:t>
+            </a:r>
+            <a:r>
+              <a:rPr lang="de-AT" sz="1800" dirty="0">
+                <a:latin typeface="Courier New" panose="02070309020205020404" pitchFamily="49" charset="0"/>
+                <a:cs typeface="Courier New" panose="02070309020205020404" pitchFamily="49" charset="0"/>
+              </a:rPr>
+              <a:t>+ </a:t>
+            </a:r>
+            <a:r>
+              <a:rPr lang="de-AT" sz="1800" dirty="0" err="1">
+                <a:latin typeface="Courier New" panose="02070309020205020404" pitchFamily="49" charset="0"/>
+                <a:cs typeface="Courier New" panose="02070309020205020404" pitchFamily="49" charset="0"/>
+              </a:rPr>
+              <a:t>sum</a:t>
+            </a:r>
+            <a:r>
+              <a:rPr lang="de-AT" sz="1800" dirty="0" smtClean="0">
+                <a:latin typeface="Courier New" panose="02070309020205020404" pitchFamily="49" charset="0"/>
+                <a:cs typeface="Courier New" panose="02070309020205020404" pitchFamily="49" charset="0"/>
+              </a:rPr>
+              <a:t>);</a:t>
+            </a:r>
+          </a:p>
+          <a:p>
+            <a:pPr marL="0" indent="0">
+              <a:buNone/>
               <a:defRPr sz="1800"/>
             </a:pPr>
-            <a:endParaRPr lang="de-AT" sz="1800" dirty="0"/>
-          </a:p>
-          <a:p>
-            <a:pPr lvl="0">
+            <a:endParaRPr lang="de-AT" sz="1800" dirty="0" smtClean="0">
+              <a:latin typeface="Courier New" panose="02070309020205020404" pitchFamily="49" charset="0"/>
+              <a:cs typeface="Courier New" panose="02070309020205020404" pitchFamily="49" charset="0"/>
+            </a:endParaRPr>
+          </a:p>
+          <a:p>
+            <a:pPr marL="0" indent="0">
+              <a:buNone/>
               <a:defRPr sz="1800"/>
             </a:pPr>
             <a:r>
-              <a:rPr lang="en-US" sz="1800" dirty="0" err="1"/>
+              <a:rPr lang="de-AT" sz="1800" dirty="0" err="1" smtClean="0">
+                <a:latin typeface="Courier New" panose="02070309020205020404" pitchFamily="49" charset="0"/>
+                <a:cs typeface="Courier New" panose="02070309020205020404" pitchFamily="49" charset="0"/>
+              </a:rPr>
               <a:t>int</a:t>
             </a:r>
             <a:r>
-              <a:rPr lang="en-US" sz="1800" dirty="0"/>
-              <a:t> summand1 = 17;</a:t>
-            </a:r>
-          </a:p>
-          <a:p>
-            <a:pPr lvl="0">
-              <a:defRPr sz="1800"/>
-            </a:pPr>
-            <a:r>
-              <a:rPr lang="en-US" sz="1800" dirty="0" err="1"/>
-              <a:t>int</a:t>
-            </a:r>
-            <a:r>
-              <a:rPr lang="en-US" sz="1800" dirty="0"/>
-              <a:t> summand2 = 42;</a:t>
-            </a:r>
-          </a:p>
-          <a:p>
-            <a:pPr lvl="0">
-              <a:defRPr sz="1800"/>
-            </a:pPr>
-            <a:r>
-              <a:rPr lang="en-US" sz="1800" dirty="0" err="1"/>
-              <a:t>int</a:t>
-            </a:r>
-            <a:r>
-              <a:rPr lang="en-US" sz="1800" dirty="0"/>
-              <a:t> sum = summand1 + summand2;</a:t>
-            </a:r>
-          </a:p>
-          <a:p>
-            <a:pPr>
-              <a:defRPr sz="1800"/>
-            </a:pPr>
-            <a:r>
-              <a:rPr lang="de-AT" sz="1800" dirty="0"/>
-              <a:t>Console.WriteLine(“Die Summe beträgt “ + </a:t>
-            </a:r>
-            <a:r>
-              <a:rPr lang="de-AT" sz="1800" dirty="0" err="1"/>
-              <a:t>sum</a:t>
-            </a:r>
-            <a:r>
-              <a:rPr lang="de-AT" sz="1800" dirty="0"/>
-              <a:t>);</a:t>
-            </a:r>
-          </a:p>
-          <a:p>
-            <a:pPr lvl="0">
-              <a:defRPr sz="1800"/>
-            </a:pPr>
-            <a:endParaRPr lang="en-US" sz="1800" dirty="0"/>
-          </a:p>
-          <a:p>
-            <a:pPr lvl="0">
+              <a:rPr lang="de-AT" sz="1800" dirty="0" smtClean="0">
+                <a:latin typeface="Courier New" panose="02070309020205020404" pitchFamily="49" charset="0"/>
+                <a:cs typeface="Courier New" panose="02070309020205020404" pitchFamily="49" charset="0"/>
+              </a:rPr>
+              <a:t> </a:t>
+            </a:r>
+            <a:r>
+              <a:rPr lang="de-AT" sz="1800" dirty="0" err="1" smtClean="0">
+                <a:latin typeface="Courier New" panose="02070309020205020404" pitchFamily="49" charset="0"/>
+                <a:cs typeface="Courier New" panose="02070309020205020404" pitchFamily="49" charset="0"/>
+              </a:rPr>
+              <a:t>count</a:t>
+            </a:r>
+            <a:r>
+              <a:rPr lang="de-AT" sz="1800" dirty="0" smtClean="0">
+                <a:latin typeface="Courier New" panose="02070309020205020404" pitchFamily="49" charset="0"/>
+                <a:cs typeface="Courier New" panose="02070309020205020404" pitchFamily="49" charset="0"/>
+              </a:rPr>
+              <a:t> = 0;</a:t>
+            </a:r>
+            <a:br>
+              <a:rPr lang="de-AT" sz="1800" dirty="0" smtClean="0">
+                <a:latin typeface="Courier New" panose="02070309020205020404" pitchFamily="49" charset="0"/>
+                <a:cs typeface="Courier New" panose="02070309020205020404" pitchFamily="49" charset="0"/>
+              </a:rPr>
+            </a:br>
+            <a:r>
+              <a:rPr lang="de-AT" sz="1800" dirty="0" err="1" smtClean="0">
+                <a:latin typeface="Courier New" panose="02070309020205020404" pitchFamily="49" charset="0"/>
+                <a:cs typeface="Courier New" panose="02070309020205020404" pitchFamily="49" charset="0"/>
+              </a:rPr>
+              <a:t>count</a:t>
+            </a:r>
+            <a:r>
+              <a:rPr lang="de-AT" sz="1800" dirty="0" smtClean="0">
+                <a:latin typeface="Courier New" panose="02070309020205020404" pitchFamily="49" charset="0"/>
+                <a:cs typeface="Courier New" panose="02070309020205020404" pitchFamily="49" charset="0"/>
+              </a:rPr>
+              <a:t> = </a:t>
+            </a:r>
+            <a:r>
+              <a:rPr lang="de-AT" sz="1800" dirty="0" err="1" smtClean="0">
+                <a:latin typeface="Courier New" panose="02070309020205020404" pitchFamily="49" charset="0"/>
+                <a:cs typeface="Courier New" panose="02070309020205020404" pitchFamily="49" charset="0"/>
+              </a:rPr>
+              <a:t>count</a:t>
+            </a:r>
+            <a:r>
+              <a:rPr lang="de-AT" sz="1800" dirty="0" smtClean="0">
+                <a:latin typeface="Courier New" panose="02070309020205020404" pitchFamily="49" charset="0"/>
+                <a:cs typeface="Courier New" panose="02070309020205020404" pitchFamily="49" charset="0"/>
+              </a:rPr>
+              <a:t> + 1;</a:t>
+            </a:r>
+            <a:endParaRPr lang="de-AT" sz="1800" dirty="0">
+              <a:latin typeface="Courier New" panose="02070309020205020404" pitchFamily="49" charset="0"/>
+              <a:cs typeface="Courier New" panose="02070309020205020404" pitchFamily="49" charset="0"/>
+            </a:endParaRPr>
+          </a:p>
+          <a:p>
+            <a:pPr marL="0" lvl="0" indent="0">
+              <a:buNone/>
               <a:defRPr sz="1800"/>
             </a:pPr>
             <a:endParaRPr lang="de-AT" sz="1800" dirty="0"/>
@@ -12991,7 +12670,442 @@
 </p:sld>
 </file>
 
-<file path=ppt/slides/slide14.xml><?xml version="1.0" encoding="utf-8"?>
+<file path=ppt/slides/slide12.xml><?xml version="1.0" encoding="utf-8"?>
+<p:sld xmlns:a="http://schemas.openxmlformats.org/drawingml/2006/main" xmlns:r="http://schemas.openxmlformats.org/officeDocument/2006/relationships" xmlns:p="http://schemas.openxmlformats.org/presentationml/2006/main">
+  <p:cSld>
+    <p:spTree>
+      <p:nvGrpSpPr>
+        <p:cNvPr id="1" name=""/>
+        <p:cNvGrpSpPr/>
+        <p:nvPr/>
+      </p:nvGrpSpPr>
+      <p:grpSpPr>
+        <a:xfrm>
+          <a:off x="0" y="0"/>
+          <a:ext cx="0" cy="0"/>
+          <a:chOff x="0" y="0"/>
+          <a:chExt cx="0" cy="0"/>
+        </a:xfrm>
+      </p:grpSpPr>
+      <p:sp>
+        <p:nvSpPr>
+          <p:cNvPr id="15363" name="Foliennummernplatzhalter 4"/>
+          <p:cNvSpPr>
+            <a:spLocks noGrp="1"/>
+          </p:cNvSpPr>
+          <p:nvPr>
+            <p:ph type="sldNum" sz="quarter" idx="4294967295"/>
+          </p:nvPr>
+        </p:nvSpPr>
+        <p:spPr>
+          <a:xfrm>
+            <a:off x="6773863" y="6380163"/>
+            <a:ext cx="2195512" cy="341312"/>
+          </a:xfrm>
+          <a:prstGeom prst="rect">
+            <a:avLst/>
+          </a:prstGeom>
+          <a:noFill/>
+          <a:ln/>
+          <a:extLst>
+            <a:ext uri="{909E8E84-426E-40DD-AFC4-6F175D3DCCD1}">
+              <a14:hiddenFill xmlns:a14="http://schemas.microsoft.com/office/drawing/2010/main">
+                <a:solidFill>
+                  <a:srgbClr val="FFFFFF"/>
+                </a:solidFill>
+              </a14:hiddenFill>
+            </a:ext>
+            <a:ext uri="{91240B29-F687-4F45-9708-019B960494DF}">
+              <a14:hiddenLine xmlns:a14="http://schemas.microsoft.com/office/drawing/2010/main" w="9525">
+                <a:solidFill>
+                  <a:srgbClr val="000000"/>
+                </a:solidFill>
+                <a:miter lim="800000"/>
+                <a:headEnd/>
+                <a:tailEnd/>
+              </a14:hiddenLine>
+            </a:ext>
+          </a:extLst>
+        </p:spPr>
+        <p:txBody>
+          <a:bodyPr/>
+          <a:lstStyle>
+            <a:lvl1pPr>
+              <a:spcBef>
+                <a:spcPct val="20000"/>
+              </a:spcBef>
+              <a:buFont typeface="Wingdings" panose="05000000000000000000" pitchFamily="2" charset="2"/>
+              <a:buChar char="Ø"/>
+              <a:defRPr sz="3200">
+                <a:solidFill>
+                  <a:srgbClr val="000080"/>
+                </a:solidFill>
+                <a:latin typeface="Times New Roman" panose="02020603050405020304" pitchFamily="18" charset="0"/>
+              </a:defRPr>
+            </a:lvl1pPr>
+            <a:lvl2pPr marL="742950" indent="-285750">
+              <a:spcBef>
+                <a:spcPct val="20000"/>
+              </a:spcBef>
+              <a:buChar char="•"/>
+              <a:defRPr sz="2800">
+                <a:solidFill>
+                  <a:srgbClr val="000080"/>
+                </a:solidFill>
+                <a:latin typeface="Times New Roman" panose="02020603050405020304" pitchFamily="18" charset="0"/>
+              </a:defRPr>
+            </a:lvl2pPr>
+            <a:lvl3pPr marL="1143000" indent="-228600">
+              <a:spcBef>
+                <a:spcPct val="20000"/>
+              </a:spcBef>
+              <a:buFont typeface="Wingdings" panose="05000000000000000000" pitchFamily="2" charset="2"/>
+              <a:buChar char="§"/>
+              <a:defRPr sz="2400">
+                <a:solidFill>
+                  <a:srgbClr val="000080"/>
+                </a:solidFill>
+                <a:latin typeface="Times New Roman" panose="02020603050405020304" pitchFamily="18" charset="0"/>
+              </a:defRPr>
+            </a:lvl3pPr>
+            <a:lvl4pPr marL="1600200" indent="-228600">
+              <a:spcBef>
+                <a:spcPct val="20000"/>
+              </a:spcBef>
+              <a:buChar char="–"/>
+              <a:defRPr sz="2000">
+                <a:solidFill>
+                  <a:srgbClr val="000080"/>
+                </a:solidFill>
+                <a:latin typeface="Times New Roman" panose="02020603050405020304" pitchFamily="18" charset="0"/>
+              </a:defRPr>
+            </a:lvl4pPr>
+            <a:lvl5pPr marL="2057400" indent="-228600">
+              <a:spcBef>
+                <a:spcPct val="20000"/>
+              </a:spcBef>
+              <a:buChar char="»"/>
+              <a:defRPr sz="2000">
+                <a:solidFill>
+                  <a:srgbClr val="000080"/>
+                </a:solidFill>
+                <a:latin typeface="Times New Roman" panose="02020603050405020304" pitchFamily="18" charset="0"/>
+              </a:defRPr>
+            </a:lvl5pPr>
+            <a:lvl6pPr marL="2514600" indent="-228600" eaLnBrk="0" fontAlgn="base" hangingPunct="0">
+              <a:spcBef>
+                <a:spcPct val="20000"/>
+              </a:spcBef>
+              <a:spcAft>
+                <a:spcPct val="0"/>
+              </a:spcAft>
+              <a:buChar char="»"/>
+              <a:defRPr sz="2000">
+                <a:solidFill>
+                  <a:srgbClr val="000080"/>
+                </a:solidFill>
+                <a:latin typeface="Times New Roman" panose="02020603050405020304" pitchFamily="18" charset="0"/>
+              </a:defRPr>
+            </a:lvl6pPr>
+            <a:lvl7pPr marL="2971800" indent="-228600" eaLnBrk="0" fontAlgn="base" hangingPunct="0">
+              <a:spcBef>
+                <a:spcPct val="20000"/>
+              </a:spcBef>
+              <a:spcAft>
+                <a:spcPct val="0"/>
+              </a:spcAft>
+              <a:buChar char="»"/>
+              <a:defRPr sz="2000">
+                <a:solidFill>
+                  <a:srgbClr val="000080"/>
+                </a:solidFill>
+                <a:latin typeface="Times New Roman" panose="02020603050405020304" pitchFamily="18" charset="0"/>
+              </a:defRPr>
+            </a:lvl7pPr>
+            <a:lvl8pPr marL="3429000" indent="-228600" eaLnBrk="0" fontAlgn="base" hangingPunct="0">
+              <a:spcBef>
+                <a:spcPct val="20000"/>
+              </a:spcBef>
+              <a:spcAft>
+                <a:spcPct val="0"/>
+              </a:spcAft>
+              <a:buChar char="»"/>
+              <a:defRPr sz="2000">
+                <a:solidFill>
+                  <a:srgbClr val="000080"/>
+                </a:solidFill>
+                <a:latin typeface="Times New Roman" panose="02020603050405020304" pitchFamily="18" charset="0"/>
+              </a:defRPr>
+            </a:lvl8pPr>
+            <a:lvl9pPr marL="3886200" indent="-228600" eaLnBrk="0" fontAlgn="base" hangingPunct="0">
+              <a:spcBef>
+                <a:spcPct val="20000"/>
+              </a:spcBef>
+              <a:spcAft>
+                <a:spcPct val="0"/>
+              </a:spcAft>
+              <a:buChar char="»"/>
+              <a:defRPr sz="2000">
+                <a:solidFill>
+                  <a:srgbClr val="000080"/>
+                </a:solidFill>
+                <a:latin typeface="Times New Roman" panose="02020603050405020304" pitchFamily="18" charset="0"/>
+              </a:defRPr>
+            </a:lvl9pPr>
+          </a:lstStyle>
+          <a:p>
+            <a:pPr>
+              <a:spcBef>
+                <a:spcPct val="0"/>
+              </a:spcBef>
+              <a:buFontTx/>
+              <a:buNone/>
+            </a:pPr>
+            <a:fld id="{C4A61D47-9B62-4C54-9F0F-F9D105DA4D4A}" type="slidenum">
+              <a:rPr lang="de-DE" altLang="de-DE" sz="1400" smtClean="0">
+                <a:solidFill>
+                  <a:schemeClr val="bg1"/>
+                </a:solidFill>
+              </a:rPr>
+              <a:pPr>
+                <a:spcBef>
+                  <a:spcPct val="0"/>
+                </a:spcBef>
+                <a:buFontTx/>
+                <a:buNone/>
+              </a:pPr>
+              <a:t>12</a:t>
+            </a:fld>
+            <a:endParaRPr lang="de-DE" altLang="de-DE" sz="1400">
+              <a:solidFill>
+                <a:schemeClr val="bg1"/>
+              </a:solidFill>
+            </a:endParaRPr>
+          </a:p>
+        </p:txBody>
+      </p:sp>
+      <p:sp>
+        <p:nvSpPr>
+          <p:cNvPr id="15364" name="Rectangle 2"/>
+          <p:cNvSpPr>
+            <a:spLocks noGrp="1" noChangeArrowheads="1"/>
+          </p:cNvSpPr>
+          <p:nvPr>
+            <p:ph type="title"/>
+          </p:nvPr>
+        </p:nvSpPr>
+        <p:spPr/>
+        <p:txBody>
+          <a:bodyPr/>
+          <a:lstStyle/>
+          <a:p>
+            <a:pPr eaLnBrk="1" hangingPunct="1"/>
+            <a:r>
+              <a:rPr lang="de-DE" altLang="de-DE" dirty="0"/>
+              <a:t>Bezeichner – Namen von Variablen </a:t>
+            </a:r>
+          </a:p>
+        </p:txBody>
+      </p:sp>
+      <p:sp>
+        <p:nvSpPr>
+          <p:cNvPr id="15365" name="Rectangle 3"/>
+          <p:cNvSpPr>
+            <a:spLocks noGrp="1" noChangeArrowheads="1"/>
+          </p:cNvSpPr>
+          <p:nvPr>
+            <p:ph type="body" idx="1"/>
+          </p:nvPr>
+        </p:nvSpPr>
+        <p:spPr>
+          <a:xfrm>
+            <a:off x="457200" y="1268414"/>
+            <a:ext cx="8229600" cy="4857750"/>
+          </a:xfrm>
+        </p:spPr>
+        <p:txBody>
+          <a:bodyPr/>
+          <a:lstStyle/>
+          <a:p>
+            <a:pPr eaLnBrk="1" hangingPunct="1"/>
+            <a:r>
+              <a:rPr lang="de-DE" altLang="de-DE" sz="2400" dirty="0"/>
+              <a:t>Kombination aus Zeichen, Ziffern, _, @</a:t>
+            </a:r>
+          </a:p>
+          <a:p>
+            <a:pPr eaLnBrk="1" hangingPunct="1"/>
+            <a:r>
+              <a:rPr lang="de-DE" altLang="de-DE" sz="2400" dirty="0"/>
+              <a:t>Case-sensitiv</a:t>
+            </a:r>
+          </a:p>
+          <a:p>
+            <a:pPr eaLnBrk="1" hangingPunct="1"/>
+            <a:r>
+              <a:rPr lang="de-DE" altLang="de-DE" sz="2400" dirty="0"/>
+              <a:t>Schlüsselwörter dürfen nicht verwendet werden</a:t>
+            </a:r>
+          </a:p>
+          <a:p>
+            <a:pPr lvl="1" eaLnBrk="1" hangingPunct="1"/>
+            <a:r>
+              <a:rPr lang="de-DE" altLang="de-DE" sz="2100" dirty="0"/>
+              <a:t>Siehe </a:t>
+            </a:r>
+            <a:r>
+              <a:rPr lang="de-DE" altLang="de-DE" sz="2100" dirty="0">
+                <a:hlinkClick r:id="rId2"/>
+              </a:rPr>
+              <a:t>https://msdn.microsoft.com/de-de/library/x53a06bb%28v=vs.120%29.aspx</a:t>
+            </a:r>
+            <a:endParaRPr lang="de-DE" altLang="de-DE" sz="2100" dirty="0"/>
+          </a:p>
+          <a:p>
+            <a:pPr eaLnBrk="1" hangingPunct="1"/>
+            <a:r>
+              <a:rPr lang="de-DE" altLang="de-DE" sz="2400" dirty="0"/>
+              <a:t>Richtlinien für die Namenswahl:</a:t>
+            </a:r>
+          </a:p>
+          <a:p>
+            <a:pPr lvl="1" eaLnBrk="1" hangingPunct="1"/>
+            <a:r>
+              <a:rPr lang="de-DE" altLang="de-DE" sz="2000" dirty="0"/>
+              <a:t>Sprechende Bezeichner verwenden – der Name beschreibt, was in der Variablen gespeichert ist!</a:t>
+            </a:r>
+          </a:p>
+          <a:p>
+            <a:pPr lvl="1" eaLnBrk="1" hangingPunct="1"/>
+            <a:r>
+              <a:rPr lang="de-DE" altLang="de-DE" sz="2000" dirty="0"/>
+              <a:t>Nur englische Namen verwenden</a:t>
+            </a:r>
+          </a:p>
+          <a:p>
+            <a:pPr lvl="1" eaLnBrk="1" hangingPunct="1"/>
+            <a:r>
+              <a:rPr lang="de-DE" altLang="de-DE" sz="2100" dirty="0"/>
+              <a:t>„</a:t>
+            </a:r>
+            <a:r>
+              <a:rPr lang="de-DE" altLang="de-DE" sz="2100" dirty="0" err="1"/>
+              <a:t>CamelCase</a:t>
+            </a:r>
+            <a:r>
+              <a:rPr lang="de-DE" altLang="de-DE" sz="2100" dirty="0"/>
+              <a:t>“</a:t>
+            </a:r>
+          </a:p>
+          <a:p>
+            <a:pPr lvl="2" eaLnBrk="1" hangingPunct="1"/>
+            <a:r>
+              <a:rPr lang="de-DE" altLang="de-DE" sz="1800" dirty="0"/>
+              <a:t>Beginnen mit kleinem Anfangsbuchstaben</a:t>
+            </a:r>
+          </a:p>
+          <a:p>
+            <a:pPr lvl="2" eaLnBrk="1" hangingPunct="1"/>
+            <a:r>
+              <a:rPr lang="de-DE" altLang="de-DE" sz="1800" dirty="0"/>
+              <a:t>Jedes innere Teilwort groß beginnen</a:t>
+            </a:r>
+          </a:p>
+          <a:p>
+            <a:pPr lvl="2" eaLnBrk="1" hangingPunct="1"/>
+            <a:r>
+              <a:rPr lang="de-DE" altLang="de-DE" sz="1800" dirty="0" err="1"/>
+              <a:t>Bsp</a:t>
+            </a:r>
+            <a:r>
+              <a:rPr lang="de-DE" altLang="de-DE" sz="1800" dirty="0"/>
+              <a:t>: </a:t>
+            </a:r>
+            <a:r>
+              <a:rPr lang="de-DE" altLang="de-DE" sz="1800" i="1" dirty="0" err="1">
+                <a:latin typeface="Courier New" panose="02070309020205020404" pitchFamily="49" charset="0"/>
+                <a:cs typeface="Courier New" panose="02070309020205020404" pitchFamily="49" charset="0"/>
+              </a:rPr>
+              <a:t>myVariableInCamelCaseNotation</a:t>
+            </a:r>
+            <a:endParaRPr lang="de-DE" altLang="de-DE" sz="1800" i="1" dirty="0">
+              <a:latin typeface="Courier New" panose="02070309020205020404" pitchFamily="49" charset="0"/>
+              <a:cs typeface="Courier New" panose="02070309020205020404" pitchFamily="49" charset="0"/>
+            </a:endParaRPr>
+          </a:p>
+          <a:p>
+            <a:pPr eaLnBrk="1" hangingPunct="1"/>
+            <a:endParaRPr lang="de-DE" altLang="de-DE" sz="2800" dirty="0"/>
+          </a:p>
+          <a:p>
+            <a:pPr eaLnBrk="1" hangingPunct="1"/>
+            <a:endParaRPr lang="de-DE" altLang="de-DE" sz="2800" dirty="0"/>
+          </a:p>
+          <a:p>
+            <a:pPr eaLnBrk="1" hangingPunct="1"/>
+            <a:endParaRPr lang="de-DE" altLang="de-DE" sz="2800" dirty="0"/>
+          </a:p>
+          <a:p>
+            <a:pPr eaLnBrk="1" hangingPunct="1"/>
+            <a:endParaRPr lang="de-DE" altLang="de-DE" sz="2800" dirty="0"/>
+          </a:p>
+        </p:txBody>
+      </p:sp>
+      <p:pic>
+        <p:nvPicPr>
+          <p:cNvPr id="1030" name="Picture 6" descr="http://duden.de/_media_/full/K/Kamel-201100285794.jpg"/>
+          <p:cNvPicPr>
+            <a:picLocks noChangeAspect="1" noChangeArrowheads="1"/>
+          </p:cNvPicPr>
+          <p:nvPr/>
+        </p:nvPicPr>
+        <p:blipFill>
+          <a:blip r:embed="rId3" cstate="print">
+            <a:extLst>
+              <a:ext uri="{28A0092B-C50C-407E-A947-70E740481C1C}">
+                <a14:useLocalDpi xmlns:a14="http://schemas.microsoft.com/office/drawing/2010/main" val="0"/>
+              </a:ext>
+            </a:extLst>
+          </a:blip>
+          <a:srcRect/>
+          <a:stretch>
+            <a:fillRect/>
+          </a:stretch>
+        </p:blipFill>
+        <p:spPr bwMode="auto">
+          <a:xfrm>
+            <a:off x="6795291" y="4653136"/>
+            <a:ext cx="1521817" cy="1353109"/>
+          </a:xfrm>
+          <a:prstGeom prst="rect">
+            <a:avLst/>
+          </a:prstGeom>
+          <a:noFill/>
+          <a:extLst>
+            <a:ext uri="{909E8E84-426E-40DD-AFC4-6F175D3DCCD1}">
+              <a14:hiddenFill xmlns:a14="http://schemas.microsoft.com/office/drawing/2010/main">
+                <a:solidFill>
+                  <a:srgbClr val="FFFFFF"/>
+                </a:solidFill>
+              </a14:hiddenFill>
+            </a:ext>
+          </a:extLst>
+        </p:spPr>
+      </p:pic>
+    </p:spTree>
+    <p:extLst>
+      <p:ext uri="{BB962C8B-B14F-4D97-AF65-F5344CB8AC3E}">
+        <p14:creationId xmlns:p14="http://schemas.microsoft.com/office/powerpoint/2010/main" val="1324539928"/>
+      </p:ext>
+    </p:extLst>
+  </p:cSld>
+  <p:clrMapOvr>
+    <a:masterClrMapping/>
+  </p:clrMapOvr>
+</p:sld>
+</file>
+
+<file path=ppt/slides/slide13.xml><?xml version="1.0" encoding="utf-8"?>
 <p:sld xmlns:a="http://schemas.openxmlformats.org/drawingml/2006/main" xmlns:r="http://schemas.openxmlformats.org/officeDocument/2006/relationships" xmlns:p="http://schemas.openxmlformats.org/presentationml/2006/main">
   <p:cSld>
     <p:spTree>
@@ -17775,6 +17889,13 @@
   <p:clrMapOvr>
     <a:masterClrMapping/>
   </p:clrMapOvr>
+  <p:timing>
+    <p:tnLst>
+      <p:par>
+        <p:cTn id="1" dur="indefinite" restart="never" nodeType="tmRoot"/>
+      </p:par>
+    </p:tnLst>
+  </p:timing>
 </p:sld>
 </file>
 
@@ -17795,41 +17916,12 @@
           <a:chExt cx="0" cy="0"/>
         </a:xfrm>
       </p:grpSpPr>
-      <p:pic>
-        <p:nvPicPr>
-          <p:cNvPr id="5" name="Grafik 4">
-            <a:extLst>
-              <a:ext uri="{FF2B5EF4-FFF2-40B4-BE49-F238E27FC236}">
-                <a16:creationId xmlns="" xmlns:a16="http://schemas.microsoft.com/office/drawing/2014/main" id="{47B33B7B-0956-4691-A384-E5954D8DBE96}"/>
-              </a:ext>
-            </a:extLst>
-          </p:cNvPr>
-          <p:cNvPicPr>
-            <a:picLocks noChangeAspect="1"/>
-          </p:cNvPicPr>
-          <p:nvPr/>
-        </p:nvPicPr>
-        <p:blipFill rotWithShape="1">
-          <a:blip r:embed="rId2"/>
-          <a:srcRect l="6828" t="30653" r="40496" b="59858"/>
-          <a:stretch/>
-        </p:blipFill>
-        <p:spPr>
-          <a:xfrm>
-            <a:off x="755576" y="2996952"/>
-            <a:ext cx="7776866" cy="432048"/>
-          </a:xfrm>
-          <a:prstGeom prst="rect">
-            <a:avLst/>
-          </a:prstGeom>
-        </p:spPr>
-      </p:pic>
       <p:sp>
         <p:nvSpPr>
           <p:cNvPr id="2" name="Titel 1">
             <a:extLst>
               <a:ext uri="{FF2B5EF4-FFF2-40B4-BE49-F238E27FC236}">
-                <a16:creationId xmlns="" xmlns:a16="http://schemas.microsoft.com/office/drawing/2014/main" id="{91AE9513-1234-4703-8392-93226C9A3675}"/>
+                <a16:creationId xmlns:a16="http://schemas.microsoft.com/office/drawing/2014/main" xmlns="" id="{91AE9513-1234-4703-8392-93226C9A3675}"/>
               </a:ext>
             </a:extLst>
           </p:cNvPr>
@@ -17846,9 +17938,10 @@
           <a:lstStyle/>
           <a:p>
             <a:r>
-              <a:rPr lang="de-AT" dirty="0"/>
-              <a:t>Deklaration und Zuweisung</a:t>
-            </a:r>
+              <a:rPr lang="de-AT" dirty="0" smtClean="0"/>
+              <a:t>Deklaration</a:t>
+            </a:r>
+            <a:endParaRPr lang="de-AT" dirty="0"/>
           </a:p>
         </p:txBody>
       </p:sp>
@@ -17857,7 +17950,7 @@
           <p:cNvPr id="3" name="Inhaltsplatzhalter 2">
             <a:extLst>
               <a:ext uri="{FF2B5EF4-FFF2-40B4-BE49-F238E27FC236}">
-                <a16:creationId xmlns="" xmlns:a16="http://schemas.microsoft.com/office/drawing/2014/main" id="{2011BA9D-4171-4462-9EA8-9AA2E9346ACA}"/>
+                <a16:creationId xmlns:a16="http://schemas.microsoft.com/office/drawing/2014/main" xmlns="" id="{2011BA9D-4171-4462-9EA8-9AA2E9346ACA}"/>
               </a:ext>
             </a:extLst>
           </p:cNvPr>
@@ -17870,7 +17963,7 @@
         </p:nvSpPr>
         <p:spPr>
           <a:xfrm>
-            <a:off x="457200" y="4077072"/>
+            <a:off x="323528" y="1124744"/>
             <a:ext cx="8229600" cy="2049091"/>
           </a:xfrm>
         </p:spPr>
@@ -17878,10 +17971,157 @@
           <a:bodyPr/>
           <a:lstStyle/>
           <a:p>
-            <a:r>
-              <a:rPr lang="de-AT" dirty="0"/>
-              <a:t>Man kann ab jetzt der Variablen auch andere Zeichenketten zuweisen:</a:t>
-            </a:r>
+            <a:pPr marL="0" indent="0">
+              <a:buNone/>
+            </a:pPr>
+            <a:r>
+              <a:rPr lang="de-AT" dirty="0" smtClean="0"/>
+              <a:t>Bevor eine Variable verwendet werden kann muss diese bekanntgegeben (=deklariert) werden.</a:t>
+            </a:r>
+          </a:p>
+          <a:p>
+            <a:endParaRPr lang="de-AT" dirty="0" smtClean="0">
+              <a:solidFill>
+                <a:srgbClr val="0000FF"/>
+              </a:solidFill>
+              <a:latin typeface="Courier New" panose="02070309020205020404" pitchFamily="49" charset="0"/>
+              <a:cs typeface="Courier New" panose="02070309020205020404" pitchFamily="49" charset="0"/>
+            </a:endParaRPr>
+          </a:p>
+          <a:p>
+            <a:endParaRPr lang="de-AT" dirty="0" smtClean="0">
+              <a:solidFill>
+                <a:srgbClr val="0000FF"/>
+              </a:solidFill>
+              <a:latin typeface="Courier New" panose="02070309020205020404" pitchFamily="49" charset="0"/>
+              <a:cs typeface="Courier New" panose="02070309020205020404" pitchFamily="49" charset="0"/>
+            </a:endParaRPr>
+          </a:p>
+          <a:p>
+            <a:endParaRPr lang="de-AT" dirty="0">
+              <a:solidFill>
+                <a:srgbClr val="0000FF"/>
+              </a:solidFill>
+              <a:latin typeface="Courier New" panose="02070309020205020404" pitchFamily="49" charset="0"/>
+              <a:cs typeface="Courier New" panose="02070309020205020404" pitchFamily="49" charset="0"/>
+            </a:endParaRPr>
+          </a:p>
+          <a:p>
+            <a:endParaRPr lang="de-AT" dirty="0" smtClean="0">
+              <a:solidFill>
+                <a:srgbClr val="0000FF"/>
+              </a:solidFill>
+              <a:latin typeface="Courier New" panose="02070309020205020404" pitchFamily="49" charset="0"/>
+              <a:cs typeface="Courier New" panose="02070309020205020404" pitchFamily="49" charset="0"/>
+            </a:endParaRPr>
+          </a:p>
+          <a:p>
+            <a:endParaRPr lang="de-AT" dirty="0" smtClean="0">
+              <a:solidFill>
+                <a:srgbClr val="0000FF"/>
+              </a:solidFill>
+              <a:latin typeface="Courier New" panose="02070309020205020404" pitchFamily="49" charset="0"/>
+              <a:cs typeface="Courier New" panose="02070309020205020404" pitchFamily="49" charset="0"/>
+            </a:endParaRPr>
+          </a:p>
+          <a:p>
+            <a:pPr marL="0" indent="0">
+              <a:buNone/>
+            </a:pPr>
+            <a:r>
+              <a:rPr lang="de-AT" dirty="0" err="1" smtClean="0">
+                <a:solidFill>
+                  <a:srgbClr val="0000FF"/>
+                </a:solidFill>
+                <a:latin typeface="Courier New" panose="02070309020205020404" pitchFamily="49" charset="0"/>
+                <a:cs typeface="Courier New" panose="02070309020205020404" pitchFamily="49" charset="0"/>
+              </a:rPr>
+              <a:t>string</a:t>
+            </a:r>
+            <a:r>
+              <a:rPr lang="de-AT" dirty="0" smtClean="0">
+                <a:solidFill>
+                  <a:srgbClr val="0000FF"/>
+                </a:solidFill>
+                <a:latin typeface="Courier New" panose="02070309020205020404" pitchFamily="49" charset="0"/>
+                <a:cs typeface="Courier New" panose="02070309020205020404" pitchFamily="49" charset="0"/>
+              </a:rPr>
+              <a:t> </a:t>
+            </a:r>
+            <a:r>
+              <a:rPr lang="de-AT" dirty="0" err="1">
+                <a:solidFill>
+                  <a:schemeClr val="tx1"/>
+                </a:solidFill>
+                <a:latin typeface="Courier New" panose="02070309020205020404" pitchFamily="49" charset="0"/>
+                <a:cs typeface="Courier New" panose="02070309020205020404" pitchFamily="49" charset="0"/>
+              </a:rPr>
+              <a:t>vorname</a:t>
+            </a:r>
+            <a:r>
+              <a:rPr lang="de-AT" dirty="0" smtClean="0">
+                <a:latin typeface="Courier New" panose="02070309020205020404" pitchFamily="49" charset="0"/>
+                <a:cs typeface="Courier New" panose="02070309020205020404" pitchFamily="49" charset="0"/>
+              </a:rPr>
+              <a:t>;		</a:t>
+            </a:r>
+            <a:r>
+              <a:rPr lang="de-AT" dirty="0">
+                <a:solidFill>
+                  <a:srgbClr val="0000FF"/>
+                </a:solidFill>
+                <a:latin typeface="Courier New" panose="02070309020205020404" pitchFamily="49" charset="0"/>
+                <a:cs typeface="Courier New" panose="02070309020205020404" pitchFamily="49" charset="0"/>
+              </a:rPr>
+              <a:t> </a:t>
+            </a:r>
+            <a:r>
+              <a:rPr lang="de-AT" dirty="0" err="1" smtClean="0">
+                <a:solidFill>
+                  <a:srgbClr val="0000FF"/>
+                </a:solidFill>
+                <a:latin typeface="Courier New" panose="02070309020205020404" pitchFamily="49" charset="0"/>
+                <a:cs typeface="Courier New" panose="02070309020205020404" pitchFamily="49" charset="0"/>
+              </a:rPr>
+              <a:t>int</a:t>
+            </a:r>
+            <a:r>
+              <a:rPr lang="de-AT" dirty="0" smtClean="0">
+                <a:solidFill>
+                  <a:srgbClr val="0000FF"/>
+                </a:solidFill>
+                <a:latin typeface="Courier New" panose="02070309020205020404" pitchFamily="49" charset="0"/>
+                <a:cs typeface="Courier New" panose="02070309020205020404" pitchFamily="49" charset="0"/>
+              </a:rPr>
+              <a:t> </a:t>
+            </a:r>
+            <a:r>
+              <a:rPr lang="de-AT" dirty="0" smtClean="0">
+                <a:solidFill>
+                  <a:schemeClr val="tx1"/>
+                </a:solidFill>
+                <a:latin typeface="Courier New" panose="02070309020205020404" pitchFamily="49" charset="0"/>
+                <a:cs typeface="Courier New" panose="02070309020205020404" pitchFamily="49" charset="0"/>
+              </a:rPr>
+              <a:t>tage</a:t>
+            </a:r>
+            <a:r>
+              <a:rPr lang="de-AT" dirty="0" smtClean="0">
+                <a:solidFill>
+                  <a:srgbClr val="0000FF"/>
+                </a:solidFill>
+                <a:latin typeface="Courier New" panose="02070309020205020404" pitchFamily="49" charset="0"/>
+                <a:cs typeface="Courier New" panose="02070309020205020404" pitchFamily="49" charset="0"/>
+              </a:rPr>
+              <a:t>;</a:t>
+            </a:r>
+            <a:endParaRPr lang="de-AT" dirty="0" smtClean="0">
+              <a:latin typeface="Courier New" panose="02070309020205020404" pitchFamily="49" charset="0"/>
+              <a:cs typeface="Courier New" panose="02070309020205020404" pitchFamily="49" charset="0"/>
+            </a:endParaRPr>
+          </a:p>
+          <a:p>
+            <a:endParaRPr lang="de-AT" dirty="0" smtClean="0"/>
           </a:p>
         </p:txBody>
       </p:sp>
@@ -17890,7 +18130,7 @@
           <p:cNvPr id="6" name="Sprechblase: oval 5">
             <a:extLst>
               <a:ext uri="{FF2B5EF4-FFF2-40B4-BE49-F238E27FC236}">
-                <a16:creationId xmlns="" xmlns:a16="http://schemas.microsoft.com/office/drawing/2014/main" id="{381D2117-5022-4813-A7BF-4AD136F123B9}"/>
+                <a16:creationId xmlns:a16="http://schemas.microsoft.com/office/drawing/2014/main" xmlns="" id="{381D2117-5022-4813-A7BF-4AD136F123B9}"/>
               </a:ext>
             </a:extLst>
           </p:cNvPr>
@@ -17899,8 +18139,8 @@
         </p:nvSpPr>
         <p:spPr>
           <a:xfrm>
-            <a:off x="107504" y="834887"/>
-            <a:ext cx="4248472" cy="1806081"/>
+            <a:off x="457200" y="2798936"/>
+            <a:ext cx="3816424" cy="1374230"/>
           </a:xfrm>
           <a:prstGeom prst="wedgeEllipseCallout">
             <a:avLst>
@@ -17931,19 +18171,20 @@
           <a:p>
             <a:pPr algn="ctr"/>
             <a:r>
+              <a:rPr lang="de-AT" dirty="0" smtClean="0"/>
+              <a:t>Die </a:t>
+            </a:r>
+            <a:r>
               <a:rPr lang="de-AT" dirty="0"/>
-              <a:t>Deklaration:</a:t>
-            </a:r>
-          </a:p>
-          <a:p>
-            <a:pPr algn="ctr"/>
-            <a:r>
-              <a:rPr lang="de-AT" dirty="0"/>
-              <a:t>Die Variable heißt „</a:t>
-            </a:r>
-            <a:r>
-              <a:rPr lang="de-AT" dirty="0" err="1"/>
-              <a:t>name</a:t>
+              <a:t>Variable heißt </a:t>
+            </a:r>
+            <a:r>
+              <a:rPr lang="de-AT" dirty="0" smtClean="0"/>
+              <a:t>„</a:t>
+            </a:r>
+            <a:r>
+              <a:rPr lang="de-AT" dirty="0" err="1" smtClean="0"/>
+              <a:t>vorname</a:t>
             </a:r>
             <a:r>
               <a:rPr lang="de-AT" dirty="0"/>
@@ -17966,10 +18207,10 @@
       </p:sp>
       <p:sp>
         <p:nvSpPr>
-          <p:cNvPr id="8" name="Rechteck: abgerundete Ecken 7">
+          <p:cNvPr id="10" name="Sprechblase: oval 5">
             <a:extLst>
               <a:ext uri="{FF2B5EF4-FFF2-40B4-BE49-F238E27FC236}">
-                <a16:creationId xmlns="" xmlns:a16="http://schemas.microsoft.com/office/drawing/2014/main" id="{41B512A9-2F47-4BE3-801B-74117AF904A6}"/>
+                <a16:creationId xmlns:a16="http://schemas.microsoft.com/office/drawing/2014/main" xmlns="" id="{381D2117-5022-4813-A7BF-4AD136F123B9}"/>
               </a:ext>
             </a:extLst>
           </p:cNvPr>
@@ -17978,117 +18219,13 @@
         </p:nvSpPr>
         <p:spPr>
           <a:xfrm>
-            <a:off x="755576" y="2972754"/>
-            <a:ext cx="2664294" cy="528253"/>
-          </a:xfrm>
-          <a:prstGeom prst="roundRect">
-            <a:avLst/>
-          </a:prstGeom>
-          <a:noFill/>
-          <a:ln>
-            <a:solidFill>
-              <a:srgbClr val="C00000"/>
-            </a:solidFill>
-          </a:ln>
-        </p:spPr>
-        <p:style>
-          <a:lnRef idx="2">
-            <a:schemeClr val="accent1">
-              <a:shade val="50000"/>
-            </a:schemeClr>
-          </a:lnRef>
-          <a:fillRef idx="1">
-            <a:schemeClr val="accent1"/>
-          </a:fillRef>
-          <a:effectRef idx="0">
-            <a:schemeClr val="accent1"/>
-          </a:effectRef>
-          <a:fontRef idx="minor">
-            <a:schemeClr val="lt1"/>
-          </a:fontRef>
-        </p:style>
-        <p:txBody>
-          <a:bodyPr rtlCol="0" anchor="ctr"/>
-          <a:lstStyle/>
-          <a:p>
-            <a:pPr algn="ctr"/>
-            <a:endParaRPr lang="de-AT"/>
-          </a:p>
-        </p:txBody>
-      </p:sp>
-      <p:sp>
-        <p:nvSpPr>
-          <p:cNvPr id="12" name="Rechteck: abgerundete Ecken 11">
-            <a:extLst>
-              <a:ext uri="{FF2B5EF4-FFF2-40B4-BE49-F238E27FC236}">
-                <a16:creationId xmlns="" xmlns:a16="http://schemas.microsoft.com/office/drawing/2014/main" id="{F78FEF22-9723-4B19-87DD-733E658C05A5}"/>
-              </a:ext>
-            </a:extLst>
-          </p:cNvPr>
-          <p:cNvSpPr/>
-          <p:nvPr/>
-        </p:nvSpPr>
-        <p:spPr>
-          <a:xfrm>
-            <a:off x="3563888" y="2972755"/>
-            <a:ext cx="4824536" cy="528253"/>
-          </a:xfrm>
-          <a:prstGeom prst="roundRect">
-            <a:avLst/>
-          </a:prstGeom>
-          <a:noFill/>
-          <a:ln>
-            <a:solidFill>
-              <a:srgbClr val="C00000"/>
-            </a:solidFill>
-          </a:ln>
-        </p:spPr>
-        <p:style>
-          <a:lnRef idx="2">
-            <a:schemeClr val="accent1">
-              <a:shade val="50000"/>
-            </a:schemeClr>
-          </a:lnRef>
-          <a:fillRef idx="1">
-            <a:schemeClr val="accent1"/>
-          </a:fillRef>
-          <a:effectRef idx="0">
-            <a:schemeClr val="accent1"/>
-          </a:effectRef>
-          <a:fontRef idx="minor">
-            <a:schemeClr val="lt1"/>
-          </a:fontRef>
-        </p:style>
-        <p:txBody>
-          <a:bodyPr rtlCol="0" anchor="ctr"/>
-          <a:lstStyle/>
-          <a:p>
-            <a:pPr algn="ctr"/>
-            <a:endParaRPr lang="de-AT"/>
-          </a:p>
-        </p:txBody>
-      </p:sp>
-      <p:sp>
-        <p:nvSpPr>
-          <p:cNvPr id="14" name="Sprechblase: oval 13">
-            <a:extLst>
-              <a:ext uri="{FF2B5EF4-FFF2-40B4-BE49-F238E27FC236}">
-                <a16:creationId xmlns="" xmlns:a16="http://schemas.microsoft.com/office/drawing/2014/main" id="{2DA2CD00-C227-416E-AD24-F1644C50718F}"/>
-              </a:ext>
-            </a:extLst>
-          </p:cNvPr>
-          <p:cNvSpPr/>
-          <p:nvPr/>
-        </p:nvSpPr>
-        <p:spPr>
-          <a:xfrm>
-            <a:off x="5076056" y="980728"/>
-            <a:ext cx="3456386" cy="1631032"/>
+            <a:off x="4709010" y="2811187"/>
+            <a:ext cx="3816424" cy="1374230"/>
           </a:xfrm>
           <a:prstGeom prst="wedgeEllipseCallout">
             <a:avLst>
-              <a:gd name="adj1" fmla="val -75001"/>
-              <a:gd name="adj2" fmla="val 70952"/>
+              <a:gd name="adj1" fmla="val 7008"/>
+              <a:gd name="adj2" fmla="val 66904"/>
             </a:avLst>
           </a:prstGeom>
         </p:spPr>
@@ -18114,42 +18251,37 @@
           <a:p>
             <a:pPr algn="ctr"/>
             <a:r>
+              <a:rPr lang="de-AT" dirty="0" smtClean="0"/>
+              <a:t>Die </a:t>
+            </a:r>
+            <a:r>
               <a:rPr lang="de-AT" dirty="0"/>
-              <a:t>Zuweisung: Die in der Konsole eingegebene Zeichenkette wird der Variablen zugewiesen</a:t>
-            </a:r>
+              <a:t>Variable heißt </a:t>
+            </a:r>
+            <a:r>
+              <a:rPr lang="de-AT" dirty="0" smtClean="0"/>
+              <a:t>„tage“ </a:t>
+            </a:r>
+            <a:r>
+              <a:rPr lang="de-AT" dirty="0"/>
+              <a:t>und ist vom Datentyp </a:t>
+            </a:r>
+            <a:r>
+              <a:rPr lang="de-AT" dirty="0" smtClean="0"/>
+              <a:t>„</a:t>
+            </a:r>
+            <a:r>
+              <a:rPr lang="de-AT" dirty="0" err="1" smtClean="0"/>
+              <a:t>int</a:t>
+            </a:r>
+            <a:r>
+              <a:rPr lang="de-AT" dirty="0" smtClean="0"/>
+              <a:t>“ (Ganzzahl)</a:t>
+            </a:r>
+            <a:endParaRPr lang="de-AT" dirty="0"/>
           </a:p>
         </p:txBody>
       </p:sp>
-      <p:pic>
-        <p:nvPicPr>
-          <p:cNvPr id="15" name="Grafik 14">
-            <a:extLst>
-              <a:ext uri="{FF2B5EF4-FFF2-40B4-BE49-F238E27FC236}">
-                <a16:creationId xmlns="" xmlns:a16="http://schemas.microsoft.com/office/drawing/2014/main" id="{0EA9A304-3051-415B-8085-802030218061}"/>
-              </a:ext>
-            </a:extLst>
-          </p:cNvPr>
-          <p:cNvPicPr>
-            <a:picLocks noChangeAspect="1"/>
-          </p:cNvPicPr>
-          <p:nvPr/>
-        </p:nvPicPr>
-        <p:blipFill>
-          <a:blip r:embed="rId3"/>
-          <a:stretch>
-            <a:fillRect/>
-          </a:stretch>
-        </p:blipFill>
-        <p:spPr>
-          <a:xfrm>
-            <a:off x="1631429" y="5229200"/>
-            <a:ext cx="5748883" cy="604182"/>
-          </a:xfrm>
-          <a:prstGeom prst="rect">
-            <a:avLst/>
-          </a:prstGeom>
-        </p:spPr>
-      </p:pic>
     </p:spTree>
     <p:extLst>
       <p:ext uri="{BB962C8B-B14F-4D97-AF65-F5344CB8AC3E}">
@@ -18160,6 +18292,13 @@
   <p:clrMapOvr>
     <a:masterClrMapping/>
   </p:clrMapOvr>
+  <p:timing>
+    <p:tnLst>
+      <p:par>
+        <p:cTn id="1" dur="indefinite" restart="never" nodeType="tmRoot"/>
+      </p:par>
+    </p:tnLst>
+  </p:timing>
 </p:sld>
 </file>
 
@@ -18185,7 +18324,7 @@
           <p:cNvPr id="2" name="Titel 1">
             <a:extLst>
               <a:ext uri="{FF2B5EF4-FFF2-40B4-BE49-F238E27FC236}">
-                <a16:creationId xmlns="" xmlns:a16="http://schemas.microsoft.com/office/drawing/2014/main" id="{18B5709C-786B-46D4-8AF1-62D2DAC23D12}"/>
+                <a16:creationId xmlns:a16="http://schemas.microsoft.com/office/drawing/2014/main" xmlns="" id="{91AE9513-1234-4703-8392-93226C9A3675}"/>
               </a:ext>
             </a:extLst>
           </p:cNvPr>
@@ -18202,810 +18341,337 @@
           <a:lstStyle/>
           <a:p>
             <a:r>
-              <a:rPr lang="de-AT" dirty="0"/>
-              <a:t>Beispiel: Eine Zeichenkette einlesen</a:t>
-            </a:r>
+              <a:rPr lang="de-AT" dirty="0" smtClean="0"/>
+              <a:t>Deklaration mit Initialisierung</a:t>
+            </a:r>
+            <a:endParaRPr lang="de-AT" dirty="0"/>
           </a:p>
         </p:txBody>
       </p:sp>
       <p:sp>
         <p:nvSpPr>
-          <p:cNvPr id="6" name="Pfeil: nach unten 5">
+          <p:cNvPr id="3" name="Inhaltsplatzhalter 2">
             <a:extLst>
               <a:ext uri="{FF2B5EF4-FFF2-40B4-BE49-F238E27FC236}">
-                <a16:creationId xmlns="" xmlns:a16="http://schemas.microsoft.com/office/drawing/2014/main" id="{938AEF34-9E37-4620-9D27-386ACF24A163}"/>
+                <a16:creationId xmlns:a16="http://schemas.microsoft.com/office/drawing/2014/main" xmlns="" id="{2011BA9D-4171-4462-9EA8-9AA2E9346ACA}"/>
               </a:ext>
             </a:extLst>
           </p:cNvPr>
-          <p:cNvSpPr/>
-          <p:nvPr/>
+          <p:cNvSpPr>
+            <a:spLocks noGrp="1"/>
+          </p:cNvSpPr>
+          <p:nvPr>
+            <p:ph idx="1"/>
+          </p:nvPr>
         </p:nvSpPr>
         <p:spPr>
           <a:xfrm>
-            <a:off x="3491880" y="3429000"/>
-            <a:ext cx="216024" cy="576064"/>
+            <a:off x="323528" y="1124744"/>
+            <a:ext cx="8229600" cy="2049091"/>
           </a:xfrm>
-          <a:prstGeom prst="downArrow">
-            <a:avLst/>
-          </a:prstGeom>
         </p:spPr>
-        <p:style>
-          <a:lnRef idx="2">
-            <a:schemeClr val="accent1">
-              <a:shade val="50000"/>
-            </a:schemeClr>
-          </a:lnRef>
-          <a:fillRef idx="1">
-            <a:schemeClr val="accent1"/>
-          </a:fillRef>
-          <a:effectRef idx="0">
-            <a:schemeClr val="accent1"/>
-          </a:effectRef>
-          <a:fontRef idx="minor">
-            <a:schemeClr val="lt1"/>
-          </a:fontRef>
-        </p:style>
         <p:txBody>
-          <a:bodyPr rtlCol="0" anchor="ctr"/>
+          <a:bodyPr/>
           <a:lstStyle/>
           <a:p>
-            <a:pPr algn="ctr"/>
-            <a:endParaRPr lang="de-AT"/>
-          </a:p>
-        </p:txBody>
-      </p:sp>
-      <p:pic>
-        <p:nvPicPr>
-          <p:cNvPr id="10" name="Grafik 9">
-            <a:extLst>
-              <a:ext uri="{FF2B5EF4-FFF2-40B4-BE49-F238E27FC236}">
-                <a16:creationId xmlns="" xmlns:a16="http://schemas.microsoft.com/office/drawing/2014/main" id="{BD2ECE35-85A6-44BC-9D52-0DDE7859D8B9}"/>
-              </a:ext>
-            </a:extLst>
-          </p:cNvPr>
-          <p:cNvPicPr>
-            <a:picLocks noChangeAspect="1"/>
-          </p:cNvPicPr>
-          <p:nvPr/>
-        </p:nvPicPr>
-        <p:blipFill>
-          <a:blip r:embed="rId2"/>
-          <a:stretch>
-            <a:fillRect/>
-          </a:stretch>
-        </p:blipFill>
-        <p:spPr>
-          <a:xfrm>
-            <a:off x="2079476" y="4293096"/>
-            <a:ext cx="4076700" cy="1162050"/>
-          </a:xfrm>
-          <a:prstGeom prst="rect">
-            <a:avLst/>
-          </a:prstGeom>
-        </p:spPr>
-      </p:pic>
-      <p:pic>
-        <p:nvPicPr>
-          <p:cNvPr id="11" name="Grafik 10">
-            <a:extLst>
-              <a:ext uri="{FF2B5EF4-FFF2-40B4-BE49-F238E27FC236}">
-                <a16:creationId xmlns="" xmlns:a16="http://schemas.microsoft.com/office/drawing/2014/main" id="{BF7A0922-B0AF-4396-9CE7-8B36F43383F9}"/>
-              </a:ext>
-            </a:extLst>
-          </p:cNvPr>
-          <p:cNvPicPr>
-            <a:picLocks noChangeAspect="1"/>
-          </p:cNvPicPr>
-          <p:nvPr/>
-        </p:nvPicPr>
-        <p:blipFill>
-          <a:blip r:embed="rId3"/>
-          <a:stretch>
-            <a:fillRect/>
-          </a:stretch>
-        </p:blipFill>
-        <p:spPr>
-          <a:xfrm>
-            <a:off x="683568" y="1003001"/>
-            <a:ext cx="7381875" cy="2276475"/>
-          </a:xfrm>
-          <a:prstGeom prst="rect">
-            <a:avLst/>
-          </a:prstGeom>
-        </p:spPr>
-      </p:pic>
-      <p:sp>
-        <p:nvSpPr>
-          <p:cNvPr id="7" name="Rechteck: abgerundete Ecken 6">
-            <a:extLst>
-              <a:ext uri="{FF2B5EF4-FFF2-40B4-BE49-F238E27FC236}">
-                <a16:creationId xmlns="" xmlns:a16="http://schemas.microsoft.com/office/drawing/2014/main" id="{ADE4EDDF-E84F-44C2-8B8A-414A39087522}"/>
-              </a:ext>
-            </a:extLst>
-          </p:cNvPr>
-          <p:cNvSpPr/>
-          <p:nvPr/>
-        </p:nvSpPr>
-        <p:spPr>
-          <a:xfrm>
-            <a:off x="1115616" y="1628800"/>
-            <a:ext cx="1440160" cy="360040"/>
-          </a:xfrm>
-          <a:prstGeom prst="roundRect">
-            <a:avLst/>
-          </a:prstGeom>
-          <a:noFill/>
-          <a:ln>
-            <a:solidFill>
-              <a:srgbClr val="C00000"/>
-            </a:solidFill>
-          </a:ln>
-        </p:spPr>
-        <p:style>
-          <a:lnRef idx="2">
-            <a:schemeClr val="accent1">
-              <a:shade val="50000"/>
-            </a:schemeClr>
-          </a:lnRef>
-          <a:fillRef idx="1">
-            <a:schemeClr val="accent1"/>
-          </a:fillRef>
-          <a:effectRef idx="0">
-            <a:schemeClr val="accent1"/>
-          </a:effectRef>
-          <a:fontRef idx="minor">
-            <a:schemeClr val="lt1"/>
-          </a:fontRef>
-        </p:style>
-        <p:txBody>
-          <a:bodyPr rtlCol="0" anchor="ctr"/>
-          <a:lstStyle/>
-          <a:p>
-            <a:pPr algn="ctr"/>
-            <a:endParaRPr lang="de-AT"/>
-          </a:p>
-        </p:txBody>
-      </p:sp>
-      <p:sp>
-        <p:nvSpPr>
-          <p:cNvPr id="9" name="Rechteck: abgerundete Ecken 8">
-            <a:extLst>
-              <a:ext uri="{FF2B5EF4-FFF2-40B4-BE49-F238E27FC236}">
-                <a16:creationId xmlns="" xmlns:a16="http://schemas.microsoft.com/office/drawing/2014/main" id="{21A3DDD4-0B6E-445E-97BD-8E1FD53FCA54}"/>
-              </a:ext>
-            </a:extLst>
-          </p:cNvPr>
-          <p:cNvSpPr/>
-          <p:nvPr/>
-        </p:nvSpPr>
-        <p:spPr>
-          <a:xfrm>
-            <a:off x="5724128" y="1862682"/>
-            <a:ext cx="576064" cy="270174"/>
-          </a:xfrm>
-          <a:prstGeom prst="roundRect">
-            <a:avLst/>
-          </a:prstGeom>
-          <a:noFill/>
-          <a:ln>
-            <a:solidFill>
-              <a:srgbClr val="C00000"/>
-            </a:solidFill>
-          </a:ln>
-        </p:spPr>
-        <p:style>
-          <a:lnRef idx="2">
-            <a:schemeClr val="accent1">
-              <a:shade val="50000"/>
-            </a:schemeClr>
-          </a:lnRef>
-          <a:fillRef idx="1">
-            <a:schemeClr val="accent1"/>
-          </a:fillRef>
-          <a:effectRef idx="0">
-            <a:schemeClr val="accent1"/>
-          </a:effectRef>
-          <a:fontRef idx="minor">
-            <a:schemeClr val="lt1"/>
-          </a:fontRef>
-        </p:style>
-        <p:txBody>
-          <a:bodyPr rtlCol="0" anchor="ctr"/>
-          <a:lstStyle/>
-          <a:p>
-            <a:pPr algn="ctr"/>
-            <a:endParaRPr lang="de-AT"/>
+            <a:pPr marL="0" indent="0">
+              <a:buNone/>
+            </a:pPr>
+            <a:r>
+              <a:rPr lang="de-AT" dirty="0" smtClean="0"/>
+              <a:t>Bei der Deklaration einer Variable kann auch gleichzeitig ein Wert festgelegt werden:</a:t>
+            </a:r>
+          </a:p>
+          <a:p>
+            <a:pPr marL="0" indent="0">
+              <a:buNone/>
+            </a:pPr>
+            <a:endParaRPr lang="de-AT" dirty="0" smtClean="0">
+              <a:solidFill>
+                <a:srgbClr val="0000FF"/>
+              </a:solidFill>
+              <a:latin typeface="Courier New" panose="02070309020205020404" pitchFamily="49" charset="0"/>
+              <a:cs typeface="Courier New" panose="02070309020205020404" pitchFamily="49" charset="0"/>
+            </a:endParaRPr>
+          </a:p>
+          <a:p>
+            <a:pPr marL="0" indent="0">
+              <a:buNone/>
+            </a:pPr>
+            <a:r>
+              <a:rPr lang="de-AT" dirty="0" err="1" smtClean="0">
+                <a:solidFill>
+                  <a:srgbClr val="0000FF"/>
+                </a:solidFill>
+                <a:latin typeface="Courier New" panose="02070309020205020404" pitchFamily="49" charset="0"/>
+                <a:cs typeface="Courier New" panose="02070309020205020404" pitchFamily="49" charset="0"/>
+              </a:rPr>
+              <a:t>string</a:t>
+            </a:r>
+            <a:r>
+              <a:rPr lang="de-AT" dirty="0" smtClean="0">
+                <a:solidFill>
+                  <a:srgbClr val="0000FF"/>
+                </a:solidFill>
+                <a:latin typeface="Courier New" panose="02070309020205020404" pitchFamily="49" charset="0"/>
+                <a:cs typeface="Courier New" panose="02070309020205020404" pitchFamily="49" charset="0"/>
+              </a:rPr>
+              <a:t> </a:t>
+            </a:r>
+            <a:r>
+              <a:rPr lang="de-AT" dirty="0" err="1" smtClean="0">
+                <a:solidFill>
+                  <a:schemeClr val="tx1"/>
+                </a:solidFill>
+                <a:latin typeface="Courier New" panose="02070309020205020404" pitchFamily="49" charset="0"/>
+                <a:cs typeface="Courier New" panose="02070309020205020404" pitchFamily="49" charset="0"/>
+              </a:rPr>
+              <a:t>nachname</a:t>
+            </a:r>
+            <a:r>
+              <a:rPr lang="de-AT" dirty="0" smtClean="0">
+                <a:solidFill>
+                  <a:schemeClr val="tx1"/>
+                </a:solidFill>
+                <a:latin typeface="Courier New" panose="02070309020205020404" pitchFamily="49" charset="0"/>
+                <a:cs typeface="Courier New" panose="02070309020205020404" pitchFamily="49" charset="0"/>
+              </a:rPr>
+              <a:t> = </a:t>
+            </a:r>
+            <a:r>
+              <a:rPr lang="de-AT" dirty="0">
+                <a:latin typeface="Courier New" panose="02070309020205020404" pitchFamily="49" charset="0"/>
+                <a:cs typeface="Courier New" panose="02070309020205020404" pitchFamily="49" charset="0"/>
+              </a:rPr>
+              <a:t>"</a:t>
+            </a:r>
+            <a:r>
+              <a:rPr lang="de-AT" dirty="0" smtClean="0">
+                <a:latin typeface="Courier New" panose="02070309020205020404" pitchFamily="49" charset="0"/>
+                <a:cs typeface="Courier New" panose="02070309020205020404" pitchFamily="49" charset="0"/>
+              </a:rPr>
+              <a:t>Mustermann"; </a:t>
+            </a:r>
+          </a:p>
+          <a:p>
+            <a:pPr marL="0" indent="0">
+              <a:buNone/>
+            </a:pPr>
+            <a:r>
+              <a:rPr lang="de-AT" dirty="0" err="1" smtClean="0">
+                <a:solidFill>
+                  <a:srgbClr val="0000FF"/>
+                </a:solidFill>
+                <a:latin typeface="Courier New" panose="02070309020205020404" pitchFamily="49" charset="0"/>
+                <a:cs typeface="Courier New" panose="02070309020205020404" pitchFamily="49" charset="0"/>
+              </a:rPr>
+              <a:t>string</a:t>
+            </a:r>
+            <a:r>
+              <a:rPr lang="de-AT" dirty="0" smtClean="0">
+                <a:solidFill>
+                  <a:srgbClr val="0000FF"/>
+                </a:solidFill>
+                <a:latin typeface="Courier New" panose="02070309020205020404" pitchFamily="49" charset="0"/>
+                <a:cs typeface="Courier New" panose="02070309020205020404" pitchFamily="49" charset="0"/>
+              </a:rPr>
+              <a:t> </a:t>
+            </a:r>
+            <a:r>
+              <a:rPr lang="de-AT" dirty="0" err="1" smtClean="0">
+                <a:solidFill>
+                  <a:schemeClr val="tx1"/>
+                </a:solidFill>
+                <a:latin typeface="Courier New" panose="02070309020205020404" pitchFamily="49" charset="0"/>
+                <a:cs typeface="Courier New" panose="02070309020205020404" pitchFamily="49" charset="0"/>
+              </a:rPr>
+              <a:t>wohnort</a:t>
+            </a:r>
+            <a:r>
+              <a:rPr lang="de-AT" dirty="0" smtClean="0">
+                <a:solidFill>
+                  <a:schemeClr val="tx1"/>
+                </a:solidFill>
+                <a:latin typeface="Courier New" panose="02070309020205020404" pitchFamily="49" charset="0"/>
+                <a:cs typeface="Courier New" panose="02070309020205020404" pitchFamily="49" charset="0"/>
+              </a:rPr>
+              <a:t> = </a:t>
+            </a:r>
+            <a:r>
+              <a:rPr lang="de-AT" dirty="0" err="1" smtClean="0">
+                <a:solidFill>
+                  <a:schemeClr val="tx1"/>
+                </a:solidFill>
+                <a:latin typeface="Courier New" panose="02070309020205020404" pitchFamily="49" charset="0"/>
+                <a:cs typeface="Courier New" panose="02070309020205020404" pitchFamily="49" charset="0"/>
+              </a:rPr>
+              <a:t>Console.ReadLine</a:t>
+            </a:r>
+            <a:r>
+              <a:rPr lang="de-AT" dirty="0" smtClean="0">
+                <a:solidFill>
+                  <a:schemeClr val="tx1"/>
+                </a:solidFill>
+                <a:latin typeface="Courier New" panose="02070309020205020404" pitchFamily="49" charset="0"/>
+                <a:cs typeface="Courier New" panose="02070309020205020404" pitchFamily="49" charset="0"/>
+              </a:rPr>
+              <a:t>()</a:t>
+            </a:r>
+            <a:r>
+              <a:rPr lang="de-AT" dirty="0" smtClean="0">
+                <a:latin typeface="Courier New" panose="02070309020205020404" pitchFamily="49" charset="0"/>
+                <a:cs typeface="Courier New" panose="02070309020205020404" pitchFamily="49" charset="0"/>
+              </a:rPr>
+              <a:t>; </a:t>
+            </a:r>
+            <a:endParaRPr lang="de-AT" dirty="0">
+              <a:latin typeface="Courier New" panose="02070309020205020404" pitchFamily="49" charset="0"/>
+              <a:cs typeface="Courier New" panose="02070309020205020404" pitchFamily="49" charset="0"/>
+            </a:endParaRPr>
+          </a:p>
+          <a:p>
+            <a:pPr marL="0" indent="0">
+              <a:buNone/>
+            </a:pPr>
+            <a:r>
+              <a:rPr lang="de-AT" dirty="0" err="1" smtClean="0">
+                <a:solidFill>
+                  <a:srgbClr val="0000FF"/>
+                </a:solidFill>
+                <a:latin typeface="Courier New" panose="02070309020205020404" pitchFamily="49" charset="0"/>
+                <a:cs typeface="Courier New" panose="02070309020205020404" pitchFamily="49" charset="0"/>
+              </a:rPr>
+              <a:t>int</a:t>
+            </a:r>
+            <a:r>
+              <a:rPr lang="de-AT" dirty="0" smtClean="0">
+                <a:solidFill>
+                  <a:srgbClr val="0000FF"/>
+                </a:solidFill>
+                <a:latin typeface="Courier New" panose="02070309020205020404" pitchFamily="49" charset="0"/>
+                <a:cs typeface="Courier New" panose="02070309020205020404" pitchFamily="49" charset="0"/>
+              </a:rPr>
+              <a:t> </a:t>
+            </a:r>
+            <a:r>
+              <a:rPr lang="de-AT" dirty="0" smtClean="0">
+                <a:solidFill>
+                  <a:schemeClr val="tx1"/>
+                </a:solidFill>
+                <a:latin typeface="Courier New" panose="02070309020205020404" pitchFamily="49" charset="0"/>
+                <a:cs typeface="Courier New" panose="02070309020205020404" pitchFamily="49" charset="0"/>
+              </a:rPr>
+              <a:t>tage = 9</a:t>
+            </a:r>
+            <a:r>
+              <a:rPr lang="de-AT" dirty="0" smtClean="0">
+                <a:solidFill>
+                  <a:srgbClr val="0000FF"/>
+                </a:solidFill>
+                <a:latin typeface="Courier New" panose="02070309020205020404" pitchFamily="49" charset="0"/>
+                <a:cs typeface="Courier New" panose="02070309020205020404" pitchFamily="49" charset="0"/>
+              </a:rPr>
+              <a:t>;</a:t>
+            </a:r>
+          </a:p>
+          <a:p>
+            <a:pPr marL="0" indent="0">
+              <a:buNone/>
+            </a:pPr>
+            <a:r>
+              <a:rPr lang="de-AT" dirty="0" err="1" smtClean="0">
+                <a:solidFill>
+                  <a:srgbClr val="0000FF"/>
+                </a:solidFill>
+                <a:latin typeface="Courier New" panose="02070309020205020404" pitchFamily="49" charset="0"/>
+                <a:cs typeface="Courier New" panose="02070309020205020404" pitchFamily="49" charset="0"/>
+              </a:rPr>
+              <a:t>int</a:t>
+            </a:r>
+            <a:r>
+              <a:rPr lang="de-AT" dirty="0" smtClean="0">
+                <a:solidFill>
+                  <a:srgbClr val="0000FF"/>
+                </a:solidFill>
+                <a:latin typeface="Courier New" panose="02070309020205020404" pitchFamily="49" charset="0"/>
+                <a:cs typeface="Courier New" panose="02070309020205020404" pitchFamily="49" charset="0"/>
+              </a:rPr>
+              <a:t> </a:t>
+            </a:r>
+            <a:r>
+              <a:rPr lang="de-AT" dirty="0" err="1" smtClean="0">
+                <a:solidFill>
+                  <a:schemeClr val="tx1"/>
+                </a:solidFill>
+                <a:latin typeface="Courier New" panose="02070309020205020404" pitchFamily="49" charset="0"/>
+                <a:cs typeface="Courier New" panose="02070309020205020404" pitchFamily="49" charset="0"/>
+              </a:rPr>
+              <a:t>minuten</a:t>
+            </a:r>
+            <a:r>
+              <a:rPr lang="de-AT" dirty="0" smtClean="0">
+                <a:solidFill>
+                  <a:schemeClr val="tx1"/>
+                </a:solidFill>
+                <a:latin typeface="Courier New" panose="02070309020205020404" pitchFamily="49" charset="0"/>
+                <a:cs typeface="Courier New" panose="02070309020205020404" pitchFamily="49" charset="0"/>
+              </a:rPr>
+              <a:t> </a:t>
+            </a:r>
+            <a:r>
+              <a:rPr lang="de-AT" dirty="0" smtClean="0">
+                <a:solidFill>
+                  <a:srgbClr val="0000FF"/>
+                </a:solidFill>
+                <a:latin typeface="Courier New" panose="02070309020205020404" pitchFamily="49" charset="0"/>
+                <a:cs typeface="Courier New" panose="02070309020205020404" pitchFamily="49" charset="0"/>
+              </a:rPr>
+              <a:t>= </a:t>
+            </a:r>
+            <a:r>
+              <a:rPr lang="de-AT" dirty="0" smtClean="0">
+                <a:solidFill>
+                  <a:schemeClr val="tx1"/>
+                </a:solidFill>
+                <a:latin typeface="Courier New" panose="02070309020205020404" pitchFamily="49" charset="0"/>
+                <a:cs typeface="Courier New" panose="02070309020205020404" pitchFamily="49" charset="0"/>
+              </a:rPr>
+              <a:t>24 * 60</a:t>
+            </a:r>
+            <a:r>
+              <a:rPr lang="de-AT" dirty="0" smtClean="0">
+                <a:solidFill>
+                  <a:srgbClr val="0000FF"/>
+                </a:solidFill>
+                <a:latin typeface="Courier New" panose="02070309020205020404" pitchFamily="49" charset="0"/>
+                <a:cs typeface="Courier New" panose="02070309020205020404" pitchFamily="49" charset="0"/>
+              </a:rPr>
+              <a:t>; </a:t>
+            </a:r>
+            <a:endParaRPr lang="de-AT" dirty="0" smtClean="0">
+              <a:latin typeface="Courier New" panose="02070309020205020404" pitchFamily="49" charset="0"/>
+              <a:cs typeface="Courier New" panose="02070309020205020404" pitchFamily="49" charset="0"/>
+            </a:endParaRPr>
+          </a:p>
+          <a:p>
+            <a:endParaRPr lang="de-AT" dirty="0" smtClean="0"/>
+          </a:p>
+          <a:p>
+            <a:pPr marL="0" indent="0">
+              <a:buNone/>
+            </a:pPr>
+            <a:r>
+              <a:rPr lang="de-DE" sz="1600" dirty="0"/>
+              <a:t>Alle Variablen müssen vor der Benutzung initialisiert werden (aber nicht zwangsläufig sofort bei der Deklaration</a:t>
+            </a:r>
+            <a:endParaRPr lang="de-AT" sz="1600" dirty="0" smtClean="0"/>
           </a:p>
         </p:txBody>
       </p:sp>
     </p:spTree>
     <p:extLst>
       <p:ext uri="{BB962C8B-B14F-4D97-AF65-F5344CB8AC3E}">
-        <p14:creationId xmlns:p14="http://schemas.microsoft.com/office/powerpoint/2010/main" val="845763494"/>
-      </p:ext>
-    </p:extLst>
-  </p:cSld>
-  <p:clrMapOvr>
-    <a:masterClrMapping/>
-  </p:clrMapOvr>
-</p:sld>
-</file>
-
-<file path=ppt/slides/slide5.xml><?xml version="1.0" encoding="utf-8"?>
-<p:sld xmlns:a="http://schemas.openxmlformats.org/drawingml/2006/main" xmlns:r="http://schemas.openxmlformats.org/officeDocument/2006/relationships" xmlns:p="http://schemas.openxmlformats.org/presentationml/2006/main">
-  <p:cSld>
-    <p:spTree>
-      <p:nvGrpSpPr>
-        <p:cNvPr id="1" name=""/>
-        <p:cNvGrpSpPr/>
-        <p:nvPr/>
-      </p:nvGrpSpPr>
-      <p:grpSpPr>
-        <a:xfrm>
-          <a:off x="0" y="0"/>
-          <a:ext cx="0" cy="0"/>
-          <a:chOff x="0" y="0"/>
-          <a:chExt cx="0" cy="0"/>
-        </a:xfrm>
-      </p:grpSpPr>
-      <p:sp>
-        <p:nvSpPr>
-          <p:cNvPr id="14339" name="Foliennummernplatzhalter 4"/>
-          <p:cNvSpPr>
-            <a:spLocks noGrp="1"/>
-          </p:cNvSpPr>
-          <p:nvPr>
-            <p:ph type="sldNum" sz="quarter" idx="4294967295"/>
-          </p:nvPr>
-        </p:nvSpPr>
-        <p:spPr>
-          <a:xfrm>
-            <a:off x="6773863" y="6380163"/>
-            <a:ext cx="2195512" cy="341312"/>
-          </a:xfrm>
-          <a:prstGeom prst="rect">
-            <a:avLst/>
-          </a:prstGeom>
-          <a:noFill/>
-          <a:ln/>
-          <a:extLst>
-            <a:ext uri="{909E8E84-426E-40DD-AFC4-6F175D3DCCD1}">
-              <a14:hiddenFill xmlns:a14="http://schemas.microsoft.com/office/drawing/2010/main">
-                <a:solidFill>
-                  <a:srgbClr val="FFFFFF"/>
-                </a:solidFill>
-              </a14:hiddenFill>
-            </a:ext>
-            <a:ext uri="{91240B29-F687-4F45-9708-019B960494DF}">
-              <a14:hiddenLine xmlns:a14="http://schemas.microsoft.com/office/drawing/2010/main" w="9525">
-                <a:solidFill>
-                  <a:srgbClr val="000000"/>
-                </a:solidFill>
-                <a:miter lim="800000"/>
-                <a:headEnd/>
-                <a:tailEnd/>
-              </a14:hiddenLine>
-            </a:ext>
-          </a:extLst>
-        </p:spPr>
-        <p:txBody>
-          <a:bodyPr/>
-          <a:lstStyle>
-            <a:lvl1pPr>
-              <a:spcBef>
-                <a:spcPct val="20000"/>
-              </a:spcBef>
-              <a:buFont typeface="Wingdings" panose="05000000000000000000" pitchFamily="2" charset="2"/>
-              <a:buChar char="Ø"/>
-              <a:defRPr sz="3200">
-                <a:solidFill>
-                  <a:srgbClr val="000080"/>
-                </a:solidFill>
-                <a:latin typeface="Times New Roman" panose="02020603050405020304" pitchFamily="18" charset="0"/>
-              </a:defRPr>
-            </a:lvl1pPr>
-            <a:lvl2pPr marL="742950" indent="-285750">
-              <a:spcBef>
-                <a:spcPct val="20000"/>
-              </a:spcBef>
-              <a:buChar char="•"/>
-              <a:defRPr sz="2800">
-                <a:solidFill>
-                  <a:srgbClr val="000080"/>
-                </a:solidFill>
-                <a:latin typeface="Times New Roman" panose="02020603050405020304" pitchFamily="18" charset="0"/>
-              </a:defRPr>
-            </a:lvl2pPr>
-            <a:lvl3pPr marL="1143000" indent="-228600">
-              <a:spcBef>
-                <a:spcPct val="20000"/>
-              </a:spcBef>
-              <a:buFont typeface="Wingdings" panose="05000000000000000000" pitchFamily="2" charset="2"/>
-              <a:buChar char="§"/>
-              <a:defRPr sz="2400">
-                <a:solidFill>
-                  <a:srgbClr val="000080"/>
-                </a:solidFill>
-                <a:latin typeface="Times New Roman" panose="02020603050405020304" pitchFamily="18" charset="0"/>
-              </a:defRPr>
-            </a:lvl3pPr>
-            <a:lvl4pPr marL="1600200" indent="-228600">
-              <a:spcBef>
-                <a:spcPct val="20000"/>
-              </a:spcBef>
-              <a:buChar char="–"/>
-              <a:defRPr sz="2000">
-                <a:solidFill>
-                  <a:srgbClr val="000080"/>
-                </a:solidFill>
-                <a:latin typeface="Times New Roman" panose="02020603050405020304" pitchFamily="18" charset="0"/>
-              </a:defRPr>
-            </a:lvl4pPr>
-            <a:lvl5pPr marL="2057400" indent="-228600">
-              <a:spcBef>
-                <a:spcPct val="20000"/>
-              </a:spcBef>
-              <a:buChar char="»"/>
-              <a:defRPr sz="2000">
-                <a:solidFill>
-                  <a:srgbClr val="000080"/>
-                </a:solidFill>
-                <a:latin typeface="Times New Roman" panose="02020603050405020304" pitchFamily="18" charset="0"/>
-              </a:defRPr>
-            </a:lvl5pPr>
-            <a:lvl6pPr marL="2514600" indent="-228600" eaLnBrk="0" fontAlgn="base" hangingPunct="0">
-              <a:spcBef>
-                <a:spcPct val="20000"/>
-              </a:spcBef>
-              <a:spcAft>
-                <a:spcPct val="0"/>
-              </a:spcAft>
-              <a:buChar char="»"/>
-              <a:defRPr sz="2000">
-                <a:solidFill>
-                  <a:srgbClr val="000080"/>
-                </a:solidFill>
-                <a:latin typeface="Times New Roman" panose="02020603050405020304" pitchFamily="18" charset="0"/>
-              </a:defRPr>
-            </a:lvl6pPr>
-            <a:lvl7pPr marL="2971800" indent="-228600" eaLnBrk="0" fontAlgn="base" hangingPunct="0">
-              <a:spcBef>
-                <a:spcPct val="20000"/>
-              </a:spcBef>
-              <a:spcAft>
-                <a:spcPct val="0"/>
-              </a:spcAft>
-              <a:buChar char="»"/>
-              <a:defRPr sz="2000">
-                <a:solidFill>
-                  <a:srgbClr val="000080"/>
-                </a:solidFill>
-                <a:latin typeface="Times New Roman" panose="02020603050405020304" pitchFamily="18" charset="0"/>
-              </a:defRPr>
-            </a:lvl7pPr>
-            <a:lvl8pPr marL="3429000" indent="-228600" eaLnBrk="0" fontAlgn="base" hangingPunct="0">
-              <a:spcBef>
-                <a:spcPct val="20000"/>
-              </a:spcBef>
-              <a:spcAft>
-                <a:spcPct val="0"/>
-              </a:spcAft>
-              <a:buChar char="»"/>
-              <a:defRPr sz="2000">
-                <a:solidFill>
-                  <a:srgbClr val="000080"/>
-                </a:solidFill>
-                <a:latin typeface="Times New Roman" panose="02020603050405020304" pitchFamily="18" charset="0"/>
-              </a:defRPr>
-            </a:lvl8pPr>
-            <a:lvl9pPr marL="3886200" indent="-228600" eaLnBrk="0" fontAlgn="base" hangingPunct="0">
-              <a:spcBef>
-                <a:spcPct val="20000"/>
-              </a:spcBef>
-              <a:spcAft>
-                <a:spcPct val="0"/>
-              </a:spcAft>
-              <a:buChar char="»"/>
-              <a:defRPr sz="2000">
-                <a:solidFill>
-                  <a:srgbClr val="000080"/>
-                </a:solidFill>
-                <a:latin typeface="Times New Roman" panose="02020603050405020304" pitchFamily="18" charset="0"/>
-              </a:defRPr>
-            </a:lvl9pPr>
-          </a:lstStyle>
-          <a:p>
-            <a:pPr>
-              <a:spcBef>
-                <a:spcPct val="0"/>
-              </a:spcBef>
-              <a:buFontTx/>
-              <a:buNone/>
-            </a:pPr>
-            <a:fld id="{6623F941-FAC9-418E-8F3D-B355B613E7BE}" type="slidenum">
-              <a:rPr lang="de-DE" altLang="de-DE" sz="1400" smtClean="0">
-                <a:solidFill>
-                  <a:schemeClr val="bg1"/>
-                </a:solidFill>
-              </a:rPr>
-              <a:pPr>
-                <a:spcBef>
-                  <a:spcPct val="0"/>
-                </a:spcBef>
-                <a:buFontTx/>
-                <a:buNone/>
-              </a:pPr>
-              <a:t>5</a:t>
-            </a:fld>
-            <a:endParaRPr lang="de-DE" altLang="de-DE" sz="1400">
-              <a:solidFill>
-                <a:schemeClr val="bg1"/>
-              </a:solidFill>
-            </a:endParaRPr>
-          </a:p>
-        </p:txBody>
-      </p:sp>
-      <p:sp>
-        <p:nvSpPr>
-          <p:cNvPr id="14340" name="Rectangle 2"/>
-          <p:cNvSpPr>
-            <a:spLocks noGrp="1" noChangeArrowheads="1"/>
-          </p:cNvSpPr>
-          <p:nvPr>
-            <p:ph type="title"/>
-          </p:nvPr>
-        </p:nvSpPr>
-        <p:spPr/>
-        <p:txBody>
-          <a:bodyPr/>
-          <a:lstStyle/>
-          <a:p>
-            <a:pPr eaLnBrk="1" hangingPunct="1"/>
-            <a:r>
-              <a:rPr lang="de-DE" altLang="de-DE" dirty="0"/>
-              <a:t>Variablen: Name, Datentyp, Daten</a:t>
-            </a:r>
-          </a:p>
-        </p:txBody>
-      </p:sp>
-      <p:sp>
-        <p:nvSpPr>
-          <p:cNvPr id="14341" name="Rectangle 3"/>
-          <p:cNvSpPr>
-            <a:spLocks noGrp="1" noChangeArrowheads="1"/>
-          </p:cNvSpPr>
-          <p:nvPr>
-            <p:ph type="body" idx="1"/>
-          </p:nvPr>
-        </p:nvSpPr>
-        <p:spPr>
-          <a:xfrm>
-            <a:off x="236538" y="1268413"/>
-            <a:ext cx="8583612" cy="4835525"/>
-          </a:xfrm>
-        </p:spPr>
-        <p:txBody>
-          <a:bodyPr/>
-          <a:lstStyle/>
-          <a:p>
-            <a:pPr eaLnBrk="1" hangingPunct="1">
-              <a:lnSpc>
-                <a:spcPct val="80000"/>
-              </a:lnSpc>
-            </a:pPr>
-            <a:r>
-              <a:rPr lang="de-DE" altLang="de-DE" sz="2000" dirty="0"/>
-              <a:t>Variablen sind </a:t>
-            </a:r>
-            <a:r>
-              <a:rPr lang="de-DE" altLang="de-DE" sz="2000" b="1" dirty="0"/>
-              <a:t>benannte Platzhalter </a:t>
-            </a:r>
-            <a:r>
-              <a:rPr lang="de-DE" altLang="de-DE" sz="2000" dirty="0"/>
-              <a:t>bestimmter Größe für Bereiche im Arbeitsspeicher, in denen Daten gespeichert sind:</a:t>
-            </a:r>
-            <a:br>
-              <a:rPr lang="de-DE" altLang="de-DE" sz="2000" dirty="0"/>
-            </a:br>
-            <a:endParaRPr lang="de-DE" altLang="de-DE" sz="2000" dirty="0"/>
-          </a:p>
-          <a:p>
-            <a:pPr lvl="1" eaLnBrk="1" hangingPunct="1">
-              <a:lnSpc>
-                <a:spcPct val="80000"/>
-              </a:lnSpc>
-            </a:pPr>
-            <a:r>
-              <a:rPr lang="de-DE" altLang="de-DE" sz="1800" dirty="0"/>
-              <a:t>Welchen </a:t>
-            </a:r>
-            <a:r>
-              <a:rPr lang="de-DE" altLang="de-DE" sz="1800" b="1" dirty="0"/>
-              <a:t>Namen</a:t>
-            </a:r>
-            <a:r>
-              <a:rPr lang="de-DE" altLang="de-DE" sz="1800" dirty="0"/>
-              <a:t> hat die Variable? (</a:t>
-            </a:r>
-            <a:r>
-              <a:rPr lang="de-DE" altLang="de-DE" sz="1800" b="1" dirty="0"/>
-              <a:t>Deklaration</a:t>
-            </a:r>
-            <a:r>
-              <a:rPr lang="de-DE" altLang="de-DE" sz="1800" dirty="0"/>
-              <a:t> </a:t>
-            </a:r>
-            <a:r>
-              <a:rPr lang="de-DE" altLang="de-DE" sz="1800" dirty="0">
-                <a:sym typeface="Wingdings" panose="05000000000000000000" pitchFamily="2" charset="2"/>
-              </a:rPr>
-              <a:t> </a:t>
-            </a:r>
-            <a:r>
-              <a:rPr lang="de-DE" altLang="de-DE" sz="1800" dirty="0"/>
-              <a:t>Bezeichner)</a:t>
-            </a:r>
-          </a:p>
-          <a:p>
-            <a:pPr lvl="1" eaLnBrk="1" hangingPunct="1">
-              <a:lnSpc>
-                <a:spcPct val="80000"/>
-              </a:lnSpc>
-            </a:pPr>
-            <a:r>
-              <a:rPr lang="de-DE" altLang="de-DE" sz="1800" dirty="0"/>
-              <a:t>Welchen </a:t>
-            </a:r>
-            <a:r>
-              <a:rPr lang="de-DE" altLang="de-DE" sz="1800" b="1" dirty="0"/>
-              <a:t>Datentyp</a:t>
-            </a:r>
-            <a:r>
-              <a:rPr lang="de-DE" altLang="de-DE" sz="1800" dirty="0"/>
-              <a:t> hat die Variable? (</a:t>
-            </a:r>
-            <a:r>
-              <a:rPr lang="de-DE" altLang="de-DE" sz="1800" b="1" dirty="0"/>
-              <a:t>Definition</a:t>
-            </a:r>
-            <a:r>
-              <a:rPr lang="de-DE" altLang="de-DE" sz="1800" dirty="0"/>
-              <a:t> </a:t>
-            </a:r>
-            <a:r>
-              <a:rPr lang="de-DE" altLang="de-DE" sz="1800" dirty="0">
-                <a:sym typeface="Wingdings" panose="05000000000000000000" pitchFamily="2" charset="2"/>
-              </a:rPr>
-              <a:t></a:t>
-            </a:r>
-            <a:r>
-              <a:rPr lang="de-DE" altLang="de-DE" sz="1800" dirty="0"/>
-              <a:t> Größe im Speicher)</a:t>
-            </a:r>
-          </a:p>
-          <a:p>
-            <a:pPr lvl="1" eaLnBrk="1" hangingPunct="1">
-              <a:lnSpc>
-                <a:spcPct val="80000"/>
-              </a:lnSpc>
-            </a:pPr>
-            <a:r>
-              <a:rPr lang="de-DE" altLang="de-DE" sz="1800" dirty="0"/>
-              <a:t>Welche </a:t>
-            </a:r>
-            <a:r>
-              <a:rPr lang="de-DE" altLang="de-DE" sz="1800" b="1" dirty="0"/>
-              <a:t>Daten</a:t>
-            </a:r>
-            <a:r>
-              <a:rPr lang="de-DE" altLang="de-DE" sz="1800" dirty="0"/>
-              <a:t> werden gespeichert? (</a:t>
-            </a:r>
-            <a:r>
-              <a:rPr lang="de-DE" altLang="de-DE" sz="1800" b="1" dirty="0"/>
-              <a:t>Initialisierung</a:t>
-            </a:r>
-            <a:r>
-              <a:rPr lang="de-DE" altLang="de-DE" sz="1800" dirty="0"/>
-              <a:t> </a:t>
-            </a:r>
-            <a:r>
-              <a:rPr lang="de-DE" altLang="de-DE" sz="1800" dirty="0">
-                <a:sym typeface="Wingdings" panose="05000000000000000000" pitchFamily="2" charset="2"/>
-              </a:rPr>
-              <a:t> </a:t>
-            </a:r>
-            <a:r>
-              <a:rPr lang="de-DE" altLang="de-DE" sz="1800" dirty="0"/>
-              <a:t>Wertzuweisung)</a:t>
-            </a:r>
-          </a:p>
-          <a:p>
-            <a:pPr lvl="1" eaLnBrk="1" hangingPunct="1">
-              <a:lnSpc>
-                <a:spcPct val="80000"/>
-              </a:lnSpc>
-            </a:pPr>
-            <a:endParaRPr lang="de-DE" altLang="de-DE" sz="1800" dirty="0"/>
-          </a:p>
-          <a:p>
-            <a:pPr eaLnBrk="1" hangingPunct="1">
-              <a:lnSpc>
-                <a:spcPct val="80000"/>
-              </a:lnSpc>
-            </a:pPr>
-            <a:r>
-              <a:rPr lang="de-DE" altLang="de-DE" sz="2000" dirty="0"/>
-              <a:t>Deklaration und Definition:</a:t>
-            </a:r>
-          </a:p>
-          <a:p>
-            <a:pPr lvl="1" eaLnBrk="1" hangingPunct="1">
-              <a:lnSpc>
-                <a:spcPct val="80000"/>
-              </a:lnSpc>
-            </a:pPr>
-            <a:r>
-              <a:rPr lang="de-DE" altLang="de-DE" sz="1800" dirty="0"/>
-              <a:t>Typ Bezeichner; 		z.B. </a:t>
-            </a:r>
-            <a:r>
-              <a:rPr lang="de-DE" altLang="de-DE" sz="1800" dirty="0" err="1">
-                <a:latin typeface="Courier New" panose="02070309020205020404" pitchFamily="49" charset="0"/>
-                <a:cs typeface="Courier New" panose="02070309020205020404" pitchFamily="49" charset="0"/>
-              </a:rPr>
-              <a:t>int</a:t>
-            </a:r>
-            <a:r>
-              <a:rPr lang="de-DE" altLang="de-DE" sz="1800" dirty="0">
-                <a:latin typeface="Courier New" panose="02070309020205020404" pitchFamily="49" charset="0"/>
-                <a:cs typeface="Courier New" panose="02070309020205020404" pitchFamily="49" charset="0"/>
-              </a:rPr>
-              <a:t> </a:t>
-            </a:r>
-            <a:r>
-              <a:rPr lang="de-DE" altLang="de-DE" sz="1800" dirty="0" err="1">
-                <a:latin typeface="Courier New" panose="02070309020205020404" pitchFamily="49" charset="0"/>
-                <a:cs typeface="Courier New" panose="02070309020205020404" pitchFamily="49" charset="0"/>
-              </a:rPr>
-              <a:t>counter</a:t>
-            </a:r>
-            <a:r>
-              <a:rPr lang="de-DE" altLang="de-DE" sz="1800" dirty="0">
-                <a:latin typeface="Courier New" panose="02070309020205020404" pitchFamily="49" charset="0"/>
-                <a:cs typeface="Courier New" panose="02070309020205020404" pitchFamily="49" charset="0"/>
-              </a:rPr>
-              <a:t>;</a:t>
-            </a:r>
-          </a:p>
-          <a:p>
-            <a:pPr eaLnBrk="1" hangingPunct="1">
-              <a:lnSpc>
-                <a:spcPct val="80000"/>
-              </a:lnSpc>
-            </a:pPr>
-            <a:r>
-              <a:rPr lang="de-DE" altLang="de-DE" sz="2000" dirty="0"/>
-              <a:t>Initialisierung / Zuweisung:</a:t>
-            </a:r>
-          </a:p>
-          <a:p>
-            <a:pPr lvl="1" eaLnBrk="1" hangingPunct="1">
-              <a:lnSpc>
-                <a:spcPct val="80000"/>
-              </a:lnSpc>
-            </a:pPr>
-            <a:r>
-              <a:rPr lang="de-DE" altLang="de-DE" sz="1800" dirty="0"/>
-              <a:t>Bezeichner = Wert; 	z.B. </a:t>
-            </a:r>
-            <a:r>
-              <a:rPr lang="de-DE" altLang="de-DE" sz="1800" dirty="0" err="1">
-                <a:latin typeface="Courier New" panose="02070309020205020404" pitchFamily="49" charset="0"/>
-                <a:cs typeface="Courier New" panose="02070309020205020404" pitchFamily="49" charset="0"/>
-              </a:rPr>
-              <a:t>counter</a:t>
-            </a:r>
-            <a:r>
-              <a:rPr lang="de-DE" altLang="de-DE" sz="1800" dirty="0">
-                <a:latin typeface="Courier New" panose="02070309020205020404" pitchFamily="49" charset="0"/>
-                <a:cs typeface="Courier New" panose="02070309020205020404" pitchFamily="49" charset="0"/>
-              </a:rPr>
-              <a:t> = 4;</a:t>
-            </a:r>
-          </a:p>
-          <a:p>
-            <a:pPr eaLnBrk="1" hangingPunct="1">
-              <a:lnSpc>
-                <a:spcPct val="80000"/>
-              </a:lnSpc>
-            </a:pPr>
-            <a:r>
-              <a:rPr lang="de-DE" altLang="de-DE" sz="2000" dirty="0"/>
-              <a:t>Zusammenfallen von Deklaration und Initialisierung:</a:t>
-            </a:r>
-          </a:p>
-          <a:p>
-            <a:pPr lvl="1" eaLnBrk="1" hangingPunct="1">
-              <a:lnSpc>
-                <a:spcPct val="80000"/>
-              </a:lnSpc>
-            </a:pPr>
-            <a:r>
-              <a:rPr lang="de-DE" altLang="de-DE" sz="1800" dirty="0"/>
-              <a:t>Typ Bezeichner = Wert; 	z.B. </a:t>
-            </a:r>
-            <a:r>
-              <a:rPr lang="de-DE" altLang="de-DE" sz="1800" dirty="0" err="1">
-                <a:latin typeface="Courier New" panose="02070309020205020404" pitchFamily="49" charset="0"/>
-                <a:cs typeface="Courier New" panose="02070309020205020404" pitchFamily="49" charset="0"/>
-              </a:rPr>
-              <a:t>int</a:t>
-            </a:r>
-            <a:r>
-              <a:rPr lang="de-DE" altLang="de-DE" sz="1800" dirty="0">
-                <a:latin typeface="Courier New" panose="02070309020205020404" pitchFamily="49" charset="0"/>
-                <a:cs typeface="Courier New" panose="02070309020205020404" pitchFamily="49" charset="0"/>
-              </a:rPr>
-              <a:t> </a:t>
-            </a:r>
-            <a:r>
-              <a:rPr lang="de-DE" altLang="de-DE" sz="1800" dirty="0" err="1">
-                <a:latin typeface="Courier New" panose="02070309020205020404" pitchFamily="49" charset="0"/>
-                <a:cs typeface="Courier New" panose="02070309020205020404" pitchFamily="49" charset="0"/>
-              </a:rPr>
-              <a:t>counter</a:t>
-            </a:r>
-            <a:r>
-              <a:rPr lang="de-DE" altLang="de-DE" sz="1800" dirty="0">
-                <a:latin typeface="Courier New" panose="02070309020205020404" pitchFamily="49" charset="0"/>
-                <a:cs typeface="Courier New" panose="02070309020205020404" pitchFamily="49" charset="0"/>
-              </a:rPr>
-              <a:t> = 4;</a:t>
-            </a:r>
-          </a:p>
-          <a:p>
-            <a:pPr lvl="1" eaLnBrk="1" hangingPunct="1">
-              <a:lnSpc>
-                <a:spcPct val="80000"/>
-              </a:lnSpc>
-            </a:pPr>
-            <a:endParaRPr lang="de-DE" altLang="de-DE" sz="1800" dirty="0"/>
-          </a:p>
-          <a:p>
-            <a:pPr eaLnBrk="1" hangingPunct="1">
-              <a:lnSpc>
-                <a:spcPct val="80000"/>
-              </a:lnSpc>
-            </a:pPr>
-            <a:r>
-              <a:rPr lang="de-DE" altLang="de-DE" sz="2000" dirty="0"/>
-              <a:t>Alle </a:t>
-            </a:r>
-            <a:r>
-              <a:rPr lang="de-DE" altLang="de-DE" sz="1800" dirty="0"/>
-              <a:t>Variablen</a:t>
-            </a:r>
-            <a:r>
-              <a:rPr lang="de-DE" altLang="de-DE" sz="2000" dirty="0"/>
-              <a:t> müssen vor der Benutzung initialisiert werden (aber nicht zwangsläufig sofort bei der Deklaration)</a:t>
-            </a:r>
-          </a:p>
-          <a:p>
-            <a:pPr eaLnBrk="1" hangingPunct="1">
-              <a:lnSpc>
-                <a:spcPct val="80000"/>
-              </a:lnSpc>
-            </a:pPr>
-            <a:endParaRPr lang="de-DE" altLang="de-DE" sz="2000" dirty="0"/>
-          </a:p>
-        </p:txBody>
-      </p:sp>
-    </p:spTree>
-    <p:extLst>
-      <p:ext uri="{BB962C8B-B14F-4D97-AF65-F5344CB8AC3E}">
-        <p14:creationId xmlns:p14="http://schemas.microsoft.com/office/powerpoint/2010/main" val="2557494301"/>
+        <p14:creationId xmlns:p14="http://schemas.microsoft.com/office/powerpoint/2010/main" val="557777689"/>
       </p:ext>
     </p:extLst>
   </p:cSld>
@@ -19015,3313 +18681,14 @@
   <p:timing>
     <p:tnLst>
       <p:par>
-        <p:cTn id="1" dur="indefinite" restart="never" nodeType="tmRoot">
-          <p:childTnLst>
-            <p:seq concurrent="1" nextAc="seek">
-              <p:cTn id="2" dur="indefinite" nodeType="mainSeq">
-                <p:childTnLst>
-                  <p:par>
-                    <p:cTn id="3" fill="hold">
-                      <p:stCondLst>
-                        <p:cond delay="indefinite"/>
-                      </p:stCondLst>
-                      <p:childTnLst>
-                        <p:par>
-                          <p:cTn id="4" fill="hold">
-                            <p:stCondLst>
-                              <p:cond delay="0"/>
-                            </p:stCondLst>
-                            <p:childTnLst>
-                              <p:par>
-                                <p:cTn id="5" presetID="1" presetClass="entr" presetSubtype="0" fill="hold" nodeType="clickEffect">
-                                  <p:stCondLst>
-                                    <p:cond delay="0"/>
-                                  </p:stCondLst>
-                                  <p:childTnLst>
-                                    <p:set>
-                                      <p:cBhvr>
-                                        <p:cTn id="6" dur="1" fill="hold">
-                                          <p:stCondLst>
-                                            <p:cond delay="0"/>
-                                          </p:stCondLst>
-                                        </p:cTn>
-                                        <p:tgtEl>
-                                          <p:spTgt spid="14341">
-                                            <p:txEl>
-                                              <p:pRg st="0" end="0"/>
-                                            </p:txEl>
-                                          </p:spTgt>
-                                        </p:tgtEl>
-                                        <p:attrNameLst>
-                                          <p:attrName>style.visibility</p:attrName>
-                                        </p:attrNameLst>
-                                      </p:cBhvr>
-                                      <p:to>
-                                        <p:strVal val="visible"/>
-                                      </p:to>
-                                    </p:set>
-                                  </p:childTnLst>
-                                </p:cTn>
-                              </p:par>
-                            </p:childTnLst>
-                          </p:cTn>
-                        </p:par>
-                      </p:childTnLst>
-                    </p:cTn>
-                  </p:par>
-                  <p:par>
-                    <p:cTn id="7" fill="hold">
-                      <p:stCondLst>
-                        <p:cond delay="indefinite"/>
-                      </p:stCondLst>
-                      <p:childTnLst>
-                        <p:par>
-                          <p:cTn id="8" fill="hold">
-                            <p:stCondLst>
-                              <p:cond delay="0"/>
-                            </p:stCondLst>
-                            <p:childTnLst>
-                              <p:par>
-                                <p:cTn id="9" presetID="1" presetClass="entr" presetSubtype="0" fill="hold" nodeType="clickEffect">
-                                  <p:stCondLst>
-                                    <p:cond delay="0"/>
-                                  </p:stCondLst>
-                                  <p:childTnLst>
-                                    <p:set>
-                                      <p:cBhvr>
-                                        <p:cTn id="10" dur="1" fill="hold">
-                                          <p:stCondLst>
-                                            <p:cond delay="0"/>
-                                          </p:stCondLst>
-                                        </p:cTn>
-                                        <p:tgtEl>
-                                          <p:spTgt spid="14341">
-                                            <p:txEl>
-                                              <p:pRg st="1" end="1"/>
-                                            </p:txEl>
-                                          </p:spTgt>
-                                        </p:tgtEl>
-                                        <p:attrNameLst>
-                                          <p:attrName>style.visibility</p:attrName>
-                                        </p:attrNameLst>
-                                      </p:cBhvr>
-                                      <p:to>
-                                        <p:strVal val="visible"/>
-                                      </p:to>
-                                    </p:set>
-                                  </p:childTnLst>
-                                </p:cTn>
-                              </p:par>
-                            </p:childTnLst>
-                          </p:cTn>
-                        </p:par>
-                      </p:childTnLst>
-                    </p:cTn>
-                  </p:par>
-                  <p:par>
-                    <p:cTn id="11" fill="hold">
-                      <p:stCondLst>
-                        <p:cond delay="indefinite"/>
-                      </p:stCondLst>
-                      <p:childTnLst>
-                        <p:par>
-                          <p:cTn id="12" fill="hold">
-                            <p:stCondLst>
-                              <p:cond delay="0"/>
-                            </p:stCondLst>
-                            <p:childTnLst>
-                              <p:par>
-                                <p:cTn id="13" presetID="1" presetClass="entr" presetSubtype="0" fill="hold" nodeType="clickEffect">
-                                  <p:stCondLst>
-                                    <p:cond delay="0"/>
-                                  </p:stCondLst>
-                                  <p:childTnLst>
-                                    <p:set>
-                                      <p:cBhvr>
-                                        <p:cTn id="14" dur="1" fill="hold">
-                                          <p:stCondLst>
-                                            <p:cond delay="0"/>
-                                          </p:stCondLst>
-                                        </p:cTn>
-                                        <p:tgtEl>
-                                          <p:spTgt spid="14341">
-                                            <p:txEl>
-                                              <p:pRg st="2" end="2"/>
-                                            </p:txEl>
-                                          </p:spTgt>
-                                        </p:tgtEl>
-                                        <p:attrNameLst>
-                                          <p:attrName>style.visibility</p:attrName>
-                                        </p:attrNameLst>
-                                      </p:cBhvr>
-                                      <p:to>
-                                        <p:strVal val="visible"/>
-                                      </p:to>
-                                    </p:set>
-                                  </p:childTnLst>
-                                </p:cTn>
-                              </p:par>
-                            </p:childTnLst>
-                          </p:cTn>
-                        </p:par>
-                      </p:childTnLst>
-                    </p:cTn>
-                  </p:par>
-                  <p:par>
-                    <p:cTn id="15" fill="hold">
-                      <p:stCondLst>
-                        <p:cond delay="indefinite"/>
-                      </p:stCondLst>
-                      <p:childTnLst>
-                        <p:par>
-                          <p:cTn id="16" fill="hold">
-                            <p:stCondLst>
-                              <p:cond delay="0"/>
-                            </p:stCondLst>
-                            <p:childTnLst>
-                              <p:par>
-                                <p:cTn id="17" presetID="1" presetClass="entr" presetSubtype="0" fill="hold" nodeType="clickEffect">
-                                  <p:stCondLst>
-                                    <p:cond delay="0"/>
-                                  </p:stCondLst>
-                                  <p:childTnLst>
-                                    <p:set>
-                                      <p:cBhvr>
-                                        <p:cTn id="18" dur="1" fill="hold">
-                                          <p:stCondLst>
-                                            <p:cond delay="0"/>
-                                          </p:stCondLst>
-                                        </p:cTn>
-                                        <p:tgtEl>
-                                          <p:spTgt spid="14341">
-                                            <p:txEl>
-                                              <p:pRg st="3" end="3"/>
-                                            </p:txEl>
-                                          </p:spTgt>
-                                        </p:tgtEl>
-                                        <p:attrNameLst>
-                                          <p:attrName>style.visibility</p:attrName>
-                                        </p:attrNameLst>
-                                      </p:cBhvr>
-                                      <p:to>
-                                        <p:strVal val="visible"/>
-                                      </p:to>
-                                    </p:set>
-                                  </p:childTnLst>
-                                </p:cTn>
-                              </p:par>
-                            </p:childTnLst>
-                          </p:cTn>
-                        </p:par>
-                      </p:childTnLst>
-                    </p:cTn>
-                  </p:par>
-                  <p:par>
-                    <p:cTn id="19" fill="hold">
-                      <p:stCondLst>
-                        <p:cond delay="indefinite"/>
-                      </p:stCondLst>
-                      <p:childTnLst>
-                        <p:par>
-                          <p:cTn id="20" fill="hold">
-                            <p:stCondLst>
-                              <p:cond delay="0"/>
-                            </p:stCondLst>
-                            <p:childTnLst>
-                              <p:par>
-                                <p:cTn id="21" presetID="1" presetClass="entr" presetSubtype="0" fill="hold" nodeType="clickEffect">
-                                  <p:stCondLst>
-                                    <p:cond delay="0"/>
-                                  </p:stCondLst>
-                                  <p:childTnLst>
-                                    <p:set>
-                                      <p:cBhvr>
-                                        <p:cTn id="22" dur="1" fill="hold">
-                                          <p:stCondLst>
-                                            <p:cond delay="0"/>
-                                          </p:stCondLst>
-                                        </p:cTn>
-                                        <p:tgtEl>
-                                          <p:spTgt spid="14341">
-                                            <p:txEl>
-                                              <p:pRg st="5" end="5"/>
-                                            </p:txEl>
-                                          </p:spTgt>
-                                        </p:tgtEl>
-                                        <p:attrNameLst>
-                                          <p:attrName>style.visibility</p:attrName>
-                                        </p:attrNameLst>
-                                      </p:cBhvr>
-                                      <p:to>
-                                        <p:strVal val="visible"/>
-                                      </p:to>
-                                    </p:set>
-                                  </p:childTnLst>
-                                </p:cTn>
-                              </p:par>
-                              <p:par>
-                                <p:cTn id="23" presetID="1" presetClass="entr" presetSubtype="0" fill="hold" nodeType="withEffect">
-                                  <p:stCondLst>
-                                    <p:cond delay="0"/>
-                                  </p:stCondLst>
-                                  <p:childTnLst>
-                                    <p:set>
-                                      <p:cBhvr>
-                                        <p:cTn id="24" dur="1" fill="hold">
-                                          <p:stCondLst>
-                                            <p:cond delay="0"/>
-                                          </p:stCondLst>
-                                        </p:cTn>
-                                        <p:tgtEl>
-                                          <p:spTgt spid="14341">
-                                            <p:txEl>
-                                              <p:pRg st="6" end="6"/>
-                                            </p:txEl>
-                                          </p:spTgt>
-                                        </p:tgtEl>
-                                        <p:attrNameLst>
-                                          <p:attrName>style.visibility</p:attrName>
-                                        </p:attrNameLst>
-                                      </p:cBhvr>
-                                      <p:to>
-                                        <p:strVal val="visible"/>
-                                      </p:to>
-                                    </p:set>
-                                  </p:childTnLst>
-                                </p:cTn>
-                              </p:par>
-                            </p:childTnLst>
-                          </p:cTn>
-                        </p:par>
-                      </p:childTnLst>
-                    </p:cTn>
-                  </p:par>
-                  <p:par>
-                    <p:cTn id="25" fill="hold">
-                      <p:stCondLst>
-                        <p:cond delay="indefinite"/>
-                      </p:stCondLst>
-                      <p:childTnLst>
-                        <p:par>
-                          <p:cTn id="26" fill="hold">
-                            <p:stCondLst>
-                              <p:cond delay="0"/>
-                            </p:stCondLst>
-                            <p:childTnLst>
-                              <p:par>
-                                <p:cTn id="27" presetID="1" presetClass="entr" presetSubtype="0" fill="hold" nodeType="clickEffect">
-                                  <p:stCondLst>
-                                    <p:cond delay="0"/>
-                                  </p:stCondLst>
-                                  <p:childTnLst>
-                                    <p:set>
-                                      <p:cBhvr>
-                                        <p:cTn id="28" dur="1" fill="hold">
-                                          <p:stCondLst>
-                                            <p:cond delay="0"/>
-                                          </p:stCondLst>
-                                        </p:cTn>
-                                        <p:tgtEl>
-                                          <p:spTgt spid="14341">
-                                            <p:txEl>
-                                              <p:pRg st="7" end="7"/>
-                                            </p:txEl>
-                                          </p:spTgt>
-                                        </p:tgtEl>
-                                        <p:attrNameLst>
-                                          <p:attrName>style.visibility</p:attrName>
-                                        </p:attrNameLst>
-                                      </p:cBhvr>
-                                      <p:to>
-                                        <p:strVal val="visible"/>
-                                      </p:to>
-                                    </p:set>
-                                  </p:childTnLst>
-                                </p:cTn>
-                              </p:par>
-                              <p:par>
-                                <p:cTn id="29" presetID="1" presetClass="entr" presetSubtype="0" fill="hold" nodeType="withEffect">
-                                  <p:stCondLst>
-                                    <p:cond delay="0"/>
-                                  </p:stCondLst>
-                                  <p:childTnLst>
-                                    <p:set>
-                                      <p:cBhvr>
-                                        <p:cTn id="30" dur="1" fill="hold">
-                                          <p:stCondLst>
-                                            <p:cond delay="0"/>
-                                          </p:stCondLst>
-                                        </p:cTn>
-                                        <p:tgtEl>
-                                          <p:spTgt spid="14341">
-                                            <p:txEl>
-                                              <p:pRg st="8" end="8"/>
-                                            </p:txEl>
-                                          </p:spTgt>
-                                        </p:tgtEl>
-                                        <p:attrNameLst>
-                                          <p:attrName>style.visibility</p:attrName>
-                                        </p:attrNameLst>
-                                      </p:cBhvr>
-                                      <p:to>
-                                        <p:strVal val="visible"/>
-                                      </p:to>
-                                    </p:set>
-                                  </p:childTnLst>
-                                </p:cTn>
-                              </p:par>
-                            </p:childTnLst>
-                          </p:cTn>
-                        </p:par>
-                      </p:childTnLst>
-                    </p:cTn>
-                  </p:par>
-                  <p:par>
-                    <p:cTn id="31" fill="hold">
-                      <p:stCondLst>
-                        <p:cond delay="indefinite"/>
-                      </p:stCondLst>
-                      <p:childTnLst>
-                        <p:par>
-                          <p:cTn id="32" fill="hold">
-                            <p:stCondLst>
-                              <p:cond delay="0"/>
-                            </p:stCondLst>
-                            <p:childTnLst>
-                              <p:par>
-                                <p:cTn id="33" presetID="1" presetClass="entr" presetSubtype="0" fill="hold" nodeType="clickEffect">
-                                  <p:stCondLst>
-                                    <p:cond delay="0"/>
-                                  </p:stCondLst>
-                                  <p:childTnLst>
-                                    <p:set>
-                                      <p:cBhvr>
-                                        <p:cTn id="34" dur="1" fill="hold">
-                                          <p:stCondLst>
-                                            <p:cond delay="0"/>
-                                          </p:stCondLst>
-                                        </p:cTn>
-                                        <p:tgtEl>
-                                          <p:spTgt spid="14341">
-                                            <p:txEl>
-                                              <p:pRg st="9" end="9"/>
-                                            </p:txEl>
-                                          </p:spTgt>
-                                        </p:tgtEl>
-                                        <p:attrNameLst>
-                                          <p:attrName>style.visibility</p:attrName>
-                                        </p:attrNameLst>
-                                      </p:cBhvr>
-                                      <p:to>
-                                        <p:strVal val="visible"/>
-                                      </p:to>
-                                    </p:set>
-                                  </p:childTnLst>
-                                </p:cTn>
-                              </p:par>
-                              <p:par>
-                                <p:cTn id="35" presetID="1" presetClass="entr" presetSubtype="0" fill="hold" nodeType="withEffect">
-                                  <p:stCondLst>
-                                    <p:cond delay="0"/>
-                                  </p:stCondLst>
-                                  <p:childTnLst>
-                                    <p:set>
-                                      <p:cBhvr>
-                                        <p:cTn id="36" dur="1" fill="hold">
-                                          <p:stCondLst>
-                                            <p:cond delay="0"/>
-                                          </p:stCondLst>
-                                        </p:cTn>
-                                        <p:tgtEl>
-                                          <p:spTgt spid="14341">
-                                            <p:txEl>
-                                              <p:pRg st="10" end="10"/>
-                                            </p:txEl>
-                                          </p:spTgt>
-                                        </p:tgtEl>
-                                        <p:attrNameLst>
-                                          <p:attrName>style.visibility</p:attrName>
-                                        </p:attrNameLst>
-                                      </p:cBhvr>
-                                      <p:to>
-                                        <p:strVal val="visible"/>
-                                      </p:to>
-                                    </p:set>
-                                  </p:childTnLst>
-                                </p:cTn>
-                              </p:par>
-                            </p:childTnLst>
-                          </p:cTn>
-                        </p:par>
-                      </p:childTnLst>
-                    </p:cTn>
-                  </p:par>
-                  <p:par>
-                    <p:cTn id="37" fill="hold">
-                      <p:stCondLst>
-                        <p:cond delay="indefinite"/>
-                      </p:stCondLst>
-                      <p:childTnLst>
-                        <p:par>
-                          <p:cTn id="38" fill="hold">
-                            <p:stCondLst>
-                              <p:cond delay="0"/>
-                            </p:stCondLst>
-                            <p:childTnLst>
-                              <p:par>
-                                <p:cTn id="39" presetID="1" presetClass="entr" presetSubtype="0" fill="hold" nodeType="clickEffect">
-                                  <p:stCondLst>
-                                    <p:cond delay="0"/>
-                                  </p:stCondLst>
-                                  <p:childTnLst>
-                                    <p:set>
-                                      <p:cBhvr>
-                                        <p:cTn id="40" dur="1" fill="hold">
-                                          <p:stCondLst>
-                                            <p:cond delay="0"/>
-                                          </p:stCondLst>
-                                        </p:cTn>
-                                        <p:tgtEl>
-                                          <p:spTgt spid="14341">
-                                            <p:txEl>
-                                              <p:pRg st="12" end="12"/>
-                                            </p:txEl>
-                                          </p:spTgt>
-                                        </p:tgtEl>
-                                        <p:attrNameLst>
-                                          <p:attrName>style.visibility</p:attrName>
-                                        </p:attrNameLst>
-                                      </p:cBhvr>
-                                      <p:to>
-                                        <p:strVal val="visible"/>
-                                      </p:to>
-                                    </p:set>
-                                  </p:childTnLst>
-                                </p:cTn>
-                              </p:par>
-                            </p:childTnLst>
-                          </p:cTn>
-                        </p:par>
-                      </p:childTnLst>
-                    </p:cTn>
-                  </p:par>
-                </p:childTnLst>
-              </p:cTn>
-              <p:prevCondLst>
-                <p:cond evt="onPrev" delay="0">
-                  <p:tgtEl>
-                    <p:sldTgt/>
-                  </p:tgtEl>
-                </p:cond>
-              </p:prevCondLst>
-              <p:nextCondLst>
-                <p:cond evt="onNext" delay="0">
-                  <p:tgtEl>
-                    <p:sldTgt/>
-                  </p:tgtEl>
-                </p:cond>
-              </p:nextCondLst>
-            </p:seq>
-          </p:childTnLst>
-        </p:cTn>
+        <p:cTn id="1" dur="indefinite" restart="never" nodeType="tmRoot"/>
       </p:par>
     </p:tnLst>
   </p:timing>
 </p:sld>
 </file>
 
-<file path=ppt/slides/slide6.xml><?xml version="1.0" encoding="utf-8"?>
-<p:sld xmlns:a="http://schemas.openxmlformats.org/drawingml/2006/main" xmlns:r="http://schemas.openxmlformats.org/officeDocument/2006/relationships" xmlns:p="http://schemas.openxmlformats.org/presentationml/2006/main">
-  <p:cSld>
-    <p:spTree>
-      <p:nvGrpSpPr>
-        <p:cNvPr id="1" name=""/>
-        <p:cNvGrpSpPr/>
-        <p:nvPr/>
-      </p:nvGrpSpPr>
-      <p:grpSpPr>
-        <a:xfrm>
-          <a:off x="0" y="0"/>
-          <a:ext cx="0" cy="0"/>
-          <a:chOff x="0" y="0"/>
-          <a:chExt cx="0" cy="0"/>
-        </a:xfrm>
-      </p:grpSpPr>
-      <p:sp>
-        <p:nvSpPr>
-          <p:cNvPr id="2" name="Titel 1"/>
-          <p:cNvSpPr>
-            <a:spLocks noGrp="1"/>
-          </p:cNvSpPr>
-          <p:nvPr>
-            <p:ph type="title"/>
-          </p:nvPr>
-        </p:nvSpPr>
-        <p:spPr/>
-        <p:txBody>
-          <a:bodyPr/>
-          <a:lstStyle/>
-          <a:p>
-            <a:r>
-              <a:rPr lang="de-DE" dirty="0"/>
-              <a:t>Datentyp</a:t>
-            </a:r>
-          </a:p>
-        </p:txBody>
-      </p:sp>
-      <p:sp>
-        <p:nvSpPr>
-          <p:cNvPr id="3" name="Inhaltsplatzhalter 2"/>
-          <p:cNvSpPr>
-            <a:spLocks noGrp="1"/>
-          </p:cNvSpPr>
-          <p:nvPr>
-            <p:ph sz="quarter" idx="11"/>
-          </p:nvPr>
-        </p:nvSpPr>
-        <p:spPr>
-          <a:xfrm>
-            <a:off x="467544" y="1268761"/>
-            <a:ext cx="8208912" cy="936103"/>
-          </a:xfrm>
-        </p:spPr>
-        <p:txBody>
-          <a:bodyPr/>
-          <a:lstStyle/>
-          <a:p>
-            <a:pPr marL="0" indent="0">
-              <a:buNone/>
-            </a:pPr>
-            <a:r>
-              <a:rPr lang="de-DE" dirty="0"/>
-              <a:t>Für den Prozessor sind Daten eine Folge von zwei verschiedenen Zuständen. </a:t>
-            </a:r>
-            <a:endParaRPr lang="de-AT" dirty="0"/>
-          </a:p>
-        </p:txBody>
-      </p:sp>
-      <p:sp>
-        <p:nvSpPr>
-          <p:cNvPr id="4" name="Rechteck 3"/>
-          <p:cNvSpPr/>
-          <p:nvPr/>
-        </p:nvSpPr>
-        <p:spPr>
-          <a:xfrm>
-            <a:off x="587729" y="2347139"/>
-            <a:ext cx="216024" cy="432048"/>
-          </a:xfrm>
-          <a:prstGeom prst="rect">
-            <a:avLst/>
-          </a:prstGeom>
-          <a:solidFill>
-            <a:schemeClr val="accent1">
-              <a:lumMod val="20000"/>
-              <a:lumOff val="80000"/>
-            </a:schemeClr>
-          </a:solidFill>
-        </p:spPr>
-        <p:style>
-          <a:lnRef idx="2">
-            <a:schemeClr val="accent1">
-              <a:shade val="50000"/>
-            </a:schemeClr>
-          </a:lnRef>
-          <a:fillRef idx="1">
-            <a:schemeClr val="accent1"/>
-          </a:fillRef>
-          <a:effectRef idx="0">
-            <a:schemeClr val="accent1"/>
-          </a:effectRef>
-          <a:fontRef idx="minor">
-            <a:schemeClr val="lt1"/>
-          </a:fontRef>
-        </p:style>
-        <p:txBody>
-          <a:bodyPr rtlCol="0" anchor="ctr"/>
-          <a:lstStyle/>
-          <a:p>
-            <a:pPr algn="ctr"/>
-            <a:r>
-              <a:rPr lang="de-AT" dirty="0">
-                <a:solidFill>
-                  <a:schemeClr val="tx2">
-                    <a:lumMod val="75000"/>
-                  </a:schemeClr>
-                </a:solidFill>
-              </a:rPr>
-              <a:t>0</a:t>
-            </a:r>
-          </a:p>
-        </p:txBody>
-      </p:sp>
-      <p:sp>
-        <p:nvSpPr>
-          <p:cNvPr id="5" name="Rechteck 4"/>
-          <p:cNvSpPr/>
-          <p:nvPr/>
-        </p:nvSpPr>
-        <p:spPr>
-          <a:xfrm>
-            <a:off x="587729" y="3139227"/>
-            <a:ext cx="216024" cy="432048"/>
-          </a:xfrm>
-          <a:prstGeom prst="rect">
-            <a:avLst/>
-          </a:prstGeom>
-          <a:solidFill>
-            <a:schemeClr val="accent1">
-              <a:lumMod val="20000"/>
-              <a:lumOff val="80000"/>
-            </a:schemeClr>
-          </a:solidFill>
-        </p:spPr>
-        <p:style>
-          <a:lnRef idx="2">
-            <a:schemeClr val="accent1">
-              <a:shade val="50000"/>
-            </a:schemeClr>
-          </a:lnRef>
-          <a:fillRef idx="1">
-            <a:schemeClr val="accent1"/>
-          </a:fillRef>
-          <a:effectRef idx="0">
-            <a:schemeClr val="accent1"/>
-          </a:effectRef>
-          <a:fontRef idx="minor">
-            <a:schemeClr val="lt1"/>
-          </a:fontRef>
-        </p:style>
-        <p:txBody>
-          <a:bodyPr rtlCol="0" anchor="ctr"/>
-          <a:lstStyle/>
-          <a:p>
-            <a:pPr algn="ctr"/>
-            <a:r>
-              <a:rPr lang="de-AT" dirty="0">
-                <a:solidFill>
-                  <a:schemeClr val="tx2">
-                    <a:lumMod val="75000"/>
-                  </a:schemeClr>
-                </a:solidFill>
-              </a:rPr>
-              <a:t>0</a:t>
-            </a:r>
-          </a:p>
-        </p:txBody>
-      </p:sp>
-      <p:sp>
-        <p:nvSpPr>
-          <p:cNvPr id="6" name="Rechteck 5"/>
-          <p:cNvSpPr/>
-          <p:nvPr/>
-        </p:nvSpPr>
-        <p:spPr>
-          <a:xfrm>
-            <a:off x="790568" y="3139227"/>
-            <a:ext cx="216024" cy="432048"/>
-          </a:xfrm>
-          <a:prstGeom prst="rect">
-            <a:avLst/>
-          </a:prstGeom>
-          <a:solidFill>
-            <a:schemeClr val="accent1">
-              <a:lumMod val="20000"/>
-              <a:lumOff val="80000"/>
-            </a:schemeClr>
-          </a:solidFill>
-        </p:spPr>
-        <p:style>
-          <a:lnRef idx="2">
-            <a:schemeClr val="accent1">
-              <a:shade val="50000"/>
-            </a:schemeClr>
-          </a:lnRef>
-          <a:fillRef idx="1">
-            <a:schemeClr val="accent1"/>
-          </a:fillRef>
-          <a:effectRef idx="0">
-            <a:schemeClr val="accent1"/>
-          </a:effectRef>
-          <a:fontRef idx="minor">
-            <a:schemeClr val="lt1"/>
-          </a:fontRef>
-        </p:style>
-        <p:txBody>
-          <a:bodyPr rtlCol="0" anchor="ctr"/>
-          <a:lstStyle/>
-          <a:p>
-            <a:pPr algn="ctr"/>
-            <a:r>
-              <a:rPr lang="de-AT" dirty="0">
-                <a:solidFill>
-                  <a:schemeClr val="tx2">
-                    <a:lumMod val="75000"/>
-                  </a:schemeClr>
-                </a:solidFill>
-              </a:rPr>
-              <a:t>1</a:t>
-            </a:r>
-          </a:p>
-        </p:txBody>
-      </p:sp>
-      <p:sp>
-        <p:nvSpPr>
-          <p:cNvPr id="7" name="Rechteck 6"/>
-          <p:cNvSpPr/>
-          <p:nvPr/>
-        </p:nvSpPr>
-        <p:spPr>
-          <a:xfrm>
-            <a:off x="1006592" y="3139227"/>
-            <a:ext cx="216024" cy="432048"/>
-          </a:xfrm>
-          <a:prstGeom prst="rect">
-            <a:avLst/>
-          </a:prstGeom>
-          <a:solidFill>
-            <a:schemeClr val="accent1">
-              <a:lumMod val="20000"/>
-              <a:lumOff val="80000"/>
-            </a:schemeClr>
-          </a:solidFill>
-        </p:spPr>
-        <p:style>
-          <a:lnRef idx="2">
-            <a:schemeClr val="accent1">
-              <a:shade val="50000"/>
-            </a:schemeClr>
-          </a:lnRef>
-          <a:fillRef idx="1">
-            <a:schemeClr val="accent1"/>
-          </a:fillRef>
-          <a:effectRef idx="0">
-            <a:schemeClr val="accent1"/>
-          </a:effectRef>
-          <a:fontRef idx="minor">
-            <a:schemeClr val="lt1"/>
-          </a:fontRef>
-        </p:style>
-        <p:txBody>
-          <a:bodyPr rtlCol="0" anchor="ctr"/>
-          <a:lstStyle/>
-          <a:p>
-            <a:pPr algn="ctr"/>
-            <a:r>
-              <a:rPr lang="de-AT" dirty="0">
-                <a:solidFill>
-                  <a:schemeClr val="tx2">
-                    <a:lumMod val="75000"/>
-                  </a:schemeClr>
-                </a:solidFill>
-              </a:rPr>
-              <a:t>1</a:t>
-            </a:r>
-          </a:p>
-        </p:txBody>
-      </p:sp>
-      <p:sp>
-        <p:nvSpPr>
-          <p:cNvPr id="8" name="Rechteck 7"/>
-          <p:cNvSpPr/>
-          <p:nvPr/>
-        </p:nvSpPr>
-        <p:spPr>
-          <a:xfrm>
-            <a:off x="1222292" y="3139227"/>
-            <a:ext cx="216024" cy="432048"/>
-          </a:xfrm>
-          <a:prstGeom prst="rect">
-            <a:avLst/>
-          </a:prstGeom>
-          <a:solidFill>
-            <a:schemeClr val="accent1">
-              <a:lumMod val="20000"/>
-              <a:lumOff val="80000"/>
-            </a:schemeClr>
-          </a:solidFill>
-        </p:spPr>
-        <p:style>
-          <a:lnRef idx="2">
-            <a:schemeClr val="accent1">
-              <a:shade val="50000"/>
-            </a:schemeClr>
-          </a:lnRef>
-          <a:fillRef idx="1">
-            <a:schemeClr val="accent1"/>
-          </a:fillRef>
-          <a:effectRef idx="0">
-            <a:schemeClr val="accent1"/>
-          </a:effectRef>
-          <a:fontRef idx="minor">
-            <a:schemeClr val="lt1"/>
-          </a:fontRef>
-        </p:style>
-        <p:txBody>
-          <a:bodyPr rtlCol="0" anchor="ctr"/>
-          <a:lstStyle/>
-          <a:p>
-            <a:pPr algn="ctr"/>
-            <a:r>
-              <a:rPr lang="de-AT" dirty="0">
-                <a:solidFill>
-                  <a:schemeClr val="tx2">
-                    <a:lumMod val="75000"/>
-                  </a:schemeClr>
-                </a:solidFill>
-              </a:rPr>
-              <a:t>0</a:t>
-            </a:r>
-          </a:p>
-        </p:txBody>
-      </p:sp>
-      <p:sp>
-        <p:nvSpPr>
-          <p:cNvPr id="9" name="Rechteck 8"/>
-          <p:cNvSpPr/>
-          <p:nvPr/>
-        </p:nvSpPr>
-        <p:spPr>
-          <a:xfrm>
-            <a:off x="1444367" y="3139227"/>
-            <a:ext cx="216024" cy="432048"/>
-          </a:xfrm>
-          <a:prstGeom prst="rect">
-            <a:avLst/>
-          </a:prstGeom>
-          <a:solidFill>
-            <a:schemeClr val="accent1">
-              <a:lumMod val="20000"/>
-              <a:lumOff val="80000"/>
-            </a:schemeClr>
-          </a:solidFill>
-        </p:spPr>
-        <p:style>
-          <a:lnRef idx="2">
-            <a:schemeClr val="accent1">
-              <a:shade val="50000"/>
-            </a:schemeClr>
-          </a:lnRef>
-          <a:fillRef idx="1">
-            <a:schemeClr val="accent1"/>
-          </a:fillRef>
-          <a:effectRef idx="0">
-            <a:schemeClr val="accent1"/>
-          </a:effectRef>
-          <a:fontRef idx="minor">
-            <a:schemeClr val="lt1"/>
-          </a:fontRef>
-        </p:style>
-        <p:txBody>
-          <a:bodyPr rtlCol="0" anchor="ctr"/>
-          <a:lstStyle/>
-          <a:p>
-            <a:pPr algn="ctr"/>
-            <a:r>
-              <a:rPr lang="de-AT" dirty="0">
-                <a:solidFill>
-                  <a:schemeClr val="tx2">
-                    <a:lumMod val="75000"/>
-                  </a:schemeClr>
-                </a:solidFill>
-              </a:rPr>
-              <a:t>0</a:t>
-            </a:r>
-          </a:p>
-        </p:txBody>
-      </p:sp>
-      <p:sp>
-        <p:nvSpPr>
-          <p:cNvPr id="10" name="Rechteck 9"/>
-          <p:cNvSpPr/>
-          <p:nvPr/>
-        </p:nvSpPr>
-        <p:spPr>
-          <a:xfrm>
-            <a:off x="1654529" y="3139227"/>
-            <a:ext cx="216024" cy="432048"/>
-          </a:xfrm>
-          <a:prstGeom prst="rect">
-            <a:avLst/>
-          </a:prstGeom>
-          <a:solidFill>
-            <a:schemeClr val="accent1">
-              <a:lumMod val="20000"/>
-              <a:lumOff val="80000"/>
-            </a:schemeClr>
-          </a:solidFill>
-        </p:spPr>
-        <p:style>
-          <a:lnRef idx="2">
-            <a:schemeClr val="accent1">
-              <a:shade val="50000"/>
-            </a:schemeClr>
-          </a:lnRef>
-          <a:fillRef idx="1">
-            <a:schemeClr val="accent1"/>
-          </a:fillRef>
-          <a:effectRef idx="0">
-            <a:schemeClr val="accent1"/>
-          </a:effectRef>
-          <a:fontRef idx="minor">
-            <a:schemeClr val="lt1"/>
-          </a:fontRef>
-        </p:style>
-        <p:txBody>
-          <a:bodyPr rtlCol="0" anchor="ctr"/>
-          <a:lstStyle/>
-          <a:p>
-            <a:pPr algn="ctr"/>
-            <a:r>
-              <a:rPr lang="de-AT" dirty="0">
-                <a:solidFill>
-                  <a:schemeClr val="tx2">
-                    <a:lumMod val="75000"/>
-                  </a:schemeClr>
-                </a:solidFill>
-              </a:rPr>
-              <a:t>1</a:t>
-            </a:r>
-          </a:p>
-        </p:txBody>
-      </p:sp>
-      <p:sp>
-        <p:nvSpPr>
-          <p:cNvPr id="11" name="Rechteck 10"/>
-          <p:cNvSpPr/>
-          <p:nvPr/>
-        </p:nvSpPr>
-        <p:spPr>
-          <a:xfrm>
-            <a:off x="1870553" y="3139227"/>
-            <a:ext cx="216024" cy="432048"/>
-          </a:xfrm>
-          <a:prstGeom prst="rect">
-            <a:avLst/>
-          </a:prstGeom>
-          <a:solidFill>
-            <a:schemeClr val="accent1">
-              <a:lumMod val="20000"/>
-              <a:lumOff val="80000"/>
-            </a:schemeClr>
-          </a:solidFill>
-        </p:spPr>
-        <p:style>
-          <a:lnRef idx="2">
-            <a:schemeClr val="accent1">
-              <a:shade val="50000"/>
-            </a:schemeClr>
-          </a:lnRef>
-          <a:fillRef idx="1">
-            <a:schemeClr val="accent1"/>
-          </a:fillRef>
-          <a:effectRef idx="0">
-            <a:schemeClr val="accent1"/>
-          </a:effectRef>
-          <a:fontRef idx="minor">
-            <a:schemeClr val="lt1"/>
-          </a:fontRef>
-        </p:style>
-        <p:txBody>
-          <a:bodyPr rtlCol="0" anchor="ctr"/>
-          <a:lstStyle/>
-          <a:p>
-            <a:pPr algn="ctr"/>
-            <a:r>
-              <a:rPr lang="de-AT" dirty="0">
-                <a:solidFill>
-                  <a:schemeClr val="tx2">
-                    <a:lumMod val="75000"/>
-                  </a:schemeClr>
-                </a:solidFill>
-              </a:rPr>
-              <a:t>0</a:t>
-            </a:r>
-          </a:p>
-        </p:txBody>
-      </p:sp>
-      <p:sp>
-        <p:nvSpPr>
-          <p:cNvPr id="12" name="Rechteck 11"/>
-          <p:cNvSpPr/>
-          <p:nvPr/>
-        </p:nvSpPr>
-        <p:spPr>
-          <a:xfrm>
-            <a:off x="2078114" y="3139227"/>
-            <a:ext cx="216024" cy="432048"/>
-          </a:xfrm>
-          <a:prstGeom prst="rect">
-            <a:avLst/>
-          </a:prstGeom>
-          <a:solidFill>
-            <a:schemeClr val="accent1">
-              <a:lumMod val="20000"/>
-              <a:lumOff val="80000"/>
-            </a:schemeClr>
-          </a:solidFill>
-        </p:spPr>
-        <p:style>
-          <a:lnRef idx="2">
-            <a:schemeClr val="accent1">
-              <a:shade val="50000"/>
-            </a:schemeClr>
-          </a:lnRef>
-          <a:fillRef idx="1">
-            <a:schemeClr val="accent1"/>
-          </a:fillRef>
-          <a:effectRef idx="0">
-            <a:schemeClr val="accent1"/>
-          </a:effectRef>
-          <a:fontRef idx="minor">
-            <a:schemeClr val="lt1"/>
-          </a:fontRef>
-        </p:style>
-        <p:txBody>
-          <a:bodyPr rtlCol="0" anchor="ctr"/>
-          <a:lstStyle/>
-          <a:p>
-            <a:pPr algn="ctr"/>
-            <a:r>
-              <a:rPr lang="de-AT" dirty="0">
-                <a:solidFill>
-                  <a:schemeClr val="tx2">
-                    <a:lumMod val="75000"/>
-                  </a:schemeClr>
-                </a:solidFill>
-              </a:rPr>
-              <a:t>0</a:t>
-            </a:r>
-          </a:p>
-        </p:txBody>
-      </p:sp>
-      <p:sp>
-        <p:nvSpPr>
-          <p:cNvPr id="13" name="Rechteck 12"/>
-          <p:cNvSpPr/>
-          <p:nvPr/>
-        </p:nvSpPr>
-        <p:spPr>
-          <a:xfrm>
-            <a:off x="609512" y="4795411"/>
-            <a:ext cx="216024" cy="432048"/>
-          </a:xfrm>
-          <a:prstGeom prst="rect">
-            <a:avLst/>
-          </a:prstGeom>
-          <a:solidFill>
-            <a:schemeClr val="accent1">
-              <a:lumMod val="20000"/>
-              <a:lumOff val="80000"/>
-            </a:schemeClr>
-          </a:solidFill>
-        </p:spPr>
-        <p:style>
-          <a:lnRef idx="2">
-            <a:schemeClr val="accent1">
-              <a:shade val="50000"/>
-            </a:schemeClr>
-          </a:lnRef>
-          <a:fillRef idx="1">
-            <a:schemeClr val="accent1"/>
-          </a:fillRef>
-          <a:effectRef idx="0">
-            <a:schemeClr val="accent1"/>
-          </a:effectRef>
-          <a:fontRef idx="minor">
-            <a:schemeClr val="lt1"/>
-          </a:fontRef>
-        </p:style>
-        <p:txBody>
-          <a:bodyPr rtlCol="0" anchor="ctr"/>
-          <a:lstStyle/>
-          <a:p>
-            <a:pPr algn="ctr"/>
-            <a:r>
-              <a:rPr lang="de-AT" dirty="0">
-                <a:solidFill>
-                  <a:schemeClr val="tx2">
-                    <a:lumMod val="75000"/>
-                  </a:schemeClr>
-                </a:solidFill>
-              </a:rPr>
-              <a:t>0</a:t>
-            </a:r>
-          </a:p>
-        </p:txBody>
-      </p:sp>
-      <p:sp>
-        <p:nvSpPr>
-          <p:cNvPr id="14" name="Rechteck 13"/>
-          <p:cNvSpPr/>
-          <p:nvPr/>
-        </p:nvSpPr>
-        <p:spPr>
-          <a:xfrm>
-            <a:off x="812351" y="4795411"/>
-            <a:ext cx="216024" cy="432048"/>
-          </a:xfrm>
-          <a:prstGeom prst="rect">
-            <a:avLst/>
-          </a:prstGeom>
-          <a:solidFill>
-            <a:schemeClr val="accent1">
-              <a:lumMod val="20000"/>
-              <a:lumOff val="80000"/>
-            </a:schemeClr>
-          </a:solidFill>
-        </p:spPr>
-        <p:style>
-          <a:lnRef idx="2">
-            <a:schemeClr val="accent1">
-              <a:shade val="50000"/>
-            </a:schemeClr>
-          </a:lnRef>
-          <a:fillRef idx="1">
-            <a:schemeClr val="accent1"/>
-          </a:fillRef>
-          <a:effectRef idx="0">
-            <a:schemeClr val="accent1"/>
-          </a:effectRef>
-          <a:fontRef idx="minor">
-            <a:schemeClr val="lt1"/>
-          </a:fontRef>
-        </p:style>
-        <p:txBody>
-          <a:bodyPr rtlCol="0" anchor="ctr"/>
-          <a:lstStyle/>
-          <a:p>
-            <a:pPr algn="ctr"/>
-            <a:r>
-              <a:rPr lang="de-AT" dirty="0">
-                <a:solidFill>
-                  <a:schemeClr val="tx2">
-                    <a:lumMod val="75000"/>
-                  </a:schemeClr>
-                </a:solidFill>
-              </a:rPr>
-              <a:t>1</a:t>
-            </a:r>
-          </a:p>
-        </p:txBody>
-      </p:sp>
-      <p:sp>
-        <p:nvSpPr>
-          <p:cNvPr id="15" name="Rechteck 14"/>
-          <p:cNvSpPr/>
-          <p:nvPr/>
-        </p:nvSpPr>
-        <p:spPr>
-          <a:xfrm>
-            <a:off x="1028375" y="4795411"/>
-            <a:ext cx="216024" cy="432048"/>
-          </a:xfrm>
-          <a:prstGeom prst="rect">
-            <a:avLst/>
-          </a:prstGeom>
-          <a:solidFill>
-            <a:schemeClr val="accent1">
-              <a:lumMod val="20000"/>
-              <a:lumOff val="80000"/>
-            </a:schemeClr>
-          </a:solidFill>
-        </p:spPr>
-        <p:style>
-          <a:lnRef idx="2">
-            <a:schemeClr val="accent1">
-              <a:shade val="50000"/>
-            </a:schemeClr>
-          </a:lnRef>
-          <a:fillRef idx="1">
-            <a:schemeClr val="accent1"/>
-          </a:fillRef>
-          <a:effectRef idx="0">
-            <a:schemeClr val="accent1"/>
-          </a:effectRef>
-          <a:fontRef idx="minor">
-            <a:schemeClr val="lt1"/>
-          </a:fontRef>
-        </p:style>
-        <p:txBody>
-          <a:bodyPr rtlCol="0" anchor="ctr"/>
-          <a:lstStyle/>
-          <a:p>
-            <a:pPr algn="ctr"/>
-            <a:r>
-              <a:rPr lang="de-AT" dirty="0">
-                <a:solidFill>
-                  <a:schemeClr val="tx2">
-                    <a:lumMod val="75000"/>
-                  </a:schemeClr>
-                </a:solidFill>
-              </a:rPr>
-              <a:t>1</a:t>
-            </a:r>
-          </a:p>
-        </p:txBody>
-      </p:sp>
-      <p:sp>
-        <p:nvSpPr>
-          <p:cNvPr id="16" name="Rechteck 15"/>
-          <p:cNvSpPr/>
-          <p:nvPr/>
-        </p:nvSpPr>
-        <p:spPr>
-          <a:xfrm>
-            <a:off x="1244075" y="4795411"/>
-            <a:ext cx="216024" cy="432048"/>
-          </a:xfrm>
-          <a:prstGeom prst="rect">
-            <a:avLst/>
-          </a:prstGeom>
-          <a:solidFill>
-            <a:schemeClr val="accent1">
-              <a:lumMod val="20000"/>
-              <a:lumOff val="80000"/>
-            </a:schemeClr>
-          </a:solidFill>
-        </p:spPr>
-        <p:style>
-          <a:lnRef idx="2">
-            <a:schemeClr val="accent1">
-              <a:shade val="50000"/>
-            </a:schemeClr>
-          </a:lnRef>
-          <a:fillRef idx="1">
-            <a:schemeClr val="accent1"/>
-          </a:fillRef>
-          <a:effectRef idx="0">
-            <a:schemeClr val="accent1"/>
-          </a:effectRef>
-          <a:fontRef idx="minor">
-            <a:schemeClr val="lt1"/>
-          </a:fontRef>
-        </p:style>
-        <p:txBody>
-          <a:bodyPr rtlCol="0" anchor="ctr"/>
-          <a:lstStyle/>
-          <a:p>
-            <a:pPr algn="ctr"/>
-            <a:r>
-              <a:rPr lang="de-AT" dirty="0">
-                <a:solidFill>
-                  <a:schemeClr val="tx2">
-                    <a:lumMod val="75000"/>
-                  </a:schemeClr>
-                </a:solidFill>
-              </a:rPr>
-              <a:t>0</a:t>
-            </a:r>
-          </a:p>
-        </p:txBody>
-      </p:sp>
-      <p:sp>
-        <p:nvSpPr>
-          <p:cNvPr id="17" name="Rechteck 16"/>
-          <p:cNvSpPr/>
-          <p:nvPr/>
-        </p:nvSpPr>
-        <p:spPr>
-          <a:xfrm>
-            <a:off x="1466150" y="4795411"/>
-            <a:ext cx="216024" cy="432048"/>
-          </a:xfrm>
-          <a:prstGeom prst="rect">
-            <a:avLst/>
-          </a:prstGeom>
-          <a:solidFill>
-            <a:schemeClr val="accent1">
-              <a:lumMod val="20000"/>
-              <a:lumOff val="80000"/>
-            </a:schemeClr>
-          </a:solidFill>
-        </p:spPr>
-        <p:style>
-          <a:lnRef idx="2">
-            <a:schemeClr val="accent1">
-              <a:shade val="50000"/>
-            </a:schemeClr>
-          </a:lnRef>
-          <a:fillRef idx="1">
-            <a:schemeClr val="accent1"/>
-          </a:fillRef>
-          <a:effectRef idx="0">
-            <a:schemeClr val="accent1"/>
-          </a:effectRef>
-          <a:fontRef idx="minor">
-            <a:schemeClr val="lt1"/>
-          </a:fontRef>
-        </p:style>
-        <p:txBody>
-          <a:bodyPr rtlCol="0" anchor="ctr"/>
-          <a:lstStyle/>
-          <a:p>
-            <a:pPr algn="ctr"/>
-            <a:r>
-              <a:rPr lang="de-AT" dirty="0">
-                <a:solidFill>
-                  <a:schemeClr val="tx2">
-                    <a:lumMod val="75000"/>
-                  </a:schemeClr>
-                </a:solidFill>
-              </a:rPr>
-              <a:t>0</a:t>
-            </a:r>
-          </a:p>
-        </p:txBody>
-      </p:sp>
-      <p:sp>
-        <p:nvSpPr>
-          <p:cNvPr id="18" name="Rechteck 17"/>
-          <p:cNvSpPr/>
-          <p:nvPr/>
-        </p:nvSpPr>
-        <p:spPr>
-          <a:xfrm>
-            <a:off x="1676312" y="4795411"/>
-            <a:ext cx="216024" cy="432048"/>
-          </a:xfrm>
-          <a:prstGeom prst="rect">
-            <a:avLst/>
-          </a:prstGeom>
-          <a:solidFill>
-            <a:schemeClr val="accent1">
-              <a:lumMod val="20000"/>
-              <a:lumOff val="80000"/>
-            </a:schemeClr>
-          </a:solidFill>
-        </p:spPr>
-        <p:style>
-          <a:lnRef idx="2">
-            <a:schemeClr val="accent1">
-              <a:shade val="50000"/>
-            </a:schemeClr>
-          </a:lnRef>
-          <a:fillRef idx="1">
-            <a:schemeClr val="accent1"/>
-          </a:fillRef>
-          <a:effectRef idx="0">
-            <a:schemeClr val="accent1"/>
-          </a:effectRef>
-          <a:fontRef idx="minor">
-            <a:schemeClr val="lt1"/>
-          </a:fontRef>
-        </p:style>
-        <p:txBody>
-          <a:bodyPr rtlCol="0" anchor="ctr"/>
-          <a:lstStyle/>
-          <a:p>
-            <a:pPr algn="ctr"/>
-            <a:r>
-              <a:rPr lang="de-AT" dirty="0">
-                <a:solidFill>
-                  <a:schemeClr val="tx2">
-                    <a:lumMod val="75000"/>
-                  </a:schemeClr>
-                </a:solidFill>
-              </a:rPr>
-              <a:t>1</a:t>
-            </a:r>
-          </a:p>
-        </p:txBody>
-      </p:sp>
-      <p:sp>
-        <p:nvSpPr>
-          <p:cNvPr id="19" name="Rechteck 18"/>
-          <p:cNvSpPr/>
-          <p:nvPr/>
-        </p:nvSpPr>
-        <p:spPr>
-          <a:xfrm>
-            <a:off x="1892336" y="4795411"/>
-            <a:ext cx="216024" cy="432048"/>
-          </a:xfrm>
-          <a:prstGeom prst="rect">
-            <a:avLst/>
-          </a:prstGeom>
-          <a:solidFill>
-            <a:schemeClr val="accent1">
-              <a:lumMod val="20000"/>
-              <a:lumOff val="80000"/>
-            </a:schemeClr>
-          </a:solidFill>
-        </p:spPr>
-        <p:style>
-          <a:lnRef idx="2">
-            <a:schemeClr val="accent1">
-              <a:shade val="50000"/>
-            </a:schemeClr>
-          </a:lnRef>
-          <a:fillRef idx="1">
-            <a:schemeClr val="accent1"/>
-          </a:fillRef>
-          <a:effectRef idx="0">
-            <a:schemeClr val="accent1"/>
-          </a:effectRef>
-          <a:fontRef idx="minor">
-            <a:schemeClr val="lt1"/>
-          </a:fontRef>
-        </p:style>
-        <p:txBody>
-          <a:bodyPr rtlCol="0" anchor="ctr"/>
-          <a:lstStyle/>
-          <a:p>
-            <a:pPr algn="ctr"/>
-            <a:r>
-              <a:rPr lang="de-AT" dirty="0">
-                <a:solidFill>
-                  <a:schemeClr val="tx2">
-                    <a:lumMod val="75000"/>
-                  </a:schemeClr>
-                </a:solidFill>
-              </a:rPr>
-              <a:t>0</a:t>
-            </a:r>
-          </a:p>
-        </p:txBody>
-      </p:sp>
-      <p:sp>
-        <p:nvSpPr>
-          <p:cNvPr id="20" name="Rechteck 19"/>
-          <p:cNvSpPr/>
-          <p:nvPr/>
-        </p:nvSpPr>
-        <p:spPr>
-          <a:xfrm>
-            <a:off x="2099897" y="4795411"/>
-            <a:ext cx="216024" cy="432048"/>
-          </a:xfrm>
-          <a:prstGeom prst="rect">
-            <a:avLst/>
-          </a:prstGeom>
-          <a:solidFill>
-            <a:schemeClr val="accent1">
-              <a:lumMod val="20000"/>
-              <a:lumOff val="80000"/>
-            </a:schemeClr>
-          </a:solidFill>
-        </p:spPr>
-        <p:style>
-          <a:lnRef idx="2">
-            <a:schemeClr val="accent1">
-              <a:shade val="50000"/>
-            </a:schemeClr>
-          </a:lnRef>
-          <a:fillRef idx="1">
-            <a:schemeClr val="accent1"/>
-          </a:fillRef>
-          <a:effectRef idx="0">
-            <a:schemeClr val="accent1"/>
-          </a:effectRef>
-          <a:fontRef idx="minor">
-            <a:schemeClr val="lt1"/>
-          </a:fontRef>
-        </p:style>
-        <p:txBody>
-          <a:bodyPr rtlCol="0" anchor="ctr"/>
-          <a:lstStyle/>
-          <a:p>
-            <a:pPr algn="ctr"/>
-            <a:r>
-              <a:rPr lang="de-AT" dirty="0">
-                <a:solidFill>
-                  <a:schemeClr val="tx2">
-                    <a:lumMod val="75000"/>
-                  </a:schemeClr>
-                </a:solidFill>
-              </a:rPr>
-              <a:t>0</a:t>
-            </a:r>
-          </a:p>
-        </p:txBody>
-      </p:sp>
-      <p:sp>
-        <p:nvSpPr>
-          <p:cNvPr id="21" name="Rechteck 20"/>
-          <p:cNvSpPr/>
-          <p:nvPr/>
-        </p:nvSpPr>
-        <p:spPr>
-          <a:xfrm>
-            <a:off x="2319245" y="4795411"/>
-            <a:ext cx="216024" cy="432048"/>
-          </a:xfrm>
-          <a:prstGeom prst="rect">
-            <a:avLst/>
-          </a:prstGeom>
-          <a:solidFill>
-            <a:schemeClr val="accent1">
-              <a:lumMod val="20000"/>
-              <a:lumOff val="80000"/>
-            </a:schemeClr>
-          </a:solidFill>
-        </p:spPr>
-        <p:style>
-          <a:lnRef idx="2">
-            <a:schemeClr val="accent1">
-              <a:shade val="50000"/>
-            </a:schemeClr>
-          </a:lnRef>
-          <a:fillRef idx="1">
-            <a:schemeClr val="accent1"/>
-          </a:fillRef>
-          <a:effectRef idx="0">
-            <a:schemeClr val="accent1"/>
-          </a:effectRef>
-          <a:fontRef idx="minor">
-            <a:schemeClr val="lt1"/>
-          </a:fontRef>
-        </p:style>
-        <p:txBody>
-          <a:bodyPr rtlCol="0" anchor="ctr"/>
-          <a:lstStyle/>
-          <a:p>
-            <a:pPr algn="ctr"/>
-            <a:r>
-              <a:rPr lang="de-AT" dirty="0">
-                <a:solidFill>
-                  <a:schemeClr val="tx2">
-                    <a:lumMod val="75000"/>
-                  </a:schemeClr>
-                </a:solidFill>
-              </a:rPr>
-              <a:t>0</a:t>
-            </a:r>
-          </a:p>
-        </p:txBody>
-      </p:sp>
-      <p:sp>
-        <p:nvSpPr>
-          <p:cNvPr id="22" name="Rechteck 21"/>
-          <p:cNvSpPr/>
-          <p:nvPr/>
-        </p:nvSpPr>
-        <p:spPr>
-          <a:xfrm>
-            <a:off x="2522084" y="4795411"/>
-            <a:ext cx="216024" cy="432048"/>
-          </a:xfrm>
-          <a:prstGeom prst="rect">
-            <a:avLst/>
-          </a:prstGeom>
-          <a:solidFill>
-            <a:schemeClr val="accent1">
-              <a:lumMod val="20000"/>
-              <a:lumOff val="80000"/>
-            </a:schemeClr>
-          </a:solidFill>
-        </p:spPr>
-        <p:style>
-          <a:lnRef idx="2">
-            <a:schemeClr val="accent1">
-              <a:shade val="50000"/>
-            </a:schemeClr>
-          </a:lnRef>
-          <a:fillRef idx="1">
-            <a:schemeClr val="accent1"/>
-          </a:fillRef>
-          <a:effectRef idx="0">
-            <a:schemeClr val="accent1"/>
-          </a:effectRef>
-          <a:fontRef idx="minor">
-            <a:schemeClr val="lt1"/>
-          </a:fontRef>
-        </p:style>
-        <p:txBody>
-          <a:bodyPr rtlCol="0" anchor="ctr"/>
-          <a:lstStyle/>
-          <a:p>
-            <a:pPr algn="ctr"/>
-            <a:r>
-              <a:rPr lang="de-AT" dirty="0">
-                <a:solidFill>
-                  <a:schemeClr val="tx2">
-                    <a:lumMod val="75000"/>
-                  </a:schemeClr>
-                </a:solidFill>
-              </a:rPr>
-              <a:t>1</a:t>
-            </a:r>
-          </a:p>
-        </p:txBody>
-      </p:sp>
-      <p:sp>
-        <p:nvSpPr>
-          <p:cNvPr id="23" name="Rechteck 22"/>
-          <p:cNvSpPr/>
-          <p:nvPr/>
-        </p:nvSpPr>
-        <p:spPr>
-          <a:xfrm>
-            <a:off x="2738108" y="4795411"/>
-            <a:ext cx="216024" cy="432048"/>
-          </a:xfrm>
-          <a:prstGeom prst="rect">
-            <a:avLst/>
-          </a:prstGeom>
-          <a:solidFill>
-            <a:schemeClr val="accent1">
-              <a:lumMod val="20000"/>
-              <a:lumOff val="80000"/>
-            </a:schemeClr>
-          </a:solidFill>
-        </p:spPr>
-        <p:style>
-          <a:lnRef idx="2">
-            <a:schemeClr val="accent1">
-              <a:shade val="50000"/>
-            </a:schemeClr>
-          </a:lnRef>
-          <a:fillRef idx="1">
-            <a:schemeClr val="accent1"/>
-          </a:fillRef>
-          <a:effectRef idx="0">
-            <a:schemeClr val="accent1"/>
-          </a:effectRef>
-          <a:fontRef idx="minor">
-            <a:schemeClr val="lt1"/>
-          </a:fontRef>
-        </p:style>
-        <p:txBody>
-          <a:bodyPr rtlCol="0" anchor="ctr"/>
-          <a:lstStyle/>
-          <a:p>
-            <a:pPr algn="ctr"/>
-            <a:r>
-              <a:rPr lang="de-AT" dirty="0">
-                <a:solidFill>
-                  <a:schemeClr val="tx2">
-                    <a:lumMod val="75000"/>
-                  </a:schemeClr>
-                </a:solidFill>
-              </a:rPr>
-              <a:t>1</a:t>
-            </a:r>
-          </a:p>
-        </p:txBody>
-      </p:sp>
-      <p:sp>
-        <p:nvSpPr>
-          <p:cNvPr id="24" name="Rechteck 23"/>
-          <p:cNvSpPr/>
-          <p:nvPr/>
-        </p:nvSpPr>
-        <p:spPr>
-          <a:xfrm>
-            <a:off x="2953808" y="4795411"/>
-            <a:ext cx="216024" cy="432048"/>
-          </a:xfrm>
-          <a:prstGeom prst="rect">
-            <a:avLst/>
-          </a:prstGeom>
-          <a:solidFill>
-            <a:schemeClr val="accent1">
-              <a:lumMod val="20000"/>
-              <a:lumOff val="80000"/>
-            </a:schemeClr>
-          </a:solidFill>
-        </p:spPr>
-        <p:style>
-          <a:lnRef idx="2">
-            <a:schemeClr val="accent1">
-              <a:shade val="50000"/>
-            </a:schemeClr>
-          </a:lnRef>
-          <a:fillRef idx="1">
-            <a:schemeClr val="accent1"/>
-          </a:fillRef>
-          <a:effectRef idx="0">
-            <a:schemeClr val="accent1"/>
-          </a:effectRef>
-          <a:fontRef idx="minor">
-            <a:schemeClr val="lt1"/>
-          </a:fontRef>
-        </p:style>
-        <p:txBody>
-          <a:bodyPr rtlCol="0" anchor="ctr"/>
-          <a:lstStyle/>
-          <a:p>
-            <a:pPr algn="ctr"/>
-            <a:r>
-              <a:rPr lang="de-AT" dirty="0">
-                <a:solidFill>
-                  <a:schemeClr val="tx2">
-                    <a:lumMod val="75000"/>
-                  </a:schemeClr>
-                </a:solidFill>
-              </a:rPr>
-              <a:t>0</a:t>
-            </a:r>
-          </a:p>
-        </p:txBody>
-      </p:sp>
-      <p:sp>
-        <p:nvSpPr>
-          <p:cNvPr id="25" name="Rechteck 24"/>
-          <p:cNvSpPr/>
-          <p:nvPr/>
-        </p:nvSpPr>
-        <p:spPr>
-          <a:xfrm>
-            <a:off x="3175883" y="4795411"/>
-            <a:ext cx="216024" cy="432048"/>
-          </a:xfrm>
-          <a:prstGeom prst="rect">
-            <a:avLst/>
-          </a:prstGeom>
-          <a:solidFill>
-            <a:schemeClr val="accent1">
-              <a:lumMod val="20000"/>
-              <a:lumOff val="80000"/>
-            </a:schemeClr>
-          </a:solidFill>
-        </p:spPr>
-        <p:style>
-          <a:lnRef idx="2">
-            <a:schemeClr val="accent1">
-              <a:shade val="50000"/>
-            </a:schemeClr>
-          </a:lnRef>
-          <a:fillRef idx="1">
-            <a:schemeClr val="accent1"/>
-          </a:fillRef>
-          <a:effectRef idx="0">
-            <a:schemeClr val="accent1"/>
-          </a:effectRef>
-          <a:fontRef idx="minor">
-            <a:schemeClr val="lt1"/>
-          </a:fontRef>
-        </p:style>
-        <p:txBody>
-          <a:bodyPr rtlCol="0" anchor="ctr"/>
-          <a:lstStyle/>
-          <a:p>
-            <a:pPr algn="ctr"/>
-            <a:r>
-              <a:rPr lang="de-AT" dirty="0">
-                <a:solidFill>
-                  <a:schemeClr val="tx2">
-                    <a:lumMod val="75000"/>
-                  </a:schemeClr>
-                </a:solidFill>
-              </a:rPr>
-              <a:t>0</a:t>
-            </a:r>
-          </a:p>
-        </p:txBody>
-      </p:sp>
-      <p:sp>
-        <p:nvSpPr>
-          <p:cNvPr id="26" name="Rechteck 25"/>
-          <p:cNvSpPr/>
-          <p:nvPr/>
-        </p:nvSpPr>
-        <p:spPr>
-          <a:xfrm>
-            <a:off x="3386045" y="4795411"/>
-            <a:ext cx="216024" cy="432048"/>
-          </a:xfrm>
-          <a:prstGeom prst="rect">
-            <a:avLst/>
-          </a:prstGeom>
-          <a:solidFill>
-            <a:schemeClr val="accent1">
-              <a:lumMod val="20000"/>
-              <a:lumOff val="80000"/>
-            </a:schemeClr>
-          </a:solidFill>
-        </p:spPr>
-        <p:style>
-          <a:lnRef idx="2">
-            <a:schemeClr val="accent1">
-              <a:shade val="50000"/>
-            </a:schemeClr>
-          </a:lnRef>
-          <a:fillRef idx="1">
-            <a:schemeClr val="accent1"/>
-          </a:fillRef>
-          <a:effectRef idx="0">
-            <a:schemeClr val="accent1"/>
-          </a:effectRef>
-          <a:fontRef idx="minor">
-            <a:schemeClr val="lt1"/>
-          </a:fontRef>
-        </p:style>
-        <p:txBody>
-          <a:bodyPr rtlCol="0" anchor="ctr"/>
-          <a:lstStyle/>
-          <a:p>
-            <a:pPr algn="ctr"/>
-            <a:r>
-              <a:rPr lang="de-AT" dirty="0">
-                <a:solidFill>
-                  <a:schemeClr val="tx2">
-                    <a:lumMod val="75000"/>
-                  </a:schemeClr>
-                </a:solidFill>
-              </a:rPr>
-              <a:t>1</a:t>
-            </a:r>
-          </a:p>
-        </p:txBody>
-      </p:sp>
-      <p:sp>
-        <p:nvSpPr>
-          <p:cNvPr id="27" name="Rechteck 26"/>
-          <p:cNvSpPr/>
-          <p:nvPr/>
-        </p:nvSpPr>
-        <p:spPr>
-          <a:xfrm>
-            <a:off x="3602069" y="4795411"/>
-            <a:ext cx="216024" cy="432048"/>
-          </a:xfrm>
-          <a:prstGeom prst="rect">
-            <a:avLst/>
-          </a:prstGeom>
-          <a:solidFill>
-            <a:schemeClr val="accent1">
-              <a:lumMod val="20000"/>
-              <a:lumOff val="80000"/>
-            </a:schemeClr>
-          </a:solidFill>
-        </p:spPr>
-        <p:style>
-          <a:lnRef idx="2">
-            <a:schemeClr val="accent1">
-              <a:shade val="50000"/>
-            </a:schemeClr>
-          </a:lnRef>
-          <a:fillRef idx="1">
-            <a:schemeClr val="accent1"/>
-          </a:fillRef>
-          <a:effectRef idx="0">
-            <a:schemeClr val="accent1"/>
-          </a:effectRef>
-          <a:fontRef idx="minor">
-            <a:schemeClr val="lt1"/>
-          </a:fontRef>
-        </p:style>
-        <p:txBody>
-          <a:bodyPr rtlCol="0" anchor="ctr"/>
-          <a:lstStyle/>
-          <a:p>
-            <a:pPr algn="ctr"/>
-            <a:r>
-              <a:rPr lang="de-AT" dirty="0">
-                <a:solidFill>
-                  <a:schemeClr val="tx2">
-                    <a:lumMod val="75000"/>
-                  </a:schemeClr>
-                </a:solidFill>
-              </a:rPr>
-              <a:t>0</a:t>
-            </a:r>
-          </a:p>
-        </p:txBody>
-      </p:sp>
-      <p:sp>
-        <p:nvSpPr>
-          <p:cNvPr id="28" name="Rechteck 27"/>
-          <p:cNvSpPr/>
-          <p:nvPr/>
-        </p:nvSpPr>
-        <p:spPr>
-          <a:xfrm>
-            <a:off x="3809630" y="4795411"/>
-            <a:ext cx="216024" cy="432048"/>
-          </a:xfrm>
-          <a:prstGeom prst="rect">
-            <a:avLst/>
-          </a:prstGeom>
-          <a:solidFill>
-            <a:schemeClr val="accent1">
-              <a:lumMod val="20000"/>
-              <a:lumOff val="80000"/>
-            </a:schemeClr>
-          </a:solidFill>
-        </p:spPr>
-        <p:style>
-          <a:lnRef idx="2">
-            <a:schemeClr val="accent1">
-              <a:shade val="50000"/>
-            </a:schemeClr>
-          </a:lnRef>
-          <a:fillRef idx="1">
-            <a:schemeClr val="accent1"/>
-          </a:fillRef>
-          <a:effectRef idx="0">
-            <a:schemeClr val="accent1"/>
-          </a:effectRef>
-          <a:fontRef idx="minor">
-            <a:schemeClr val="lt1"/>
-          </a:fontRef>
-        </p:style>
-        <p:txBody>
-          <a:bodyPr rtlCol="0" anchor="ctr"/>
-          <a:lstStyle/>
-          <a:p>
-            <a:pPr algn="ctr"/>
-            <a:r>
-              <a:rPr lang="de-AT" dirty="0">
-                <a:solidFill>
-                  <a:schemeClr val="tx2">
-                    <a:lumMod val="75000"/>
-                  </a:schemeClr>
-                </a:solidFill>
-              </a:rPr>
-              <a:t>0</a:t>
-            </a:r>
-          </a:p>
-        </p:txBody>
-      </p:sp>
-      <p:sp>
-        <p:nvSpPr>
-          <p:cNvPr id="29" name="Rechteck 28"/>
-          <p:cNvSpPr/>
-          <p:nvPr/>
-        </p:nvSpPr>
-        <p:spPr>
-          <a:xfrm>
-            <a:off x="4025654" y="4795411"/>
-            <a:ext cx="216024" cy="432048"/>
-          </a:xfrm>
-          <a:prstGeom prst="rect">
-            <a:avLst/>
-          </a:prstGeom>
-          <a:solidFill>
-            <a:schemeClr val="accent1">
-              <a:lumMod val="20000"/>
-              <a:lumOff val="80000"/>
-            </a:schemeClr>
-          </a:solidFill>
-        </p:spPr>
-        <p:style>
-          <a:lnRef idx="2">
-            <a:schemeClr val="accent1">
-              <a:shade val="50000"/>
-            </a:schemeClr>
-          </a:lnRef>
-          <a:fillRef idx="1">
-            <a:schemeClr val="accent1"/>
-          </a:fillRef>
-          <a:effectRef idx="0">
-            <a:schemeClr val="accent1"/>
-          </a:effectRef>
-          <a:fontRef idx="minor">
-            <a:schemeClr val="lt1"/>
-          </a:fontRef>
-        </p:style>
-        <p:txBody>
-          <a:bodyPr rtlCol="0" anchor="ctr"/>
-          <a:lstStyle/>
-          <a:p>
-            <a:pPr algn="ctr"/>
-            <a:r>
-              <a:rPr lang="de-AT" dirty="0">
-                <a:solidFill>
-                  <a:schemeClr val="tx2">
-                    <a:lumMod val="75000"/>
-                  </a:schemeClr>
-                </a:solidFill>
-              </a:rPr>
-              <a:t>0</a:t>
-            </a:r>
-          </a:p>
-        </p:txBody>
-      </p:sp>
-      <p:sp>
-        <p:nvSpPr>
-          <p:cNvPr id="30" name="Rechteck 29"/>
-          <p:cNvSpPr/>
-          <p:nvPr/>
-        </p:nvSpPr>
-        <p:spPr>
-          <a:xfrm>
-            <a:off x="4228493" y="4795411"/>
-            <a:ext cx="216024" cy="432048"/>
-          </a:xfrm>
-          <a:prstGeom prst="rect">
-            <a:avLst/>
-          </a:prstGeom>
-          <a:solidFill>
-            <a:schemeClr val="accent1">
-              <a:lumMod val="20000"/>
-              <a:lumOff val="80000"/>
-            </a:schemeClr>
-          </a:solidFill>
-        </p:spPr>
-        <p:style>
-          <a:lnRef idx="2">
-            <a:schemeClr val="accent1">
-              <a:shade val="50000"/>
-            </a:schemeClr>
-          </a:lnRef>
-          <a:fillRef idx="1">
-            <a:schemeClr val="accent1"/>
-          </a:fillRef>
-          <a:effectRef idx="0">
-            <a:schemeClr val="accent1"/>
-          </a:effectRef>
-          <a:fontRef idx="minor">
-            <a:schemeClr val="lt1"/>
-          </a:fontRef>
-        </p:style>
-        <p:txBody>
-          <a:bodyPr rtlCol="0" anchor="ctr"/>
-          <a:lstStyle/>
-          <a:p>
-            <a:pPr algn="ctr"/>
-            <a:r>
-              <a:rPr lang="de-AT" dirty="0">
-                <a:solidFill>
-                  <a:schemeClr val="tx2">
-                    <a:lumMod val="75000"/>
-                  </a:schemeClr>
-                </a:solidFill>
-              </a:rPr>
-              <a:t>1</a:t>
-            </a:r>
-          </a:p>
-        </p:txBody>
-      </p:sp>
-      <p:sp>
-        <p:nvSpPr>
-          <p:cNvPr id="31" name="Rechteck 30"/>
-          <p:cNvSpPr/>
-          <p:nvPr/>
-        </p:nvSpPr>
-        <p:spPr>
-          <a:xfrm>
-            <a:off x="4444517" y="4795411"/>
-            <a:ext cx="216024" cy="432048"/>
-          </a:xfrm>
-          <a:prstGeom prst="rect">
-            <a:avLst/>
-          </a:prstGeom>
-          <a:solidFill>
-            <a:schemeClr val="accent1">
-              <a:lumMod val="20000"/>
-              <a:lumOff val="80000"/>
-            </a:schemeClr>
-          </a:solidFill>
-        </p:spPr>
-        <p:style>
-          <a:lnRef idx="2">
-            <a:schemeClr val="accent1">
-              <a:shade val="50000"/>
-            </a:schemeClr>
-          </a:lnRef>
-          <a:fillRef idx="1">
-            <a:schemeClr val="accent1"/>
-          </a:fillRef>
-          <a:effectRef idx="0">
-            <a:schemeClr val="accent1"/>
-          </a:effectRef>
-          <a:fontRef idx="minor">
-            <a:schemeClr val="lt1"/>
-          </a:fontRef>
-        </p:style>
-        <p:txBody>
-          <a:bodyPr rtlCol="0" anchor="ctr"/>
-          <a:lstStyle/>
-          <a:p>
-            <a:pPr algn="ctr"/>
-            <a:r>
-              <a:rPr lang="de-AT" dirty="0">
-                <a:solidFill>
-                  <a:schemeClr val="tx2">
-                    <a:lumMod val="75000"/>
-                  </a:schemeClr>
-                </a:solidFill>
-              </a:rPr>
-              <a:t>1</a:t>
-            </a:r>
-          </a:p>
-        </p:txBody>
-      </p:sp>
-      <p:sp>
-        <p:nvSpPr>
-          <p:cNvPr id="32" name="Rechteck 31"/>
-          <p:cNvSpPr/>
-          <p:nvPr/>
-        </p:nvSpPr>
-        <p:spPr>
-          <a:xfrm>
-            <a:off x="4660217" y="4795411"/>
-            <a:ext cx="216024" cy="432048"/>
-          </a:xfrm>
-          <a:prstGeom prst="rect">
-            <a:avLst/>
-          </a:prstGeom>
-          <a:solidFill>
-            <a:schemeClr val="accent1">
-              <a:lumMod val="20000"/>
-              <a:lumOff val="80000"/>
-            </a:schemeClr>
-          </a:solidFill>
-        </p:spPr>
-        <p:style>
-          <a:lnRef idx="2">
-            <a:schemeClr val="accent1">
-              <a:shade val="50000"/>
-            </a:schemeClr>
-          </a:lnRef>
-          <a:fillRef idx="1">
-            <a:schemeClr val="accent1"/>
-          </a:fillRef>
-          <a:effectRef idx="0">
-            <a:schemeClr val="accent1"/>
-          </a:effectRef>
-          <a:fontRef idx="minor">
-            <a:schemeClr val="lt1"/>
-          </a:fontRef>
-        </p:style>
-        <p:txBody>
-          <a:bodyPr rtlCol="0" anchor="ctr"/>
-          <a:lstStyle/>
-          <a:p>
-            <a:pPr algn="ctr"/>
-            <a:r>
-              <a:rPr lang="de-AT" dirty="0">
-                <a:solidFill>
-                  <a:schemeClr val="tx2">
-                    <a:lumMod val="75000"/>
-                  </a:schemeClr>
-                </a:solidFill>
-              </a:rPr>
-              <a:t>0</a:t>
-            </a:r>
-          </a:p>
-        </p:txBody>
-      </p:sp>
-      <p:sp>
-        <p:nvSpPr>
-          <p:cNvPr id="33" name="Rechteck 32"/>
-          <p:cNvSpPr/>
-          <p:nvPr/>
-        </p:nvSpPr>
-        <p:spPr>
-          <a:xfrm>
-            <a:off x="4882292" y="4795411"/>
-            <a:ext cx="216024" cy="432048"/>
-          </a:xfrm>
-          <a:prstGeom prst="rect">
-            <a:avLst/>
-          </a:prstGeom>
-          <a:solidFill>
-            <a:schemeClr val="accent1">
-              <a:lumMod val="20000"/>
-              <a:lumOff val="80000"/>
-            </a:schemeClr>
-          </a:solidFill>
-        </p:spPr>
-        <p:style>
-          <a:lnRef idx="2">
-            <a:schemeClr val="accent1">
-              <a:shade val="50000"/>
-            </a:schemeClr>
-          </a:lnRef>
-          <a:fillRef idx="1">
-            <a:schemeClr val="accent1"/>
-          </a:fillRef>
-          <a:effectRef idx="0">
-            <a:schemeClr val="accent1"/>
-          </a:effectRef>
-          <a:fontRef idx="minor">
-            <a:schemeClr val="lt1"/>
-          </a:fontRef>
-        </p:style>
-        <p:txBody>
-          <a:bodyPr rtlCol="0" anchor="ctr"/>
-          <a:lstStyle/>
-          <a:p>
-            <a:pPr algn="ctr"/>
-            <a:r>
-              <a:rPr lang="de-AT" dirty="0">
-                <a:solidFill>
-                  <a:schemeClr val="tx2">
-                    <a:lumMod val="75000"/>
-                  </a:schemeClr>
-                </a:solidFill>
-              </a:rPr>
-              <a:t>0</a:t>
-            </a:r>
-          </a:p>
-        </p:txBody>
-      </p:sp>
-      <p:sp>
-        <p:nvSpPr>
-          <p:cNvPr id="34" name="Rechteck 33"/>
-          <p:cNvSpPr/>
-          <p:nvPr/>
-        </p:nvSpPr>
-        <p:spPr>
-          <a:xfrm>
-            <a:off x="5092454" y="4795411"/>
-            <a:ext cx="216024" cy="432048"/>
-          </a:xfrm>
-          <a:prstGeom prst="rect">
-            <a:avLst/>
-          </a:prstGeom>
-          <a:solidFill>
-            <a:schemeClr val="accent1">
-              <a:lumMod val="20000"/>
-              <a:lumOff val="80000"/>
-            </a:schemeClr>
-          </a:solidFill>
-        </p:spPr>
-        <p:style>
-          <a:lnRef idx="2">
-            <a:schemeClr val="accent1">
-              <a:shade val="50000"/>
-            </a:schemeClr>
-          </a:lnRef>
-          <a:fillRef idx="1">
-            <a:schemeClr val="accent1"/>
-          </a:fillRef>
-          <a:effectRef idx="0">
-            <a:schemeClr val="accent1"/>
-          </a:effectRef>
-          <a:fontRef idx="minor">
-            <a:schemeClr val="lt1"/>
-          </a:fontRef>
-        </p:style>
-        <p:txBody>
-          <a:bodyPr rtlCol="0" anchor="ctr"/>
-          <a:lstStyle/>
-          <a:p>
-            <a:pPr algn="ctr"/>
-            <a:r>
-              <a:rPr lang="de-AT" dirty="0">
-                <a:solidFill>
-                  <a:schemeClr val="tx2">
-                    <a:lumMod val="75000"/>
-                  </a:schemeClr>
-                </a:solidFill>
-              </a:rPr>
-              <a:t>1</a:t>
-            </a:r>
-          </a:p>
-        </p:txBody>
-      </p:sp>
-      <p:sp>
-        <p:nvSpPr>
-          <p:cNvPr id="35" name="Rechteck 34"/>
-          <p:cNvSpPr/>
-          <p:nvPr/>
-        </p:nvSpPr>
-        <p:spPr>
-          <a:xfrm>
-            <a:off x="5308478" y="4795411"/>
-            <a:ext cx="216024" cy="432048"/>
-          </a:xfrm>
-          <a:prstGeom prst="rect">
-            <a:avLst/>
-          </a:prstGeom>
-          <a:solidFill>
-            <a:schemeClr val="accent1">
-              <a:lumMod val="20000"/>
-              <a:lumOff val="80000"/>
-            </a:schemeClr>
-          </a:solidFill>
-        </p:spPr>
-        <p:style>
-          <a:lnRef idx="2">
-            <a:schemeClr val="accent1">
-              <a:shade val="50000"/>
-            </a:schemeClr>
-          </a:lnRef>
-          <a:fillRef idx="1">
-            <a:schemeClr val="accent1"/>
-          </a:fillRef>
-          <a:effectRef idx="0">
-            <a:schemeClr val="accent1"/>
-          </a:effectRef>
-          <a:fontRef idx="minor">
-            <a:schemeClr val="lt1"/>
-          </a:fontRef>
-        </p:style>
-        <p:txBody>
-          <a:bodyPr rtlCol="0" anchor="ctr"/>
-          <a:lstStyle/>
-          <a:p>
-            <a:pPr algn="ctr"/>
-            <a:r>
-              <a:rPr lang="de-AT" dirty="0">
-                <a:solidFill>
-                  <a:schemeClr val="tx2">
-                    <a:lumMod val="75000"/>
-                  </a:schemeClr>
-                </a:solidFill>
-              </a:rPr>
-              <a:t>0</a:t>
-            </a:r>
-          </a:p>
-        </p:txBody>
-      </p:sp>
-      <p:sp>
-        <p:nvSpPr>
-          <p:cNvPr id="36" name="Rechteck 35"/>
-          <p:cNvSpPr/>
-          <p:nvPr/>
-        </p:nvSpPr>
-        <p:spPr>
-          <a:xfrm>
-            <a:off x="5516039" y="4795411"/>
-            <a:ext cx="216024" cy="432048"/>
-          </a:xfrm>
-          <a:prstGeom prst="rect">
-            <a:avLst/>
-          </a:prstGeom>
-          <a:solidFill>
-            <a:schemeClr val="accent1">
-              <a:lumMod val="20000"/>
-              <a:lumOff val="80000"/>
-            </a:schemeClr>
-          </a:solidFill>
-        </p:spPr>
-        <p:style>
-          <a:lnRef idx="2">
-            <a:schemeClr val="accent1">
-              <a:shade val="50000"/>
-            </a:schemeClr>
-          </a:lnRef>
-          <a:fillRef idx="1">
-            <a:schemeClr val="accent1"/>
-          </a:fillRef>
-          <a:effectRef idx="0">
-            <a:schemeClr val="accent1"/>
-          </a:effectRef>
-          <a:fontRef idx="minor">
-            <a:schemeClr val="lt1"/>
-          </a:fontRef>
-        </p:style>
-        <p:txBody>
-          <a:bodyPr rtlCol="0" anchor="ctr"/>
-          <a:lstStyle/>
-          <a:p>
-            <a:pPr algn="ctr"/>
-            <a:r>
-              <a:rPr lang="de-AT" dirty="0">
-                <a:solidFill>
-                  <a:schemeClr val="tx2">
-                    <a:lumMod val="75000"/>
-                  </a:schemeClr>
-                </a:solidFill>
-              </a:rPr>
-              <a:t>0</a:t>
-            </a:r>
-          </a:p>
-        </p:txBody>
-      </p:sp>
-      <p:sp>
-        <p:nvSpPr>
-          <p:cNvPr id="37" name="Rechteck 36"/>
-          <p:cNvSpPr/>
-          <p:nvPr/>
-        </p:nvSpPr>
-        <p:spPr>
-          <a:xfrm>
-            <a:off x="5722080" y="4795411"/>
-            <a:ext cx="216024" cy="432048"/>
-          </a:xfrm>
-          <a:prstGeom prst="rect">
-            <a:avLst/>
-          </a:prstGeom>
-          <a:solidFill>
-            <a:schemeClr val="accent1">
-              <a:lumMod val="20000"/>
-              <a:lumOff val="80000"/>
-            </a:schemeClr>
-          </a:solidFill>
-        </p:spPr>
-        <p:style>
-          <a:lnRef idx="2">
-            <a:schemeClr val="accent1">
-              <a:shade val="50000"/>
-            </a:schemeClr>
-          </a:lnRef>
-          <a:fillRef idx="1">
-            <a:schemeClr val="accent1"/>
-          </a:fillRef>
-          <a:effectRef idx="0">
-            <a:schemeClr val="accent1"/>
-          </a:effectRef>
-          <a:fontRef idx="minor">
-            <a:schemeClr val="lt1"/>
-          </a:fontRef>
-        </p:style>
-        <p:txBody>
-          <a:bodyPr rtlCol="0" anchor="ctr"/>
-          <a:lstStyle/>
-          <a:p>
-            <a:pPr algn="ctr"/>
-            <a:r>
-              <a:rPr lang="de-AT" dirty="0">
-                <a:solidFill>
-                  <a:schemeClr val="tx2">
-                    <a:lumMod val="75000"/>
-                  </a:schemeClr>
-                </a:solidFill>
-              </a:rPr>
-              <a:t>0</a:t>
-            </a:r>
-          </a:p>
-        </p:txBody>
-      </p:sp>
-      <p:sp>
-        <p:nvSpPr>
-          <p:cNvPr id="38" name="Rechteck 37"/>
-          <p:cNvSpPr/>
-          <p:nvPr/>
-        </p:nvSpPr>
-        <p:spPr>
-          <a:xfrm>
-            <a:off x="5924919" y="4795411"/>
-            <a:ext cx="216024" cy="432048"/>
-          </a:xfrm>
-          <a:prstGeom prst="rect">
-            <a:avLst/>
-          </a:prstGeom>
-          <a:solidFill>
-            <a:schemeClr val="accent1">
-              <a:lumMod val="20000"/>
-              <a:lumOff val="80000"/>
-            </a:schemeClr>
-          </a:solidFill>
-        </p:spPr>
-        <p:style>
-          <a:lnRef idx="2">
-            <a:schemeClr val="accent1">
-              <a:shade val="50000"/>
-            </a:schemeClr>
-          </a:lnRef>
-          <a:fillRef idx="1">
-            <a:schemeClr val="accent1"/>
-          </a:fillRef>
-          <a:effectRef idx="0">
-            <a:schemeClr val="accent1"/>
-          </a:effectRef>
-          <a:fontRef idx="minor">
-            <a:schemeClr val="lt1"/>
-          </a:fontRef>
-        </p:style>
-        <p:txBody>
-          <a:bodyPr rtlCol="0" anchor="ctr"/>
-          <a:lstStyle/>
-          <a:p>
-            <a:pPr algn="ctr"/>
-            <a:r>
-              <a:rPr lang="de-AT" dirty="0">
-                <a:solidFill>
-                  <a:schemeClr val="tx2">
-                    <a:lumMod val="75000"/>
-                  </a:schemeClr>
-                </a:solidFill>
-              </a:rPr>
-              <a:t>1</a:t>
-            </a:r>
-          </a:p>
-        </p:txBody>
-      </p:sp>
-      <p:sp>
-        <p:nvSpPr>
-          <p:cNvPr id="39" name="Rechteck 38"/>
-          <p:cNvSpPr/>
-          <p:nvPr/>
-        </p:nvSpPr>
-        <p:spPr>
-          <a:xfrm>
-            <a:off x="6140943" y="4795411"/>
-            <a:ext cx="216024" cy="432048"/>
-          </a:xfrm>
-          <a:prstGeom prst="rect">
-            <a:avLst/>
-          </a:prstGeom>
-          <a:solidFill>
-            <a:schemeClr val="accent1">
-              <a:lumMod val="20000"/>
-              <a:lumOff val="80000"/>
-            </a:schemeClr>
-          </a:solidFill>
-        </p:spPr>
-        <p:style>
-          <a:lnRef idx="2">
-            <a:schemeClr val="accent1">
-              <a:shade val="50000"/>
-            </a:schemeClr>
-          </a:lnRef>
-          <a:fillRef idx="1">
-            <a:schemeClr val="accent1"/>
-          </a:fillRef>
-          <a:effectRef idx="0">
-            <a:schemeClr val="accent1"/>
-          </a:effectRef>
-          <a:fontRef idx="minor">
-            <a:schemeClr val="lt1"/>
-          </a:fontRef>
-        </p:style>
-        <p:txBody>
-          <a:bodyPr rtlCol="0" anchor="ctr"/>
-          <a:lstStyle/>
-          <a:p>
-            <a:pPr algn="ctr"/>
-            <a:r>
-              <a:rPr lang="de-AT" dirty="0">
-                <a:solidFill>
-                  <a:schemeClr val="tx2">
-                    <a:lumMod val="75000"/>
-                  </a:schemeClr>
-                </a:solidFill>
-              </a:rPr>
-              <a:t>1</a:t>
-            </a:r>
-          </a:p>
-        </p:txBody>
-      </p:sp>
-      <p:sp>
-        <p:nvSpPr>
-          <p:cNvPr id="40" name="Rechteck 39"/>
-          <p:cNvSpPr/>
-          <p:nvPr/>
-        </p:nvSpPr>
-        <p:spPr>
-          <a:xfrm>
-            <a:off x="6356643" y="4795411"/>
-            <a:ext cx="216024" cy="432048"/>
-          </a:xfrm>
-          <a:prstGeom prst="rect">
-            <a:avLst/>
-          </a:prstGeom>
-          <a:solidFill>
-            <a:schemeClr val="accent1">
-              <a:lumMod val="20000"/>
-              <a:lumOff val="80000"/>
-            </a:schemeClr>
-          </a:solidFill>
-        </p:spPr>
-        <p:style>
-          <a:lnRef idx="2">
-            <a:schemeClr val="accent1">
-              <a:shade val="50000"/>
-            </a:schemeClr>
-          </a:lnRef>
-          <a:fillRef idx="1">
-            <a:schemeClr val="accent1"/>
-          </a:fillRef>
-          <a:effectRef idx="0">
-            <a:schemeClr val="accent1"/>
-          </a:effectRef>
-          <a:fontRef idx="minor">
-            <a:schemeClr val="lt1"/>
-          </a:fontRef>
-        </p:style>
-        <p:txBody>
-          <a:bodyPr rtlCol="0" anchor="ctr"/>
-          <a:lstStyle/>
-          <a:p>
-            <a:pPr algn="ctr"/>
-            <a:r>
-              <a:rPr lang="de-AT" dirty="0">
-                <a:solidFill>
-                  <a:schemeClr val="tx2">
-                    <a:lumMod val="75000"/>
-                  </a:schemeClr>
-                </a:solidFill>
-              </a:rPr>
-              <a:t>0</a:t>
-            </a:r>
-          </a:p>
-        </p:txBody>
-      </p:sp>
-      <p:sp>
-        <p:nvSpPr>
-          <p:cNvPr id="41" name="Rechteck 40"/>
-          <p:cNvSpPr/>
-          <p:nvPr/>
-        </p:nvSpPr>
-        <p:spPr>
-          <a:xfrm>
-            <a:off x="6578718" y="4795411"/>
-            <a:ext cx="216024" cy="432048"/>
-          </a:xfrm>
-          <a:prstGeom prst="rect">
-            <a:avLst/>
-          </a:prstGeom>
-          <a:solidFill>
-            <a:schemeClr val="accent1">
-              <a:lumMod val="20000"/>
-              <a:lumOff val="80000"/>
-            </a:schemeClr>
-          </a:solidFill>
-        </p:spPr>
-        <p:style>
-          <a:lnRef idx="2">
-            <a:schemeClr val="accent1">
-              <a:shade val="50000"/>
-            </a:schemeClr>
-          </a:lnRef>
-          <a:fillRef idx="1">
-            <a:schemeClr val="accent1"/>
-          </a:fillRef>
-          <a:effectRef idx="0">
-            <a:schemeClr val="accent1"/>
-          </a:effectRef>
-          <a:fontRef idx="minor">
-            <a:schemeClr val="lt1"/>
-          </a:fontRef>
-        </p:style>
-        <p:txBody>
-          <a:bodyPr rtlCol="0" anchor="ctr"/>
-          <a:lstStyle/>
-          <a:p>
-            <a:pPr algn="ctr"/>
-            <a:r>
-              <a:rPr lang="de-AT" dirty="0">
-                <a:solidFill>
-                  <a:schemeClr val="tx2">
-                    <a:lumMod val="75000"/>
-                  </a:schemeClr>
-                </a:solidFill>
-              </a:rPr>
-              <a:t>0</a:t>
-            </a:r>
-          </a:p>
-        </p:txBody>
-      </p:sp>
-      <p:sp>
-        <p:nvSpPr>
-          <p:cNvPr id="42" name="Rechteck 41"/>
-          <p:cNvSpPr/>
-          <p:nvPr/>
-        </p:nvSpPr>
-        <p:spPr>
-          <a:xfrm>
-            <a:off x="6788880" y="4795411"/>
-            <a:ext cx="216024" cy="432048"/>
-          </a:xfrm>
-          <a:prstGeom prst="rect">
-            <a:avLst/>
-          </a:prstGeom>
-          <a:solidFill>
-            <a:schemeClr val="accent1">
-              <a:lumMod val="20000"/>
-              <a:lumOff val="80000"/>
-            </a:schemeClr>
-          </a:solidFill>
-        </p:spPr>
-        <p:style>
-          <a:lnRef idx="2">
-            <a:schemeClr val="accent1">
-              <a:shade val="50000"/>
-            </a:schemeClr>
-          </a:lnRef>
-          <a:fillRef idx="1">
-            <a:schemeClr val="accent1"/>
-          </a:fillRef>
-          <a:effectRef idx="0">
-            <a:schemeClr val="accent1"/>
-          </a:effectRef>
-          <a:fontRef idx="minor">
-            <a:schemeClr val="lt1"/>
-          </a:fontRef>
-        </p:style>
-        <p:txBody>
-          <a:bodyPr rtlCol="0" anchor="ctr"/>
-          <a:lstStyle/>
-          <a:p>
-            <a:pPr algn="ctr"/>
-            <a:r>
-              <a:rPr lang="de-AT" dirty="0">
-                <a:solidFill>
-                  <a:schemeClr val="tx2">
-                    <a:lumMod val="75000"/>
-                  </a:schemeClr>
-                </a:solidFill>
-              </a:rPr>
-              <a:t>1</a:t>
-            </a:r>
-          </a:p>
-        </p:txBody>
-      </p:sp>
-      <p:sp>
-        <p:nvSpPr>
-          <p:cNvPr id="43" name="Rechteck 42"/>
-          <p:cNvSpPr/>
-          <p:nvPr/>
-        </p:nvSpPr>
-        <p:spPr>
-          <a:xfrm>
-            <a:off x="7004904" y="4795411"/>
-            <a:ext cx="216024" cy="432048"/>
-          </a:xfrm>
-          <a:prstGeom prst="rect">
-            <a:avLst/>
-          </a:prstGeom>
-          <a:solidFill>
-            <a:schemeClr val="accent1">
-              <a:lumMod val="20000"/>
-              <a:lumOff val="80000"/>
-            </a:schemeClr>
-          </a:solidFill>
-        </p:spPr>
-        <p:style>
-          <a:lnRef idx="2">
-            <a:schemeClr val="accent1">
-              <a:shade val="50000"/>
-            </a:schemeClr>
-          </a:lnRef>
-          <a:fillRef idx="1">
-            <a:schemeClr val="accent1"/>
-          </a:fillRef>
-          <a:effectRef idx="0">
-            <a:schemeClr val="accent1"/>
-          </a:effectRef>
-          <a:fontRef idx="minor">
-            <a:schemeClr val="lt1"/>
-          </a:fontRef>
-        </p:style>
-        <p:txBody>
-          <a:bodyPr rtlCol="0" anchor="ctr"/>
-          <a:lstStyle/>
-          <a:p>
-            <a:pPr algn="ctr"/>
-            <a:r>
-              <a:rPr lang="de-AT" dirty="0">
-                <a:solidFill>
-                  <a:schemeClr val="tx2">
-                    <a:lumMod val="75000"/>
-                  </a:schemeClr>
-                </a:solidFill>
-              </a:rPr>
-              <a:t>0</a:t>
-            </a:r>
-          </a:p>
-        </p:txBody>
-      </p:sp>
-      <p:sp>
-        <p:nvSpPr>
-          <p:cNvPr id="44" name="Rechteck 43"/>
-          <p:cNvSpPr/>
-          <p:nvPr/>
-        </p:nvSpPr>
-        <p:spPr>
-          <a:xfrm>
-            <a:off x="7212465" y="4795411"/>
-            <a:ext cx="216024" cy="432048"/>
-          </a:xfrm>
-          <a:prstGeom prst="rect">
-            <a:avLst/>
-          </a:prstGeom>
-          <a:solidFill>
-            <a:schemeClr val="accent1">
-              <a:lumMod val="20000"/>
-              <a:lumOff val="80000"/>
-            </a:schemeClr>
-          </a:solidFill>
-        </p:spPr>
-        <p:style>
-          <a:lnRef idx="2">
-            <a:schemeClr val="accent1">
-              <a:shade val="50000"/>
-            </a:schemeClr>
-          </a:lnRef>
-          <a:fillRef idx="1">
-            <a:schemeClr val="accent1"/>
-          </a:fillRef>
-          <a:effectRef idx="0">
-            <a:schemeClr val="accent1"/>
-          </a:effectRef>
-          <a:fontRef idx="minor">
-            <a:schemeClr val="lt1"/>
-          </a:fontRef>
-        </p:style>
-        <p:txBody>
-          <a:bodyPr rtlCol="0" anchor="ctr"/>
-          <a:lstStyle/>
-          <a:p>
-            <a:pPr algn="ctr"/>
-            <a:r>
-              <a:rPr lang="de-AT" dirty="0">
-                <a:solidFill>
-                  <a:schemeClr val="tx2">
-                    <a:lumMod val="75000"/>
-                  </a:schemeClr>
-                </a:solidFill>
-              </a:rPr>
-              <a:t>0</a:t>
-            </a:r>
-          </a:p>
-        </p:txBody>
-      </p:sp>
-      <p:sp>
-        <p:nvSpPr>
-          <p:cNvPr id="45" name="Textfeld 44"/>
-          <p:cNvSpPr txBox="1"/>
-          <p:nvPr/>
-        </p:nvSpPr>
-        <p:spPr>
-          <a:xfrm>
-            <a:off x="2698832" y="2378497"/>
-            <a:ext cx="2857449" cy="369332"/>
-          </a:xfrm>
-          <a:prstGeom prst="rect">
-            <a:avLst/>
-          </a:prstGeom>
-          <a:noFill/>
-        </p:spPr>
-        <p:txBody>
-          <a:bodyPr wrap="none" rtlCol="0">
-            <a:spAutoFit/>
-          </a:bodyPr>
-          <a:lstStyle/>
-          <a:p>
-            <a:r>
-              <a:rPr lang="de-AT" dirty="0"/>
-              <a:t>Bit (Binary Digit), 2 Zustände</a:t>
-            </a:r>
-          </a:p>
-        </p:txBody>
-      </p:sp>
-      <p:sp>
-        <p:nvSpPr>
-          <p:cNvPr id="46" name="Textfeld 45"/>
-          <p:cNvSpPr txBox="1"/>
-          <p:nvPr/>
-        </p:nvSpPr>
-        <p:spPr>
-          <a:xfrm>
-            <a:off x="2747969" y="3170585"/>
-            <a:ext cx="2485617" cy="369332"/>
-          </a:xfrm>
-          <a:prstGeom prst="rect">
-            <a:avLst/>
-          </a:prstGeom>
-          <a:noFill/>
-        </p:spPr>
-        <p:txBody>
-          <a:bodyPr wrap="none" rtlCol="0">
-            <a:spAutoFit/>
-          </a:bodyPr>
-          <a:lstStyle/>
-          <a:p>
-            <a:r>
-              <a:rPr lang="de-AT" dirty="0"/>
-              <a:t>Byte, 2</a:t>
-            </a:r>
-            <a:r>
-              <a:rPr lang="de-AT" baseline="30000" dirty="0"/>
-              <a:t>8</a:t>
-            </a:r>
-            <a:r>
-              <a:rPr lang="de-AT" dirty="0"/>
-              <a:t>  = 256 Zustände</a:t>
-            </a:r>
-          </a:p>
-        </p:txBody>
-      </p:sp>
-      <p:sp>
-        <p:nvSpPr>
-          <p:cNvPr id="47" name="Textfeld 46"/>
-          <p:cNvSpPr txBox="1"/>
-          <p:nvPr/>
-        </p:nvSpPr>
-        <p:spPr>
-          <a:xfrm>
-            <a:off x="587729" y="5434191"/>
-            <a:ext cx="4997522" cy="369332"/>
-          </a:xfrm>
-          <a:prstGeom prst="rect">
-            <a:avLst/>
-          </a:prstGeom>
-          <a:noFill/>
-        </p:spPr>
-        <p:txBody>
-          <a:bodyPr wrap="none" rtlCol="0">
-            <a:spAutoFit/>
-          </a:bodyPr>
-          <a:lstStyle/>
-          <a:p>
-            <a:r>
-              <a:rPr lang="de-AT" dirty="0"/>
-              <a:t>z. Bsp.  </a:t>
-            </a:r>
-            <a:r>
-              <a:rPr lang="de-AT" dirty="0" err="1">
-                <a:latin typeface="Courier New" pitchFamily="49" charset="0"/>
-                <a:cs typeface="Courier New" pitchFamily="49" charset="0"/>
-              </a:rPr>
-              <a:t>int</a:t>
-            </a:r>
-            <a:r>
-              <a:rPr lang="de-AT" dirty="0"/>
-              <a:t> (4 Byte), 2</a:t>
-            </a:r>
-            <a:r>
-              <a:rPr lang="de-AT" baseline="30000" dirty="0"/>
-              <a:t>32</a:t>
-            </a:r>
-            <a:r>
-              <a:rPr lang="de-AT" dirty="0"/>
-              <a:t>  = 4.294.967.296 Zustände</a:t>
-            </a:r>
-          </a:p>
-        </p:txBody>
-      </p:sp>
-      <p:sp>
-        <p:nvSpPr>
-          <p:cNvPr id="48" name="Textfeld 47"/>
-          <p:cNvSpPr txBox="1"/>
-          <p:nvPr/>
-        </p:nvSpPr>
-        <p:spPr>
-          <a:xfrm>
-            <a:off x="467544" y="3861048"/>
-            <a:ext cx="8161209" cy="646331"/>
-          </a:xfrm>
-          <a:prstGeom prst="rect">
-            <a:avLst/>
-          </a:prstGeom>
-          <a:noFill/>
-        </p:spPr>
-        <p:txBody>
-          <a:bodyPr wrap="none" rtlCol="0">
-            <a:spAutoFit/>
-          </a:bodyPr>
-          <a:lstStyle/>
-          <a:p>
-            <a:r>
-              <a:rPr lang="de-AT" dirty="0"/>
-              <a:t>In einer Programmiersprache werden ein oder mehrere Bytes zu sogenannten</a:t>
-            </a:r>
-          </a:p>
-          <a:p>
-            <a:r>
-              <a:rPr lang="de-AT" dirty="0"/>
-              <a:t>Datentypen zusammengefasst.</a:t>
-            </a:r>
-          </a:p>
-        </p:txBody>
-      </p:sp>
-    </p:spTree>
-    <p:extLst>
-      <p:ext uri="{BB962C8B-B14F-4D97-AF65-F5344CB8AC3E}">
-        <p14:creationId xmlns:p14="http://schemas.microsoft.com/office/powerpoint/2010/main" val="1465335660"/>
-      </p:ext>
-    </p:extLst>
-  </p:cSld>
-  <p:clrMapOvr>
-    <a:masterClrMapping/>
-  </p:clrMapOvr>
-</p:sld>
-</file>
-
-<file path=ppt/slides/slide7.xml><?xml version="1.0" encoding="utf-8"?>
-<p:sld xmlns:a="http://schemas.openxmlformats.org/drawingml/2006/main" xmlns:r="http://schemas.openxmlformats.org/officeDocument/2006/relationships" xmlns:p="http://schemas.openxmlformats.org/presentationml/2006/main">
-  <p:cSld>
-    <p:spTree>
-      <p:nvGrpSpPr>
-        <p:cNvPr id="1" name=""/>
-        <p:cNvGrpSpPr/>
-        <p:nvPr/>
-      </p:nvGrpSpPr>
-      <p:grpSpPr>
-        <a:xfrm>
-          <a:off x="0" y="0"/>
-          <a:ext cx="0" cy="0"/>
-          <a:chOff x="0" y="0"/>
-          <a:chExt cx="0" cy="0"/>
-        </a:xfrm>
-      </p:grpSpPr>
-      <p:sp>
-        <p:nvSpPr>
-          <p:cNvPr id="17411" name="Foliennummernplatzhalter 4"/>
-          <p:cNvSpPr>
-            <a:spLocks noGrp="1"/>
-          </p:cNvSpPr>
-          <p:nvPr>
-            <p:ph type="sldNum" sz="quarter" idx="4294967295"/>
-          </p:nvPr>
-        </p:nvSpPr>
-        <p:spPr>
-          <a:xfrm>
-            <a:off x="6773863" y="6380163"/>
-            <a:ext cx="2195512" cy="341312"/>
-          </a:xfrm>
-          <a:prstGeom prst="rect">
-            <a:avLst/>
-          </a:prstGeom>
-          <a:noFill/>
-          <a:ln/>
-          <a:extLst>
-            <a:ext uri="{909E8E84-426E-40DD-AFC4-6F175D3DCCD1}">
-              <a14:hiddenFill xmlns:a14="http://schemas.microsoft.com/office/drawing/2010/main">
-                <a:solidFill>
-                  <a:srgbClr val="FFFFFF"/>
-                </a:solidFill>
-              </a14:hiddenFill>
-            </a:ext>
-            <a:ext uri="{91240B29-F687-4F45-9708-019B960494DF}">
-              <a14:hiddenLine xmlns:a14="http://schemas.microsoft.com/office/drawing/2010/main" w="9525">
-                <a:solidFill>
-                  <a:srgbClr val="000000"/>
-                </a:solidFill>
-                <a:miter lim="800000"/>
-                <a:headEnd/>
-                <a:tailEnd/>
-              </a14:hiddenLine>
-            </a:ext>
-          </a:extLst>
-        </p:spPr>
-        <p:txBody>
-          <a:bodyPr/>
-          <a:lstStyle>
-            <a:lvl1pPr>
-              <a:spcBef>
-                <a:spcPct val="20000"/>
-              </a:spcBef>
-              <a:buFont typeface="Wingdings" panose="05000000000000000000" pitchFamily="2" charset="2"/>
-              <a:buChar char="Ø"/>
-              <a:defRPr sz="3200">
-                <a:solidFill>
-                  <a:srgbClr val="000080"/>
-                </a:solidFill>
-                <a:latin typeface="Times New Roman" panose="02020603050405020304" pitchFamily="18" charset="0"/>
-              </a:defRPr>
-            </a:lvl1pPr>
-            <a:lvl2pPr marL="742950" indent="-285750">
-              <a:spcBef>
-                <a:spcPct val="20000"/>
-              </a:spcBef>
-              <a:buChar char="•"/>
-              <a:defRPr sz="2800">
-                <a:solidFill>
-                  <a:srgbClr val="000080"/>
-                </a:solidFill>
-                <a:latin typeface="Times New Roman" panose="02020603050405020304" pitchFamily="18" charset="0"/>
-              </a:defRPr>
-            </a:lvl2pPr>
-            <a:lvl3pPr marL="1143000" indent="-228600">
-              <a:spcBef>
-                <a:spcPct val="20000"/>
-              </a:spcBef>
-              <a:buFont typeface="Wingdings" panose="05000000000000000000" pitchFamily="2" charset="2"/>
-              <a:buChar char="§"/>
-              <a:defRPr sz="2400">
-                <a:solidFill>
-                  <a:srgbClr val="000080"/>
-                </a:solidFill>
-                <a:latin typeface="Times New Roman" panose="02020603050405020304" pitchFamily="18" charset="0"/>
-              </a:defRPr>
-            </a:lvl3pPr>
-            <a:lvl4pPr marL="1600200" indent="-228600">
-              <a:spcBef>
-                <a:spcPct val="20000"/>
-              </a:spcBef>
-              <a:buChar char="–"/>
-              <a:defRPr sz="2000">
-                <a:solidFill>
-                  <a:srgbClr val="000080"/>
-                </a:solidFill>
-                <a:latin typeface="Times New Roman" panose="02020603050405020304" pitchFamily="18" charset="0"/>
-              </a:defRPr>
-            </a:lvl4pPr>
-            <a:lvl5pPr marL="2057400" indent="-228600">
-              <a:spcBef>
-                <a:spcPct val="20000"/>
-              </a:spcBef>
-              <a:buChar char="»"/>
-              <a:defRPr sz="2000">
-                <a:solidFill>
-                  <a:srgbClr val="000080"/>
-                </a:solidFill>
-                <a:latin typeface="Times New Roman" panose="02020603050405020304" pitchFamily="18" charset="0"/>
-              </a:defRPr>
-            </a:lvl5pPr>
-            <a:lvl6pPr marL="2514600" indent="-228600" eaLnBrk="0" fontAlgn="base" hangingPunct="0">
-              <a:spcBef>
-                <a:spcPct val="20000"/>
-              </a:spcBef>
-              <a:spcAft>
-                <a:spcPct val="0"/>
-              </a:spcAft>
-              <a:buChar char="»"/>
-              <a:defRPr sz="2000">
-                <a:solidFill>
-                  <a:srgbClr val="000080"/>
-                </a:solidFill>
-                <a:latin typeface="Times New Roman" panose="02020603050405020304" pitchFamily="18" charset="0"/>
-              </a:defRPr>
-            </a:lvl6pPr>
-            <a:lvl7pPr marL="2971800" indent="-228600" eaLnBrk="0" fontAlgn="base" hangingPunct="0">
-              <a:spcBef>
-                <a:spcPct val="20000"/>
-              </a:spcBef>
-              <a:spcAft>
-                <a:spcPct val="0"/>
-              </a:spcAft>
-              <a:buChar char="»"/>
-              <a:defRPr sz="2000">
-                <a:solidFill>
-                  <a:srgbClr val="000080"/>
-                </a:solidFill>
-                <a:latin typeface="Times New Roman" panose="02020603050405020304" pitchFamily="18" charset="0"/>
-              </a:defRPr>
-            </a:lvl7pPr>
-            <a:lvl8pPr marL="3429000" indent="-228600" eaLnBrk="0" fontAlgn="base" hangingPunct="0">
-              <a:spcBef>
-                <a:spcPct val="20000"/>
-              </a:spcBef>
-              <a:spcAft>
-                <a:spcPct val="0"/>
-              </a:spcAft>
-              <a:buChar char="»"/>
-              <a:defRPr sz="2000">
-                <a:solidFill>
-                  <a:srgbClr val="000080"/>
-                </a:solidFill>
-                <a:latin typeface="Times New Roman" panose="02020603050405020304" pitchFamily="18" charset="0"/>
-              </a:defRPr>
-            </a:lvl8pPr>
-            <a:lvl9pPr marL="3886200" indent="-228600" eaLnBrk="0" fontAlgn="base" hangingPunct="0">
-              <a:spcBef>
-                <a:spcPct val="20000"/>
-              </a:spcBef>
-              <a:spcAft>
-                <a:spcPct val="0"/>
-              </a:spcAft>
-              <a:buChar char="»"/>
-              <a:defRPr sz="2000">
-                <a:solidFill>
-                  <a:srgbClr val="000080"/>
-                </a:solidFill>
-                <a:latin typeface="Times New Roman" panose="02020603050405020304" pitchFamily="18" charset="0"/>
-              </a:defRPr>
-            </a:lvl9pPr>
-          </a:lstStyle>
-          <a:p>
-            <a:pPr>
-              <a:spcBef>
-                <a:spcPct val="0"/>
-              </a:spcBef>
-              <a:buFontTx/>
-              <a:buNone/>
-            </a:pPr>
-            <a:fld id="{46A55494-496A-4535-98D2-ECF1313D8DFB}" type="slidenum">
-              <a:rPr lang="de-DE" altLang="de-DE" sz="1400" smtClean="0">
-                <a:solidFill>
-                  <a:schemeClr val="bg1"/>
-                </a:solidFill>
-              </a:rPr>
-              <a:pPr>
-                <a:spcBef>
-                  <a:spcPct val="0"/>
-                </a:spcBef>
-                <a:buFontTx/>
-                <a:buNone/>
-              </a:pPr>
-              <a:t>7</a:t>
-            </a:fld>
-            <a:endParaRPr lang="de-DE" altLang="de-DE" sz="1400">
-              <a:solidFill>
-                <a:schemeClr val="bg1"/>
-              </a:solidFill>
-            </a:endParaRPr>
-          </a:p>
-        </p:txBody>
-      </p:sp>
-      <p:sp>
-        <p:nvSpPr>
-          <p:cNvPr id="17412" name="Rectangle 2"/>
-          <p:cNvSpPr>
-            <a:spLocks noGrp="1" noChangeArrowheads="1"/>
-          </p:cNvSpPr>
-          <p:nvPr>
-            <p:ph type="title"/>
-          </p:nvPr>
-        </p:nvSpPr>
-        <p:spPr/>
-        <p:txBody>
-          <a:bodyPr/>
-          <a:lstStyle/>
-          <a:p>
-            <a:pPr eaLnBrk="1" hangingPunct="1"/>
-            <a:r>
-              <a:rPr lang="de-DE" altLang="de-DE" sz="2400"/>
-              <a:t>Deklaration, Definition und Initialisierung von Variablen</a:t>
-            </a:r>
-          </a:p>
-        </p:txBody>
-      </p:sp>
-      <p:pic>
-        <p:nvPicPr>
-          <p:cNvPr id="17413" name="Picture 4"/>
-          <p:cNvPicPr>
-            <a:picLocks noChangeAspect="1" noChangeArrowheads="1"/>
-          </p:cNvPicPr>
-          <p:nvPr/>
-        </p:nvPicPr>
-        <p:blipFill>
-          <a:blip r:embed="rId2">
-            <a:extLst>
-              <a:ext uri="{28A0092B-C50C-407E-A947-70E740481C1C}">
-                <a14:useLocalDpi xmlns:a14="http://schemas.microsoft.com/office/drawing/2010/main" val="0"/>
-              </a:ext>
-            </a:extLst>
-          </a:blip>
-          <a:srcRect/>
-          <a:stretch>
-            <a:fillRect/>
-          </a:stretch>
-        </p:blipFill>
-        <p:spPr bwMode="auto">
-          <a:xfrm>
-            <a:off x="1454150" y="1152525"/>
-            <a:ext cx="6191250" cy="4657725"/>
-          </a:xfrm>
-          <a:prstGeom prst="rect">
-            <a:avLst/>
-          </a:prstGeom>
-          <a:noFill/>
-          <a:ln>
-            <a:noFill/>
-          </a:ln>
-          <a:extLst>
-            <a:ext uri="{909E8E84-426E-40DD-AFC4-6F175D3DCCD1}">
-              <a14:hiddenFill xmlns:a14="http://schemas.microsoft.com/office/drawing/2010/main">
-                <a:solidFill>
-                  <a:srgbClr val="FFFFFF"/>
-                </a:solidFill>
-              </a14:hiddenFill>
-            </a:ext>
-            <a:ext uri="{91240B29-F687-4F45-9708-019B960494DF}">
-              <a14:hiddenLine xmlns:a14="http://schemas.microsoft.com/office/drawing/2010/main" w="9525">
-                <a:solidFill>
-                  <a:srgbClr val="000000"/>
-                </a:solidFill>
-                <a:miter lim="800000"/>
-                <a:headEnd/>
-                <a:tailEnd/>
-              </a14:hiddenLine>
-            </a:ext>
-          </a:extLst>
-        </p:spPr>
-      </p:pic>
-    </p:spTree>
-    <p:extLst>
-      <p:ext uri="{BB962C8B-B14F-4D97-AF65-F5344CB8AC3E}">
-        <p14:creationId xmlns:p14="http://schemas.microsoft.com/office/powerpoint/2010/main" val="3205958513"/>
-      </p:ext>
-    </p:extLst>
-  </p:cSld>
-  <p:clrMapOvr>
-    <a:masterClrMapping/>
-  </p:clrMapOvr>
-</p:sld>
-</file>
-
-<file path=ppt/slides/slide8.xml><?xml version="1.0" encoding="utf-8"?>
+<file path=ppt/slides/slide5.xml><?xml version="1.0" encoding="utf-8"?>
 <p:sld xmlns:a="http://schemas.openxmlformats.org/drawingml/2006/main" xmlns:r="http://schemas.openxmlformats.org/officeDocument/2006/relationships" xmlns:p="http://schemas.openxmlformats.org/presentationml/2006/main">
   <p:cSld>
     <p:spTree>
@@ -22355,9 +18722,10 @@
           <a:p>
             <a:pPr eaLnBrk="1" hangingPunct="1"/>
             <a:r>
-              <a:rPr lang="de-AT" altLang="de-DE"/>
-              <a:t>Wichtige Typen am Beginn der Karriere</a:t>
-            </a:r>
+              <a:rPr lang="de-AT" altLang="de-DE" dirty="0" smtClean="0"/>
+              <a:t>Datentypen - Übersicht</a:t>
+            </a:r>
+            <a:endParaRPr lang="de-AT" altLang="de-DE" dirty="0"/>
           </a:p>
         </p:txBody>
       </p:sp>
@@ -22686,7 +19054,7 @@
                 <a:buFontTx/>
                 <a:buNone/>
               </a:pPr>
-              <a:t>8</a:t>
+              <a:t>5</a:t>
             </a:fld>
             <a:endParaRPr lang="de-DE" altLang="de-DE" sz="1400">
               <a:solidFill>
@@ -22706,10 +19074,17 @@
   <p:clrMapOvr>
     <a:masterClrMapping/>
   </p:clrMapOvr>
+  <p:timing>
+    <p:tnLst>
+      <p:par>
+        <p:cTn id="1" dur="indefinite" restart="never" nodeType="tmRoot"/>
+      </p:par>
+    </p:tnLst>
+  </p:timing>
 </p:sld>
 </file>
 
-<file path=ppt/slides/slide9.xml><?xml version="1.0" encoding="utf-8"?>
+<file path=ppt/slides/slide6.xml><?xml version="1.0" encoding="utf-8"?>
 <p:sld xmlns:a="http://schemas.openxmlformats.org/drawingml/2006/main" xmlns:r="http://schemas.openxmlformats.org/officeDocument/2006/relationships" xmlns:p="http://schemas.openxmlformats.org/presentationml/2006/main">
   <p:cSld>
     <p:spTree>
@@ -23579,6 +19954,824 @@
   <p:clrMapOvr>
     <a:masterClrMapping/>
   </p:clrMapOvr>
+  <p:timing>
+    <p:tnLst>
+      <p:par>
+        <p:cTn id="1" dur="indefinite" restart="never" nodeType="tmRoot"/>
+      </p:par>
+    </p:tnLst>
+  </p:timing>
+</p:sld>
+</file>
+
+<file path=ppt/slides/slide7.xml><?xml version="1.0" encoding="utf-8"?>
+<p:sld xmlns:a="http://schemas.openxmlformats.org/drawingml/2006/main" xmlns:r="http://schemas.openxmlformats.org/officeDocument/2006/relationships" xmlns:p="http://schemas.openxmlformats.org/presentationml/2006/main">
+  <p:cSld>
+    <p:spTree>
+      <p:nvGrpSpPr>
+        <p:cNvPr id="1" name=""/>
+        <p:cNvGrpSpPr/>
+        <p:nvPr/>
+      </p:nvGrpSpPr>
+      <p:grpSpPr>
+        <a:xfrm>
+          <a:off x="0" y="0"/>
+          <a:ext cx="0" cy="0"/>
+          <a:chOff x="0" y="0"/>
+          <a:chExt cx="0" cy="0"/>
+        </a:xfrm>
+      </p:grpSpPr>
+      <p:sp>
+        <p:nvSpPr>
+          <p:cNvPr id="2" name="Titel 1">
+            <a:extLst>
+              <a:ext uri="{FF2B5EF4-FFF2-40B4-BE49-F238E27FC236}">
+                <a16:creationId xmlns:a16="http://schemas.microsoft.com/office/drawing/2014/main" xmlns="" id="{91AE9513-1234-4703-8392-93226C9A3675}"/>
+              </a:ext>
+            </a:extLst>
+          </p:cNvPr>
+          <p:cNvSpPr>
+            <a:spLocks noGrp="1"/>
+          </p:cNvSpPr>
+          <p:nvPr>
+            <p:ph type="title"/>
+          </p:nvPr>
+        </p:nvSpPr>
+        <p:spPr/>
+        <p:txBody>
+          <a:bodyPr/>
+          <a:lstStyle/>
+          <a:p>
+            <a:r>
+              <a:rPr lang="de-AT" dirty="0" smtClean="0"/>
+              <a:t>Verwendung (Evaluation)</a:t>
+            </a:r>
+            <a:endParaRPr lang="de-AT" dirty="0"/>
+          </a:p>
+        </p:txBody>
+      </p:sp>
+      <p:sp>
+        <p:nvSpPr>
+          <p:cNvPr id="3" name="Inhaltsplatzhalter 2">
+            <a:extLst>
+              <a:ext uri="{FF2B5EF4-FFF2-40B4-BE49-F238E27FC236}">
+                <a16:creationId xmlns:a16="http://schemas.microsoft.com/office/drawing/2014/main" xmlns="" id="{2011BA9D-4171-4462-9EA8-9AA2E9346ACA}"/>
+              </a:ext>
+            </a:extLst>
+          </p:cNvPr>
+          <p:cNvSpPr>
+            <a:spLocks noGrp="1"/>
+          </p:cNvSpPr>
+          <p:nvPr>
+            <p:ph idx="1"/>
+          </p:nvPr>
+        </p:nvSpPr>
+        <p:spPr>
+          <a:xfrm>
+            <a:off x="391070" y="1295999"/>
+            <a:ext cx="8229600" cy="2049091"/>
+          </a:xfrm>
+        </p:spPr>
+        <p:txBody>
+          <a:bodyPr/>
+          <a:lstStyle/>
+          <a:p>
+            <a:pPr marL="0" indent="0">
+              <a:buNone/>
+            </a:pPr>
+            <a:r>
+              <a:rPr lang="de-AT" dirty="0" smtClean="0"/>
+              <a:t>Der aktuelle Wert einer Variablen kann jederzeit bestimmt werden.</a:t>
+            </a:r>
+          </a:p>
+          <a:p>
+            <a:pPr marL="0" indent="0">
+              <a:buNone/>
+            </a:pPr>
+            <a:r>
+              <a:rPr lang="de-AT" dirty="0" smtClean="0">
+                <a:latin typeface="Courier New" panose="02070309020205020404" pitchFamily="49" charset="0"/>
+                <a:cs typeface="Courier New" panose="02070309020205020404" pitchFamily="49" charset="0"/>
+              </a:rPr>
+              <a:t>  </a:t>
+            </a:r>
+            <a:r>
+              <a:rPr lang="de-AT" dirty="0" err="1" smtClean="0">
+                <a:latin typeface="Courier New" panose="02070309020205020404" pitchFamily="49" charset="0"/>
+                <a:cs typeface="Courier New" panose="02070309020205020404" pitchFamily="49" charset="0"/>
+              </a:rPr>
+              <a:t>Console.WriteLine</a:t>
+            </a:r>
+            <a:r>
+              <a:rPr lang="de-AT" dirty="0" smtClean="0">
+                <a:latin typeface="Courier New" panose="02070309020205020404" pitchFamily="49" charset="0"/>
+                <a:cs typeface="Courier New" panose="02070309020205020404" pitchFamily="49" charset="0"/>
+              </a:rPr>
+              <a:t>(</a:t>
+            </a:r>
+            <a:r>
+              <a:rPr lang="de-AT" dirty="0" err="1" smtClean="0">
+                <a:latin typeface="Courier New" panose="02070309020205020404" pitchFamily="49" charset="0"/>
+                <a:cs typeface="Courier New" panose="02070309020205020404" pitchFamily="49" charset="0"/>
+              </a:rPr>
+              <a:t>vorname</a:t>
+            </a:r>
+            <a:r>
+              <a:rPr lang="de-AT" dirty="0" smtClean="0">
+                <a:latin typeface="Courier New" panose="02070309020205020404" pitchFamily="49" charset="0"/>
+                <a:cs typeface="Courier New" panose="02070309020205020404" pitchFamily="49" charset="0"/>
+              </a:rPr>
+              <a:t>);</a:t>
+            </a:r>
+          </a:p>
+          <a:p>
+            <a:pPr marL="0" indent="0">
+              <a:buNone/>
+            </a:pPr>
+            <a:r>
+              <a:rPr lang="de-AT" dirty="0" smtClean="0">
+                <a:latin typeface="Courier New" panose="02070309020205020404" pitchFamily="49" charset="0"/>
+                <a:cs typeface="Courier New" panose="02070309020205020404" pitchFamily="49" charset="0"/>
+              </a:rPr>
+              <a:t>  </a:t>
+            </a:r>
+            <a:r>
+              <a:rPr lang="de-AT" dirty="0" err="1" smtClean="0">
+                <a:latin typeface="Courier New" panose="02070309020205020404" pitchFamily="49" charset="0"/>
+                <a:cs typeface="Courier New" panose="02070309020205020404" pitchFamily="49" charset="0"/>
+              </a:rPr>
+              <a:t>Console.WriteLine</a:t>
+            </a:r>
+            <a:r>
+              <a:rPr lang="de-AT" dirty="0" smtClean="0">
+                <a:latin typeface="Courier New" panose="02070309020205020404" pitchFamily="49" charset="0"/>
+                <a:cs typeface="Courier New" panose="02070309020205020404" pitchFamily="49" charset="0"/>
+              </a:rPr>
+              <a:t>(tage + 7);</a:t>
+            </a:r>
+          </a:p>
+          <a:p>
+            <a:pPr marL="0" indent="0">
+              <a:buNone/>
+            </a:pPr>
+            <a:endParaRPr lang="de-AT" dirty="0">
+              <a:latin typeface="Courier New" panose="02070309020205020404" pitchFamily="49" charset="0"/>
+              <a:cs typeface="Courier New" panose="02070309020205020404" pitchFamily="49" charset="0"/>
+            </a:endParaRPr>
+          </a:p>
+        </p:txBody>
+      </p:sp>
+    </p:spTree>
+    <p:extLst>
+      <p:ext uri="{BB962C8B-B14F-4D97-AF65-F5344CB8AC3E}">
+        <p14:creationId xmlns:p14="http://schemas.microsoft.com/office/powerpoint/2010/main" val="674200365"/>
+      </p:ext>
+    </p:extLst>
+  </p:cSld>
+  <p:clrMapOvr>
+    <a:masterClrMapping/>
+  </p:clrMapOvr>
+  <p:timing>
+    <p:tnLst>
+      <p:par>
+        <p:cTn id="1" dur="indefinite" restart="never" nodeType="tmRoot"/>
+      </p:par>
+    </p:tnLst>
+  </p:timing>
+</p:sld>
+</file>
+
+<file path=ppt/slides/slide8.xml><?xml version="1.0" encoding="utf-8"?>
+<p:sld xmlns:a="http://schemas.openxmlformats.org/drawingml/2006/main" xmlns:r="http://schemas.openxmlformats.org/officeDocument/2006/relationships" xmlns:p="http://schemas.openxmlformats.org/presentationml/2006/main">
+  <p:cSld>
+    <p:spTree>
+      <p:nvGrpSpPr>
+        <p:cNvPr id="1" name=""/>
+        <p:cNvGrpSpPr/>
+        <p:nvPr/>
+      </p:nvGrpSpPr>
+      <p:grpSpPr>
+        <a:xfrm>
+          <a:off x="0" y="0"/>
+          <a:ext cx="0" cy="0"/>
+          <a:chOff x="0" y="0"/>
+          <a:chExt cx="0" cy="0"/>
+        </a:xfrm>
+      </p:grpSpPr>
+      <p:sp>
+        <p:nvSpPr>
+          <p:cNvPr id="2" name="Titel 1">
+            <a:extLst>
+              <a:ext uri="{FF2B5EF4-FFF2-40B4-BE49-F238E27FC236}">
+                <a16:creationId xmlns:a16="http://schemas.microsoft.com/office/drawing/2014/main" xmlns="" id="{91AE9513-1234-4703-8392-93226C9A3675}"/>
+              </a:ext>
+            </a:extLst>
+          </p:cNvPr>
+          <p:cNvSpPr>
+            <a:spLocks noGrp="1"/>
+          </p:cNvSpPr>
+          <p:nvPr>
+            <p:ph type="title"/>
+          </p:nvPr>
+        </p:nvSpPr>
+        <p:spPr/>
+        <p:txBody>
+          <a:bodyPr/>
+          <a:lstStyle/>
+          <a:p>
+            <a:r>
+              <a:rPr lang="de-AT" dirty="0" smtClean="0"/>
+              <a:t>Zuweisung (</a:t>
+            </a:r>
+            <a:r>
+              <a:rPr lang="de-AT" dirty="0" err="1" smtClean="0"/>
+              <a:t>Assignment</a:t>
+            </a:r>
+            <a:r>
+              <a:rPr lang="de-AT" dirty="0" smtClean="0"/>
+              <a:t>)</a:t>
+            </a:r>
+            <a:endParaRPr lang="de-AT" dirty="0"/>
+          </a:p>
+        </p:txBody>
+      </p:sp>
+      <p:sp>
+        <p:nvSpPr>
+          <p:cNvPr id="3" name="Inhaltsplatzhalter 2">
+            <a:extLst>
+              <a:ext uri="{FF2B5EF4-FFF2-40B4-BE49-F238E27FC236}">
+                <a16:creationId xmlns:a16="http://schemas.microsoft.com/office/drawing/2014/main" xmlns="" id="{2011BA9D-4171-4462-9EA8-9AA2E9346ACA}"/>
+              </a:ext>
+            </a:extLst>
+          </p:cNvPr>
+          <p:cNvSpPr>
+            <a:spLocks noGrp="1"/>
+          </p:cNvSpPr>
+          <p:nvPr>
+            <p:ph idx="1"/>
+          </p:nvPr>
+        </p:nvSpPr>
+        <p:spPr>
+          <a:xfrm>
+            <a:off x="391070" y="1295999"/>
+            <a:ext cx="8229600" cy="2049091"/>
+          </a:xfrm>
+        </p:spPr>
+        <p:txBody>
+          <a:bodyPr/>
+          <a:lstStyle/>
+          <a:p>
+            <a:pPr marL="0" indent="0">
+              <a:buNone/>
+            </a:pPr>
+            <a:r>
+              <a:rPr lang="de-AT" dirty="0" smtClean="0"/>
+              <a:t>An einer beliebigen Stellen im Programm kann der Wert einer Variable verändert werden</a:t>
+            </a:r>
+            <a:br>
+              <a:rPr lang="de-AT" dirty="0" smtClean="0"/>
+            </a:br>
+            <a:endParaRPr lang="de-AT" dirty="0" smtClean="0"/>
+          </a:p>
+          <a:p>
+            <a:pPr marL="0" indent="0">
+              <a:buNone/>
+            </a:pPr>
+            <a:r>
+              <a:rPr lang="de-AT" dirty="0" smtClean="0">
+                <a:latin typeface="Courier New" panose="02070309020205020404" pitchFamily="49" charset="0"/>
+                <a:cs typeface="Courier New" panose="02070309020205020404" pitchFamily="49" charset="0"/>
+              </a:rPr>
+              <a:t>   </a:t>
+            </a:r>
+            <a:r>
+              <a:rPr lang="de-AT" dirty="0" err="1" smtClean="0">
+                <a:latin typeface="Courier New" panose="02070309020205020404" pitchFamily="49" charset="0"/>
+                <a:cs typeface="Courier New" panose="02070309020205020404" pitchFamily="49" charset="0"/>
+              </a:rPr>
+              <a:t>vorname</a:t>
+            </a:r>
+            <a:r>
+              <a:rPr lang="de-AT" dirty="0" smtClean="0">
+                <a:latin typeface="Courier New" panose="02070309020205020404" pitchFamily="49" charset="0"/>
+                <a:cs typeface="Courier New" panose="02070309020205020404" pitchFamily="49" charset="0"/>
+              </a:rPr>
+              <a:t> </a:t>
+            </a:r>
+            <a:r>
+              <a:rPr lang="de-AT" dirty="0" smtClean="0">
+                <a:solidFill>
+                  <a:srgbClr val="0000FF"/>
+                </a:solidFill>
+                <a:latin typeface="Courier New" panose="02070309020205020404" pitchFamily="49" charset="0"/>
+                <a:cs typeface="Courier New" panose="02070309020205020404" pitchFamily="49" charset="0"/>
+              </a:rPr>
+              <a:t>=</a:t>
+            </a:r>
+            <a:r>
+              <a:rPr lang="de-AT" dirty="0" smtClean="0">
+                <a:latin typeface="Courier New" panose="02070309020205020404" pitchFamily="49" charset="0"/>
+                <a:cs typeface="Courier New" panose="02070309020205020404" pitchFamily="49" charset="0"/>
+              </a:rPr>
+              <a:t> </a:t>
+            </a:r>
+            <a:r>
+              <a:rPr lang="de-AT" dirty="0">
+                <a:latin typeface="Courier New" panose="02070309020205020404" pitchFamily="49" charset="0"/>
+                <a:cs typeface="Courier New" panose="02070309020205020404" pitchFamily="49" charset="0"/>
+              </a:rPr>
+              <a:t>"</a:t>
+            </a:r>
+            <a:r>
+              <a:rPr lang="de-AT" dirty="0" smtClean="0">
+                <a:latin typeface="Courier New" panose="02070309020205020404" pitchFamily="49" charset="0"/>
+                <a:cs typeface="Courier New" panose="02070309020205020404" pitchFamily="49" charset="0"/>
+              </a:rPr>
+              <a:t>Max";</a:t>
+            </a:r>
+          </a:p>
+          <a:p>
+            <a:pPr marL="0" indent="0">
+              <a:buNone/>
+            </a:pPr>
+            <a:r>
+              <a:rPr lang="de-AT" dirty="0">
+                <a:latin typeface="Courier New" panose="02070309020205020404" pitchFamily="49" charset="0"/>
+                <a:cs typeface="Courier New" panose="02070309020205020404" pitchFamily="49" charset="0"/>
+              </a:rPr>
+              <a:t> </a:t>
+            </a:r>
+            <a:r>
+              <a:rPr lang="de-AT" dirty="0" smtClean="0">
+                <a:latin typeface="Courier New" panose="02070309020205020404" pitchFamily="49" charset="0"/>
+                <a:cs typeface="Courier New" panose="02070309020205020404" pitchFamily="49" charset="0"/>
+              </a:rPr>
+              <a:t>  tage </a:t>
+            </a:r>
+            <a:r>
+              <a:rPr lang="de-AT" dirty="0">
+                <a:solidFill>
+                  <a:srgbClr val="0000FF"/>
+                </a:solidFill>
+                <a:latin typeface="Courier New" panose="02070309020205020404" pitchFamily="49" charset="0"/>
+                <a:cs typeface="Courier New" panose="02070309020205020404" pitchFamily="49" charset="0"/>
+              </a:rPr>
+              <a:t>=</a:t>
+            </a:r>
+            <a:r>
+              <a:rPr lang="de-AT" dirty="0">
+                <a:latin typeface="Courier New" panose="02070309020205020404" pitchFamily="49" charset="0"/>
+                <a:cs typeface="Courier New" panose="02070309020205020404" pitchFamily="49" charset="0"/>
+              </a:rPr>
+              <a:t> </a:t>
+            </a:r>
+            <a:r>
+              <a:rPr lang="de-AT" dirty="0" smtClean="0">
+                <a:latin typeface="Courier New" panose="02070309020205020404" pitchFamily="49" charset="0"/>
+                <a:cs typeface="Courier New" panose="02070309020205020404" pitchFamily="49" charset="0"/>
+              </a:rPr>
+              <a:t>7;</a:t>
+            </a:r>
+          </a:p>
+          <a:p>
+            <a:pPr marL="0" indent="0">
+              <a:buNone/>
+            </a:pPr>
+            <a:r>
+              <a:rPr lang="de-AT" dirty="0" smtClean="0">
+                <a:latin typeface="Courier New" panose="02070309020205020404" pitchFamily="49" charset="0"/>
+                <a:cs typeface="Courier New" panose="02070309020205020404" pitchFamily="49" charset="0"/>
+              </a:rPr>
+              <a:t>   </a:t>
+            </a:r>
+            <a:r>
+              <a:rPr lang="de-AT" dirty="0" err="1" smtClean="0">
+                <a:latin typeface="Courier New" panose="02070309020205020404" pitchFamily="49" charset="0"/>
+                <a:cs typeface="Courier New" panose="02070309020205020404" pitchFamily="49" charset="0"/>
+              </a:rPr>
+              <a:t>nachname</a:t>
+            </a:r>
+            <a:r>
+              <a:rPr lang="de-AT" dirty="0" smtClean="0">
+                <a:latin typeface="Courier New" panose="02070309020205020404" pitchFamily="49" charset="0"/>
+                <a:cs typeface="Courier New" panose="02070309020205020404" pitchFamily="49" charset="0"/>
+              </a:rPr>
+              <a:t> </a:t>
+            </a:r>
+            <a:r>
+              <a:rPr lang="de-AT" dirty="0">
+                <a:solidFill>
+                  <a:srgbClr val="0000FF"/>
+                </a:solidFill>
+                <a:latin typeface="Courier New" panose="02070309020205020404" pitchFamily="49" charset="0"/>
+                <a:cs typeface="Courier New" panose="02070309020205020404" pitchFamily="49" charset="0"/>
+              </a:rPr>
+              <a:t>=</a:t>
+            </a:r>
+            <a:r>
+              <a:rPr lang="de-AT" dirty="0">
+                <a:latin typeface="Courier New" panose="02070309020205020404" pitchFamily="49" charset="0"/>
+                <a:cs typeface="Courier New" panose="02070309020205020404" pitchFamily="49" charset="0"/>
+              </a:rPr>
+              <a:t> </a:t>
+            </a:r>
+            <a:r>
+              <a:rPr lang="de-AT" dirty="0" err="1" smtClean="0">
+                <a:latin typeface="Courier New" panose="02070309020205020404" pitchFamily="49" charset="0"/>
+                <a:cs typeface="Courier New" panose="02070309020205020404" pitchFamily="49" charset="0"/>
+              </a:rPr>
+              <a:t>Console.ReadLine</a:t>
+            </a:r>
+            <a:r>
+              <a:rPr lang="de-AT" dirty="0" smtClean="0">
+                <a:latin typeface="Courier New" panose="02070309020205020404" pitchFamily="49" charset="0"/>
+                <a:cs typeface="Courier New" panose="02070309020205020404" pitchFamily="49" charset="0"/>
+              </a:rPr>
+              <a:t>();</a:t>
+            </a:r>
+          </a:p>
+          <a:p>
+            <a:endParaRPr lang="de-AT" dirty="0">
+              <a:latin typeface="Courier New" panose="02070309020205020404" pitchFamily="49" charset="0"/>
+              <a:cs typeface="Courier New" panose="02070309020205020404" pitchFamily="49" charset="0"/>
+            </a:endParaRPr>
+          </a:p>
+          <a:p>
+            <a:r>
+              <a:rPr lang="de-AT" dirty="0" smtClean="0"/>
+              <a:t>Eine Zuweisung erfolgt durch das Zeichen </a:t>
+            </a:r>
+            <a:r>
+              <a:rPr lang="de-AT" dirty="0" smtClean="0">
+                <a:solidFill>
+                  <a:srgbClr val="0000FF"/>
+                </a:solidFill>
+              </a:rPr>
+              <a:t>=</a:t>
+            </a:r>
+            <a:r>
+              <a:rPr lang="de-AT" dirty="0" smtClean="0"/>
+              <a:t>  </a:t>
+            </a:r>
+          </a:p>
+          <a:p>
+            <a:r>
+              <a:rPr lang="de-AT" dirty="0" smtClean="0"/>
+              <a:t>Links vom </a:t>
+            </a:r>
+            <a:r>
+              <a:rPr lang="de-AT" dirty="0">
+                <a:solidFill>
+                  <a:srgbClr val="0000FF"/>
+                </a:solidFill>
+              </a:rPr>
+              <a:t>= </a:t>
+            </a:r>
+            <a:r>
+              <a:rPr lang="de-AT" dirty="0" smtClean="0"/>
+              <a:t>steht der Variablenname.</a:t>
+            </a:r>
+          </a:p>
+          <a:p>
+            <a:r>
+              <a:rPr lang="de-AT" dirty="0" smtClean="0"/>
+              <a:t>Rechts steht der neue Wert (=Term). </a:t>
+            </a:r>
+            <a:endParaRPr lang="de-AT" dirty="0"/>
+          </a:p>
+          <a:p>
+            <a:endParaRPr lang="de-AT" dirty="0"/>
+          </a:p>
+        </p:txBody>
+      </p:sp>
+    </p:spTree>
+    <p:extLst>
+      <p:ext uri="{BB962C8B-B14F-4D97-AF65-F5344CB8AC3E}">
+        <p14:creationId xmlns:p14="http://schemas.microsoft.com/office/powerpoint/2010/main" val="1589850260"/>
+      </p:ext>
+    </p:extLst>
+  </p:cSld>
+  <p:clrMapOvr>
+    <a:masterClrMapping/>
+  </p:clrMapOvr>
+  <p:timing>
+    <p:tnLst>
+      <p:par>
+        <p:cTn id="1" dur="indefinite" restart="never" nodeType="tmRoot"/>
+      </p:par>
+    </p:tnLst>
+  </p:timing>
+</p:sld>
+</file>
+
+<file path=ppt/slides/slide9.xml><?xml version="1.0" encoding="utf-8"?>
+<p:sld xmlns:a="http://schemas.openxmlformats.org/drawingml/2006/main" xmlns:r="http://schemas.openxmlformats.org/officeDocument/2006/relationships" xmlns:p="http://schemas.openxmlformats.org/presentationml/2006/main">
+  <p:cSld>
+    <p:spTree>
+      <p:nvGrpSpPr>
+        <p:cNvPr id="1" name=""/>
+        <p:cNvGrpSpPr/>
+        <p:nvPr/>
+      </p:nvGrpSpPr>
+      <p:grpSpPr>
+        <a:xfrm>
+          <a:off x="0" y="0"/>
+          <a:ext cx="0" cy="0"/>
+          <a:chOff x="0" y="0"/>
+          <a:chExt cx="0" cy="0"/>
+        </a:xfrm>
+      </p:grpSpPr>
+      <p:sp>
+        <p:nvSpPr>
+          <p:cNvPr id="21507" name="Foliennummernplatzhalter 4"/>
+          <p:cNvSpPr>
+            <a:spLocks noGrp="1"/>
+          </p:cNvSpPr>
+          <p:nvPr>
+            <p:ph type="sldNum" sz="quarter" idx="4294967295"/>
+          </p:nvPr>
+        </p:nvSpPr>
+        <p:spPr>
+          <a:xfrm>
+            <a:off x="6773863" y="6380163"/>
+            <a:ext cx="2195512" cy="341312"/>
+          </a:xfrm>
+          <a:prstGeom prst="rect">
+            <a:avLst/>
+          </a:prstGeom>
+          <a:noFill/>
+          <a:ln/>
+          <a:extLst>
+            <a:ext uri="{909E8E84-426E-40DD-AFC4-6F175D3DCCD1}">
+              <a14:hiddenFill xmlns:a14="http://schemas.microsoft.com/office/drawing/2010/main">
+                <a:solidFill>
+                  <a:srgbClr val="FFFFFF"/>
+                </a:solidFill>
+              </a14:hiddenFill>
+            </a:ext>
+            <a:ext uri="{91240B29-F687-4F45-9708-019B960494DF}">
+              <a14:hiddenLine xmlns:a14="http://schemas.microsoft.com/office/drawing/2010/main" w="9525">
+                <a:solidFill>
+                  <a:srgbClr val="000000"/>
+                </a:solidFill>
+                <a:miter lim="800000"/>
+                <a:headEnd/>
+                <a:tailEnd/>
+              </a14:hiddenLine>
+            </a:ext>
+          </a:extLst>
+        </p:spPr>
+        <p:txBody>
+          <a:bodyPr/>
+          <a:lstStyle>
+            <a:lvl1pPr>
+              <a:spcBef>
+                <a:spcPct val="20000"/>
+              </a:spcBef>
+              <a:buFont typeface="Wingdings" panose="05000000000000000000" pitchFamily="2" charset="2"/>
+              <a:buChar char="Ø"/>
+              <a:defRPr sz="3200">
+                <a:solidFill>
+                  <a:srgbClr val="000080"/>
+                </a:solidFill>
+                <a:latin typeface="Times New Roman" panose="02020603050405020304" pitchFamily="18" charset="0"/>
+              </a:defRPr>
+            </a:lvl1pPr>
+            <a:lvl2pPr marL="742950" indent="-285750">
+              <a:spcBef>
+                <a:spcPct val="20000"/>
+              </a:spcBef>
+              <a:buChar char="•"/>
+              <a:defRPr sz="2800">
+                <a:solidFill>
+                  <a:srgbClr val="000080"/>
+                </a:solidFill>
+                <a:latin typeface="Times New Roman" panose="02020603050405020304" pitchFamily="18" charset="0"/>
+              </a:defRPr>
+            </a:lvl2pPr>
+            <a:lvl3pPr marL="1143000" indent="-228600">
+              <a:spcBef>
+                <a:spcPct val="20000"/>
+              </a:spcBef>
+              <a:buFont typeface="Wingdings" panose="05000000000000000000" pitchFamily="2" charset="2"/>
+              <a:buChar char="§"/>
+              <a:defRPr sz="2400">
+                <a:solidFill>
+                  <a:srgbClr val="000080"/>
+                </a:solidFill>
+                <a:latin typeface="Times New Roman" panose="02020603050405020304" pitchFamily="18" charset="0"/>
+              </a:defRPr>
+            </a:lvl3pPr>
+            <a:lvl4pPr marL="1600200" indent="-228600">
+              <a:spcBef>
+                <a:spcPct val="20000"/>
+              </a:spcBef>
+              <a:buChar char="–"/>
+              <a:defRPr sz="2000">
+                <a:solidFill>
+                  <a:srgbClr val="000080"/>
+                </a:solidFill>
+                <a:latin typeface="Times New Roman" panose="02020603050405020304" pitchFamily="18" charset="0"/>
+              </a:defRPr>
+            </a:lvl4pPr>
+            <a:lvl5pPr marL="2057400" indent="-228600">
+              <a:spcBef>
+                <a:spcPct val="20000"/>
+              </a:spcBef>
+              <a:buChar char="»"/>
+              <a:defRPr sz="2000">
+                <a:solidFill>
+                  <a:srgbClr val="000080"/>
+                </a:solidFill>
+                <a:latin typeface="Times New Roman" panose="02020603050405020304" pitchFamily="18" charset="0"/>
+              </a:defRPr>
+            </a:lvl5pPr>
+            <a:lvl6pPr marL="2514600" indent="-228600" eaLnBrk="0" fontAlgn="base" hangingPunct="0">
+              <a:spcBef>
+                <a:spcPct val="20000"/>
+              </a:spcBef>
+              <a:spcAft>
+                <a:spcPct val="0"/>
+              </a:spcAft>
+              <a:buChar char="»"/>
+              <a:defRPr sz="2000">
+                <a:solidFill>
+                  <a:srgbClr val="000080"/>
+                </a:solidFill>
+                <a:latin typeface="Times New Roman" panose="02020603050405020304" pitchFamily="18" charset="0"/>
+              </a:defRPr>
+            </a:lvl6pPr>
+            <a:lvl7pPr marL="2971800" indent="-228600" eaLnBrk="0" fontAlgn="base" hangingPunct="0">
+              <a:spcBef>
+                <a:spcPct val="20000"/>
+              </a:spcBef>
+              <a:spcAft>
+                <a:spcPct val="0"/>
+              </a:spcAft>
+              <a:buChar char="»"/>
+              <a:defRPr sz="2000">
+                <a:solidFill>
+                  <a:srgbClr val="000080"/>
+                </a:solidFill>
+                <a:latin typeface="Times New Roman" panose="02020603050405020304" pitchFamily="18" charset="0"/>
+              </a:defRPr>
+            </a:lvl7pPr>
+            <a:lvl8pPr marL="3429000" indent="-228600" eaLnBrk="0" fontAlgn="base" hangingPunct="0">
+              <a:spcBef>
+                <a:spcPct val="20000"/>
+              </a:spcBef>
+              <a:spcAft>
+                <a:spcPct val="0"/>
+              </a:spcAft>
+              <a:buChar char="»"/>
+              <a:defRPr sz="2000">
+                <a:solidFill>
+                  <a:srgbClr val="000080"/>
+                </a:solidFill>
+                <a:latin typeface="Times New Roman" panose="02020603050405020304" pitchFamily="18" charset="0"/>
+              </a:defRPr>
+            </a:lvl8pPr>
+            <a:lvl9pPr marL="3886200" indent="-228600" eaLnBrk="0" fontAlgn="base" hangingPunct="0">
+              <a:spcBef>
+                <a:spcPct val="20000"/>
+              </a:spcBef>
+              <a:spcAft>
+                <a:spcPct val="0"/>
+              </a:spcAft>
+              <a:buChar char="»"/>
+              <a:defRPr sz="2000">
+                <a:solidFill>
+                  <a:srgbClr val="000080"/>
+                </a:solidFill>
+                <a:latin typeface="Times New Roman" panose="02020603050405020304" pitchFamily="18" charset="0"/>
+              </a:defRPr>
+            </a:lvl9pPr>
+          </a:lstStyle>
+          <a:p>
+            <a:pPr>
+              <a:spcBef>
+                <a:spcPct val="0"/>
+              </a:spcBef>
+              <a:buFontTx/>
+              <a:buNone/>
+            </a:pPr>
+            <a:fld id="{E00ABB23-8E16-40B9-A845-CB6C3B14536A}" type="slidenum">
+              <a:rPr lang="de-DE" altLang="de-DE" sz="1400" smtClean="0">
+                <a:solidFill>
+                  <a:schemeClr val="bg1"/>
+                </a:solidFill>
+              </a:rPr>
+              <a:pPr>
+                <a:spcBef>
+                  <a:spcPct val="0"/>
+                </a:spcBef>
+                <a:buFontTx/>
+                <a:buNone/>
+              </a:pPr>
+              <a:t>9</a:t>
+            </a:fld>
+            <a:endParaRPr lang="de-DE" altLang="de-DE" sz="1400">
+              <a:solidFill>
+                <a:schemeClr val="bg1"/>
+              </a:solidFill>
+            </a:endParaRPr>
+          </a:p>
+        </p:txBody>
+      </p:sp>
+      <p:sp>
+        <p:nvSpPr>
+          <p:cNvPr id="21508" name="Rectangle 2"/>
+          <p:cNvSpPr>
+            <a:spLocks noGrp="1" noChangeArrowheads="1"/>
+          </p:cNvSpPr>
+          <p:nvPr>
+            <p:ph type="title"/>
+          </p:nvPr>
+        </p:nvSpPr>
+        <p:spPr/>
+        <p:txBody>
+          <a:bodyPr/>
+          <a:lstStyle/>
+          <a:p>
+            <a:pPr eaLnBrk="1" hangingPunct="1"/>
+            <a:r>
+              <a:rPr lang="de-DE" altLang="de-DE"/>
+              <a:t>Zuweisungsoperator</a:t>
+            </a:r>
+          </a:p>
+        </p:txBody>
+      </p:sp>
+      <p:pic>
+        <p:nvPicPr>
+          <p:cNvPr id="21509" name="Picture 4"/>
+          <p:cNvPicPr>
+            <a:picLocks noChangeAspect="1" noChangeArrowheads="1"/>
+          </p:cNvPicPr>
+          <p:nvPr/>
+        </p:nvPicPr>
+        <p:blipFill>
+          <a:blip r:embed="rId2">
+            <a:extLst>
+              <a:ext uri="{28A0092B-C50C-407E-A947-70E740481C1C}">
+                <a14:useLocalDpi xmlns:a14="http://schemas.microsoft.com/office/drawing/2010/main" val="0"/>
+              </a:ext>
+            </a:extLst>
+          </a:blip>
+          <a:srcRect/>
+          <a:stretch>
+            <a:fillRect/>
+          </a:stretch>
+        </p:blipFill>
+        <p:spPr bwMode="auto">
+          <a:xfrm>
+            <a:off x="1708150" y="1730375"/>
+            <a:ext cx="5727700" cy="3397250"/>
+          </a:xfrm>
+          <a:prstGeom prst="rect">
+            <a:avLst/>
+          </a:prstGeom>
+          <a:noFill/>
+          <a:ln>
+            <a:noFill/>
+          </a:ln>
+          <a:extLst>
+            <a:ext uri="{909E8E84-426E-40DD-AFC4-6F175D3DCCD1}">
+              <a14:hiddenFill xmlns:a14="http://schemas.microsoft.com/office/drawing/2010/main">
+                <a:solidFill>
+                  <a:srgbClr val="FFFFFF"/>
+                </a:solidFill>
+              </a14:hiddenFill>
+            </a:ext>
+            <a:ext uri="{91240B29-F687-4F45-9708-019B960494DF}">
+              <a14:hiddenLine xmlns:a14="http://schemas.microsoft.com/office/drawing/2010/main" w="9525">
+                <a:solidFill>
+                  <a:srgbClr val="000000"/>
+                </a:solidFill>
+                <a:miter lim="800000"/>
+                <a:headEnd/>
+                <a:tailEnd/>
+              </a14:hiddenLine>
+            </a:ext>
+          </a:extLst>
+        </p:spPr>
+      </p:pic>
+    </p:spTree>
+    <p:extLst>
+      <p:ext uri="{BB962C8B-B14F-4D97-AF65-F5344CB8AC3E}">
+        <p14:creationId xmlns:p14="http://schemas.microsoft.com/office/powerpoint/2010/main" val="2198421695"/>
+      </p:ext>
+    </p:extLst>
+  </p:cSld>
+  <p:clrMapOvr>
+    <a:masterClrMapping/>
+  </p:clrMapOvr>
+  <p:timing>
+    <p:tnLst>
+      <p:par>
+        <p:cTn id="1" dur="indefinite" restart="never" nodeType="tmRoot"/>
+      </p:par>
+    </p:tnLst>
+  </p:timing>
 </p:sld>
 </file>
 

--- a/02_Variablen/02_Variablen.pptx
+++ b/02_Variablen/02_Variablen.pptx
@@ -296,7 +296,7 @@
               <a:pPr>
                 <a:defRPr/>
               </a:pPr>
-              <a:t>22.09.2021</a:t>
+              <a:t>18.09.2024</a:t>
             </a:fld>
             <a:endParaRPr lang="de-AT"/>
           </a:p>
@@ -511,7 +511,7 @@
               <a:pPr>
                 <a:defRPr/>
               </a:pPr>
-              <a:t>22.09.2021</a:t>
+              <a:t>18.09.2024</a:t>
             </a:fld>
             <a:endParaRPr lang="de-AT"/>
           </a:p>
@@ -4298,7 +4298,7 @@
             <a:fld id="{ABC9E1A3-5F60-4045-A7A5-F47B61D1FECD}" type="datetimeFigureOut">
               <a:rPr lang="de-AT" smtClean="0"/>
               <a:pPr/>
-              <a:t>22.09.2021</a:t>
+              <a:t>18.09.2024</a:t>
             </a:fld>
             <a:endParaRPr lang="de-AT"/>
           </a:p>
@@ -4498,7 +4498,7 @@
             <a:fld id="{ABC9E1A3-5F60-4045-A7A5-F47B61D1FECD}" type="datetimeFigureOut">
               <a:rPr lang="de-AT" smtClean="0"/>
               <a:pPr/>
-              <a:t>22.09.2021</a:t>
+              <a:t>18.09.2024</a:t>
             </a:fld>
             <a:endParaRPr lang="de-AT"/>
           </a:p>
@@ -8488,12 +8488,8 @@
           <a:lstStyle/>
           <a:p>
             <a:r>
-              <a:rPr lang="de-AT" dirty="0" smtClean="0"/>
+              <a:rPr lang="de-AT" dirty="0"/>
               <a:t>Variablen - Motivation</a:t>
-            </a:r>
-            <a:r>
-              <a:rPr lang="de-AT" dirty="0"/>
-              <a:t/>
             </a:r>
             <a:br>
               <a:rPr lang="de-AT" dirty="0"/>
@@ -8529,21 +8525,13 @@
               <a:buChar char="•"/>
             </a:pPr>
             <a:r>
-              <a:rPr lang="de-AT" dirty="0" smtClean="0"/>
-              <a:t>Unser bisheriges „Programm“ hat bei </a:t>
-            </a:r>
-            <a:r>
-              <a:rPr lang="de-AT" dirty="0" smtClean="0"/>
-              <a:t>jedem </a:t>
-            </a:r>
-            <a:r>
-              <a:rPr lang="de-AT" dirty="0" smtClean="0"/>
-              <a:t>Aufruf immer „Hallo Welt“ ausgegeben.</a:t>
+              <a:rPr lang="de-AT" dirty="0"/>
+              <a:t>Unser bisheriges „Programm“ hat bei jedem Aufruf immer „Hallo Welt“ ausgegeben.</a:t>
             </a:r>
             <a:br>
-              <a:rPr lang="de-AT" dirty="0" smtClean="0"/>
+              <a:rPr lang="de-AT" dirty="0"/>
             </a:br>
-            <a:endParaRPr lang="de-AT" dirty="0" smtClean="0"/>
+            <a:endParaRPr lang="de-AT" dirty="0"/>
           </a:p>
           <a:p>
             <a:pPr marL="285750" indent="-285750">
@@ -8551,20 +8539,20 @@
               <a:buChar char="•"/>
             </a:pPr>
             <a:r>
-              <a:rPr lang="de-AT" dirty="0" smtClean="0"/>
+              <a:rPr lang="de-AT" dirty="0"/>
               <a:t>Wir wollen den Benutzer auffordern, seinen Namen einzugeben.</a:t>
             </a:r>
             <a:br>
-              <a:rPr lang="de-AT" dirty="0" smtClean="0"/>
+              <a:rPr lang="de-AT" dirty="0"/>
             </a:br>
             <a:r>
-              <a:rPr lang="de-AT" dirty="0" smtClean="0"/>
+              <a:rPr lang="de-AT" dirty="0"/>
               <a:t>Der Name soll anschließend ausgegeben werden.</a:t>
             </a:r>
             <a:br>
-              <a:rPr lang="de-AT" dirty="0" smtClean="0"/>
+              <a:rPr lang="de-AT" dirty="0"/>
             </a:br>
-            <a:endParaRPr lang="de-AT" dirty="0" smtClean="0"/>
+            <a:endParaRPr lang="de-AT" dirty="0"/>
           </a:p>
           <a:p>
             <a:pPr marL="285750" indent="-285750">
@@ -8572,20 +8560,20 @@
               <a:buChar char="•"/>
             </a:pPr>
             <a:r>
-              <a:rPr lang="de-AT" dirty="0" smtClean="0"/>
+              <a:rPr lang="de-AT" dirty="0"/>
               <a:t>Der Benutzer soll uns den Vornamen, Nachnamen und sein Alter in Jahren mitteilen.</a:t>
             </a:r>
             <a:br>
-              <a:rPr lang="de-AT" dirty="0" smtClean="0"/>
+              <a:rPr lang="de-AT" dirty="0"/>
             </a:br>
             <a:r>
-              <a:rPr lang="de-AT" dirty="0" smtClean="0"/>
+              <a:rPr lang="de-AT" dirty="0"/>
               <a:t>All diese Werte wollen wir uns im Programm merken und wieder ausgeben.</a:t>
             </a:r>
             <a:br>
-              <a:rPr lang="de-AT" dirty="0" smtClean="0"/>
+              <a:rPr lang="de-AT" dirty="0"/>
             </a:br>
-            <a:endParaRPr lang="de-AT" dirty="0" smtClean="0"/>
+            <a:endParaRPr lang="de-AT" dirty="0"/>
           </a:p>
           <a:p>
             <a:pPr marL="285750" indent="-285750">
@@ -8593,21 +8581,21 @@
               <a:buChar char="•"/>
             </a:pPr>
             <a:r>
-              <a:rPr lang="de-AT" dirty="0" smtClean="0"/>
+              <a:rPr lang="de-AT" dirty="0"/>
               <a:t>Der Benutzer sagt uns die Kantenlänge eines Quadrates.</a:t>
             </a:r>
             <a:br>
-              <a:rPr lang="de-AT" dirty="0" smtClean="0"/>
+              <a:rPr lang="de-AT" dirty="0"/>
             </a:br>
             <a:r>
-              <a:rPr lang="de-AT" dirty="0" smtClean="0"/>
+              <a:rPr lang="de-AT" dirty="0"/>
               <a:t>Das Programm berechnet und merkt sich den Umfang und den Flächeninhalt.</a:t>
             </a:r>
             <a:br>
-              <a:rPr lang="de-AT" dirty="0" smtClean="0"/>
+              <a:rPr lang="de-AT" dirty="0"/>
             </a:br>
             <a:r>
-              <a:rPr lang="de-AT" dirty="0" smtClean="0"/>
+              <a:rPr lang="de-AT" dirty="0"/>
               <a:t>Diese Werte werden anschließend ausgegeben.</a:t>
             </a:r>
           </a:p>
@@ -8616,11 +8604,11 @@
               <a:buFont typeface="Arial" panose="020B0604020202020204" pitchFamily="34" charset="0"/>
               <a:buChar char="•"/>
             </a:pPr>
-            <a:endParaRPr lang="de-AT" sz="2000" dirty="0" smtClean="0"/>
-          </a:p>
-          <a:p>
-            <a:r>
-              <a:rPr lang="de-AT" sz="2000" dirty="0" smtClean="0">
+            <a:endParaRPr lang="de-AT" sz="2000" dirty="0"/>
+          </a:p>
+          <a:p>
+            <a:r>
+              <a:rPr lang="de-AT" sz="2000" dirty="0">
                 <a:solidFill>
                   <a:srgbClr val="C00000"/>
                 </a:solidFill>
@@ -8630,7 +8618,7 @@
           </a:p>
           <a:p>
             <a:r>
-              <a:rPr lang="de-AT" sz="2000" dirty="0" smtClean="0">
+              <a:rPr lang="de-AT" sz="2000" dirty="0">
                 <a:solidFill>
                   <a:srgbClr val="C00000"/>
                 </a:solidFill>
@@ -8657,13 +8645,6 @@
   <p:clrMapOvr>
     <a:masterClrMapping/>
   </p:clrMapOvr>
-  <p:timing>
-    <p:tnLst>
-      <p:par>
-        <p:cTn id="1" dur="indefinite" restart="never" nodeType="tmRoot"/>
-      </p:par>
-    </p:tnLst>
-  </p:timing>
 </p:sld>
 </file>
 
@@ -11928,61 +11909,36 @@
                 <a:latin typeface="Courier New" panose="02070309020205020404" pitchFamily="49" charset="0"/>
                 <a:cs typeface="Courier New" panose="02070309020205020404" pitchFamily="49" charset="0"/>
               </a:rPr>
-              <a:t>string </a:t>
-            </a:r>
-            <a:r>
-              <a:rPr lang="en-US" dirty="0" smtClean="0">
+              <a:t>string message = </a:t>
+            </a:r>
+            <a:r>
+              <a:rPr lang="de-AT" dirty="0">
                 <a:latin typeface="Courier New" panose="02070309020205020404" pitchFamily="49" charset="0"/>
                 <a:cs typeface="Courier New" panose="02070309020205020404" pitchFamily="49" charset="0"/>
               </a:rPr>
-              <a:t>message</a:t>
-            </a:r>
-            <a:r>
-              <a:rPr lang="en-US" dirty="0" smtClean="0">
-                <a:latin typeface="Courier New" panose="02070309020205020404" pitchFamily="49" charset="0"/>
-                <a:cs typeface="Courier New" panose="02070309020205020404" pitchFamily="49" charset="0"/>
-              </a:rPr>
-              <a:t> </a:t>
+              <a:t>"</a:t>
             </a:r>
             <a:r>
               <a:rPr lang="en-US" dirty="0">
                 <a:latin typeface="Courier New" panose="02070309020205020404" pitchFamily="49" charset="0"/>
                 <a:cs typeface="Courier New" panose="02070309020205020404" pitchFamily="49" charset="0"/>
               </a:rPr>
-              <a:t>= </a:t>
-            </a:r>
-            <a:r>
-              <a:rPr lang="de-AT" dirty="0" smtClean="0">
+              <a:t>Important text</a:t>
+            </a:r>
+            <a:r>
+              <a:rPr lang="de-AT" dirty="0">
                 <a:latin typeface="Courier New" panose="02070309020205020404" pitchFamily="49" charset="0"/>
                 <a:cs typeface="Courier New" panose="02070309020205020404" pitchFamily="49" charset="0"/>
               </a:rPr>
               <a:t>"</a:t>
             </a:r>
             <a:r>
-              <a:rPr lang="en-US" dirty="0" smtClean="0">
+              <a:rPr lang="en-US" dirty="0">
                 <a:latin typeface="Courier New" panose="02070309020205020404" pitchFamily="49" charset="0"/>
                 <a:cs typeface="Courier New" panose="02070309020205020404" pitchFamily="49" charset="0"/>
               </a:rPr>
-              <a:t>Important text</a:t>
-            </a:r>
-            <a:r>
-              <a:rPr lang="de-AT" dirty="0" smtClean="0">
-                <a:latin typeface="Courier New" panose="02070309020205020404" pitchFamily="49" charset="0"/>
-                <a:cs typeface="Courier New" panose="02070309020205020404" pitchFamily="49" charset="0"/>
-              </a:rPr>
-              <a:t>"</a:t>
-            </a:r>
-            <a:r>
-              <a:rPr lang="en-US" dirty="0" smtClean="0">
-                <a:latin typeface="Courier New" panose="02070309020205020404" pitchFamily="49" charset="0"/>
-                <a:cs typeface="Courier New" panose="02070309020205020404" pitchFamily="49" charset="0"/>
-              </a:rPr>
               <a:t>;</a:t>
             </a:r>
-            <a:endParaRPr lang="en-US" dirty="0">
-              <a:latin typeface="Courier New" panose="02070309020205020404" pitchFamily="49" charset="0"/>
-              <a:cs typeface="Courier New" panose="02070309020205020404" pitchFamily="49" charset="0"/>
-            </a:endParaRPr>
           </a:p>
           <a:p>
             <a:pPr marL="0" lvl="0" indent="0">
@@ -12004,25 +11960,18 @@
               <a:t> </a:t>
             </a:r>
             <a:r>
-              <a:rPr lang="en-US" dirty="0" err="1" smtClean="0">
+              <a:rPr lang="en-US" dirty="0" err="1">
                 <a:latin typeface="Courier New" panose="02070309020205020404" pitchFamily="49" charset="0"/>
                 <a:cs typeface="Courier New" panose="02070309020205020404" pitchFamily="49" charset="0"/>
               </a:rPr>
               <a:t>errorCount</a:t>
-            </a:r>
-            <a:r>
-              <a:rPr lang="en-US" dirty="0" smtClean="0">
-                <a:latin typeface="Courier New" panose="02070309020205020404" pitchFamily="49" charset="0"/>
-                <a:cs typeface="Courier New" panose="02070309020205020404" pitchFamily="49" charset="0"/>
-              </a:rPr>
-              <a:t> </a:t>
             </a:r>
             <a:r>
               <a:rPr lang="en-US" dirty="0">
                 <a:latin typeface="Courier New" panose="02070309020205020404" pitchFamily="49" charset="0"/>
                 <a:cs typeface="Courier New" panose="02070309020205020404" pitchFamily="49" charset="0"/>
               </a:rPr>
-              <a:t>= 42;</a:t>
+              <a:t> = 42;</a:t>
             </a:r>
           </a:p>
           <a:p>
@@ -12065,40 +12014,26 @@
               <a:t>double </a:t>
             </a:r>
             <a:r>
-              <a:rPr lang="en-US" dirty="0" err="1" smtClean="0">
+              <a:rPr lang="en-US" dirty="0" err="1">
                 <a:latin typeface="Courier New" panose="02070309020205020404" pitchFamily="49" charset="0"/>
                 <a:cs typeface="Courier New" panose="02070309020205020404" pitchFamily="49" charset="0"/>
               </a:rPr>
               <a:t>piValue</a:t>
-            </a:r>
-            <a:r>
-              <a:rPr lang="en-US" dirty="0" smtClean="0">
-                <a:latin typeface="Courier New" panose="02070309020205020404" pitchFamily="49" charset="0"/>
-                <a:cs typeface="Courier New" panose="02070309020205020404" pitchFamily="49" charset="0"/>
-              </a:rPr>
-              <a:t> </a:t>
             </a:r>
             <a:r>
               <a:rPr lang="en-US" dirty="0">
                 <a:latin typeface="Courier New" panose="02070309020205020404" pitchFamily="49" charset="0"/>
                 <a:cs typeface="Courier New" panose="02070309020205020404" pitchFamily="49" charset="0"/>
               </a:rPr>
-              <a:t>= 3.141592653</a:t>
-            </a:r>
-            <a:r>
-              <a:rPr lang="en-US" dirty="0" smtClean="0">
+              <a:t> = 3.141592653;</a:t>
+            </a:r>
+            <a:br>
+              <a:rPr lang="en-US" dirty="0">
                 <a:latin typeface="Courier New" panose="02070309020205020404" pitchFamily="49" charset="0"/>
                 <a:cs typeface="Courier New" panose="02070309020205020404" pitchFamily="49" charset="0"/>
               </a:rPr>
-              <a:t>;</a:t>
-            </a:r>
-            <a:br>
-              <a:rPr lang="en-US" dirty="0" smtClean="0">
-                <a:latin typeface="Courier New" panose="02070309020205020404" pitchFamily="49" charset="0"/>
-                <a:cs typeface="Courier New" panose="02070309020205020404" pitchFamily="49" charset="0"/>
-              </a:rPr>
             </a:br>
-            <a:endParaRPr lang="de-AT" sz="1800" dirty="0" smtClean="0">
+            <a:endParaRPr lang="de-AT" sz="1800" dirty="0">
               <a:latin typeface="Courier New" panose="02070309020205020404" pitchFamily="49" charset="0"/>
               <a:ea typeface="Monaco"/>
               <a:cs typeface="Courier New" panose="02070309020205020404" pitchFamily="49" charset="0"/>
@@ -12111,65 +12046,61 @@
               <a:defRPr sz="1800"/>
             </a:pPr>
             <a:r>
-              <a:rPr lang="de-AT" sz="1800" dirty="0" err="1" smtClean="0">
-                <a:latin typeface="Courier New" panose="02070309020205020404" pitchFamily="49" charset="0"/>
-                <a:cs typeface="Courier New" panose="02070309020205020404" pitchFamily="49" charset="0"/>
-              </a:rPr>
-              <a:t>string</a:t>
-            </a:r>
-            <a:r>
-              <a:rPr lang="de-AT" sz="1800" dirty="0" smtClean="0">
-                <a:latin typeface="Courier New" panose="02070309020205020404" pitchFamily="49" charset="0"/>
-                <a:cs typeface="Courier New" panose="02070309020205020404" pitchFamily="49" charset="0"/>
-              </a:rPr>
-              <a:t> </a:t>
-            </a:r>
-            <a:r>
               <a:rPr lang="de-AT" sz="1800" dirty="0" err="1">
                 <a:latin typeface="Courier New" panose="02070309020205020404" pitchFamily="49" charset="0"/>
                 <a:cs typeface="Courier New" panose="02070309020205020404" pitchFamily="49" charset="0"/>
               </a:rPr>
-              <a:t>firstName</a:t>
+              <a:t>string</a:t>
             </a:r>
             <a:r>
               <a:rPr lang="de-AT" sz="1800" dirty="0">
                 <a:latin typeface="Courier New" panose="02070309020205020404" pitchFamily="49" charset="0"/>
                 <a:cs typeface="Courier New" panose="02070309020205020404" pitchFamily="49" charset="0"/>
               </a:rPr>
-              <a:t> = </a:t>
-            </a:r>
-            <a:r>
-              <a:rPr lang="de-AT" dirty="0" smtClean="0">
+              <a:t> </a:t>
+            </a:r>
+            <a:r>
+              <a:rPr lang="de-AT" sz="1800" dirty="0" err="1">
                 <a:latin typeface="Courier New" panose="02070309020205020404" pitchFamily="49" charset="0"/>
                 <a:cs typeface="Courier New" panose="02070309020205020404" pitchFamily="49" charset="0"/>
               </a:rPr>
-              <a:t>"</a:t>
-            </a:r>
-            <a:r>
-              <a:rPr lang="de-AT" sz="1800" dirty="0" smtClean="0">
+              <a:t>firstName</a:t>
+            </a:r>
+            <a:r>
+              <a:rPr lang="de-AT" sz="1800" dirty="0">
                 <a:latin typeface="Courier New" panose="02070309020205020404" pitchFamily="49" charset="0"/>
                 <a:cs typeface="Courier New" panose="02070309020205020404" pitchFamily="49" charset="0"/>
               </a:rPr>
-              <a:t>Hansi</a:t>
-            </a:r>
-            <a:r>
-              <a:rPr lang="de-AT" dirty="0" smtClean="0">
+              <a:t> = </a:t>
+            </a:r>
+            <a:r>
+              <a:rPr lang="de-AT" dirty="0">
                 <a:latin typeface="Courier New" panose="02070309020205020404" pitchFamily="49" charset="0"/>
                 <a:cs typeface="Courier New" panose="02070309020205020404" pitchFamily="49" charset="0"/>
               </a:rPr>
               <a:t>"</a:t>
             </a:r>
             <a:r>
-              <a:rPr lang="de-AT" sz="1800" dirty="0" smtClean="0">
+              <a:rPr lang="de-AT" sz="1800" dirty="0">
                 <a:latin typeface="Courier New" panose="02070309020205020404" pitchFamily="49" charset="0"/>
                 <a:cs typeface="Courier New" panose="02070309020205020404" pitchFamily="49" charset="0"/>
               </a:rPr>
+              <a:t>Hansi</a:t>
+            </a:r>
+            <a:r>
+              <a:rPr lang="de-AT" dirty="0">
+                <a:latin typeface="Courier New" panose="02070309020205020404" pitchFamily="49" charset="0"/>
+                <a:cs typeface="Courier New" panose="02070309020205020404" pitchFamily="49" charset="0"/>
+              </a:rPr>
+              <a:t>"</a:t>
+            </a:r>
+            <a:r>
+              <a:rPr lang="de-AT" sz="1800" dirty="0">
+                <a:latin typeface="Courier New" panose="02070309020205020404" pitchFamily="49" charset="0"/>
+                <a:cs typeface="Courier New" panose="02070309020205020404" pitchFamily="49" charset="0"/>
+              </a:rPr>
               <a:t>;</a:t>
             </a:r>
-            <a:endParaRPr lang="de-AT" sz="1800" dirty="0">
-              <a:latin typeface="Courier New" panose="02070309020205020404" pitchFamily="49" charset="0"/>
-              <a:cs typeface="Courier New" panose="02070309020205020404" pitchFamily="49" charset="0"/>
-            </a:endParaRPr>
           </a:p>
           <a:p>
             <a:pPr marL="0" lvl="0" indent="0">
@@ -12205,37 +12136,33 @@
               <a:t> = </a:t>
             </a:r>
             <a:r>
-              <a:rPr lang="de-AT" dirty="0" smtClean="0">
+              <a:rPr lang="de-AT" dirty="0">
                 <a:latin typeface="Courier New" panose="02070309020205020404" pitchFamily="49" charset="0"/>
                 <a:cs typeface="Courier New" panose="02070309020205020404" pitchFamily="49" charset="0"/>
               </a:rPr>
               <a:t>"</a:t>
             </a:r>
             <a:r>
-              <a:rPr lang="de-AT" sz="1800" dirty="0" smtClean="0">
+              <a:rPr lang="de-AT" sz="1800" dirty="0">
                 <a:latin typeface="Courier New" panose="02070309020205020404" pitchFamily="49" charset="0"/>
                 <a:cs typeface="Courier New" panose="02070309020205020404" pitchFamily="49" charset="0"/>
               </a:rPr>
               <a:t>Hinterseer</a:t>
             </a:r>
             <a:r>
-              <a:rPr lang="de-AT" dirty="0" smtClean="0">
+              <a:rPr lang="de-AT" dirty="0">
                 <a:latin typeface="Courier New" panose="02070309020205020404" pitchFamily="49" charset="0"/>
                 <a:cs typeface="Courier New" panose="02070309020205020404" pitchFamily="49" charset="0"/>
               </a:rPr>
               <a:t>"</a:t>
             </a:r>
             <a:r>
-              <a:rPr lang="de-AT" sz="1800" dirty="0" smtClean="0">
+              <a:rPr lang="de-AT" sz="1800" dirty="0">
                 <a:latin typeface="Courier New" panose="02070309020205020404" pitchFamily="49" charset="0"/>
                 <a:cs typeface="Courier New" panose="02070309020205020404" pitchFamily="49" charset="0"/>
               </a:rPr>
               <a:t>;</a:t>
             </a:r>
-            <a:endParaRPr lang="de-AT" sz="1800" dirty="0">
-              <a:latin typeface="Courier New" panose="02070309020205020404" pitchFamily="49" charset="0"/>
-              <a:cs typeface="Courier New" panose="02070309020205020404" pitchFamily="49" charset="0"/>
-            </a:endParaRPr>
           </a:p>
           <a:p>
             <a:pPr marL="0" lvl="0" indent="0">
@@ -12243,11 +12170,25 @@
               <a:defRPr sz="1800"/>
             </a:pPr>
             <a:r>
+              <a:rPr lang="de-AT" sz="1800" dirty="0" err="1">
+                <a:latin typeface="Courier New" panose="02070309020205020404" pitchFamily="49" charset="0"/>
+                <a:cs typeface="Courier New" panose="02070309020205020404" pitchFamily="49" charset="0"/>
+              </a:rPr>
+              <a:t>Console.WriteLine</a:t>
+            </a:r>
+            <a:r>
               <a:rPr lang="de-AT" sz="1800" dirty="0">
                 <a:latin typeface="Courier New" panose="02070309020205020404" pitchFamily="49" charset="0"/>
                 <a:cs typeface="Courier New" panose="02070309020205020404" pitchFamily="49" charset="0"/>
               </a:rPr>
-              <a:t>Console.WriteLine(</a:t>
+              <a:t>($</a:t>
+            </a:r>
+            <a:r>
+              <a:rPr lang="de-AT" dirty="0">
+                <a:latin typeface="Courier New" panose="02070309020205020404" pitchFamily="49" charset="0"/>
+                <a:cs typeface="Courier New" panose="02070309020205020404" pitchFamily="49" charset="0"/>
+              </a:rPr>
+              <a:t>"{</a:t>
             </a:r>
             <a:r>
               <a:rPr lang="de-AT" sz="1800" dirty="0" err="1">
@@ -12261,7 +12202,21 @@
                 <a:latin typeface="Courier New" panose="02070309020205020404" pitchFamily="49" charset="0"/>
                 <a:cs typeface="Courier New" panose="02070309020205020404" pitchFamily="49" charset="0"/>
               </a:rPr>
-              <a:t> + </a:t>
+              <a:t>} {</a:t>
+            </a:r>
+            <a:r>
+              <a:rPr lang="de-AT" sz="1800" dirty="0" err="1">
+                <a:latin typeface="Courier New" panose="02070309020205020404" pitchFamily="49" charset="0"/>
+                <a:cs typeface="Courier New" panose="02070309020205020404" pitchFamily="49" charset="0"/>
+              </a:rPr>
+              <a:t>lastName</a:t>
+            </a:r>
+            <a:r>
+              <a:rPr lang="de-AT" sz="1800" dirty="0">
+                <a:latin typeface="Courier New" panose="02070309020205020404" pitchFamily="49" charset="0"/>
+                <a:cs typeface="Courier New" panose="02070309020205020404" pitchFamily="49" charset="0"/>
+              </a:rPr>
+              <a:t>}</a:t>
             </a:r>
             <a:r>
               <a:rPr lang="de-AT" dirty="0">
@@ -12269,41 +12224,6 @@
                 <a:cs typeface="Courier New" panose="02070309020205020404" pitchFamily="49" charset="0"/>
               </a:rPr>
               <a:t>"</a:t>
-            </a:r>
-            <a:r>
-              <a:rPr lang="de-AT" sz="1800" dirty="0" smtClean="0">
-                <a:latin typeface="Courier New" panose="02070309020205020404" pitchFamily="49" charset="0"/>
-                <a:cs typeface="Courier New" panose="02070309020205020404" pitchFamily="49" charset="0"/>
-              </a:rPr>
-              <a:t> </a:t>
-            </a:r>
-            <a:r>
-              <a:rPr lang="de-AT" dirty="0">
-                <a:latin typeface="Courier New" panose="02070309020205020404" pitchFamily="49" charset="0"/>
-                <a:cs typeface="Courier New" panose="02070309020205020404" pitchFamily="49" charset="0"/>
-              </a:rPr>
-              <a:t>"</a:t>
-            </a:r>
-            <a:r>
-              <a:rPr lang="de-AT" sz="1800" dirty="0" smtClean="0">
-                <a:latin typeface="Courier New" panose="02070309020205020404" pitchFamily="49" charset="0"/>
-                <a:cs typeface="Courier New" panose="02070309020205020404" pitchFamily="49" charset="0"/>
-              </a:rPr>
-              <a:t> </a:t>
-            </a:r>
-            <a:r>
-              <a:rPr lang="de-AT" sz="1800" dirty="0">
-                <a:latin typeface="Courier New" panose="02070309020205020404" pitchFamily="49" charset="0"/>
-                <a:cs typeface="Courier New" panose="02070309020205020404" pitchFamily="49" charset="0"/>
-              </a:rPr>
-              <a:t>+ </a:t>
-            </a:r>
-            <a:r>
-              <a:rPr lang="de-AT" sz="1800" dirty="0" err="1">
-                <a:latin typeface="Courier New" panose="02070309020205020404" pitchFamily="49" charset="0"/>
-                <a:cs typeface="Courier New" panose="02070309020205020404" pitchFamily="49" charset="0"/>
-              </a:rPr>
-              <a:t>lastName</a:t>
             </a:r>
             <a:r>
               <a:rPr lang="de-AT" sz="1800" dirty="0">
@@ -12395,32 +12315,11 @@
               <a:t>Console.WriteLine</a:t>
             </a:r>
             <a:r>
-              <a:rPr lang="de-AT" sz="1800" dirty="0" smtClean="0">
-                <a:latin typeface="Courier New" panose="02070309020205020404" pitchFamily="49" charset="0"/>
-                <a:cs typeface="Courier New" panose="02070309020205020404" pitchFamily="49" charset="0"/>
-              </a:rPr>
-              <a:t>(</a:t>
-            </a:r>
-            <a:r>
-              <a:rPr lang="de-AT" dirty="0" smtClean="0">
-                <a:latin typeface="Courier New" panose="02070309020205020404" pitchFamily="49" charset="0"/>
-                <a:cs typeface="Courier New" panose="02070309020205020404" pitchFamily="49" charset="0"/>
-              </a:rPr>
-              <a:t>"</a:t>
-            </a:r>
-            <a:r>
-              <a:rPr lang="de-AT" sz="1800" dirty="0" smtClean="0">
-                <a:latin typeface="Courier New" panose="02070309020205020404" pitchFamily="49" charset="0"/>
-                <a:cs typeface="Courier New" panose="02070309020205020404" pitchFamily="49" charset="0"/>
-              </a:rPr>
-              <a:t>Die </a:t>
-            </a:r>
-            <a:r>
               <a:rPr lang="de-AT" sz="1800" dirty="0">
                 <a:latin typeface="Courier New" panose="02070309020205020404" pitchFamily="49" charset="0"/>
                 <a:cs typeface="Courier New" panose="02070309020205020404" pitchFamily="49" charset="0"/>
               </a:rPr>
-              <a:t>Summe beträgt </a:t>
+              <a:t>($</a:t>
             </a:r>
             <a:r>
               <a:rPr lang="de-AT" dirty="0">
@@ -12430,18 +12329,11 @@
               <a:t>"</a:t>
             </a:r>
             <a:r>
-              <a:rPr lang="de-AT" sz="1800" dirty="0" smtClean="0">
-                <a:latin typeface="Courier New" panose="02070309020205020404" pitchFamily="49" charset="0"/>
-                <a:cs typeface="Courier New" panose="02070309020205020404" pitchFamily="49" charset="0"/>
-              </a:rPr>
-              <a:t> </a:t>
-            </a:r>
-            <a:r>
               <a:rPr lang="de-AT" sz="1800" dirty="0">
                 <a:latin typeface="Courier New" panose="02070309020205020404" pitchFamily="49" charset="0"/>
                 <a:cs typeface="Courier New" panose="02070309020205020404" pitchFamily="49" charset="0"/>
               </a:rPr>
-              <a:t>+ </a:t>
+              <a:t>Die Summe beträgt {</a:t>
             </a:r>
             <a:r>
               <a:rPr lang="de-AT" sz="1800" dirty="0" err="1">
@@ -12451,7 +12343,21 @@
               <a:t>sum</a:t>
             </a:r>
             <a:r>
-              <a:rPr lang="de-AT" sz="1800" dirty="0" smtClean="0">
+              <a:rPr lang="de-AT" sz="1800" dirty="0">
+                <a:latin typeface="Courier New" panose="02070309020205020404" pitchFamily="49" charset="0"/>
+                <a:cs typeface="Courier New" panose="02070309020205020404" pitchFamily="49" charset="0"/>
+              </a:rPr>
+              <a:t>}</a:t>
+            </a:r>
+            <a:r>
+              <a:rPr lang="de-AT" dirty="0">
+                <a:latin typeface="Courier New" panose="02070309020205020404" pitchFamily="49" charset="0"/>
+                <a:cs typeface="Courier New" panose="02070309020205020404" pitchFamily="49" charset="0"/>
+              </a:rPr>
+              <a:t>"</a:t>
+            </a:r>
+            <a:r>
+              <a:rPr lang="de-AT" sz="1800" dirty="0">
                 <a:latin typeface="Courier New" panose="02070309020205020404" pitchFamily="49" charset="0"/>
                 <a:cs typeface="Courier New" panose="02070309020205020404" pitchFamily="49" charset="0"/>
               </a:rPr>
@@ -12463,7 +12369,7 @@
               <a:buNone/>
               <a:defRPr sz="1800"/>
             </a:pPr>
-            <a:endParaRPr lang="de-AT" sz="1800" dirty="0" smtClean="0">
+            <a:endParaRPr lang="de-AT" sz="1800" dirty="0">
               <a:latin typeface="Courier New" panose="02070309020205020404" pitchFamily="49" charset="0"/>
               <a:cs typeface="Courier New" panose="02070309020205020404" pitchFamily="49" charset="0"/>
             </a:endParaRPr>
@@ -12474,71 +12380,67 @@
               <a:defRPr sz="1800"/>
             </a:pPr>
             <a:r>
-              <a:rPr lang="de-AT" sz="1800" dirty="0" err="1" smtClean="0">
+              <a:rPr lang="de-AT" sz="1800" dirty="0" err="1">
                 <a:latin typeface="Courier New" panose="02070309020205020404" pitchFamily="49" charset="0"/>
                 <a:cs typeface="Courier New" panose="02070309020205020404" pitchFamily="49" charset="0"/>
               </a:rPr>
               <a:t>int</a:t>
             </a:r>
             <a:r>
-              <a:rPr lang="de-AT" sz="1800" dirty="0" smtClean="0">
+              <a:rPr lang="de-AT" sz="1800" dirty="0">
                 <a:latin typeface="Courier New" panose="02070309020205020404" pitchFamily="49" charset="0"/>
                 <a:cs typeface="Courier New" panose="02070309020205020404" pitchFamily="49" charset="0"/>
               </a:rPr>
               <a:t> </a:t>
             </a:r>
             <a:r>
-              <a:rPr lang="de-AT" sz="1800" dirty="0" err="1" smtClean="0">
+              <a:rPr lang="de-AT" sz="1800" dirty="0" err="1">
                 <a:latin typeface="Courier New" panose="02070309020205020404" pitchFamily="49" charset="0"/>
                 <a:cs typeface="Courier New" panose="02070309020205020404" pitchFamily="49" charset="0"/>
               </a:rPr>
               <a:t>count</a:t>
             </a:r>
             <a:r>
-              <a:rPr lang="de-AT" sz="1800" dirty="0" smtClean="0">
+              <a:rPr lang="de-AT" sz="1800" dirty="0">
                 <a:latin typeface="Courier New" panose="02070309020205020404" pitchFamily="49" charset="0"/>
                 <a:cs typeface="Courier New" panose="02070309020205020404" pitchFamily="49" charset="0"/>
               </a:rPr>
               <a:t> = 0;</a:t>
             </a:r>
             <a:br>
-              <a:rPr lang="de-AT" sz="1800" dirty="0" smtClean="0">
+              <a:rPr lang="de-AT" sz="1800" dirty="0">
                 <a:latin typeface="Courier New" panose="02070309020205020404" pitchFamily="49" charset="0"/>
                 <a:cs typeface="Courier New" panose="02070309020205020404" pitchFamily="49" charset="0"/>
               </a:rPr>
             </a:br>
             <a:r>
-              <a:rPr lang="de-AT" sz="1800" dirty="0" err="1" smtClean="0">
+              <a:rPr lang="de-AT" sz="1800" dirty="0" err="1">
                 <a:latin typeface="Courier New" panose="02070309020205020404" pitchFamily="49" charset="0"/>
                 <a:cs typeface="Courier New" panose="02070309020205020404" pitchFamily="49" charset="0"/>
               </a:rPr>
               <a:t>count</a:t>
             </a:r>
             <a:r>
-              <a:rPr lang="de-AT" sz="1800" dirty="0" smtClean="0">
+              <a:rPr lang="de-AT" sz="1800" dirty="0">
                 <a:latin typeface="Courier New" panose="02070309020205020404" pitchFamily="49" charset="0"/>
                 <a:cs typeface="Courier New" panose="02070309020205020404" pitchFamily="49" charset="0"/>
               </a:rPr>
               <a:t> = </a:t>
             </a:r>
             <a:r>
-              <a:rPr lang="de-AT" sz="1800" dirty="0" err="1" smtClean="0">
+              <a:rPr lang="de-AT" sz="1800" dirty="0" err="1">
                 <a:latin typeface="Courier New" panose="02070309020205020404" pitchFamily="49" charset="0"/>
                 <a:cs typeface="Courier New" panose="02070309020205020404" pitchFamily="49" charset="0"/>
               </a:rPr>
               <a:t>count</a:t>
             </a:r>
             <a:r>
-              <a:rPr lang="de-AT" sz="1800" dirty="0" smtClean="0">
+              <a:rPr lang="de-AT" sz="1800" dirty="0">
                 <a:latin typeface="Courier New" panose="02070309020205020404" pitchFamily="49" charset="0"/>
                 <a:cs typeface="Courier New" panose="02070309020205020404" pitchFamily="49" charset="0"/>
               </a:rPr>
               <a:t> + 1;</a:t>
             </a:r>
-            <a:endParaRPr lang="de-AT" sz="1800" dirty="0">
-              <a:latin typeface="Courier New" panose="02070309020205020404" pitchFamily="49" charset="0"/>
-              <a:cs typeface="Courier New" panose="02070309020205020404" pitchFamily="49" charset="0"/>
-            </a:endParaRPr>
           </a:p>
           <a:p>
             <a:pPr marL="0" lvl="0" indent="0">
@@ -17889,13 +17791,6 @@
   <p:clrMapOvr>
     <a:masterClrMapping/>
   </p:clrMapOvr>
-  <p:timing>
-    <p:tnLst>
-      <p:par>
-        <p:cTn id="1" dur="indefinite" restart="never" nodeType="tmRoot"/>
-      </p:par>
-    </p:tnLst>
-  </p:timing>
 </p:sld>
 </file>
 
@@ -17921,7 +17816,7 @@
           <p:cNvPr id="2" name="Titel 1">
             <a:extLst>
               <a:ext uri="{FF2B5EF4-FFF2-40B4-BE49-F238E27FC236}">
-                <a16:creationId xmlns:a16="http://schemas.microsoft.com/office/drawing/2014/main" xmlns="" id="{91AE9513-1234-4703-8392-93226C9A3675}"/>
+                <a16:creationId xmlns:a16="http://schemas.microsoft.com/office/drawing/2014/main" id="{91AE9513-1234-4703-8392-93226C9A3675}"/>
               </a:ext>
             </a:extLst>
           </p:cNvPr>
@@ -17938,10 +17833,9 @@
           <a:lstStyle/>
           <a:p>
             <a:r>
-              <a:rPr lang="de-AT" dirty="0" smtClean="0"/>
+              <a:rPr lang="de-AT" dirty="0"/>
               <a:t>Deklaration</a:t>
             </a:r>
-            <a:endParaRPr lang="de-AT" dirty="0"/>
           </a:p>
         </p:txBody>
       </p:sp>
@@ -17950,7 +17844,7 @@
           <p:cNvPr id="3" name="Inhaltsplatzhalter 2">
             <a:extLst>
               <a:ext uri="{FF2B5EF4-FFF2-40B4-BE49-F238E27FC236}">
-                <a16:creationId xmlns:a16="http://schemas.microsoft.com/office/drawing/2014/main" xmlns="" id="{2011BA9D-4171-4462-9EA8-9AA2E9346ACA}"/>
+                <a16:creationId xmlns:a16="http://schemas.microsoft.com/office/drawing/2014/main" id="{2011BA9D-4171-4462-9EA8-9AA2E9346ACA}"/>
               </a:ext>
             </a:extLst>
           </p:cNvPr>
@@ -17975,27 +17869,9 @@
               <a:buNone/>
             </a:pPr>
             <a:r>
-              <a:rPr lang="de-AT" dirty="0" smtClean="0"/>
+              <a:rPr lang="de-AT" dirty="0"/>
               <a:t>Bevor eine Variable verwendet werden kann muss diese bekanntgegeben (=deklariert) werden.</a:t>
             </a:r>
-          </a:p>
-          <a:p>
-            <a:endParaRPr lang="de-AT" dirty="0" smtClean="0">
-              <a:solidFill>
-                <a:srgbClr val="0000FF"/>
-              </a:solidFill>
-              <a:latin typeface="Courier New" panose="02070309020205020404" pitchFamily="49" charset="0"/>
-              <a:cs typeface="Courier New" panose="02070309020205020404" pitchFamily="49" charset="0"/>
-            </a:endParaRPr>
-          </a:p>
-          <a:p>
-            <a:endParaRPr lang="de-AT" dirty="0" smtClean="0">
-              <a:solidFill>
-                <a:srgbClr val="0000FF"/>
-              </a:solidFill>
-              <a:latin typeface="Courier New" panose="02070309020205020404" pitchFamily="49" charset="0"/>
-              <a:cs typeface="Courier New" panose="02070309020205020404" pitchFamily="49" charset="0"/>
-            </a:endParaRPr>
           </a:p>
           <a:p>
             <a:endParaRPr lang="de-AT" dirty="0">
@@ -18007,7 +17883,7 @@
             </a:endParaRPr>
           </a:p>
           <a:p>
-            <a:endParaRPr lang="de-AT" dirty="0" smtClean="0">
+            <a:endParaRPr lang="de-AT" dirty="0">
               <a:solidFill>
                 <a:srgbClr val="0000FF"/>
               </a:solidFill>
@@ -18016,7 +17892,7 @@
             </a:endParaRPr>
           </a:p>
           <a:p>
-            <a:endParaRPr lang="de-AT" dirty="0" smtClean="0">
+            <a:endParaRPr lang="de-AT" dirty="0">
               <a:solidFill>
                 <a:srgbClr val="0000FF"/>
               </a:solidFill>
@@ -18025,11 +17901,29 @@
             </a:endParaRPr>
           </a:p>
           <a:p>
+            <a:endParaRPr lang="de-AT" dirty="0">
+              <a:solidFill>
+                <a:srgbClr val="0000FF"/>
+              </a:solidFill>
+              <a:latin typeface="Courier New" panose="02070309020205020404" pitchFamily="49" charset="0"/>
+              <a:cs typeface="Courier New" panose="02070309020205020404" pitchFamily="49" charset="0"/>
+            </a:endParaRPr>
+          </a:p>
+          <a:p>
+            <a:endParaRPr lang="de-AT" dirty="0">
+              <a:solidFill>
+                <a:srgbClr val="0000FF"/>
+              </a:solidFill>
+              <a:latin typeface="Courier New" panose="02070309020205020404" pitchFamily="49" charset="0"/>
+              <a:cs typeface="Courier New" panose="02070309020205020404" pitchFamily="49" charset="0"/>
+            </a:endParaRPr>
+          </a:p>
+          <a:p>
             <a:pPr marL="0" indent="0">
               <a:buNone/>
             </a:pPr>
             <a:r>
-              <a:rPr lang="de-AT" dirty="0" err="1" smtClean="0">
+              <a:rPr lang="de-AT" dirty="0" err="1">
                 <a:solidFill>
                   <a:srgbClr val="0000FF"/>
                 </a:solidFill>
@@ -18039,7 +17933,7 @@
               <a:t>string</a:t>
             </a:r>
             <a:r>
-              <a:rPr lang="de-AT" dirty="0" smtClean="0">
+              <a:rPr lang="de-AT" dirty="0">
                 <a:solidFill>
                   <a:srgbClr val="0000FF"/>
                 </a:solidFill>
@@ -18059,7 +17953,7 @@
               <a:t>vorname</a:t>
             </a:r>
             <a:r>
-              <a:rPr lang="de-AT" dirty="0" smtClean="0">
+              <a:rPr lang="de-AT" dirty="0">
                 <a:latin typeface="Courier New" panose="02070309020205020404" pitchFamily="49" charset="0"/>
                 <a:cs typeface="Courier New" panose="02070309020205020404" pitchFamily="49" charset="0"/>
               </a:rPr>
@@ -18076,7 +17970,7 @@
               <a:t> </a:t>
             </a:r>
             <a:r>
-              <a:rPr lang="de-AT" dirty="0" err="1" smtClean="0">
+              <a:rPr lang="de-AT" dirty="0" err="1">
                 <a:solidFill>
                   <a:srgbClr val="0000FF"/>
                 </a:solidFill>
@@ -18086,7 +17980,7 @@
               <a:t>int</a:t>
             </a:r>
             <a:r>
-              <a:rPr lang="de-AT" dirty="0" smtClean="0">
+              <a:rPr lang="de-AT" dirty="0">
                 <a:solidFill>
                   <a:srgbClr val="0000FF"/>
                 </a:solidFill>
@@ -18096,7 +17990,7 @@
               <a:t> </a:t>
             </a:r>
             <a:r>
-              <a:rPr lang="de-AT" dirty="0" smtClean="0">
+              <a:rPr lang="de-AT" dirty="0">
                 <a:solidFill>
                   <a:schemeClr val="tx1"/>
                 </a:solidFill>
@@ -18106,7 +18000,7 @@
               <a:t>tage</a:t>
             </a:r>
             <a:r>
-              <a:rPr lang="de-AT" dirty="0" smtClean="0">
+              <a:rPr lang="de-AT" dirty="0">
                 <a:solidFill>
                   <a:srgbClr val="0000FF"/>
                 </a:solidFill>
@@ -18115,13 +18009,13 @@
               </a:rPr>
               <a:t>;</a:t>
             </a:r>
-            <a:endParaRPr lang="de-AT" dirty="0" smtClean="0">
+            <a:endParaRPr lang="de-AT" dirty="0">
               <a:latin typeface="Courier New" panose="02070309020205020404" pitchFamily="49" charset="0"/>
               <a:cs typeface="Courier New" panose="02070309020205020404" pitchFamily="49" charset="0"/>
             </a:endParaRPr>
           </a:p>
           <a:p>
-            <a:endParaRPr lang="de-AT" dirty="0" smtClean="0"/>
+            <a:endParaRPr lang="de-AT" dirty="0"/>
           </a:p>
         </p:txBody>
       </p:sp>
@@ -18130,7 +18024,7 @@
           <p:cNvPr id="6" name="Sprechblase: oval 5">
             <a:extLst>
               <a:ext uri="{FF2B5EF4-FFF2-40B4-BE49-F238E27FC236}">
-                <a16:creationId xmlns:a16="http://schemas.microsoft.com/office/drawing/2014/main" xmlns="" id="{381D2117-5022-4813-A7BF-4AD136F123B9}"/>
+                <a16:creationId xmlns:a16="http://schemas.microsoft.com/office/drawing/2014/main" id="{381D2117-5022-4813-A7BF-4AD136F123B9}"/>
               </a:ext>
             </a:extLst>
           </p:cNvPr>
@@ -18171,19 +18065,11 @@
           <a:p>
             <a:pPr algn="ctr"/>
             <a:r>
-              <a:rPr lang="de-AT" dirty="0" smtClean="0"/>
-              <a:t>Die </a:t>
-            </a:r>
-            <a:r>
               <a:rPr lang="de-AT" dirty="0"/>
-              <a:t>Variable heißt </a:t>
-            </a:r>
-            <a:r>
-              <a:rPr lang="de-AT" dirty="0" smtClean="0"/>
-              <a:t>„</a:t>
-            </a:r>
-            <a:r>
-              <a:rPr lang="de-AT" dirty="0" err="1" smtClean="0"/>
+              <a:t>Die Variable heißt „</a:t>
+            </a:r>
+            <a:r>
+              <a:rPr lang="de-AT" dirty="0" err="1"/>
               <a:t>vorname</a:t>
             </a:r>
             <a:r>
@@ -18210,7 +18096,7 @@
           <p:cNvPr id="10" name="Sprechblase: oval 5">
             <a:extLst>
               <a:ext uri="{FF2B5EF4-FFF2-40B4-BE49-F238E27FC236}">
-                <a16:creationId xmlns:a16="http://schemas.microsoft.com/office/drawing/2014/main" xmlns="" id="{381D2117-5022-4813-A7BF-4AD136F123B9}"/>
+                <a16:creationId xmlns:a16="http://schemas.microsoft.com/office/drawing/2014/main" id="{381D2117-5022-4813-A7BF-4AD136F123B9}"/>
               </a:ext>
             </a:extLst>
           </p:cNvPr>
@@ -18251,34 +18137,17 @@
           <a:p>
             <a:pPr algn="ctr"/>
             <a:r>
-              <a:rPr lang="de-AT" dirty="0" smtClean="0"/>
-              <a:t>Die </a:t>
-            </a:r>
-            <a:r>
               <a:rPr lang="de-AT" dirty="0"/>
-              <a:t>Variable heißt </a:t>
-            </a:r>
-            <a:r>
-              <a:rPr lang="de-AT" dirty="0" smtClean="0"/>
-              <a:t>„tage“ </a:t>
+              <a:t>Die Variable heißt „tage“ und ist vom Datentyp „</a:t>
+            </a:r>
+            <a:r>
+              <a:rPr lang="de-AT" dirty="0" err="1"/>
+              <a:t>int</a:t>
             </a:r>
             <a:r>
               <a:rPr lang="de-AT" dirty="0"/>
-              <a:t>und ist vom Datentyp </a:t>
-            </a:r>
-            <a:r>
-              <a:rPr lang="de-AT" dirty="0" smtClean="0"/>
-              <a:t>„</a:t>
-            </a:r>
-            <a:r>
-              <a:rPr lang="de-AT" dirty="0" err="1" smtClean="0"/>
-              <a:t>int</a:t>
-            </a:r>
-            <a:r>
-              <a:rPr lang="de-AT" dirty="0" smtClean="0"/>
               <a:t>“ (Ganzzahl)</a:t>
             </a:r>
-            <a:endParaRPr lang="de-AT" dirty="0"/>
           </a:p>
         </p:txBody>
       </p:sp>
@@ -18292,13 +18161,6 @@
   <p:clrMapOvr>
     <a:masterClrMapping/>
   </p:clrMapOvr>
-  <p:timing>
-    <p:tnLst>
-      <p:par>
-        <p:cTn id="1" dur="indefinite" restart="never" nodeType="tmRoot"/>
-      </p:par>
-    </p:tnLst>
-  </p:timing>
 </p:sld>
 </file>
 
@@ -18324,7 +18186,7 @@
           <p:cNvPr id="2" name="Titel 1">
             <a:extLst>
               <a:ext uri="{FF2B5EF4-FFF2-40B4-BE49-F238E27FC236}">
-                <a16:creationId xmlns:a16="http://schemas.microsoft.com/office/drawing/2014/main" xmlns="" id="{91AE9513-1234-4703-8392-93226C9A3675}"/>
+                <a16:creationId xmlns:a16="http://schemas.microsoft.com/office/drawing/2014/main" id="{91AE9513-1234-4703-8392-93226C9A3675}"/>
               </a:ext>
             </a:extLst>
           </p:cNvPr>
@@ -18341,10 +18203,9 @@
           <a:lstStyle/>
           <a:p>
             <a:r>
-              <a:rPr lang="de-AT" dirty="0" smtClean="0"/>
+              <a:rPr lang="de-AT" dirty="0"/>
               <a:t>Deklaration mit Initialisierung</a:t>
             </a:r>
-            <a:endParaRPr lang="de-AT" dirty="0"/>
           </a:p>
         </p:txBody>
       </p:sp>
@@ -18353,7 +18214,7 @@
           <p:cNvPr id="3" name="Inhaltsplatzhalter 2">
             <a:extLst>
               <a:ext uri="{FF2B5EF4-FFF2-40B4-BE49-F238E27FC236}">
-                <a16:creationId xmlns:a16="http://schemas.microsoft.com/office/drawing/2014/main" xmlns="" id="{2011BA9D-4171-4462-9EA8-9AA2E9346ACA}"/>
+                <a16:creationId xmlns:a16="http://schemas.microsoft.com/office/drawing/2014/main" id="{2011BA9D-4171-4462-9EA8-9AA2E9346ACA}"/>
               </a:ext>
             </a:extLst>
           </p:cNvPr>
@@ -18378,7 +18239,7 @@
               <a:buNone/>
             </a:pPr>
             <a:r>
-              <a:rPr lang="de-AT" dirty="0" smtClean="0"/>
+              <a:rPr lang="de-AT" dirty="0"/>
               <a:t>Bei der Deklaration einer Variable kann auch gleichzeitig ein Wert festgelegt werden:</a:t>
             </a:r>
           </a:p>
@@ -18386,7 +18247,7 @@
             <a:pPr marL="0" indent="0">
               <a:buNone/>
             </a:pPr>
-            <a:endParaRPr lang="de-AT" dirty="0" smtClean="0">
+            <a:endParaRPr lang="de-AT" dirty="0">
               <a:solidFill>
                 <a:srgbClr val="0000FF"/>
               </a:solidFill>
@@ -18399,7 +18260,7 @@
               <a:buNone/>
             </a:pPr>
             <a:r>
-              <a:rPr lang="de-AT" dirty="0" err="1" smtClean="0">
+              <a:rPr lang="de-AT" dirty="0" err="1">
                 <a:solidFill>
                   <a:srgbClr val="0000FF"/>
                 </a:solidFill>
@@ -18409,7 +18270,7 @@
               <a:t>string</a:t>
             </a:r>
             <a:r>
-              <a:rPr lang="de-AT" dirty="0" smtClean="0">
+              <a:rPr lang="de-AT" dirty="0">
                 <a:solidFill>
                   <a:srgbClr val="0000FF"/>
                 </a:solidFill>
@@ -18419,7 +18280,7 @@
               <a:t> </a:t>
             </a:r>
             <a:r>
-              <a:rPr lang="de-AT" dirty="0" err="1" smtClean="0">
+              <a:rPr lang="de-AT" dirty="0" err="1">
                 <a:solidFill>
                   <a:schemeClr val="tx1"/>
                 </a:solidFill>
@@ -18429,7 +18290,7 @@
               <a:t>nachname</a:t>
             </a:r>
             <a:r>
-              <a:rPr lang="de-AT" dirty="0" smtClean="0">
+              <a:rPr lang="de-AT" dirty="0">
                 <a:solidFill>
                   <a:schemeClr val="tx1"/>
                 </a:solidFill>
@@ -18443,14 +18304,7 @@
                 <a:latin typeface="Courier New" panose="02070309020205020404" pitchFamily="49" charset="0"/>
                 <a:cs typeface="Courier New" panose="02070309020205020404" pitchFamily="49" charset="0"/>
               </a:rPr>
-              <a:t>"</a:t>
-            </a:r>
-            <a:r>
-              <a:rPr lang="de-AT" dirty="0" smtClean="0">
-                <a:latin typeface="Courier New" panose="02070309020205020404" pitchFamily="49" charset="0"/>
-                <a:cs typeface="Courier New" panose="02070309020205020404" pitchFamily="49" charset="0"/>
-              </a:rPr>
-              <a:t>Mustermann"; </a:t>
+              <a:t>"Mustermann"; </a:t>
             </a:r>
           </a:p>
           <a:p>
@@ -18458,7 +18312,7 @@
               <a:buNone/>
             </a:pPr>
             <a:r>
-              <a:rPr lang="de-AT" dirty="0" err="1" smtClean="0">
+              <a:rPr lang="de-AT" dirty="0" err="1">
                 <a:solidFill>
                   <a:srgbClr val="0000FF"/>
                 </a:solidFill>
@@ -18468,7 +18322,7 @@
               <a:t>string</a:t>
             </a:r>
             <a:r>
-              <a:rPr lang="de-AT" dirty="0" smtClean="0">
+              <a:rPr lang="de-AT" dirty="0">
                 <a:solidFill>
                   <a:srgbClr val="0000FF"/>
                 </a:solidFill>
@@ -18478,7 +18332,7 @@
               <a:t> </a:t>
             </a:r>
             <a:r>
-              <a:rPr lang="de-AT" dirty="0" err="1" smtClean="0">
+              <a:rPr lang="de-AT" dirty="0" err="1">
                 <a:solidFill>
                   <a:schemeClr val="tx1"/>
                 </a:solidFill>
@@ -18488,7 +18342,7 @@
               <a:t>wohnort</a:t>
             </a:r>
             <a:r>
-              <a:rPr lang="de-AT" dirty="0" smtClean="0">
+              <a:rPr lang="de-AT" dirty="0">
                 <a:solidFill>
                   <a:schemeClr val="tx1"/>
                 </a:solidFill>
@@ -18498,7 +18352,7 @@
               <a:t> = </a:t>
             </a:r>
             <a:r>
-              <a:rPr lang="de-AT" dirty="0" err="1" smtClean="0">
+              <a:rPr lang="de-AT" dirty="0" err="1">
                 <a:solidFill>
                   <a:schemeClr val="tx1"/>
                 </a:solidFill>
@@ -18508,7 +18362,7 @@
               <a:t>Console.ReadLine</a:t>
             </a:r>
             <a:r>
-              <a:rPr lang="de-AT" dirty="0" smtClean="0">
+              <a:rPr lang="de-AT" dirty="0">
                 <a:solidFill>
                   <a:schemeClr val="tx1"/>
                 </a:solidFill>
@@ -18518,7 +18372,127 @@
               <a:t>()</a:t>
             </a:r>
             <a:r>
-              <a:rPr lang="de-AT" dirty="0" smtClean="0">
+              <a:rPr lang="de-AT" dirty="0">
+                <a:latin typeface="Courier New" panose="02070309020205020404" pitchFamily="49" charset="0"/>
+                <a:cs typeface="Courier New" panose="02070309020205020404" pitchFamily="49" charset="0"/>
+              </a:rPr>
+              <a:t>; </a:t>
+            </a:r>
+          </a:p>
+          <a:p>
+            <a:pPr marL="0" indent="0">
+              <a:buNone/>
+            </a:pPr>
+            <a:r>
+              <a:rPr lang="de-AT" dirty="0" err="1">
+                <a:solidFill>
+                  <a:srgbClr val="0000FF"/>
+                </a:solidFill>
+                <a:latin typeface="Courier New" panose="02070309020205020404" pitchFamily="49" charset="0"/>
+                <a:cs typeface="Courier New" panose="02070309020205020404" pitchFamily="49" charset="0"/>
+              </a:rPr>
+              <a:t>int</a:t>
+            </a:r>
+            <a:r>
+              <a:rPr lang="de-AT" dirty="0">
+                <a:solidFill>
+                  <a:srgbClr val="0000FF"/>
+                </a:solidFill>
+                <a:latin typeface="Courier New" panose="02070309020205020404" pitchFamily="49" charset="0"/>
+                <a:cs typeface="Courier New" panose="02070309020205020404" pitchFamily="49" charset="0"/>
+              </a:rPr>
+              <a:t> </a:t>
+            </a:r>
+            <a:r>
+              <a:rPr lang="de-AT" dirty="0">
+                <a:solidFill>
+                  <a:schemeClr val="tx1"/>
+                </a:solidFill>
+                <a:latin typeface="Courier New" panose="02070309020205020404" pitchFamily="49" charset="0"/>
+                <a:cs typeface="Courier New" panose="02070309020205020404" pitchFamily="49" charset="0"/>
+              </a:rPr>
+              <a:t>tage = 9</a:t>
+            </a:r>
+            <a:r>
+              <a:rPr lang="de-AT" dirty="0">
+                <a:solidFill>
+                  <a:srgbClr val="0000FF"/>
+                </a:solidFill>
+                <a:latin typeface="Courier New" panose="02070309020205020404" pitchFamily="49" charset="0"/>
+                <a:cs typeface="Courier New" panose="02070309020205020404" pitchFamily="49" charset="0"/>
+              </a:rPr>
+              <a:t>;</a:t>
+            </a:r>
+          </a:p>
+          <a:p>
+            <a:pPr marL="0" indent="0">
+              <a:buNone/>
+            </a:pPr>
+            <a:r>
+              <a:rPr lang="de-AT" dirty="0" err="1">
+                <a:solidFill>
+                  <a:srgbClr val="0000FF"/>
+                </a:solidFill>
+                <a:latin typeface="Courier New" panose="02070309020205020404" pitchFamily="49" charset="0"/>
+                <a:cs typeface="Courier New" panose="02070309020205020404" pitchFamily="49" charset="0"/>
+              </a:rPr>
+              <a:t>int</a:t>
+            </a:r>
+            <a:r>
+              <a:rPr lang="de-AT" dirty="0">
+                <a:solidFill>
+                  <a:srgbClr val="0000FF"/>
+                </a:solidFill>
+                <a:latin typeface="Courier New" panose="02070309020205020404" pitchFamily="49" charset="0"/>
+                <a:cs typeface="Courier New" panose="02070309020205020404" pitchFamily="49" charset="0"/>
+              </a:rPr>
+              <a:t> </a:t>
+            </a:r>
+            <a:r>
+              <a:rPr lang="de-AT" dirty="0" err="1">
+                <a:solidFill>
+                  <a:schemeClr val="tx1"/>
+                </a:solidFill>
+                <a:latin typeface="Courier New" panose="02070309020205020404" pitchFamily="49" charset="0"/>
+                <a:cs typeface="Courier New" panose="02070309020205020404" pitchFamily="49" charset="0"/>
+              </a:rPr>
+              <a:t>minuten</a:t>
+            </a:r>
+            <a:r>
+              <a:rPr lang="de-AT" dirty="0">
+                <a:solidFill>
+                  <a:schemeClr val="tx1"/>
+                </a:solidFill>
+                <a:latin typeface="Courier New" panose="02070309020205020404" pitchFamily="49" charset="0"/>
+                <a:cs typeface="Courier New" panose="02070309020205020404" pitchFamily="49" charset="0"/>
+              </a:rPr>
+              <a:t> </a:t>
+            </a:r>
+            <a:r>
+              <a:rPr lang="de-AT" dirty="0">
+                <a:solidFill>
+                  <a:srgbClr val="0000FF"/>
+                </a:solidFill>
+                <a:latin typeface="Courier New" panose="02070309020205020404" pitchFamily="49" charset="0"/>
+                <a:cs typeface="Courier New" panose="02070309020205020404" pitchFamily="49" charset="0"/>
+              </a:rPr>
+              <a:t>= </a:t>
+            </a:r>
+            <a:r>
+              <a:rPr lang="de-AT" dirty="0">
+                <a:solidFill>
+                  <a:schemeClr val="tx1"/>
+                </a:solidFill>
+                <a:latin typeface="Courier New" panose="02070309020205020404" pitchFamily="49" charset="0"/>
+                <a:cs typeface="Courier New" panose="02070309020205020404" pitchFamily="49" charset="0"/>
+              </a:rPr>
+              <a:t>24 * 60</a:t>
+            </a:r>
+            <a:r>
+              <a:rPr lang="de-AT" dirty="0">
+                <a:solidFill>
+                  <a:srgbClr val="0000FF"/>
+                </a:solidFill>
                 <a:latin typeface="Courier New" panose="02070309020205020404" pitchFamily="49" charset="0"/>
                 <a:cs typeface="Courier New" panose="02070309020205020404" pitchFamily="49" charset="0"/>
               </a:rPr>
@@ -18530,141 +18504,17 @@
             </a:endParaRPr>
           </a:p>
           <a:p>
+            <a:endParaRPr lang="de-AT" dirty="0"/>
+          </a:p>
+          <a:p>
             <a:pPr marL="0" indent="0">
               <a:buNone/>
             </a:pPr>
             <a:r>
-              <a:rPr lang="de-AT" dirty="0" err="1" smtClean="0">
-                <a:solidFill>
-                  <a:srgbClr val="0000FF"/>
-                </a:solidFill>
-                <a:latin typeface="Courier New" panose="02070309020205020404" pitchFamily="49" charset="0"/>
-                <a:cs typeface="Courier New" panose="02070309020205020404" pitchFamily="49" charset="0"/>
-              </a:rPr>
-              <a:t>int</a:t>
-            </a:r>
-            <a:r>
-              <a:rPr lang="de-AT" dirty="0" smtClean="0">
-                <a:solidFill>
-                  <a:srgbClr val="0000FF"/>
-                </a:solidFill>
-                <a:latin typeface="Courier New" panose="02070309020205020404" pitchFamily="49" charset="0"/>
-                <a:cs typeface="Courier New" panose="02070309020205020404" pitchFamily="49" charset="0"/>
-              </a:rPr>
-              <a:t> </a:t>
-            </a:r>
-            <a:r>
-              <a:rPr lang="de-AT" dirty="0" smtClean="0">
-                <a:solidFill>
-                  <a:schemeClr val="tx1"/>
-                </a:solidFill>
-                <a:latin typeface="Courier New" panose="02070309020205020404" pitchFamily="49" charset="0"/>
-                <a:cs typeface="Courier New" panose="02070309020205020404" pitchFamily="49" charset="0"/>
-              </a:rPr>
-              <a:t>tage = 9</a:t>
-            </a:r>
-            <a:r>
-              <a:rPr lang="de-AT" dirty="0" smtClean="0">
-                <a:solidFill>
-                  <a:srgbClr val="0000FF"/>
-                </a:solidFill>
-                <a:latin typeface="Courier New" panose="02070309020205020404" pitchFamily="49" charset="0"/>
-                <a:cs typeface="Courier New" panose="02070309020205020404" pitchFamily="49" charset="0"/>
-              </a:rPr>
-              <a:t>;</a:t>
-            </a:r>
-          </a:p>
-          <a:p>
-            <a:pPr marL="0" indent="0">
-              <a:buNone/>
-            </a:pPr>
-            <a:r>
-              <a:rPr lang="de-AT" dirty="0" err="1" smtClean="0">
-                <a:solidFill>
-                  <a:srgbClr val="0000FF"/>
-                </a:solidFill>
-                <a:latin typeface="Courier New" panose="02070309020205020404" pitchFamily="49" charset="0"/>
-                <a:cs typeface="Courier New" panose="02070309020205020404" pitchFamily="49" charset="0"/>
-              </a:rPr>
-              <a:t>int</a:t>
-            </a:r>
-            <a:r>
-              <a:rPr lang="de-AT" dirty="0" smtClean="0">
-                <a:solidFill>
-                  <a:srgbClr val="0000FF"/>
-                </a:solidFill>
-                <a:latin typeface="Courier New" panose="02070309020205020404" pitchFamily="49" charset="0"/>
-                <a:cs typeface="Courier New" panose="02070309020205020404" pitchFamily="49" charset="0"/>
-              </a:rPr>
-              <a:t> </a:t>
-            </a:r>
-            <a:r>
-              <a:rPr lang="de-AT" dirty="0" err="1" smtClean="0">
-                <a:solidFill>
-                  <a:schemeClr val="tx1"/>
-                </a:solidFill>
-                <a:latin typeface="Courier New" panose="02070309020205020404" pitchFamily="49" charset="0"/>
-                <a:cs typeface="Courier New" panose="02070309020205020404" pitchFamily="49" charset="0"/>
-              </a:rPr>
-              <a:t>minuten</a:t>
-            </a:r>
-            <a:r>
-              <a:rPr lang="de-AT" dirty="0" smtClean="0">
-                <a:solidFill>
-                  <a:schemeClr val="tx1"/>
-                </a:solidFill>
-                <a:latin typeface="Courier New" panose="02070309020205020404" pitchFamily="49" charset="0"/>
-                <a:cs typeface="Courier New" panose="02070309020205020404" pitchFamily="49" charset="0"/>
-              </a:rPr>
-              <a:t> </a:t>
-            </a:r>
-            <a:r>
-              <a:rPr lang="de-AT" dirty="0" smtClean="0">
-                <a:solidFill>
-                  <a:srgbClr val="0000FF"/>
-                </a:solidFill>
-                <a:latin typeface="Courier New" panose="02070309020205020404" pitchFamily="49" charset="0"/>
-                <a:cs typeface="Courier New" panose="02070309020205020404" pitchFamily="49" charset="0"/>
-              </a:rPr>
-              <a:t>= </a:t>
-            </a:r>
-            <a:r>
-              <a:rPr lang="de-AT" dirty="0" smtClean="0">
-                <a:solidFill>
-                  <a:schemeClr val="tx1"/>
-                </a:solidFill>
-                <a:latin typeface="Courier New" panose="02070309020205020404" pitchFamily="49" charset="0"/>
-                <a:cs typeface="Courier New" panose="02070309020205020404" pitchFamily="49" charset="0"/>
-              </a:rPr>
-              <a:t>24 * 60</a:t>
-            </a:r>
-            <a:r>
-              <a:rPr lang="de-AT" dirty="0" smtClean="0">
-                <a:solidFill>
-                  <a:srgbClr val="0000FF"/>
-                </a:solidFill>
-                <a:latin typeface="Courier New" panose="02070309020205020404" pitchFamily="49" charset="0"/>
-                <a:cs typeface="Courier New" panose="02070309020205020404" pitchFamily="49" charset="0"/>
-              </a:rPr>
-              <a:t>; </a:t>
-            </a:r>
-            <a:endParaRPr lang="de-AT" dirty="0" smtClean="0">
-              <a:latin typeface="Courier New" panose="02070309020205020404" pitchFamily="49" charset="0"/>
-              <a:cs typeface="Courier New" panose="02070309020205020404" pitchFamily="49" charset="0"/>
-            </a:endParaRPr>
-          </a:p>
-          <a:p>
-            <a:endParaRPr lang="de-AT" dirty="0" smtClean="0"/>
-          </a:p>
-          <a:p>
-            <a:pPr marL="0" indent="0">
-              <a:buNone/>
-            </a:pPr>
-            <a:r>
               <a:rPr lang="de-DE" sz="1600" dirty="0"/>
               <a:t>Alle Variablen müssen vor der Benutzung initialisiert werden (aber nicht zwangsläufig sofort bei der Deklaration</a:t>
             </a:r>
-            <a:endParaRPr lang="de-AT" sz="1600" dirty="0" smtClean="0"/>
+            <a:endParaRPr lang="de-AT" sz="1600" dirty="0"/>
           </a:p>
         </p:txBody>
       </p:sp>
@@ -18678,13 +18528,6 @@
   <p:clrMapOvr>
     <a:masterClrMapping/>
   </p:clrMapOvr>
-  <p:timing>
-    <p:tnLst>
-      <p:par>
-        <p:cTn id="1" dur="indefinite" restart="never" nodeType="tmRoot"/>
-      </p:par>
-    </p:tnLst>
-  </p:timing>
 </p:sld>
 </file>
 
@@ -18722,10 +18565,9 @@
           <a:p>
             <a:pPr eaLnBrk="1" hangingPunct="1"/>
             <a:r>
-              <a:rPr lang="de-AT" altLang="de-DE" dirty="0" smtClean="0"/>
+              <a:rPr lang="de-AT" altLang="de-DE" dirty="0"/>
               <a:t>Datentypen - Übersicht</a:t>
             </a:r>
-            <a:endParaRPr lang="de-AT" altLang="de-DE" dirty="0"/>
           </a:p>
         </p:txBody>
       </p:sp>
@@ -19074,13 +18916,6 @@
   <p:clrMapOvr>
     <a:masterClrMapping/>
   </p:clrMapOvr>
-  <p:timing>
-    <p:tnLst>
-      <p:par>
-        <p:cTn id="1" dur="indefinite" restart="never" nodeType="tmRoot"/>
-      </p:par>
-    </p:tnLst>
-  </p:timing>
 </p:sld>
 </file>
 
@@ -19954,13 +19789,6 @@
   <p:clrMapOvr>
     <a:masterClrMapping/>
   </p:clrMapOvr>
-  <p:timing>
-    <p:tnLst>
-      <p:par>
-        <p:cTn id="1" dur="indefinite" restart="never" nodeType="tmRoot"/>
-      </p:par>
-    </p:tnLst>
-  </p:timing>
 </p:sld>
 </file>
 
@@ -19986,7 +19814,7 @@
           <p:cNvPr id="2" name="Titel 1">
             <a:extLst>
               <a:ext uri="{FF2B5EF4-FFF2-40B4-BE49-F238E27FC236}">
-                <a16:creationId xmlns:a16="http://schemas.microsoft.com/office/drawing/2014/main" xmlns="" id="{91AE9513-1234-4703-8392-93226C9A3675}"/>
+                <a16:creationId xmlns:a16="http://schemas.microsoft.com/office/drawing/2014/main" id="{91AE9513-1234-4703-8392-93226C9A3675}"/>
               </a:ext>
             </a:extLst>
           </p:cNvPr>
@@ -20003,10 +19831,9 @@
           <a:lstStyle/>
           <a:p>
             <a:r>
-              <a:rPr lang="de-AT" dirty="0" smtClean="0"/>
+              <a:rPr lang="de-AT" dirty="0"/>
               <a:t>Verwendung (Evaluation)</a:t>
             </a:r>
-            <a:endParaRPr lang="de-AT" dirty="0"/>
           </a:p>
         </p:txBody>
       </p:sp>
@@ -20015,7 +19842,7 @@
           <p:cNvPr id="3" name="Inhaltsplatzhalter 2">
             <a:extLst>
               <a:ext uri="{FF2B5EF4-FFF2-40B4-BE49-F238E27FC236}">
-                <a16:creationId xmlns:a16="http://schemas.microsoft.com/office/drawing/2014/main" xmlns="" id="{2011BA9D-4171-4462-9EA8-9AA2E9346ACA}"/>
+                <a16:creationId xmlns:a16="http://schemas.microsoft.com/office/drawing/2014/main" id="{2011BA9D-4171-4462-9EA8-9AA2E9346ACA}"/>
               </a:ext>
             </a:extLst>
           </p:cNvPr>
@@ -20040,7 +19867,7 @@
               <a:buNone/>
             </a:pPr>
             <a:r>
-              <a:rPr lang="de-AT" dirty="0" smtClean="0"/>
+              <a:rPr lang="de-AT" dirty="0"/>
               <a:t>Der aktuelle Wert einer Variablen kann jederzeit bestimmt werden.</a:t>
             </a:r>
           </a:p>
@@ -20049,35 +19876,35 @@
               <a:buNone/>
             </a:pPr>
             <a:r>
-              <a:rPr lang="de-AT" dirty="0" smtClean="0">
+              <a:rPr lang="de-AT" dirty="0">
                 <a:latin typeface="Courier New" panose="02070309020205020404" pitchFamily="49" charset="0"/>
                 <a:cs typeface="Courier New" panose="02070309020205020404" pitchFamily="49" charset="0"/>
               </a:rPr>
               <a:t>  </a:t>
             </a:r>
             <a:r>
-              <a:rPr lang="de-AT" dirty="0" err="1" smtClean="0">
+              <a:rPr lang="de-AT" dirty="0" err="1">
                 <a:latin typeface="Courier New" panose="02070309020205020404" pitchFamily="49" charset="0"/>
                 <a:cs typeface="Courier New" panose="02070309020205020404" pitchFamily="49" charset="0"/>
               </a:rPr>
               <a:t>Console.WriteLine</a:t>
             </a:r>
             <a:r>
-              <a:rPr lang="de-AT" dirty="0" smtClean="0">
+              <a:rPr lang="de-AT" dirty="0">
                 <a:latin typeface="Courier New" panose="02070309020205020404" pitchFamily="49" charset="0"/>
                 <a:cs typeface="Courier New" panose="02070309020205020404" pitchFamily="49" charset="0"/>
               </a:rPr>
               <a:t>(</a:t>
             </a:r>
             <a:r>
-              <a:rPr lang="de-AT" dirty="0" err="1" smtClean="0">
+              <a:rPr lang="de-AT" dirty="0" err="1">
                 <a:latin typeface="Courier New" panose="02070309020205020404" pitchFamily="49" charset="0"/>
                 <a:cs typeface="Courier New" panose="02070309020205020404" pitchFamily="49" charset="0"/>
               </a:rPr>
               <a:t>vorname</a:t>
             </a:r>
             <a:r>
-              <a:rPr lang="de-AT" dirty="0" smtClean="0">
+              <a:rPr lang="de-AT" dirty="0">
                 <a:latin typeface="Courier New" panose="02070309020205020404" pitchFamily="49" charset="0"/>
                 <a:cs typeface="Courier New" panose="02070309020205020404" pitchFamily="49" charset="0"/>
               </a:rPr>
@@ -20089,21 +19916,21 @@
               <a:buNone/>
             </a:pPr>
             <a:r>
-              <a:rPr lang="de-AT" dirty="0" smtClean="0">
+              <a:rPr lang="de-AT" dirty="0">
                 <a:latin typeface="Courier New" panose="02070309020205020404" pitchFamily="49" charset="0"/>
                 <a:cs typeface="Courier New" panose="02070309020205020404" pitchFamily="49" charset="0"/>
               </a:rPr>
               <a:t>  </a:t>
             </a:r>
             <a:r>
-              <a:rPr lang="de-AT" dirty="0" err="1" smtClean="0">
+              <a:rPr lang="de-AT" dirty="0" err="1">
                 <a:latin typeface="Courier New" panose="02070309020205020404" pitchFamily="49" charset="0"/>
                 <a:cs typeface="Courier New" panose="02070309020205020404" pitchFamily="49" charset="0"/>
               </a:rPr>
               <a:t>Console.WriteLine</a:t>
             </a:r>
             <a:r>
-              <a:rPr lang="de-AT" dirty="0" smtClean="0">
+              <a:rPr lang="de-AT" dirty="0">
                 <a:latin typeface="Courier New" panose="02070309020205020404" pitchFamily="49" charset="0"/>
                 <a:cs typeface="Courier New" panose="02070309020205020404" pitchFamily="49" charset="0"/>
               </a:rPr>
@@ -20131,13 +19958,6 @@
   <p:clrMapOvr>
     <a:masterClrMapping/>
   </p:clrMapOvr>
-  <p:timing>
-    <p:tnLst>
-      <p:par>
-        <p:cTn id="1" dur="indefinite" restart="never" nodeType="tmRoot"/>
-      </p:par>
-    </p:tnLst>
-  </p:timing>
 </p:sld>
 </file>
 
@@ -20163,7 +19983,7 @@
           <p:cNvPr id="2" name="Titel 1">
             <a:extLst>
               <a:ext uri="{FF2B5EF4-FFF2-40B4-BE49-F238E27FC236}">
-                <a16:creationId xmlns:a16="http://schemas.microsoft.com/office/drawing/2014/main" xmlns="" id="{91AE9513-1234-4703-8392-93226C9A3675}"/>
+                <a16:creationId xmlns:a16="http://schemas.microsoft.com/office/drawing/2014/main" id="{91AE9513-1234-4703-8392-93226C9A3675}"/>
               </a:ext>
             </a:extLst>
           </p:cNvPr>
@@ -20180,18 +20000,17 @@
           <a:lstStyle/>
           <a:p>
             <a:r>
-              <a:rPr lang="de-AT" dirty="0" smtClean="0"/>
+              <a:rPr lang="de-AT" dirty="0"/>
               <a:t>Zuweisung (</a:t>
             </a:r>
             <a:r>
-              <a:rPr lang="de-AT" dirty="0" err="1" smtClean="0"/>
+              <a:rPr lang="de-AT" dirty="0" err="1"/>
               <a:t>Assignment</a:t>
             </a:r>
             <a:r>
-              <a:rPr lang="de-AT" dirty="0" smtClean="0"/>
+              <a:rPr lang="de-AT" dirty="0"/>
               <a:t>)</a:t>
             </a:r>
-            <a:endParaRPr lang="de-AT" dirty="0"/>
           </a:p>
         </p:txBody>
       </p:sp>
@@ -20200,7 +20019,7 @@
           <p:cNvPr id="3" name="Inhaltsplatzhalter 2">
             <a:extLst>
               <a:ext uri="{FF2B5EF4-FFF2-40B4-BE49-F238E27FC236}">
-                <a16:creationId xmlns:a16="http://schemas.microsoft.com/office/drawing/2014/main" xmlns="" id="{2011BA9D-4171-4462-9EA8-9AA2E9346ACA}"/>
+                <a16:creationId xmlns:a16="http://schemas.microsoft.com/office/drawing/2014/main" id="{2011BA9D-4171-4462-9EA8-9AA2E9346ACA}"/>
               </a:ext>
             </a:extLst>
           </p:cNvPr>
@@ -20225,69 +20044,55 @@
               <a:buNone/>
             </a:pPr>
             <a:r>
-              <a:rPr lang="de-AT" dirty="0" smtClean="0"/>
+              <a:rPr lang="de-AT" dirty="0"/>
               <a:t>An einer beliebigen Stellen im Programm kann der Wert einer Variable verändert werden</a:t>
             </a:r>
             <a:br>
-              <a:rPr lang="de-AT" dirty="0" smtClean="0"/>
+              <a:rPr lang="de-AT" dirty="0"/>
             </a:br>
-            <a:endParaRPr lang="de-AT" dirty="0" smtClean="0"/>
+            <a:endParaRPr lang="de-AT" dirty="0"/>
           </a:p>
           <a:p>
             <a:pPr marL="0" indent="0">
               <a:buNone/>
             </a:pPr>
             <a:r>
-              <a:rPr lang="de-AT" dirty="0" smtClean="0">
-                <a:latin typeface="Courier New" panose="02070309020205020404" pitchFamily="49" charset="0"/>
-                <a:cs typeface="Courier New" panose="02070309020205020404" pitchFamily="49" charset="0"/>
-              </a:rPr>
-              <a:t>   </a:t>
-            </a:r>
-            <a:r>
-              <a:rPr lang="de-AT" dirty="0" err="1" smtClean="0">
-                <a:latin typeface="Courier New" panose="02070309020205020404" pitchFamily="49" charset="0"/>
-                <a:cs typeface="Courier New" panose="02070309020205020404" pitchFamily="49" charset="0"/>
-              </a:rPr>
-              <a:t>vorname</a:t>
-            </a:r>
-            <a:r>
-              <a:rPr lang="de-AT" dirty="0" smtClean="0">
-                <a:latin typeface="Courier New" panose="02070309020205020404" pitchFamily="49" charset="0"/>
-                <a:cs typeface="Courier New" panose="02070309020205020404" pitchFamily="49" charset="0"/>
-              </a:rPr>
-              <a:t> </a:t>
-            </a:r>
-            <a:r>
-              <a:rPr lang="de-AT" dirty="0" smtClean="0">
-                <a:solidFill>
-                  <a:srgbClr val="0000FF"/>
-                </a:solidFill>
-                <a:latin typeface="Courier New" panose="02070309020205020404" pitchFamily="49" charset="0"/>
-                <a:cs typeface="Courier New" panose="02070309020205020404" pitchFamily="49" charset="0"/>
-              </a:rPr>
-              <a:t>=</a:t>
-            </a:r>
-            <a:r>
-              <a:rPr lang="de-AT" dirty="0" smtClean="0">
-                <a:latin typeface="Courier New" panose="02070309020205020404" pitchFamily="49" charset="0"/>
-                <a:cs typeface="Courier New" panose="02070309020205020404" pitchFamily="49" charset="0"/>
-              </a:rPr>
-              <a:t> </a:t>
-            </a:r>
-            <a:r>
               <a:rPr lang="de-AT" dirty="0">
                 <a:latin typeface="Courier New" panose="02070309020205020404" pitchFamily="49" charset="0"/>
                 <a:cs typeface="Courier New" panose="02070309020205020404" pitchFamily="49" charset="0"/>
               </a:rPr>
-              <a:t>"</a:t>
-            </a:r>
-            <a:r>
-              <a:rPr lang="de-AT" dirty="0" smtClean="0">
+              <a:t>   </a:t>
+            </a:r>
+            <a:r>
+              <a:rPr lang="de-AT" dirty="0" err="1">
                 <a:latin typeface="Courier New" panose="02070309020205020404" pitchFamily="49" charset="0"/>
                 <a:cs typeface="Courier New" panose="02070309020205020404" pitchFamily="49" charset="0"/>
               </a:rPr>
-              <a:t>Max";</a:t>
+              <a:t>vorname</a:t>
+            </a:r>
+            <a:r>
+              <a:rPr lang="de-AT" dirty="0">
+                <a:latin typeface="Courier New" panose="02070309020205020404" pitchFamily="49" charset="0"/>
+                <a:cs typeface="Courier New" panose="02070309020205020404" pitchFamily="49" charset="0"/>
+              </a:rPr>
+              <a:t> </a:t>
+            </a:r>
+            <a:r>
+              <a:rPr lang="de-AT" dirty="0">
+                <a:solidFill>
+                  <a:srgbClr val="0000FF"/>
+                </a:solidFill>
+                <a:latin typeface="Courier New" panose="02070309020205020404" pitchFamily="49" charset="0"/>
+                <a:cs typeface="Courier New" panose="02070309020205020404" pitchFamily="49" charset="0"/>
+              </a:rPr>
+              <a:t>=</a:t>
+            </a:r>
+            <a:r>
+              <a:rPr lang="de-AT" dirty="0">
+                <a:latin typeface="Courier New" panose="02070309020205020404" pitchFamily="49" charset="0"/>
+                <a:cs typeface="Courier New" panose="02070309020205020404" pitchFamily="49" charset="0"/>
+              </a:rPr>
+              <a:t> "Max";</a:t>
             </a:r>
           </a:p>
           <a:p>
@@ -20299,14 +20104,7 @@
                 <a:latin typeface="Courier New" panose="02070309020205020404" pitchFamily="49" charset="0"/>
                 <a:cs typeface="Courier New" panose="02070309020205020404" pitchFamily="49" charset="0"/>
               </a:rPr>
-              <a:t> </a:t>
-            </a:r>
-            <a:r>
-              <a:rPr lang="de-AT" dirty="0" smtClean="0">
-                <a:latin typeface="Courier New" panose="02070309020205020404" pitchFamily="49" charset="0"/>
-                <a:cs typeface="Courier New" panose="02070309020205020404" pitchFamily="49" charset="0"/>
-              </a:rPr>
-              <a:t>  tage </a:t>
+              <a:t>   tage </a:t>
             </a:r>
             <a:r>
               <a:rPr lang="de-AT" dirty="0">
@@ -20323,14 +20121,7 @@
                 <a:latin typeface="Courier New" panose="02070309020205020404" pitchFamily="49" charset="0"/>
                 <a:cs typeface="Courier New" panose="02070309020205020404" pitchFamily="49" charset="0"/>
               </a:rPr>
-              <a:t> </a:t>
-            </a:r>
-            <a:r>
-              <a:rPr lang="de-AT" dirty="0" smtClean="0">
-                <a:latin typeface="Courier New" panose="02070309020205020404" pitchFamily="49" charset="0"/>
-                <a:cs typeface="Courier New" panose="02070309020205020404" pitchFamily="49" charset="0"/>
-              </a:rPr>
-              <a:t>7;</a:t>
+              <a:t> 7;</a:t>
             </a:r>
           </a:p>
           <a:p>
@@ -20338,52 +20129,52 @@
               <a:buNone/>
             </a:pPr>
             <a:r>
-              <a:rPr lang="de-AT" dirty="0" smtClean="0">
-                <a:latin typeface="Courier New" panose="02070309020205020404" pitchFamily="49" charset="0"/>
-                <a:cs typeface="Courier New" panose="02070309020205020404" pitchFamily="49" charset="0"/>
-              </a:rPr>
-              <a:t>   </a:t>
-            </a:r>
-            <a:r>
-              <a:rPr lang="de-AT" dirty="0" err="1" smtClean="0">
-                <a:latin typeface="Courier New" panose="02070309020205020404" pitchFamily="49" charset="0"/>
-                <a:cs typeface="Courier New" panose="02070309020205020404" pitchFamily="49" charset="0"/>
-              </a:rPr>
-              <a:t>nachname</a:t>
-            </a:r>
-            <a:r>
-              <a:rPr lang="de-AT" dirty="0" smtClean="0">
-                <a:latin typeface="Courier New" panose="02070309020205020404" pitchFamily="49" charset="0"/>
-                <a:cs typeface="Courier New" panose="02070309020205020404" pitchFamily="49" charset="0"/>
-              </a:rPr>
-              <a:t> </a:t>
-            </a:r>
-            <a:r>
-              <a:rPr lang="de-AT" dirty="0">
-                <a:solidFill>
-                  <a:srgbClr val="0000FF"/>
-                </a:solidFill>
-                <a:latin typeface="Courier New" panose="02070309020205020404" pitchFamily="49" charset="0"/>
-                <a:cs typeface="Courier New" panose="02070309020205020404" pitchFamily="49" charset="0"/>
-              </a:rPr>
-              <a:t>=</a:t>
-            </a:r>
-            <a:r>
               <a:rPr lang="de-AT" dirty="0">
                 <a:latin typeface="Courier New" panose="02070309020205020404" pitchFamily="49" charset="0"/>
                 <a:cs typeface="Courier New" panose="02070309020205020404" pitchFamily="49" charset="0"/>
               </a:rPr>
-              <a:t> </a:t>
-            </a:r>
-            <a:r>
-              <a:rPr lang="de-AT" dirty="0" err="1" smtClean="0">
+              <a:t>   </a:t>
+            </a:r>
+            <a:r>
+              <a:rPr lang="de-AT" dirty="0" err="1">
                 <a:latin typeface="Courier New" panose="02070309020205020404" pitchFamily="49" charset="0"/>
                 <a:cs typeface="Courier New" panose="02070309020205020404" pitchFamily="49" charset="0"/>
               </a:rPr>
+              <a:t>nachname</a:t>
+            </a:r>
+            <a:r>
+              <a:rPr lang="de-AT" dirty="0">
+                <a:latin typeface="Courier New" panose="02070309020205020404" pitchFamily="49" charset="0"/>
+                <a:cs typeface="Courier New" panose="02070309020205020404" pitchFamily="49" charset="0"/>
+              </a:rPr>
+              <a:t> </a:t>
+            </a:r>
+            <a:r>
+              <a:rPr lang="de-AT" dirty="0">
+                <a:solidFill>
+                  <a:srgbClr val="0000FF"/>
+                </a:solidFill>
+                <a:latin typeface="Courier New" panose="02070309020205020404" pitchFamily="49" charset="0"/>
+                <a:cs typeface="Courier New" panose="02070309020205020404" pitchFamily="49" charset="0"/>
+              </a:rPr>
+              <a:t>=</a:t>
+            </a:r>
+            <a:r>
+              <a:rPr lang="de-AT" dirty="0">
+                <a:latin typeface="Courier New" panose="02070309020205020404" pitchFamily="49" charset="0"/>
+                <a:cs typeface="Courier New" panose="02070309020205020404" pitchFamily="49" charset="0"/>
+              </a:rPr>
+              <a:t> </a:t>
+            </a:r>
+            <a:r>
+              <a:rPr lang="de-AT" dirty="0" err="1">
+                <a:latin typeface="Courier New" panose="02070309020205020404" pitchFamily="49" charset="0"/>
+                <a:cs typeface="Courier New" panose="02070309020205020404" pitchFamily="49" charset="0"/>
+              </a:rPr>
               <a:t>Console.ReadLine</a:t>
             </a:r>
             <a:r>
-              <a:rPr lang="de-AT" dirty="0" smtClean="0">
+              <a:rPr lang="de-AT" dirty="0">
                 <a:latin typeface="Courier New" panose="02070309020205020404" pitchFamily="49" charset="0"/>
                 <a:cs typeface="Courier New" panose="02070309020205020404" pitchFamily="49" charset="0"/>
               </a:rPr>
@@ -20398,11 +20189,11 @@
           </a:p>
           <a:p>
             <a:r>
-              <a:rPr lang="de-AT" dirty="0" smtClean="0"/>
+              <a:rPr lang="de-AT" dirty="0"/>
               <a:t>Eine Zuweisung erfolgt durch das Zeichen </a:t>
             </a:r>
             <a:r>
-              <a:rPr lang="de-AT" dirty="0" smtClean="0">
+              <a:rPr lang="de-AT" dirty="0">
                 <a:solidFill>
                   <a:srgbClr val="0000FF"/>
                 </a:solidFill>
@@ -20410,13 +20201,13 @@
               <a:t>=</a:t>
             </a:r>
             <a:r>
-              <a:rPr lang="de-AT" dirty="0" smtClean="0"/>
+              <a:rPr lang="de-AT" dirty="0"/>
               <a:t>  </a:t>
             </a:r>
           </a:p>
           <a:p>
             <a:r>
-              <a:rPr lang="de-AT" dirty="0" smtClean="0"/>
+              <a:rPr lang="de-AT" dirty="0"/>
               <a:t>Links vom </a:t>
             </a:r>
             <a:r>
@@ -20428,16 +20219,15 @@
               <a:t>= </a:t>
             </a:r>
             <a:r>
-              <a:rPr lang="de-AT" dirty="0" smtClean="0"/>
+              <a:rPr lang="de-AT" dirty="0"/>
               <a:t>steht der Variablenname.</a:t>
             </a:r>
           </a:p>
           <a:p>
             <a:r>
-              <a:rPr lang="de-AT" dirty="0" smtClean="0"/>
+              <a:rPr lang="de-AT" dirty="0"/>
               <a:t>Rechts steht der neue Wert (=Term). </a:t>
             </a:r>
-            <a:endParaRPr lang="de-AT" dirty="0"/>
           </a:p>
           <a:p>
             <a:endParaRPr lang="de-AT" dirty="0"/>
@@ -20454,13 +20244,6 @@
   <p:clrMapOvr>
     <a:masterClrMapping/>
   </p:clrMapOvr>
-  <p:timing>
-    <p:tnLst>
-      <p:par>
-        <p:cTn id="1" dur="indefinite" restart="never" nodeType="tmRoot"/>
-      </p:par>
-    </p:tnLst>
-  </p:timing>
 </p:sld>
 </file>
 
@@ -20765,13 +20548,6 @@
   <p:clrMapOvr>
     <a:masterClrMapping/>
   </p:clrMapOvr>
-  <p:timing>
-    <p:tnLst>
-      <p:par>
-        <p:cTn id="1" dur="indefinite" restart="never" nodeType="tmRoot"/>
-      </p:par>
-    </p:tnLst>
-  </p:timing>
 </p:sld>
 </file>
 
